--- a/Final Project/FinalProject.pptx
+++ b/Final Project/FinalProject.pptx
@@ -117,6 +117,7 @@
 <p1510:revInfo xmlns:a="http://schemas.openxmlformats.org/drawingml/2006/main" xmlns:r="http://schemas.openxmlformats.org/officeDocument/2006/relationships" xmlns:p1510="http://schemas.microsoft.com/office/powerpoint/2015/10/main">
   <p1510:revLst>
     <p1510:client id="{60DCBEB9-452B-42DA-B7D1-E4A5A7FC6C10}" v="1749" dt="2025-12-03T17:44:14.992"/>
+    <p1510:client id="{80BA49D0-6376-CB48-B3C3-F4708D789340}" v="223" dt="2025-12-04T04:11:19.332"/>
   </p1510:revLst>
 </p1510:revInfo>
 </file>
@@ -124,132 +125,84 @@
 <file path=ppt/changesInfos/changesInfo1.xml><?xml version="1.0" encoding="utf-8"?>
 <pc:chgInfo xmlns:a="http://schemas.openxmlformats.org/drawingml/2006/main" xmlns:r="http://schemas.openxmlformats.org/officeDocument/2006/relationships" xmlns:ac="http://schemas.microsoft.com/office/drawing/2013/main/command" xmlns:pc="http://schemas.microsoft.com/office/powerpoint/2013/main/command">
   <pc:docChgLst>
-    <pc:chgData name="Morales, Abdon" userId="b8e72fca-89fa-40b2-95f0-bdb26e6d8c1d" providerId="ADAL" clId="{D6E4417C-859A-4BAF-A446-455E9918AB5F}"/>
-    <pc:docChg chg="undo custSel addSld delSld modSld">
-      <pc:chgData name="Morales, Abdon" userId="b8e72fca-89fa-40b2-95f0-bdb26e6d8c1d" providerId="ADAL" clId="{D6E4417C-859A-4BAF-A446-455E9918AB5F}" dt="2025-12-03T17:44:14.992" v="5567" actId="20577"/>
+    <pc:chgData name="Morales, Abdon" userId="b8e72fca-89fa-40b2-95f0-bdb26e6d8c1d" providerId="ADAL" clId="{F77E3D6D-613B-5030-A384-37FA661628F6}"/>
+    <pc:docChg chg="undo custSel modSld">
+      <pc:chgData name="Morales, Abdon" userId="b8e72fca-89fa-40b2-95f0-bdb26e6d8c1d" providerId="ADAL" clId="{F77E3D6D-613B-5030-A384-37FA661628F6}" dt="2025-12-04T04:20:15.339" v="1088" actId="164"/>
       <pc:docMkLst>
         <pc:docMk/>
       </pc:docMkLst>
-      <pc:sldChg chg="addSp delSp modSp add del mod">
-        <pc:chgData name="Morales, Abdon" userId="b8e72fca-89fa-40b2-95f0-bdb26e6d8c1d" providerId="ADAL" clId="{D6E4417C-859A-4BAF-A446-455E9918AB5F}" dt="2025-12-03T17:44:14.992" v="5567" actId="20577"/>
+      <pc:sldChg chg="addSp delSp modSp mod">
+        <pc:chgData name="Morales, Abdon" userId="b8e72fca-89fa-40b2-95f0-bdb26e6d8c1d" providerId="ADAL" clId="{F77E3D6D-613B-5030-A384-37FA661628F6}" dt="2025-12-04T04:20:15.339" v="1088" actId="164"/>
         <pc:sldMkLst>
           <pc:docMk/>
           <pc:sldMk cId="4152292366" sldId="268"/>
         </pc:sldMkLst>
-        <pc:spChg chg="mod">
-          <ac:chgData name="Morales, Abdon" userId="b8e72fca-89fa-40b2-95f0-bdb26e6d8c1d" providerId="ADAL" clId="{D6E4417C-859A-4BAF-A446-455E9918AB5F}" dt="2025-12-03T17:40:32.096" v="5286" actId="1076"/>
+        <pc:spChg chg="add mod">
+          <ac:chgData name="Morales, Abdon" userId="b8e72fca-89fa-40b2-95f0-bdb26e6d8c1d" providerId="ADAL" clId="{F77E3D6D-613B-5030-A384-37FA661628F6}" dt="2025-12-04T04:04:24.376" v="1037" actId="1076"/>
           <ac:spMkLst>
             <pc:docMk/>
             <pc:sldMk cId="4152292366" sldId="268"/>
-            <ac:spMk id="33" creationId="{7418BA6E-2677-B748-A162-8B83DCDBD8E6}"/>
+            <ac:spMk id="2" creationId="{B78BFC16-B0AF-8B41-829D-20E46F0F3C5B}"/>
+          </ac:spMkLst>
+        </pc:spChg>
+        <pc:spChg chg="add mod">
+          <ac:chgData name="Morales, Abdon" userId="b8e72fca-89fa-40b2-95f0-bdb26e6d8c1d" providerId="ADAL" clId="{F77E3D6D-613B-5030-A384-37FA661628F6}" dt="2025-12-04T04:05:25.467" v="1063" actId="1076"/>
+          <ac:spMkLst>
+            <pc:docMk/>
+            <pc:sldMk cId="4152292366" sldId="268"/>
+            <ac:spMk id="3" creationId="{1342CD79-1432-E499-29FA-C0F48653707F}"/>
           </ac:spMkLst>
         </pc:spChg>
         <pc:spChg chg="mod">
-          <ac:chgData name="Morales, Abdon" userId="b8e72fca-89fa-40b2-95f0-bdb26e6d8c1d" providerId="ADAL" clId="{D6E4417C-859A-4BAF-A446-455E9918AB5F}" dt="2025-11-27T11:30:14.469" v="301" actId="20577"/>
+          <ac:chgData name="Morales, Abdon" userId="b8e72fca-89fa-40b2-95f0-bdb26e6d8c1d" providerId="ADAL" clId="{F77E3D6D-613B-5030-A384-37FA661628F6}" dt="2025-12-04T04:19:55.037" v="1086" actId="14100"/>
           <ac:spMkLst>
             <pc:docMk/>
             <pc:sldMk cId="4152292366" sldId="268"/>
-            <ac:spMk id="37" creationId="{1CB2525F-971E-E941-B2D3-728BCEFFCCFB}"/>
+            <ac:spMk id="4" creationId="{C2642BAB-3737-CE4C-874C-5EA986C6E360}"/>
+          </ac:spMkLst>
+        </pc:spChg>
+        <pc:spChg chg="del">
+          <ac:chgData name="Morales, Abdon" userId="b8e72fca-89fa-40b2-95f0-bdb26e6d8c1d" providerId="ADAL" clId="{F77E3D6D-613B-5030-A384-37FA661628F6}" dt="2025-12-04T04:12:05.673" v="1083" actId="478"/>
+          <ac:spMkLst>
+            <pc:docMk/>
+            <pc:sldMk cId="4152292366" sldId="268"/>
+            <ac:spMk id="46" creationId="{D903B466-646C-2D4A-BD19-7AA4D5AE665B}"/>
           </ac:spMkLst>
         </pc:spChg>
         <pc:spChg chg="mod">
-          <ac:chgData name="Morales, Abdon" userId="b8e72fca-89fa-40b2-95f0-bdb26e6d8c1d" providerId="ADAL" clId="{D6E4417C-859A-4BAF-A446-455E9918AB5F}" dt="2025-11-27T11:13:44.407" v="215" actId="20577"/>
-          <ac:spMkLst>
-            <pc:docMk/>
-            <pc:sldMk cId="4152292366" sldId="268"/>
-            <ac:spMk id="40" creationId="{5B415905-C185-1D48-A064-6465FD424184}"/>
-          </ac:spMkLst>
-        </pc:spChg>
-        <pc:spChg chg="mod">
-          <ac:chgData name="Morales, Abdon" userId="b8e72fca-89fa-40b2-95f0-bdb26e6d8c1d" providerId="ADAL" clId="{D6E4417C-859A-4BAF-A446-455E9918AB5F}" dt="2025-12-01T15:05:50.099" v="3837" actId="1035"/>
-          <ac:spMkLst>
-            <pc:docMk/>
-            <pc:sldMk cId="4152292366" sldId="268"/>
-            <ac:spMk id="47" creationId="{5B1CB227-8D1C-E348-84AD-06F18B6E4815}"/>
-          </ac:spMkLst>
-        </pc:spChg>
-        <pc:spChg chg="mod">
-          <ac:chgData name="Morales, Abdon" userId="b8e72fca-89fa-40b2-95f0-bdb26e6d8c1d" providerId="ADAL" clId="{D6E4417C-859A-4BAF-A446-455E9918AB5F}" dt="2025-12-01T16:13:36.212" v="4800" actId="20577"/>
-          <ac:spMkLst>
-            <pc:docMk/>
-            <pc:sldMk cId="4152292366" sldId="268"/>
-            <ac:spMk id="48" creationId="{2EA8601F-31F3-C14A-BF17-B9C6854CA5E3}"/>
-          </ac:spMkLst>
-        </pc:spChg>
-        <pc:spChg chg="mod">
-          <ac:chgData name="Morales, Abdon" userId="b8e72fca-89fa-40b2-95f0-bdb26e6d8c1d" providerId="ADAL" clId="{D6E4417C-859A-4BAF-A446-455E9918AB5F}" dt="2025-12-03T17:44:14.992" v="5567" actId="20577"/>
-          <ac:spMkLst>
-            <pc:docMk/>
-            <pc:sldMk cId="4152292366" sldId="268"/>
-            <ac:spMk id="49" creationId="{9D66091E-E47C-CF42-A22A-669CB4253806}"/>
-          </ac:spMkLst>
-        </pc:spChg>
-        <pc:spChg chg="mod">
-          <ac:chgData name="Morales, Abdon" userId="b8e72fca-89fa-40b2-95f0-bdb26e6d8c1d" providerId="ADAL" clId="{D6E4417C-859A-4BAF-A446-455E9918AB5F}" dt="2025-12-03T17:42:17.528" v="5299" actId="1076"/>
+          <ac:chgData name="Morales, Abdon" userId="b8e72fca-89fa-40b2-95f0-bdb26e6d8c1d" providerId="ADAL" clId="{F77E3D6D-613B-5030-A384-37FA661628F6}" dt="2025-12-04T04:04:32.036" v="1038" actId="1076"/>
           <ac:spMkLst>
             <pc:docMk/>
             <pc:sldMk cId="4152292366" sldId="268"/>
             <ac:spMk id="51" creationId="{E1CD2C2A-F064-084C-B9FF-1CE5B53E4E32}"/>
           </ac:spMkLst>
         </pc:spChg>
-        <pc:spChg chg="del mod">
-          <ac:chgData name="Morales, Abdon" userId="b8e72fca-89fa-40b2-95f0-bdb26e6d8c1d" providerId="ADAL" clId="{D6E4417C-859A-4BAF-A446-455E9918AB5F}" dt="2025-12-03T17:32:54.343" v="4829" actId="478"/>
+        <pc:spChg chg="del">
+          <ac:chgData name="Morales, Abdon" userId="b8e72fca-89fa-40b2-95f0-bdb26e6d8c1d" providerId="ADAL" clId="{F77E3D6D-613B-5030-A384-37FA661628F6}" dt="2025-12-04T04:12:09.898" v="1084" actId="478"/>
           <ac:spMkLst>
             <pc:docMk/>
             <pc:sldMk cId="4152292366" sldId="268"/>
-            <ac:spMk id="52" creationId="{4B05A019-717D-A648-A8DE-E62A37015CA2}"/>
+            <ac:spMk id="59" creationId="{887E75FA-C034-2447-9AFA-253A4A8F5217}"/>
           </ac:spMkLst>
         </pc:spChg>
-        <pc:spChg chg="del mod">
-          <ac:chgData name="Morales, Abdon" userId="b8e72fca-89fa-40b2-95f0-bdb26e6d8c1d" providerId="ADAL" clId="{D6E4417C-859A-4BAF-A446-455E9918AB5F}" dt="2025-12-03T17:41:42.509" v="5294" actId="478"/>
-          <ac:spMkLst>
+        <pc:grpChg chg="add">
+          <ac:chgData name="Morales, Abdon" userId="b8e72fca-89fa-40b2-95f0-bdb26e6d8c1d" providerId="ADAL" clId="{F77E3D6D-613B-5030-A384-37FA661628F6}" dt="2025-12-04T04:20:08.114" v="1087" actId="164"/>
+          <ac:grpSpMkLst>
             <pc:docMk/>
             <pc:sldMk cId="4152292366" sldId="268"/>
-            <ac:spMk id="53" creationId="{868D2662-CE1B-CA4E-9C45-7BFADD8B478E}"/>
-          </ac:spMkLst>
-        </pc:spChg>
-        <pc:spChg chg="mod">
-          <ac:chgData name="Morales, Abdon" userId="b8e72fca-89fa-40b2-95f0-bdb26e6d8c1d" providerId="ADAL" clId="{D6E4417C-859A-4BAF-A446-455E9918AB5F}" dt="2025-12-03T17:42:29.545" v="5300" actId="1076"/>
-          <ac:spMkLst>
+            <ac:grpSpMk id="10" creationId="{8B87BA69-F4CB-DBF5-4676-B393D1F8A96A}"/>
+          </ac:grpSpMkLst>
+        </pc:grpChg>
+        <pc:grpChg chg="add">
+          <ac:chgData name="Morales, Abdon" userId="b8e72fca-89fa-40b2-95f0-bdb26e6d8c1d" providerId="ADAL" clId="{F77E3D6D-613B-5030-A384-37FA661628F6}" dt="2025-12-04T04:20:15.339" v="1088" actId="164"/>
+          <ac:grpSpMkLst>
             <pc:docMk/>
             <pc:sldMk cId="4152292366" sldId="268"/>
-            <ac:spMk id="54" creationId="{F8C7482B-E913-3C49-AF7C-0ACF650610EA}"/>
-          </ac:spMkLst>
-        </pc:spChg>
-        <pc:spChg chg="del">
-          <ac:chgData name="Morales, Abdon" userId="b8e72fca-89fa-40b2-95f0-bdb26e6d8c1d" providerId="ADAL" clId="{D6E4417C-859A-4BAF-A446-455E9918AB5F}" dt="2025-12-03T17:31:04.535" v="4811" actId="478"/>
-          <ac:spMkLst>
-            <pc:docMk/>
-            <pc:sldMk cId="4152292366" sldId="268"/>
-            <ac:spMk id="56" creationId="{BB2032AF-3003-B24B-9A68-7D70AAA8A35C}"/>
-          </ac:spMkLst>
-        </pc:spChg>
-        <pc:spChg chg="del">
-          <ac:chgData name="Morales, Abdon" userId="b8e72fca-89fa-40b2-95f0-bdb26e6d8c1d" providerId="ADAL" clId="{D6E4417C-859A-4BAF-A446-455E9918AB5F}" dt="2025-12-03T17:33:02.162" v="4831" actId="478"/>
-          <ac:spMkLst>
-            <pc:docMk/>
-            <pc:sldMk cId="4152292366" sldId="268"/>
-            <ac:spMk id="57" creationId="{1FED97EB-3F99-4046-B146-88CF814D5474}"/>
-          </ac:spMkLst>
-        </pc:spChg>
-        <pc:spChg chg="del">
-          <ac:chgData name="Morales, Abdon" userId="b8e72fca-89fa-40b2-95f0-bdb26e6d8c1d" providerId="ADAL" clId="{D6E4417C-859A-4BAF-A446-455E9918AB5F}" dt="2025-12-03T17:32:48.990" v="4827" actId="478"/>
-          <ac:spMkLst>
-            <pc:docMk/>
-            <pc:sldMk cId="4152292366" sldId="268"/>
-            <ac:spMk id="58" creationId="{9A716952-6964-FF4F-943E-A4CCA63175C7}"/>
-          </ac:spMkLst>
-        </pc:spChg>
-        <pc:graphicFrameChg chg="add del mod modGraphic">
-          <ac:chgData name="Morales, Abdon" userId="b8e72fca-89fa-40b2-95f0-bdb26e6d8c1d" providerId="ADAL" clId="{D6E4417C-859A-4BAF-A446-455E9918AB5F}" dt="2025-12-03T17:01:57.937" v="4806" actId="478"/>
-          <ac:graphicFrameMkLst>
-            <pc:docMk/>
-            <pc:sldMk cId="4152292366" sldId="268"/>
-            <ac:graphicFrameMk id="2" creationId="{4CFD5E63-87CB-3D3B-59A6-F5461C4DA834}"/>
-          </ac:graphicFrameMkLst>
-        </pc:graphicFrameChg>
-        <pc:picChg chg="add mod">
-          <ac:chgData name="Morales, Abdon" userId="b8e72fca-89fa-40b2-95f0-bdb26e6d8c1d" providerId="ADAL" clId="{D6E4417C-859A-4BAF-A446-455E9918AB5F}" dt="2025-12-03T17:42:11.661" v="5298" actId="14100"/>
+            <ac:grpSpMk id="11" creationId="{E4C589B7-4B88-CC58-6898-2E7425307E9A}"/>
+          </ac:grpSpMkLst>
+        </pc:grpChg>
+        <pc:picChg chg="mod">
+          <ac:chgData name="Morales, Abdon" userId="b8e72fca-89fa-40b2-95f0-bdb26e6d8c1d" providerId="ADAL" clId="{F77E3D6D-613B-5030-A384-37FA661628F6}" dt="2025-12-04T04:01:10.443" v="983" actId="1076"/>
           <ac:picMkLst>
             <pc:docMk/>
             <pc:sldMk cId="4152292366" sldId="268"/>
@@ -257,21 +210,38 @@
           </ac:picMkLst>
         </pc:picChg>
         <pc:picChg chg="add mod">
-          <ac:chgData name="Morales, Abdon" userId="b8e72fca-89fa-40b2-95f0-bdb26e6d8c1d" providerId="ADAL" clId="{D6E4417C-859A-4BAF-A446-455E9918AB5F}" dt="2025-12-03T17:33:10.449" v="4832" actId="1076"/>
+          <ac:chgData name="Morales, Abdon" userId="b8e72fca-89fa-40b2-95f0-bdb26e6d8c1d" providerId="ADAL" clId="{F77E3D6D-613B-5030-A384-37FA661628F6}" dt="2025-12-04T04:08:01.170" v="1064"/>
+          <ac:picMkLst>
+            <pc:docMk/>
+            <pc:sldMk cId="4152292366" sldId="268"/>
+            <ac:picMk id="6" creationId="{6408B6EF-FEDB-CD66-BA45-B016490FC750}"/>
+          </ac:picMkLst>
+        </pc:picChg>
+        <pc:picChg chg="mod">
+          <ac:chgData name="Morales, Abdon" userId="b8e72fca-89fa-40b2-95f0-bdb26e6d8c1d" providerId="ADAL" clId="{F77E3D6D-613B-5030-A384-37FA661628F6}" dt="2025-12-04T04:04:42.913" v="1039" actId="1076"/>
           <ac:picMkLst>
             <pc:docMk/>
             <pc:sldMk cId="4152292366" sldId="268"/>
             <ac:picMk id="7" creationId="{56CDAAF2-1818-9EB6-09DE-0325CCB12502}"/>
           </ac:picMkLst>
         </pc:picChg>
+        <pc:picChg chg="add del mod">
+          <ac:chgData name="Morales, Abdon" userId="b8e72fca-89fa-40b2-95f0-bdb26e6d8c1d" providerId="ADAL" clId="{F77E3D6D-613B-5030-A384-37FA661628F6}" dt="2025-12-04T04:08:55.938" v="1074" actId="478"/>
+          <ac:picMkLst>
+            <pc:docMk/>
+            <pc:sldMk cId="4152292366" sldId="268"/>
+            <ac:picMk id="8" creationId="{6740F724-754B-FD30-2AC9-4F6671BEBCC8}"/>
+          </ac:picMkLst>
+        </pc:picChg>
+        <pc:picChg chg="add mod">
+          <ac:chgData name="Morales, Abdon" userId="b8e72fca-89fa-40b2-95f0-bdb26e6d8c1d" providerId="ADAL" clId="{F77E3D6D-613B-5030-A384-37FA661628F6}" dt="2025-12-04T04:11:56.480" v="1082" actId="1076"/>
+          <ac:picMkLst>
+            <pc:docMk/>
+            <pc:sldMk cId="4152292366" sldId="268"/>
+            <ac:picMk id="9" creationId="{1F6FF982-84D1-D5B7-2672-EEB42FF7BB88}"/>
+          </ac:picMkLst>
+        </pc:picChg>
       </pc:sldChg>
-      <pc:sldMasterChg chg="delSldLayout">
-        <pc:chgData name="Morales, Abdon" userId="b8e72fca-89fa-40b2-95f0-bdb26e6d8c1d" providerId="ADAL" clId="{D6E4417C-859A-4BAF-A446-455E9918AB5F}" dt="2025-11-27T11:11:17.187" v="3" actId="47"/>
-        <pc:sldMasterMkLst>
-          <pc:docMk/>
-          <pc:sldMasterMk cId="2666359474" sldId="2147483648"/>
-        </pc:sldMasterMkLst>
-      </pc:sldMasterChg>
     </pc:docChg>
   </pc:docChgLst>
 </pc:chgInfo>
@@ -424,7 +394,7 @@
           <a:p>
             <a:fld id="{722949B6-FD26-4F0A-B27E-95AA34CFB7B6}" type="datetimeFigureOut">
               <a:rPr lang="en-US" smtClean="0"/>
-              <a:t>12/1/2025</a:t>
+              <a:t>12/3/25</a:t>
             </a:fld>
             <a:endParaRPr lang="en-US"/>
           </a:p>
@@ -478,7 +448,7 @@
           <a:p>
             <a:fld id="{F528ECA1-1E0E-45AA-9354-4925D9A91E67}" type="slidenum">
               <a:rPr lang="en-US" smtClean="0"/>
-              <a:t>‹#›</a:t>
+              <a:t>‹Nº›</a:t>
             </a:fld>
             <a:endParaRPr lang="en-US"/>
           </a:p>
@@ -622,7 +592,7 @@
           <a:p>
             <a:fld id="{722949B6-FD26-4F0A-B27E-95AA34CFB7B6}" type="datetimeFigureOut">
               <a:rPr lang="en-US" smtClean="0"/>
-              <a:t>12/1/2025</a:t>
+              <a:t>12/3/25</a:t>
             </a:fld>
             <a:endParaRPr lang="en-US"/>
           </a:p>
@@ -676,7 +646,7 @@
           <a:p>
             <a:fld id="{F528ECA1-1E0E-45AA-9354-4925D9A91E67}" type="slidenum">
               <a:rPr lang="en-US" smtClean="0"/>
-              <a:t>‹#›</a:t>
+              <a:t>‹Nº›</a:t>
             </a:fld>
             <a:endParaRPr lang="en-US"/>
           </a:p>
@@ -830,7 +800,7 @@
           <a:p>
             <a:fld id="{722949B6-FD26-4F0A-B27E-95AA34CFB7B6}" type="datetimeFigureOut">
               <a:rPr lang="en-US" smtClean="0"/>
-              <a:t>12/1/2025</a:t>
+              <a:t>12/3/25</a:t>
             </a:fld>
             <a:endParaRPr lang="en-US"/>
           </a:p>
@@ -884,7 +854,7 @@
           <a:p>
             <a:fld id="{F528ECA1-1E0E-45AA-9354-4925D9A91E67}" type="slidenum">
               <a:rPr lang="en-US" smtClean="0"/>
-              <a:t>‹#›</a:t>
+              <a:t>‹Nº›</a:t>
             </a:fld>
             <a:endParaRPr lang="en-US"/>
           </a:p>
@@ -1034,7 +1004,7 @@
           <a:p>
             <a:fld id="{C764DE79-268F-4C1A-8933-263129D2AF90}" type="datetimeFigureOut">
               <a:rPr lang="en-US" dirty="0"/>
-              <a:t>12/1/2025</a:t>
+              <a:t>12/3/25</a:t>
             </a:fld>
             <a:endParaRPr lang="en-US" dirty="0"/>
           </a:p>
@@ -1076,7 +1046,7 @@
           <a:p>
             <a:fld id="{48F63A3B-78C7-47BE-AE5E-E10140E04643}" type="slidenum">
               <a:rPr lang="en-US" dirty="0"/>
-              <a:t>‹#›</a:t>
+              <a:t>‹Nº›</a:t>
             </a:fld>
             <a:endParaRPr lang="en-US" dirty="0"/>
           </a:p>
@@ -1204,7 +1174,7 @@
           <a:p>
             <a:fld id="{C764DE79-268F-4C1A-8933-263129D2AF90}" type="datetimeFigureOut">
               <a:rPr lang="en-US" dirty="0"/>
-              <a:t>12/1/2025</a:t>
+              <a:t>12/3/25</a:t>
             </a:fld>
             <a:endParaRPr lang="en-US" dirty="0"/>
           </a:p>
@@ -1246,7 +1216,7 @@
           <a:p>
             <a:fld id="{48F63A3B-78C7-47BE-AE5E-E10140E04643}" type="slidenum">
               <a:rPr lang="en-US" dirty="0"/>
-              <a:t>‹#›</a:t>
+              <a:t>‹Nº›</a:t>
             </a:fld>
             <a:endParaRPr lang="en-US" dirty="0"/>
           </a:p>
@@ -1448,7 +1418,7 @@
           <a:p>
             <a:fld id="{C764DE79-268F-4C1A-8933-263129D2AF90}" type="datetimeFigureOut">
               <a:rPr lang="en-US" dirty="0"/>
-              <a:t>12/1/2025</a:t>
+              <a:t>12/3/25</a:t>
             </a:fld>
             <a:endParaRPr lang="en-US" dirty="0"/>
           </a:p>
@@ -1490,7 +1460,7 @@
           <a:p>
             <a:fld id="{48F63A3B-78C7-47BE-AE5E-E10140E04643}" type="slidenum">
               <a:rPr lang="en-US" dirty="0"/>
-              <a:t>‹#›</a:t>
+              <a:t>‹Nº›</a:t>
             </a:fld>
             <a:endParaRPr lang="en-US" dirty="0"/>
           </a:p>
@@ -1680,7 +1650,7 @@
           <a:p>
             <a:fld id="{C764DE79-268F-4C1A-8933-263129D2AF90}" type="datetimeFigureOut">
               <a:rPr lang="en-US" dirty="0"/>
-              <a:t>12/1/2025</a:t>
+              <a:t>12/3/25</a:t>
             </a:fld>
             <a:endParaRPr lang="en-US" dirty="0"/>
           </a:p>
@@ -1722,7 +1692,7 @@
           <a:p>
             <a:fld id="{48F63A3B-78C7-47BE-AE5E-E10140E04643}" type="slidenum">
               <a:rPr lang="en-US" dirty="0"/>
-              <a:t>‹#›</a:t>
+              <a:t>‹Nº›</a:t>
             </a:fld>
             <a:endParaRPr lang="en-US" dirty="0"/>
           </a:p>
@@ -2047,7 +2017,7 @@
           <a:p>
             <a:fld id="{C764DE79-268F-4C1A-8933-263129D2AF90}" type="datetimeFigureOut">
               <a:rPr lang="en-US" dirty="0"/>
-              <a:t>12/1/2025</a:t>
+              <a:t>12/3/25</a:t>
             </a:fld>
             <a:endParaRPr lang="en-US" dirty="0"/>
           </a:p>
@@ -2089,7 +2059,7 @@
           <a:p>
             <a:fld id="{48F63A3B-78C7-47BE-AE5E-E10140E04643}" type="slidenum">
               <a:rPr lang="en-US" dirty="0"/>
-              <a:t>‹#›</a:t>
+              <a:t>‹Nº›</a:t>
             </a:fld>
             <a:endParaRPr lang="en-US" dirty="0"/>
           </a:p>
@@ -2165,7 +2135,7 @@
           <a:p>
             <a:fld id="{C764DE79-268F-4C1A-8933-263129D2AF90}" type="datetimeFigureOut">
               <a:rPr lang="en-US" dirty="0"/>
-              <a:t>12/1/2025</a:t>
+              <a:t>12/3/25</a:t>
             </a:fld>
             <a:endParaRPr lang="en-US" dirty="0"/>
           </a:p>
@@ -2207,7 +2177,7 @@
           <a:p>
             <a:fld id="{48F63A3B-78C7-47BE-AE5E-E10140E04643}" type="slidenum">
               <a:rPr lang="en-US" dirty="0"/>
-              <a:t>‹#›</a:t>
+              <a:t>‹Nº›</a:t>
             </a:fld>
             <a:endParaRPr lang="en-US" dirty="0"/>
           </a:p>
@@ -2260,7 +2230,7 @@
           <a:p>
             <a:fld id="{C764DE79-268F-4C1A-8933-263129D2AF90}" type="datetimeFigureOut">
               <a:rPr lang="en-US" dirty="0"/>
-              <a:t>12/1/2025</a:t>
+              <a:t>12/3/25</a:t>
             </a:fld>
             <a:endParaRPr lang="en-US" dirty="0"/>
           </a:p>
@@ -2302,7 +2272,7 @@
           <a:p>
             <a:fld id="{48F63A3B-78C7-47BE-AE5E-E10140E04643}" type="slidenum">
               <a:rPr lang="en-US" dirty="0"/>
-              <a:t>‹#›</a:t>
+              <a:t>‹Nº›</a:t>
             </a:fld>
             <a:endParaRPr lang="en-US" dirty="0"/>
           </a:p>
@@ -2537,7 +2507,7 @@
           <a:p>
             <a:fld id="{C764DE79-268F-4C1A-8933-263129D2AF90}" type="datetimeFigureOut">
               <a:rPr lang="en-US" dirty="0"/>
-              <a:t>12/1/2025</a:t>
+              <a:t>12/3/25</a:t>
             </a:fld>
             <a:endParaRPr lang="en-US" dirty="0"/>
           </a:p>
@@ -2579,7 +2549,7 @@
           <a:p>
             <a:fld id="{48F63A3B-78C7-47BE-AE5E-E10140E04643}" type="slidenum">
               <a:rPr lang="en-US" dirty="0"/>
-              <a:t>‹#›</a:t>
+              <a:t>‹Nº›</a:t>
             </a:fld>
             <a:endParaRPr lang="en-US" dirty="0"/>
           </a:p>
@@ -2723,7 +2693,7 @@
           <a:p>
             <a:fld id="{722949B6-FD26-4F0A-B27E-95AA34CFB7B6}" type="datetimeFigureOut">
               <a:rPr lang="en-US" smtClean="0"/>
-              <a:t>12/1/2025</a:t>
+              <a:t>12/3/25</a:t>
             </a:fld>
             <a:endParaRPr lang="en-US"/>
           </a:p>
@@ -2777,7 +2747,7 @@
           <a:p>
             <a:fld id="{F528ECA1-1E0E-45AA-9354-4925D9A91E67}" type="slidenum">
               <a:rPr lang="en-US" smtClean="0"/>
-              <a:t>‹#›</a:t>
+              <a:t>‹Nº›</a:t>
             </a:fld>
             <a:endParaRPr lang="en-US"/>
           </a:p>
@@ -2992,7 +2962,7 @@
           <a:p>
             <a:fld id="{C764DE79-268F-4C1A-8933-263129D2AF90}" type="datetimeFigureOut">
               <a:rPr lang="en-US" dirty="0"/>
-              <a:t>12/1/2025</a:t>
+              <a:t>12/3/25</a:t>
             </a:fld>
             <a:endParaRPr lang="en-US" dirty="0"/>
           </a:p>
@@ -3034,7 +3004,7 @@
           <a:p>
             <a:fld id="{48F63A3B-78C7-47BE-AE5E-E10140E04643}" type="slidenum">
               <a:rPr lang="en-US" dirty="0"/>
-              <a:t>‹#›</a:t>
+              <a:t>‹Nº›</a:t>
             </a:fld>
             <a:endParaRPr lang="en-US" dirty="0"/>
           </a:p>
@@ -3162,7 +3132,7 @@
           <a:p>
             <a:fld id="{C764DE79-268F-4C1A-8933-263129D2AF90}" type="datetimeFigureOut">
               <a:rPr lang="en-US" dirty="0"/>
-              <a:t>12/1/2025</a:t>
+              <a:t>12/3/25</a:t>
             </a:fld>
             <a:endParaRPr lang="en-US" dirty="0"/>
           </a:p>
@@ -3204,7 +3174,7 @@
           <a:p>
             <a:fld id="{48F63A3B-78C7-47BE-AE5E-E10140E04643}" type="slidenum">
               <a:rPr lang="en-US" dirty="0"/>
-              <a:t>‹#›</a:t>
+              <a:t>‹Nº›</a:t>
             </a:fld>
             <a:endParaRPr lang="en-US" dirty="0"/>
           </a:p>
@@ -3342,7 +3312,7 @@
           <a:p>
             <a:fld id="{C764DE79-268F-4C1A-8933-263129D2AF90}" type="datetimeFigureOut">
               <a:rPr lang="en-US" dirty="0"/>
-              <a:t>12/1/2025</a:t>
+              <a:t>12/3/25</a:t>
             </a:fld>
             <a:endParaRPr lang="en-US" dirty="0"/>
           </a:p>
@@ -3384,7 +3354,7 @@
           <a:p>
             <a:fld id="{48F63A3B-78C7-47BE-AE5E-E10140E04643}" type="slidenum">
               <a:rPr lang="en-US" dirty="0"/>
-              <a:t>‹#›</a:t>
+              <a:t>‹Nº›</a:t>
             </a:fld>
             <a:endParaRPr lang="en-US" dirty="0"/>
           </a:p>
@@ -3635,7 +3605,7 @@
           <a:p>
             <a:fld id="{722949B6-FD26-4F0A-B27E-95AA34CFB7B6}" type="datetimeFigureOut">
               <a:rPr lang="en-US" smtClean="0"/>
-              <a:t>12/1/2025</a:t>
+              <a:t>12/3/25</a:t>
             </a:fld>
             <a:endParaRPr lang="en-US"/>
           </a:p>
@@ -3689,7 +3659,7 @@
           <a:p>
             <a:fld id="{F528ECA1-1E0E-45AA-9354-4925D9A91E67}" type="slidenum">
               <a:rPr lang="en-US" smtClean="0"/>
-              <a:t>‹#›</a:t>
+              <a:t>‹Nº›</a:t>
             </a:fld>
             <a:endParaRPr lang="en-US"/>
           </a:p>
@@ -3900,7 +3870,7 @@
           <a:p>
             <a:fld id="{722949B6-FD26-4F0A-B27E-95AA34CFB7B6}" type="datetimeFigureOut">
               <a:rPr lang="en-US" smtClean="0"/>
-              <a:t>12/1/2025</a:t>
+              <a:t>12/3/25</a:t>
             </a:fld>
             <a:endParaRPr lang="en-US"/>
           </a:p>
@@ -3954,7 +3924,7 @@
           <a:p>
             <a:fld id="{F528ECA1-1E0E-45AA-9354-4925D9A91E67}" type="slidenum">
               <a:rPr lang="en-US" smtClean="0"/>
-              <a:t>‹#›</a:t>
+              <a:t>‹Nº›</a:t>
             </a:fld>
             <a:endParaRPr lang="en-US"/>
           </a:p>
@@ -4312,7 +4282,7 @@
           <a:p>
             <a:fld id="{722949B6-FD26-4F0A-B27E-95AA34CFB7B6}" type="datetimeFigureOut">
               <a:rPr lang="en-US" smtClean="0"/>
-              <a:t>12/1/2025</a:t>
+              <a:t>12/3/25</a:t>
             </a:fld>
             <a:endParaRPr lang="en-US"/>
           </a:p>
@@ -4366,7 +4336,7 @@
           <a:p>
             <a:fld id="{F528ECA1-1E0E-45AA-9354-4925D9A91E67}" type="slidenum">
               <a:rPr lang="en-US" smtClean="0"/>
-              <a:t>‹#›</a:t>
+              <a:t>‹Nº›</a:t>
             </a:fld>
             <a:endParaRPr lang="en-US"/>
           </a:p>
@@ -4453,7 +4423,7 @@
           <a:p>
             <a:fld id="{722949B6-FD26-4F0A-B27E-95AA34CFB7B6}" type="datetimeFigureOut">
               <a:rPr lang="en-US" smtClean="0"/>
-              <a:t>12/1/2025</a:t>
+              <a:t>12/3/25</a:t>
             </a:fld>
             <a:endParaRPr lang="en-US"/>
           </a:p>
@@ -4507,7 +4477,7 @@
           <a:p>
             <a:fld id="{F528ECA1-1E0E-45AA-9354-4925D9A91E67}" type="slidenum">
               <a:rPr lang="en-US" smtClean="0"/>
-              <a:t>‹#›</a:t>
+              <a:t>‹Nº›</a:t>
             </a:fld>
             <a:endParaRPr lang="en-US"/>
           </a:p>
@@ -4566,7 +4536,7 @@
           <a:p>
             <a:fld id="{722949B6-FD26-4F0A-B27E-95AA34CFB7B6}" type="datetimeFigureOut">
               <a:rPr lang="en-US" smtClean="0"/>
-              <a:t>12/1/2025</a:t>
+              <a:t>12/3/25</a:t>
             </a:fld>
             <a:endParaRPr lang="en-US"/>
           </a:p>
@@ -4620,7 +4590,7 @@
           <a:p>
             <a:fld id="{F528ECA1-1E0E-45AA-9354-4925D9A91E67}" type="slidenum">
               <a:rPr lang="en-US" smtClean="0"/>
-              <a:t>‹#›</a:t>
+              <a:t>‹Nº›</a:t>
             </a:fld>
             <a:endParaRPr lang="en-US"/>
           </a:p>
@@ -4877,7 +4847,7 @@
           <a:p>
             <a:fld id="{722949B6-FD26-4F0A-B27E-95AA34CFB7B6}" type="datetimeFigureOut">
               <a:rPr lang="en-US" smtClean="0"/>
-              <a:t>12/1/2025</a:t>
+              <a:t>12/3/25</a:t>
             </a:fld>
             <a:endParaRPr lang="en-US"/>
           </a:p>
@@ -4931,7 +4901,7 @@
           <a:p>
             <a:fld id="{F528ECA1-1E0E-45AA-9354-4925D9A91E67}" type="slidenum">
               <a:rPr lang="en-US" smtClean="0"/>
-              <a:t>‹#›</a:t>
+              <a:t>‹Nº›</a:t>
             </a:fld>
             <a:endParaRPr lang="en-US"/>
           </a:p>
@@ -5165,7 +5135,7 @@
           <a:p>
             <a:fld id="{722949B6-FD26-4F0A-B27E-95AA34CFB7B6}" type="datetimeFigureOut">
               <a:rPr lang="en-US" smtClean="0"/>
-              <a:t>12/1/2025</a:t>
+              <a:t>12/3/25</a:t>
             </a:fld>
             <a:endParaRPr lang="en-US"/>
           </a:p>
@@ -5219,7 +5189,7 @@
           <a:p>
             <a:fld id="{F528ECA1-1E0E-45AA-9354-4925D9A91E67}" type="slidenum">
               <a:rPr lang="en-US" smtClean="0"/>
-              <a:t>‹#›</a:t>
+              <a:t>‹Nº›</a:t>
             </a:fld>
             <a:endParaRPr lang="en-US"/>
           </a:p>
@@ -5406,7 +5376,7 @@
           <a:p>
             <a:fld id="{722949B6-FD26-4F0A-B27E-95AA34CFB7B6}" type="datetimeFigureOut">
               <a:rPr lang="en-US" smtClean="0"/>
-              <a:t>12/1/2025</a:t>
+              <a:t>12/3/25</a:t>
             </a:fld>
             <a:endParaRPr lang="en-US"/>
           </a:p>
@@ -5496,7 +5466,7 @@
           <a:p>
             <a:fld id="{F528ECA1-1E0E-45AA-9354-4925D9A91E67}" type="slidenum">
               <a:rPr lang="en-US" smtClean="0"/>
-              <a:t>‹#›</a:t>
+              <a:t>‹Nº›</a:t>
             </a:fld>
             <a:endParaRPr lang="en-US"/>
           </a:p>
@@ -5958,7 +5928,7 @@
           <a:p>
             <a:fld id="{C764DE79-268F-4C1A-8933-263129D2AF90}" type="datetimeFigureOut">
               <a:rPr lang="en-US" dirty="0"/>
-              <a:t>12/1/2025</a:t>
+              <a:t>12/3/25</a:t>
             </a:fld>
             <a:endParaRPr lang="en-US" dirty="0"/>
           </a:p>
@@ -6036,7 +6006,7 @@
           <a:p>
             <a:fld id="{48F63A3B-78C7-47BE-AE5E-E10140E04643}" type="slidenum">
               <a:rPr lang="en-US" dirty="0"/>
-              <a:t>‹#›</a:t>
+              <a:t>‹Nº›</a:t>
             </a:fld>
             <a:endParaRPr lang="en-US" dirty="0"/>
           </a:p>
@@ -9175,7 +9145,7 @@
         </p:nvSpPr>
         <p:spPr>
           <a:xfrm>
-            <a:off x="1771310" y="4239936"/>
+            <a:off x="1771310" y="4192539"/>
             <a:ext cx="2452736" cy="257315"/>
           </a:xfrm>
           <a:prstGeom prst="rect">
@@ -9618,8 +9588,8 @@
           </a:p>
         </p:txBody>
       </p:sp>
-      <mc:AlternateContent xmlns:mc="http://schemas.openxmlformats.org/markup-compatibility/2006">
-        <mc:Choice xmlns:a14="http://schemas.microsoft.com/office/drawing/2010/main" Requires="a14">
+      <mc:AlternateContent xmlns:mc="http://schemas.openxmlformats.org/markup-compatibility/2006" xmlns:a14="http://schemas.microsoft.com/office/drawing/2010/main">
+        <mc:Choice Requires="a14">
           <p:sp>
             <p:nvSpPr>
               <p:cNvPr id="47" name="TextBox 46">
@@ -9784,7 +9754,7 @@
             </p:txBody>
           </p:sp>
         </mc:Choice>
-        <mc:Fallback>
+        <mc:Fallback xmlns="">
           <p:sp>
             <p:nvSpPr>
               <p:cNvPr id="47" name="TextBox 46">
@@ -9829,8 +9799,8 @@
           </p:sp>
         </mc:Fallback>
       </mc:AlternateContent>
-      <mc:AlternateContent xmlns:mc="http://schemas.openxmlformats.org/markup-compatibility/2006">
-        <mc:Choice xmlns:a14="http://schemas.microsoft.com/office/drawing/2010/main" Requires="a14">
+      <mc:AlternateContent xmlns:mc="http://schemas.openxmlformats.org/markup-compatibility/2006" xmlns:a14="http://schemas.microsoft.com/office/drawing/2010/main">
+        <mc:Choice Requires="a14">
           <p:sp>
             <p:nvSpPr>
               <p:cNvPr id="48" name="TextBox 47">
@@ -9982,7 +9952,7 @@
             </p:txBody>
           </p:sp>
         </mc:Choice>
-        <mc:Fallback>
+        <mc:Fallback xmlns="">
           <p:sp>
             <p:nvSpPr>
               <p:cNvPr id="48" name="TextBox 47">
@@ -10027,8 +9997,8 @@
           </p:sp>
         </mc:Fallback>
       </mc:AlternateContent>
-      <mc:AlternateContent xmlns:mc="http://schemas.openxmlformats.org/markup-compatibility/2006">
-        <mc:Choice xmlns:a14="http://schemas.microsoft.com/office/drawing/2010/main" Requires="a14">
+      <mc:AlternateContent xmlns:mc="http://schemas.openxmlformats.org/markup-compatibility/2006" xmlns:a14="http://schemas.microsoft.com/office/drawing/2010/main">
+        <mc:Choice Requires="a14">
           <p:sp>
             <p:nvSpPr>
               <p:cNvPr id="49" name="TextBox 48">
@@ -10043,8 +10013,8 @@
             </p:nvSpPr>
             <p:spPr>
               <a:xfrm>
-                <a:off x="1773209" y="4427397"/>
-                <a:ext cx="2594684" cy="920573"/>
+                <a:off x="1771310" y="4332107"/>
+                <a:ext cx="2594684" cy="2278188"/>
               </a:xfrm>
               <a:prstGeom prst="rect">
                 <a:avLst/>
@@ -10066,7 +10036,182 @@
                     <a:latin typeface="Arial" panose="020B0604020202020204" pitchFamily="34" charset="0"/>
                     <a:cs typeface="Arial" panose="020B0604020202020204" pitchFamily="34" charset="0"/>
                   </a:rPr>
-                  <a:t>I conducted an experiment to measure how plate area and plate separation affect the capacitance of a parallel-plate capacitor. The setup included two adjustable metal plates, a fixed voltage source, and a digital capacitance meter. For the first set of trials (N=1 to N=6), plate separation was kept constant while plate area was varied in increments. For the second set, plate area was fixed while plate separation was adjusted; at each configuration, capacitance was recorded, and energy was calculated using </a:t>
+                  <a:t>To investigate the effect of plate area and plate separation on the capacitance of a parallel-plate capacitor, I designed an experiment using adjustable metal plates, a regulated DC voltage source, and a digital capacitance meter. The plates were mounted on a frame that allowed precise control of both their surface area and the distance between them. A micrometer screw gauge was used to measure and adjust the separation with millimeter accuracy, while interchangeable plates of varying sizes were employed to modify the area. The voltage source was set to a constant value throughout the experiment to ensure that changes in capacitance were solely due to geometric variations.</a:t>
+                </a:r>
+              </a:p>
+              <a:p>
+                <a:pPr defTabSz="780653"/>
+                <a:r>
+                  <a:rPr lang="en-US" sz="572" dirty="0">
+                    <a:solidFill>
+                      <a:prstClr val="black"/>
+                    </a:solidFill>
+                    <a:latin typeface="Arial" panose="020B0604020202020204" pitchFamily="34" charset="0"/>
+                    <a:cs typeface="Arial" panose="020B0604020202020204" pitchFamily="34" charset="0"/>
+                  </a:rPr>
+                  <a:t>The experiment was conducted in two parts. In the first part, the plate separation was fixed at 6mm, and the plate area was systemically increased in increments from </a:t>
+                </a:r>
+                <a14:m>
+                  <m:oMath xmlns:m="http://schemas.openxmlformats.org/officeDocument/2006/math">
+                    <m:r>
+                      <a:rPr lang="en-US" sz="572" b="0" i="1" smtClean="0">
+                        <a:solidFill>
+                          <a:prstClr val="black"/>
+                        </a:solidFill>
+                        <a:latin typeface="Cambria Math" panose="02040503050406030204" pitchFamily="18" charset="0"/>
+                        <a:cs typeface="Arial" panose="020B0604020202020204" pitchFamily="34" charset="0"/>
+                      </a:rPr>
+                      <m:t>100 </m:t>
+                    </m:r>
+                    <m:r>
+                      <a:rPr lang="en-US" sz="572" b="0" i="1" smtClean="0">
+                        <a:solidFill>
+                          <a:prstClr val="black"/>
+                        </a:solidFill>
+                        <a:latin typeface="Cambria Math" panose="02040503050406030204" pitchFamily="18" charset="0"/>
+                        <a:cs typeface="Arial" panose="020B0604020202020204" pitchFamily="34" charset="0"/>
+                      </a:rPr>
+                      <m:t>𝑚</m:t>
+                    </m:r>
+                    <m:sSup>
+                      <m:sSupPr>
+                        <m:ctrlPr>
+                          <a:rPr lang="en-US" sz="572" b="0" i="1" smtClean="0">
+                            <a:solidFill>
+                              <a:prstClr val="black"/>
+                            </a:solidFill>
+                            <a:latin typeface="Cambria Math" panose="02040503050406030204" pitchFamily="18" charset="0"/>
+                            <a:cs typeface="Arial" panose="020B0604020202020204" pitchFamily="34" charset="0"/>
+                          </a:rPr>
+                        </m:ctrlPr>
+                      </m:sSupPr>
+                      <m:e>
+                        <m:r>
+                          <a:rPr lang="en-US" sz="572" b="0" i="1" smtClean="0">
+                            <a:solidFill>
+                              <a:prstClr val="black"/>
+                            </a:solidFill>
+                            <a:latin typeface="Cambria Math" panose="02040503050406030204" pitchFamily="18" charset="0"/>
+                            <a:cs typeface="Arial" panose="020B0604020202020204" pitchFamily="34" charset="0"/>
+                          </a:rPr>
+                          <m:t>𝑚</m:t>
+                        </m:r>
+                      </m:e>
+                      <m:sup>
+                        <m:r>
+                          <a:rPr lang="en-US" sz="572" b="0" i="1" smtClean="0">
+                            <a:solidFill>
+                              <a:prstClr val="black"/>
+                            </a:solidFill>
+                            <a:latin typeface="Cambria Math" panose="02040503050406030204" pitchFamily="18" charset="0"/>
+                            <a:cs typeface="Arial" panose="020B0604020202020204" pitchFamily="34" charset="0"/>
+                          </a:rPr>
+                          <m:t>2</m:t>
+                        </m:r>
+                      </m:sup>
+                    </m:sSup>
+                  </m:oMath>
+                </a14:m>
+                <a:r>
+                  <a:rPr lang="en-US" sz="572" dirty="0">
+                    <a:solidFill>
+                      <a:prstClr val="black"/>
+                    </a:solidFill>
+                    <a:latin typeface="Arial" panose="020B0604020202020204" pitchFamily="34" charset="0"/>
+                    <a:cs typeface="Arial" panose="020B0604020202020204" pitchFamily="34" charset="0"/>
+                  </a:rPr>
+                  <a:t> to </a:t>
+                </a:r>
+                <a14:m>
+                  <m:oMath xmlns:m="http://schemas.openxmlformats.org/officeDocument/2006/math">
+                    <m:r>
+                      <a:rPr lang="en-US" sz="572" i="1" dirty="0" smtClean="0">
+                        <a:solidFill>
+                          <a:prstClr val="black"/>
+                        </a:solidFill>
+                        <a:latin typeface="Cambria Math" panose="02040503050406030204" pitchFamily="18" charset="0"/>
+                        <a:cs typeface="Arial" panose="020B0604020202020204" pitchFamily="34" charset="0"/>
+                      </a:rPr>
+                      <m:t>1</m:t>
+                    </m:r>
+                    <m:r>
+                      <a:rPr lang="en-US" sz="572" b="0" i="1" dirty="0" smtClean="0">
+                        <a:solidFill>
+                          <a:prstClr val="black"/>
+                        </a:solidFill>
+                        <a:latin typeface="Cambria Math" panose="02040503050406030204" pitchFamily="18" charset="0"/>
+                        <a:cs typeface="Arial" panose="020B0604020202020204" pitchFamily="34" charset="0"/>
+                      </a:rPr>
+                      <m:t>50</m:t>
+                    </m:r>
+                    <m:r>
+                      <a:rPr lang="en-US" sz="572" i="1">
+                        <a:solidFill>
+                          <a:prstClr val="black"/>
+                        </a:solidFill>
+                        <a:latin typeface="Cambria Math" panose="02040503050406030204" pitchFamily="18" charset="0"/>
+                        <a:cs typeface="Arial" panose="020B0604020202020204" pitchFamily="34" charset="0"/>
+                      </a:rPr>
+                      <m:t> </m:t>
+                    </m:r>
+                    <m:r>
+                      <a:rPr lang="en-US" sz="572" i="1">
+                        <a:solidFill>
+                          <a:prstClr val="black"/>
+                        </a:solidFill>
+                        <a:latin typeface="Cambria Math" panose="02040503050406030204" pitchFamily="18" charset="0"/>
+                        <a:cs typeface="Arial" panose="020B0604020202020204" pitchFamily="34" charset="0"/>
+                      </a:rPr>
+                      <m:t>𝑚</m:t>
+                    </m:r>
+                    <m:sSup>
+                      <m:sSupPr>
+                        <m:ctrlPr>
+                          <a:rPr lang="en-US" sz="572" i="1">
+                            <a:solidFill>
+                              <a:prstClr val="black"/>
+                            </a:solidFill>
+                            <a:latin typeface="Cambria Math" panose="02040503050406030204" pitchFamily="18" charset="0"/>
+                            <a:cs typeface="Arial" panose="020B0604020202020204" pitchFamily="34" charset="0"/>
+                          </a:rPr>
+                        </m:ctrlPr>
+                      </m:sSupPr>
+                      <m:e>
+                        <m:r>
+                          <a:rPr lang="en-US" sz="572" i="1">
+                            <a:solidFill>
+                              <a:prstClr val="black"/>
+                            </a:solidFill>
+                            <a:latin typeface="Cambria Math" panose="02040503050406030204" pitchFamily="18" charset="0"/>
+                            <a:cs typeface="Arial" panose="020B0604020202020204" pitchFamily="34" charset="0"/>
+                          </a:rPr>
+                          <m:t>𝑚</m:t>
+                        </m:r>
+                      </m:e>
+                      <m:sup>
+                        <m:r>
+                          <a:rPr lang="en-US" sz="572" i="1">
+                            <a:solidFill>
+                              <a:prstClr val="black"/>
+                            </a:solidFill>
+                            <a:latin typeface="Cambria Math" panose="02040503050406030204" pitchFamily="18" charset="0"/>
+                            <a:cs typeface="Arial" panose="020B0604020202020204" pitchFamily="34" charset="0"/>
+                          </a:rPr>
+                          <m:t>2</m:t>
+                        </m:r>
+                      </m:sup>
+                    </m:sSup>
+                  </m:oMath>
+                </a14:m>
+                <a:r>
+                  <a:rPr lang="en-US" sz="572" dirty="0">
+                    <a:solidFill>
+                      <a:prstClr val="black"/>
+                    </a:solidFill>
+                    <a:latin typeface="Arial" panose="020B0604020202020204" pitchFamily="34" charset="0"/>
+                    <a:cs typeface="Arial" panose="020B0604020202020204" pitchFamily="34" charset="0"/>
+                  </a:rPr>
+                  <a:t>. For each configuration, the capacitance was measured using the digital meter, and the corresponding energy stored in the capacitor was calculated using the formula </a:t>
                 </a:r>
                 <a14:m>
                   <m:oMath xmlns:m="http://schemas.openxmlformats.org/officeDocument/2006/math">
@@ -10184,13 +10329,189 @@
                     <a:latin typeface="Arial" panose="020B0604020202020204" pitchFamily="34" charset="0"/>
                     <a:cs typeface="Arial" panose="020B0604020202020204" pitchFamily="34" charset="0"/>
                   </a:rPr>
-                  <a:t>. All measurements were repeated to ensure consistency and accuracy.</a:t>
+                  <a:t>. In the second phase, the plate are was held constant to </a:t>
                 </a:r>
+                <a14:m>
+                  <m:oMath xmlns:m="http://schemas.openxmlformats.org/officeDocument/2006/math">
+                    <m:r>
+                      <a:rPr lang="en-US" sz="572" b="0" i="1" smtClean="0">
+                        <a:solidFill>
+                          <a:prstClr val="black"/>
+                        </a:solidFill>
+                        <a:latin typeface="Cambria Math" panose="02040503050406030204" pitchFamily="18" charset="0"/>
+                        <a:cs typeface="Arial" panose="020B0604020202020204" pitchFamily="34" charset="0"/>
+                      </a:rPr>
+                      <m:t>100 </m:t>
+                    </m:r>
+                    <m:r>
+                      <a:rPr lang="en-US" sz="572" b="0" i="1" smtClean="0">
+                        <a:solidFill>
+                          <a:prstClr val="black"/>
+                        </a:solidFill>
+                        <a:latin typeface="Cambria Math" panose="02040503050406030204" pitchFamily="18" charset="0"/>
+                        <a:cs typeface="Arial" panose="020B0604020202020204" pitchFamily="34" charset="0"/>
+                      </a:rPr>
+                      <m:t>𝑚</m:t>
+                    </m:r>
+                    <m:sSup>
+                      <m:sSupPr>
+                        <m:ctrlPr>
+                          <a:rPr lang="en-US" sz="572" b="0" i="1" smtClean="0">
+                            <a:solidFill>
+                              <a:prstClr val="black"/>
+                            </a:solidFill>
+                            <a:latin typeface="Cambria Math" panose="02040503050406030204" pitchFamily="18" charset="0"/>
+                            <a:cs typeface="Arial" panose="020B0604020202020204" pitchFamily="34" charset="0"/>
+                          </a:rPr>
+                        </m:ctrlPr>
+                      </m:sSupPr>
+                      <m:e>
+                        <m:r>
+                          <a:rPr lang="en-US" sz="572" b="0" i="1" smtClean="0">
+                            <a:solidFill>
+                              <a:prstClr val="black"/>
+                            </a:solidFill>
+                            <a:latin typeface="Cambria Math" panose="02040503050406030204" pitchFamily="18" charset="0"/>
+                            <a:cs typeface="Arial" panose="020B0604020202020204" pitchFamily="34" charset="0"/>
+                          </a:rPr>
+                          <m:t>𝑚</m:t>
+                        </m:r>
+                      </m:e>
+                      <m:sup>
+                        <m:r>
+                          <a:rPr lang="en-US" sz="572" b="0" i="1" smtClean="0">
+                            <a:solidFill>
+                              <a:prstClr val="black"/>
+                            </a:solidFill>
+                            <a:latin typeface="Cambria Math" panose="02040503050406030204" pitchFamily="18" charset="0"/>
+                            <a:cs typeface="Arial" panose="020B0604020202020204" pitchFamily="34" charset="0"/>
+                          </a:rPr>
+                          <m:t>2</m:t>
+                        </m:r>
+                      </m:sup>
+                    </m:sSup>
+                  </m:oMath>
+                </a14:m>
+                <a:r>
+                  <a:rPr lang="en-US" sz="572" dirty="0">
+                    <a:solidFill>
+                      <a:prstClr val="black"/>
+                    </a:solidFill>
+                    <a:latin typeface="Arial" panose="020B0604020202020204" pitchFamily="34" charset="0"/>
+                    <a:cs typeface="Arial" panose="020B0604020202020204" pitchFamily="34" charset="0"/>
+                  </a:rPr>
+                  <a:t>, while the separation was varied from 2 mm to 7mm in steps of 1 mm. In addition, capacitance readings were recorded for each setting, and energy values were computed; all measurements were repeated to confirm consistency, and the data was organized into two sets: one for capacitance versus plate area and another for capacitance versus plate separation. These datasets were late analyzed to identify trends and compare experimental results with theoretical predictions based on the equation </a:t>
+                </a:r>
+                <a14:m>
+                  <m:oMath xmlns:m="http://schemas.openxmlformats.org/officeDocument/2006/math">
+                    <m:r>
+                      <a:rPr lang="en-US" sz="572" b="0" i="1" smtClean="0">
+                        <a:solidFill>
+                          <a:prstClr val="black"/>
+                        </a:solidFill>
+                        <a:latin typeface="Cambria Math" panose="02040503050406030204" pitchFamily="18" charset="0"/>
+                        <a:cs typeface="Arial" panose="020B0604020202020204" pitchFamily="34" charset="0"/>
+                      </a:rPr>
+                      <m:t>𝐶</m:t>
+                    </m:r>
+                    <m:r>
+                      <a:rPr lang="en-US" sz="572" b="0" i="1" smtClean="0">
+                        <a:solidFill>
+                          <a:prstClr val="black"/>
+                        </a:solidFill>
+                        <a:latin typeface="Cambria Math" panose="02040503050406030204" pitchFamily="18" charset="0"/>
+                        <a:cs typeface="Arial" panose="020B0604020202020204" pitchFamily="34" charset="0"/>
+                      </a:rPr>
+                      <m:t>=</m:t>
+                    </m:r>
+                    <m:sSub>
+                      <m:sSubPr>
+                        <m:ctrlPr>
+                          <a:rPr lang="en-US" sz="572" b="0" i="1" smtClean="0">
+                            <a:solidFill>
+                              <a:prstClr val="black"/>
+                            </a:solidFill>
+                            <a:latin typeface="Cambria Math" panose="02040503050406030204" pitchFamily="18" charset="0"/>
+                            <a:cs typeface="Arial" panose="020B0604020202020204" pitchFamily="34" charset="0"/>
+                          </a:rPr>
+                        </m:ctrlPr>
+                      </m:sSubPr>
+                      <m:e>
+                        <m:r>
+                          <a:rPr lang="en-US" sz="572" b="0" i="1" smtClean="0">
+                            <a:solidFill>
+                              <a:prstClr val="black"/>
+                            </a:solidFill>
+                            <a:latin typeface="Cambria Math" panose="02040503050406030204" pitchFamily="18" charset="0"/>
+                            <a:cs typeface="Arial" panose="020B0604020202020204" pitchFamily="34" charset="0"/>
+                          </a:rPr>
+                          <m:t>𝜖</m:t>
+                        </m:r>
+                      </m:e>
+                      <m:sub>
+                        <m:r>
+                          <a:rPr lang="en-US" sz="572" b="0" i="1" smtClean="0">
+                            <a:solidFill>
+                              <a:prstClr val="black"/>
+                            </a:solidFill>
+                            <a:latin typeface="Cambria Math" panose="02040503050406030204" pitchFamily="18" charset="0"/>
+                            <a:cs typeface="Arial" panose="020B0604020202020204" pitchFamily="34" charset="0"/>
+                          </a:rPr>
+                          <m:t>0</m:t>
+                        </m:r>
+                      </m:sub>
+                    </m:sSub>
+                    <m:f>
+                      <m:fPr>
+                        <m:ctrlPr>
+                          <a:rPr lang="en-US" sz="572" b="0" i="1" smtClean="0">
+                            <a:solidFill>
+                              <a:prstClr val="black"/>
+                            </a:solidFill>
+                            <a:latin typeface="Cambria Math" panose="02040503050406030204" pitchFamily="18" charset="0"/>
+                            <a:cs typeface="Arial" panose="020B0604020202020204" pitchFamily="34" charset="0"/>
+                          </a:rPr>
+                        </m:ctrlPr>
+                      </m:fPr>
+                      <m:num>
+                        <m:r>
+                          <a:rPr lang="en-US" sz="572" b="0" i="1" smtClean="0">
+                            <a:solidFill>
+                              <a:prstClr val="black"/>
+                            </a:solidFill>
+                            <a:latin typeface="Cambria Math" panose="02040503050406030204" pitchFamily="18" charset="0"/>
+                            <a:cs typeface="Arial" panose="020B0604020202020204" pitchFamily="34" charset="0"/>
+                          </a:rPr>
+                          <m:t>𝐴</m:t>
+                        </m:r>
+                      </m:num>
+                      <m:den>
+                        <m:r>
+                          <a:rPr lang="en-US" sz="572" b="0" i="1" smtClean="0">
+                            <a:solidFill>
+                              <a:prstClr val="black"/>
+                            </a:solidFill>
+                            <a:latin typeface="Cambria Math" panose="02040503050406030204" pitchFamily="18" charset="0"/>
+                            <a:cs typeface="Arial" panose="020B0604020202020204" pitchFamily="34" charset="0"/>
+                          </a:rPr>
+                          <m:t>𝑑</m:t>
+                        </m:r>
+                      </m:den>
+                    </m:f>
+                  </m:oMath>
+                </a14:m>
+                <a:endParaRPr lang="en-US" sz="572" dirty="0">
+                  <a:solidFill>
+                    <a:prstClr val="black"/>
+                  </a:solidFill>
+                  <a:latin typeface="Arial" panose="020B0604020202020204" pitchFamily="34" charset="0"/>
+                  <a:cs typeface="Arial" panose="020B0604020202020204" pitchFamily="34" charset="0"/>
+                </a:endParaRPr>
               </a:p>
             </p:txBody>
           </p:sp>
         </mc:Choice>
-        <mc:Fallback>
+        <mc:Fallback xmlns="">
           <p:sp>
             <p:nvSpPr>
               <p:cNvPr id="49" name="TextBox 48">
@@ -10207,8 +10528,8 @@
             </p:nvSpPr>
             <p:spPr>
               <a:xfrm>
-                <a:off x="1773209" y="4427397"/>
-                <a:ext cx="2594684" cy="920573"/>
+                <a:off x="1771310" y="4332107"/>
+                <a:ext cx="2594684" cy="2278188"/>
               </a:xfrm>
               <a:prstGeom prst="rect">
                 <a:avLst/>
@@ -10225,7 +10546,7 @@
               <a:lstStyle/>
               <a:p>
                 <a:r>
-                  <a:rPr lang="en-US">
+                  <a:rPr lang="es-ES">
                     <a:noFill/>
                   </a:rPr>
                   <a:t> </a:t>
@@ -10737,2437 +11058,251 @@
           </a:p>
         </p:txBody>
       </p:sp>
-      <p:sp>
-        <p:nvSpPr>
-          <p:cNvPr id="51" name="TextBox 50">
-            <a:extLst>
-              <a:ext uri="{FF2B5EF4-FFF2-40B4-BE49-F238E27FC236}">
-                <a16:creationId xmlns:a16="http://schemas.microsoft.com/office/drawing/2014/main" id="{E1CD2C2A-F064-084C-B9FF-1CE5B53E4E32}"/>
-              </a:ext>
-            </a:extLst>
-          </p:cNvPr>
-          <p:cNvSpPr txBox="1"/>
-          <p:nvPr/>
-        </p:nvSpPr>
-        <p:spPr>
-          <a:xfrm>
-            <a:off x="4805279" y="5787291"/>
-            <a:ext cx="2581433" cy="708592"/>
-          </a:xfrm>
-          <a:prstGeom prst="rect">
-            <a:avLst/>
-          </a:prstGeom>
-          <a:noFill/>
-        </p:spPr>
-        <p:txBody>
-          <a:bodyPr wrap="square" rtlCol="0">
-            <a:spAutoFit/>
-          </a:bodyPr>
-          <a:lstStyle/>
-          <a:p>
-            <a:pPr defTabSz="780653"/>
-            <a:r>
-              <a:rPr lang="en-US" sz="572" dirty="0">
-                <a:solidFill>
-                  <a:prstClr val="black"/>
-                </a:solidFill>
-                <a:latin typeface="Arial" panose="020B0604020202020204" pitchFamily="34" charset="0"/>
-                <a:cs typeface="Arial" panose="020B0604020202020204" pitchFamily="34" charset="0"/>
-              </a:rPr>
-              <a:t>As </a:t>
-            </a:r>
-            <a:r>
-              <a:rPr lang="en-US" sz="572" dirty="0" err="1">
-                <a:solidFill>
-                  <a:prstClr val="black"/>
-                </a:solidFill>
-                <a:latin typeface="Arial" panose="020B0604020202020204" pitchFamily="34" charset="0"/>
-                <a:cs typeface="Arial" panose="020B0604020202020204" pitchFamily="34" charset="0"/>
-              </a:rPr>
-              <a:t>verepe</a:t>
-            </a:r>
-            <a:r>
-              <a:rPr lang="en-US" sz="572" dirty="0">
-                <a:solidFill>
-                  <a:prstClr val="black"/>
-                </a:solidFill>
-                <a:latin typeface="Arial" panose="020B0604020202020204" pitchFamily="34" charset="0"/>
-                <a:cs typeface="Arial" panose="020B0604020202020204" pitchFamily="34" charset="0"/>
-              </a:rPr>
-              <a:t> </a:t>
-            </a:r>
-            <a:r>
-              <a:rPr lang="en-US" sz="572" dirty="0" err="1">
-                <a:solidFill>
-                  <a:prstClr val="black"/>
-                </a:solidFill>
-                <a:latin typeface="Arial" panose="020B0604020202020204" pitchFamily="34" charset="0"/>
-                <a:cs typeface="Arial" panose="020B0604020202020204" pitchFamily="34" charset="0"/>
-              </a:rPr>
-              <a:t>sectis</a:t>
-            </a:r>
-            <a:r>
-              <a:rPr lang="en-US" sz="572" dirty="0">
-                <a:solidFill>
-                  <a:prstClr val="black"/>
-                </a:solidFill>
-                <a:latin typeface="Arial" panose="020B0604020202020204" pitchFamily="34" charset="0"/>
-                <a:cs typeface="Arial" panose="020B0604020202020204" pitchFamily="34" charset="0"/>
-              </a:rPr>
-              <a:t> </a:t>
-            </a:r>
-            <a:r>
-              <a:rPr lang="en-US" sz="572" dirty="0" err="1">
-                <a:solidFill>
-                  <a:prstClr val="black"/>
-                </a:solidFill>
-                <a:latin typeface="Arial" panose="020B0604020202020204" pitchFamily="34" charset="0"/>
-                <a:cs typeface="Arial" panose="020B0604020202020204" pitchFamily="34" charset="0"/>
-              </a:rPr>
-              <a:t>enda</a:t>
-            </a:r>
-            <a:r>
-              <a:rPr lang="en-US" sz="572" dirty="0">
-                <a:solidFill>
-                  <a:prstClr val="black"/>
-                </a:solidFill>
-                <a:latin typeface="Arial" panose="020B0604020202020204" pitchFamily="34" charset="0"/>
-                <a:cs typeface="Arial" panose="020B0604020202020204" pitchFamily="34" charset="0"/>
-              </a:rPr>
-              <a:t> di </a:t>
-            </a:r>
-            <a:r>
-              <a:rPr lang="en-US" sz="572" dirty="0" err="1">
-                <a:solidFill>
-                  <a:prstClr val="black"/>
-                </a:solidFill>
-                <a:latin typeface="Arial" panose="020B0604020202020204" pitchFamily="34" charset="0"/>
-                <a:cs typeface="Arial" panose="020B0604020202020204" pitchFamily="34" charset="0"/>
-              </a:rPr>
-              <a:t>incto</a:t>
-            </a:r>
-            <a:r>
-              <a:rPr lang="en-US" sz="572" dirty="0">
-                <a:solidFill>
-                  <a:prstClr val="black"/>
-                </a:solidFill>
-                <a:latin typeface="Arial" panose="020B0604020202020204" pitchFamily="34" charset="0"/>
-                <a:cs typeface="Arial" panose="020B0604020202020204" pitchFamily="34" charset="0"/>
-              </a:rPr>
-              <a:t> </a:t>
-            </a:r>
-            <a:r>
-              <a:rPr lang="en-US" sz="572" dirty="0" err="1">
-                <a:solidFill>
-                  <a:prstClr val="black"/>
-                </a:solidFill>
-                <a:latin typeface="Arial" panose="020B0604020202020204" pitchFamily="34" charset="0"/>
-                <a:cs typeface="Arial" panose="020B0604020202020204" pitchFamily="34" charset="0"/>
-              </a:rPr>
-              <a:t>etusda</a:t>
-            </a:r>
-            <a:r>
-              <a:rPr lang="en-US" sz="572" dirty="0">
-                <a:solidFill>
-                  <a:prstClr val="black"/>
-                </a:solidFill>
-                <a:latin typeface="Arial" panose="020B0604020202020204" pitchFamily="34" charset="0"/>
-                <a:cs typeface="Arial" panose="020B0604020202020204" pitchFamily="34" charset="0"/>
-              </a:rPr>
-              <a:t> </a:t>
-            </a:r>
-            <a:r>
-              <a:rPr lang="en-US" sz="572" dirty="0" err="1">
-                <a:solidFill>
-                  <a:prstClr val="black"/>
-                </a:solidFill>
-                <a:latin typeface="Arial" panose="020B0604020202020204" pitchFamily="34" charset="0"/>
-                <a:cs typeface="Arial" panose="020B0604020202020204" pitchFamily="34" charset="0"/>
-              </a:rPr>
-              <a:t>delectet</a:t>
-            </a:r>
-            <a:r>
-              <a:rPr lang="en-US" sz="572" dirty="0">
-                <a:solidFill>
-                  <a:prstClr val="black"/>
-                </a:solidFill>
-                <a:latin typeface="Arial" panose="020B0604020202020204" pitchFamily="34" charset="0"/>
-                <a:cs typeface="Arial" panose="020B0604020202020204" pitchFamily="34" charset="0"/>
-              </a:rPr>
-              <a:t> </a:t>
-            </a:r>
-            <a:r>
-              <a:rPr lang="en-US" sz="572" dirty="0" err="1">
-                <a:solidFill>
-                  <a:prstClr val="black"/>
-                </a:solidFill>
-                <a:latin typeface="Arial" panose="020B0604020202020204" pitchFamily="34" charset="0"/>
-                <a:cs typeface="Arial" panose="020B0604020202020204" pitchFamily="34" charset="0"/>
-              </a:rPr>
-              <a:t>eaque</a:t>
-            </a:r>
-            <a:r>
-              <a:rPr lang="en-US" sz="572" dirty="0">
-                <a:solidFill>
-                  <a:prstClr val="black"/>
-                </a:solidFill>
-                <a:latin typeface="Arial" panose="020B0604020202020204" pitchFamily="34" charset="0"/>
-                <a:cs typeface="Arial" panose="020B0604020202020204" pitchFamily="34" charset="0"/>
-              </a:rPr>
-              <a:t> </a:t>
-            </a:r>
-            <a:r>
-              <a:rPr lang="en-US" sz="572" dirty="0" err="1">
-                <a:solidFill>
-                  <a:prstClr val="black"/>
-                </a:solidFill>
-                <a:latin typeface="Arial" panose="020B0604020202020204" pitchFamily="34" charset="0"/>
-                <a:cs typeface="Arial" panose="020B0604020202020204" pitchFamily="34" charset="0"/>
-              </a:rPr>
-              <a:t>simusda</a:t>
-            </a:r>
-            <a:r>
-              <a:rPr lang="en-US" sz="572" dirty="0">
-                <a:solidFill>
-                  <a:prstClr val="black"/>
-                </a:solidFill>
-                <a:latin typeface="Arial" panose="020B0604020202020204" pitchFamily="34" charset="0"/>
-                <a:cs typeface="Arial" panose="020B0604020202020204" pitchFamily="34" charset="0"/>
-              </a:rPr>
-              <a:t> </a:t>
-            </a:r>
-            <a:r>
-              <a:rPr lang="en-US" sz="572" dirty="0" err="1">
-                <a:solidFill>
-                  <a:prstClr val="black"/>
-                </a:solidFill>
-                <a:latin typeface="Arial" panose="020B0604020202020204" pitchFamily="34" charset="0"/>
-                <a:cs typeface="Arial" panose="020B0604020202020204" pitchFamily="34" charset="0"/>
-              </a:rPr>
-              <a:t>ndanimus</a:t>
-            </a:r>
-            <a:r>
-              <a:rPr lang="en-US" sz="572" dirty="0">
-                <a:solidFill>
-                  <a:prstClr val="black"/>
-                </a:solidFill>
-                <a:latin typeface="Arial" panose="020B0604020202020204" pitchFamily="34" charset="0"/>
-                <a:cs typeface="Arial" panose="020B0604020202020204" pitchFamily="34" charset="0"/>
-              </a:rPr>
-              <a:t>, sin </a:t>
-            </a:r>
-            <a:r>
-              <a:rPr lang="en-US" sz="572" dirty="0" err="1">
-                <a:solidFill>
-                  <a:prstClr val="black"/>
-                </a:solidFill>
-                <a:latin typeface="Arial" panose="020B0604020202020204" pitchFamily="34" charset="0"/>
-                <a:cs typeface="Arial" panose="020B0604020202020204" pitchFamily="34" charset="0"/>
-              </a:rPr>
-              <a:t>cori</a:t>
-            </a:r>
-            <a:r>
-              <a:rPr lang="en-US" sz="572" dirty="0">
-                <a:solidFill>
-                  <a:prstClr val="black"/>
-                </a:solidFill>
-                <a:latin typeface="Arial" panose="020B0604020202020204" pitchFamily="34" charset="0"/>
-                <a:cs typeface="Arial" panose="020B0604020202020204" pitchFamily="34" charset="0"/>
-              </a:rPr>
-              <a:t> rem id </a:t>
-            </a:r>
-            <a:r>
-              <a:rPr lang="en-US" sz="572" dirty="0" err="1">
-                <a:solidFill>
-                  <a:prstClr val="black"/>
-                </a:solidFill>
-                <a:latin typeface="Arial" panose="020B0604020202020204" pitchFamily="34" charset="0"/>
-                <a:cs typeface="Arial" panose="020B0604020202020204" pitchFamily="34" charset="0"/>
-              </a:rPr>
-              <a:t>maximillut</a:t>
-            </a:r>
-            <a:r>
-              <a:rPr lang="en-US" sz="572" dirty="0">
-                <a:solidFill>
-                  <a:prstClr val="black"/>
-                </a:solidFill>
-                <a:latin typeface="Arial" panose="020B0604020202020204" pitchFamily="34" charset="0"/>
-                <a:cs typeface="Arial" panose="020B0604020202020204" pitchFamily="34" charset="0"/>
-              </a:rPr>
-              <a:t> </a:t>
-            </a:r>
-            <a:r>
-              <a:rPr lang="en-US" sz="572" dirty="0" err="1">
-                <a:solidFill>
-                  <a:prstClr val="black"/>
-                </a:solidFill>
-                <a:latin typeface="Arial" panose="020B0604020202020204" pitchFamily="34" charset="0"/>
-                <a:cs typeface="Arial" panose="020B0604020202020204" pitchFamily="34" charset="0"/>
-              </a:rPr>
-              <a:t>hari</a:t>
-            </a:r>
-            <a:r>
-              <a:rPr lang="en-US" sz="572" dirty="0">
-                <a:solidFill>
-                  <a:prstClr val="black"/>
-                </a:solidFill>
-                <a:latin typeface="Arial" panose="020B0604020202020204" pitchFamily="34" charset="0"/>
-                <a:cs typeface="Arial" panose="020B0604020202020204" pitchFamily="34" charset="0"/>
-              </a:rPr>
-              <a:t> con </a:t>
-            </a:r>
-            <a:r>
-              <a:rPr lang="en-US" sz="572" dirty="0" err="1">
-                <a:solidFill>
-                  <a:prstClr val="black"/>
-                </a:solidFill>
-                <a:latin typeface="Arial" panose="020B0604020202020204" pitchFamily="34" charset="0"/>
-                <a:cs typeface="Arial" panose="020B0604020202020204" pitchFamily="34" charset="0"/>
-              </a:rPr>
-              <a:t>ea</a:t>
-            </a:r>
-            <a:r>
-              <a:rPr lang="en-US" sz="572" dirty="0">
-                <a:solidFill>
-                  <a:prstClr val="black"/>
-                </a:solidFill>
-                <a:latin typeface="Arial" panose="020B0604020202020204" pitchFamily="34" charset="0"/>
-                <a:cs typeface="Arial" panose="020B0604020202020204" pitchFamily="34" charset="0"/>
-              </a:rPr>
-              <a:t> </a:t>
-            </a:r>
-            <a:r>
-              <a:rPr lang="en-US" sz="572" dirty="0" err="1">
-                <a:solidFill>
-                  <a:prstClr val="black"/>
-                </a:solidFill>
-                <a:latin typeface="Arial" panose="020B0604020202020204" pitchFamily="34" charset="0"/>
-                <a:cs typeface="Arial" panose="020B0604020202020204" pitchFamily="34" charset="0"/>
-              </a:rPr>
-              <a:t>quiam</a:t>
-            </a:r>
-            <a:r>
-              <a:rPr lang="en-US" sz="572" dirty="0">
-                <a:solidFill>
-                  <a:prstClr val="black"/>
-                </a:solidFill>
-                <a:latin typeface="Arial" panose="020B0604020202020204" pitchFamily="34" charset="0"/>
-                <a:cs typeface="Arial" panose="020B0604020202020204" pitchFamily="34" charset="0"/>
-              </a:rPr>
-              <a:t> </a:t>
-            </a:r>
-            <a:r>
-              <a:rPr lang="en-US" sz="572" dirty="0" err="1">
-                <a:solidFill>
-                  <a:prstClr val="black"/>
-                </a:solidFill>
-                <a:latin typeface="Arial" panose="020B0604020202020204" pitchFamily="34" charset="0"/>
-                <a:cs typeface="Arial" panose="020B0604020202020204" pitchFamily="34" charset="0"/>
-              </a:rPr>
-              <a:t>quam</a:t>
-            </a:r>
-            <a:r>
-              <a:rPr lang="en-US" sz="572" dirty="0">
-                <a:solidFill>
-                  <a:prstClr val="black"/>
-                </a:solidFill>
-                <a:latin typeface="Arial" panose="020B0604020202020204" pitchFamily="34" charset="0"/>
-                <a:cs typeface="Arial" panose="020B0604020202020204" pitchFamily="34" charset="0"/>
-              </a:rPr>
-              <a:t> et </a:t>
-            </a:r>
-            <a:r>
-              <a:rPr lang="en-US" sz="572" dirty="0" err="1">
-                <a:solidFill>
-                  <a:prstClr val="black"/>
-                </a:solidFill>
-                <a:latin typeface="Arial" panose="020B0604020202020204" pitchFamily="34" charset="0"/>
-                <a:cs typeface="Arial" panose="020B0604020202020204" pitchFamily="34" charset="0"/>
-              </a:rPr>
-              <a:t>enduci</a:t>
-            </a:r>
-            <a:r>
-              <a:rPr lang="en-US" sz="572" dirty="0">
-                <a:solidFill>
-                  <a:prstClr val="black"/>
-                </a:solidFill>
-                <a:latin typeface="Arial" panose="020B0604020202020204" pitchFamily="34" charset="0"/>
-                <a:cs typeface="Arial" panose="020B0604020202020204" pitchFamily="34" charset="0"/>
-              </a:rPr>
-              <a:t> </a:t>
-            </a:r>
-            <a:r>
-              <a:rPr lang="en-US" sz="572" dirty="0" err="1">
-                <a:solidFill>
-                  <a:prstClr val="black"/>
-                </a:solidFill>
-                <a:latin typeface="Arial" panose="020B0604020202020204" pitchFamily="34" charset="0"/>
-                <a:cs typeface="Arial" panose="020B0604020202020204" pitchFamily="34" charset="0"/>
-              </a:rPr>
-              <a:t>idunt</a:t>
-            </a:r>
-            <a:r>
-              <a:rPr lang="en-US" sz="572" dirty="0">
-                <a:solidFill>
-                  <a:prstClr val="black"/>
-                </a:solidFill>
-                <a:latin typeface="Arial" panose="020B0604020202020204" pitchFamily="34" charset="0"/>
-                <a:cs typeface="Arial" panose="020B0604020202020204" pitchFamily="34" charset="0"/>
-              </a:rPr>
-              <a:t>, </a:t>
-            </a:r>
-            <a:r>
-              <a:rPr lang="en-US" sz="572" dirty="0" err="1">
-                <a:solidFill>
-                  <a:prstClr val="black"/>
-                </a:solidFill>
-                <a:latin typeface="Arial" panose="020B0604020202020204" pitchFamily="34" charset="0"/>
-                <a:cs typeface="Arial" panose="020B0604020202020204" pitchFamily="34" charset="0"/>
-              </a:rPr>
-              <a:t>corecta</a:t>
-            </a:r>
-            <a:r>
-              <a:rPr lang="en-US" sz="572" dirty="0">
-                <a:solidFill>
-                  <a:prstClr val="black"/>
-                </a:solidFill>
-                <a:latin typeface="Arial" panose="020B0604020202020204" pitchFamily="34" charset="0"/>
-                <a:cs typeface="Arial" panose="020B0604020202020204" pitchFamily="34" charset="0"/>
-              </a:rPr>
-              <a:t> </a:t>
-            </a:r>
-            <a:r>
-              <a:rPr lang="en-US" sz="572" dirty="0" err="1">
-                <a:solidFill>
-                  <a:prstClr val="black"/>
-                </a:solidFill>
-                <a:latin typeface="Arial" panose="020B0604020202020204" pitchFamily="34" charset="0"/>
-                <a:cs typeface="Arial" panose="020B0604020202020204" pitchFamily="34" charset="0"/>
-              </a:rPr>
-              <a:t>alicimp</a:t>
-            </a:r>
-            <a:r>
-              <a:rPr lang="en-US" sz="572" dirty="0">
-                <a:solidFill>
-                  <a:prstClr val="black"/>
-                </a:solidFill>
-                <a:latin typeface="Arial" panose="020B0604020202020204" pitchFamily="34" charset="0"/>
-                <a:cs typeface="Arial" panose="020B0604020202020204" pitchFamily="34" charset="0"/>
-              </a:rPr>
-              <a:t> </a:t>
-            </a:r>
-            <a:r>
-              <a:rPr lang="en-US" sz="572" dirty="0" err="1">
-                <a:solidFill>
-                  <a:prstClr val="black"/>
-                </a:solidFill>
-                <a:latin typeface="Arial" panose="020B0604020202020204" pitchFamily="34" charset="0"/>
-                <a:cs typeface="Arial" panose="020B0604020202020204" pitchFamily="34" charset="0"/>
-              </a:rPr>
-              <a:t>oriaeperum</a:t>
-            </a:r>
-            <a:r>
-              <a:rPr lang="en-US" sz="572" dirty="0">
-                <a:solidFill>
-                  <a:prstClr val="black"/>
-                </a:solidFill>
-                <a:latin typeface="Arial" panose="020B0604020202020204" pitchFamily="34" charset="0"/>
-                <a:cs typeface="Arial" panose="020B0604020202020204" pitchFamily="34" charset="0"/>
-              </a:rPr>
-              <a:t> </a:t>
-            </a:r>
-            <a:r>
-              <a:rPr lang="en-US" sz="572" dirty="0" err="1">
-                <a:solidFill>
-                  <a:prstClr val="black"/>
-                </a:solidFill>
-                <a:latin typeface="Arial" panose="020B0604020202020204" pitchFamily="34" charset="0"/>
-                <a:cs typeface="Arial" panose="020B0604020202020204" pitchFamily="34" charset="0"/>
-              </a:rPr>
-              <a:t>iusaeped</a:t>
-            </a:r>
-            <a:r>
-              <a:rPr lang="en-US" sz="572" dirty="0">
-                <a:solidFill>
-                  <a:prstClr val="black"/>
-                </a:solidFill>
-                <a:latin typeface="Arial" panose="020B0604020202020204" pitchFamily="34" charset="0"/>
-                <a:cs typeface="Arial" panose="020B0604020202020204" pitchFamily="34" charset="0"/>
-              </a:rPr>
-              <a:t> </a:t>
-            </a:r>
-            <a:r>
-              <a:rPr lang="en-US" sz="572" dirty="0" err="1">
-                <a:solidFill>
-                  <a:prstClr val="black"/>
-                </a:solidFill>
-                <a:latin typeface="Arial" panose="020B0604020202020204" pitchFamily="34" charset="0"/>
-                <a:cs typeface="Arial" panose="020B0604020202020204" pitchFamily="34" charset="0"/>
-              </a:rPr>
-              <a:t>unt</a:t>
-            </a:r>
-            <a:r>
-              <a:rPr lang="en-US" sz="572" dirty="0">
-                <a:solidFill>
-                  <a:prstClr val="black"/>
-                </a:solidFill>
-                <a:latin typeface="Arial" panose="020B0604020202020204" pitchFamily="34" charset="0"/>
-                <a:cs typeface="Arial" panose="020B0604020202020204" pitchFamily="34" charset="0"/>
-              </a:rPr>
-              <a:t> </a:t>
-            </a:r>
-            <a:r>
-              <a:rPr lang="en-US" sz="572" dirty="0" err="1">
-                <a:solidFill>
-                  <a:prstClr val="black"/>
-                </a:solidFill>
-                <a:latin typeface="Arial" panose="020B0604020202020204" pitchFamily="34" charset="0"/>
-                <a:cs typeface="Arial" panose="020B0604020202020204" pitchFamily="34" charset="0"/>
-              </a:rPr>
-              <a:t>quis</a:t>
-            </a:r>
-            <a:r>
-              <a:rPr lang="en-US" sz="572" dirty="0">
-                <a:solidFill>
-                  <a:prstClr val="black"/>
-                </a:solidFill>
-                <a:latin typeface="Arial" panose="020B0604020202020204" pitchFamily="34" charset="0"/>
-                <a:cs typeface="Arial" panose="020B0604020202020204" pitchFamily="34" charset="0"/>
-              </a:rPr>
-              <a:t> et </a:t>
-            </a:r>
-            <a:r>
-              <a:rPr lang="en-US" sz="572" dirty="0" err="1">
-                <a:solidFill>
-                  <a:prstClr val="black"/>
-                </a:solidFill>
-                <a:latin typeface="Arial" panose="020B0604020202020204" pitchFamily="34" charset="0"/>
-                <a:cs typeface="Arial" panose="020B0604020202020204" pitchFamily="34" charset="0"/>
-              </a:rPr>
-              <a:t>ut</a:t>
-            </a:r>
-            <a:r>
-              <a:rPr lang="en-US" sz="572" dirty="0">
-                <a:solidFill>
-                  <a:prstClr val="black"/>
-                </a:solidFill>
-                <a:latin typeface="Arial" panose="020B0604020202020204" pitchFamily="34" charset="0"/>
-                <a:cs typeface="Arial" panose="020B0604020202020204" pitchFamily="34" charset="0"/>
-              </a:rPr>
-              <a:t> </a:t>
-            </a:r>
-            <a:r>
-              <a:rPr lang="en-US" sz="572" dirty="0" err="1">
-                <a:solidFill>
-                  <a:prstClr val="black"/>
-                </a:solidFill>
-                <a:latin typeface="Arial" panose="020B0604020202020204" pitchFamily="34" charset="0"/>
-                <a:cs typeface="Arial" panose="020B0604020202020204" pitchFamily="34" charset="0"/>
-              </a:rPr>
-              <a:t>abor</a:t>
-            </a:r>
-            <a:r>
-              <a:rPr lang="en-US" sz="572" dirty="0">
-                <a:solidFill>
-                  <a:prstClr val="black"/>
-                </a:solidFill>
-                <a:latin typeface="Arial" panose="020B0604020202020204" pitchFamily="34" charset="0"/>
-                <a:cs typeface="Arial" panose="020B0604020202020204" pitchFamily="34" charset="0"/>
-              </a:rPr>
-              <a:t> </a:t>
-            </a:r>
-            <a:r>
-              <a:rPr lang="en-US" sz="572" dirty="0" err="1">
-                <a:solidFill>
-                  <a:prstClr val="black"/>
-                </a:solidFill>
-                <a:latin typeface="Arial" panose="020B0604020202020204" pitchFamily="34" charset="0"/>
-                <a:cs typeface="Arial" panose="020B0604020202020204" pitchFamily="34" charset="0"/>
-              </a:rPr>
-              <a:t>ame</a:t>
-            </a:r>
-            <a:r>
-              <a:rPr lang="en-US" sz="572" dirty="0">
-                <a:solidFill>
-                  <a:prstClr val="black"/>
-                </a:solidFill>
-                <a:latin typeface="Arial" panose="020B0604020202020204" pitchFamily="34" charset="0"/>
-                <a:cs typeface="Arial" panose="020B0604020202020204" pitchFamily="34" charset="0"/>
-              </a:rPr>
-              <a:t> </a:t>
-            </a:r>
-            <a:r>
-              <a:rPr lang="en-US" sz="572" dirty="0" err="1">
-                <a:solidFill>
-                  <a:prstClr val="black"/>
-                </a:solidFill>
-                <a:latin typeface="Arial" panose="020B0604020202020204" pitchFamily="34" charset="0"/>
-                <a:cs typeface="Arial" panose="020B0604020202020204" pitchFamily="34" charset="0"/>
-              </a:rPr>
-              <a:t>alis</a:t>
-            </a:r>
-            <a:r>
-              <a:rPr lang="en-US" sz="572" dirty="0">
-                <a:solidFill>
-                  <a:prstClr val="black"/>
-                </a:solidFill>
-                <a:latin typeface="Arial" panose="020B0604020202020204" pitchFamily="34" charset="0"/>
-                <a:cs typeface="Arial" panose="020B0604020202020204" pitchFamily="34" charset="0"/>
-              </a:rPr>
-              <a:t> </a:t>
-            </a:r>
-            <a:r>
-              <a:rPr lang="en-US" sz="572" dirty="0" err="1">
-                <a:solidFill>
-                  <a:prstClr val="black"/>
-                </a:solidFill>
-                <a:latin typeface="Arial" panose="020B0604020202020204" pitchFamily="34" charset="0"/>
-                <a:cs typeface="Arial" panose="020B0604020202020204" pitchFamily="34" charset="0"/>
-              </a:rPr>
-              <a:t>utatur</a:t>
-            </a:r>
-            <a:r>
-              <a:rPr lang="en-US" sz="572" dirty="0">
-                <a:solidFill>
-                  <a:prstClr val="black"/>
-                </a:solidFill>
-                <a:latin typeface="Arial" panose="020B0604020202020204" pitchFamily="34" charset="0"/>
-                <a:cs typeface="Arial" panose="020B0604020202020204" pitchFamily="34" charset="0"/>
-              </a:rPr>
-              <a:t> as senet a </a:t>
-            </a:r>
-            <a:r>
-              <a:rPr lang="en-US" sz="572" dirty="0" err="1">
-                <a:solidFill>
-                  <a:prstClr val="black"/>
-                </a:solidFill>
-                <a:latin typeface="Arial" panose="020B0604020202020204" pitchFamily="34" charset="0"/>
-                <a:cs typeface="Arial" panose="020B0604020202020204" pitchFamily="34" charset="0"/>
-              </a:rPr>
-              <a:t>quibus</a:t>
-            </a:r>
-            <a:r>
-              <a:rPr lang="en-US" sz="572" dirty="0">
-                <a:solidFill>
-                  <a:prstClr val="black"/>
-                </a:solidFill>
-                <a:latin typeface="Arial" panose="020B0604020202020204" pitchFamily="34" charset="0"/>
-                <a:cs typeface="Arial" panose="020B0604020202020204" pitchFamily="34" charset="0"/>
-              </a:rPr>
-              <a:t> </a:t>
-            </a:r>
-            <a:r>
-              <a:rPr lang="en-US" sz="572" dirty="0" err="1">
-                <a:solidFill>
-                  <a:prstClr val="black"/>
-                </a:solidFill>
-                <a:latin typeface="Arial" panose="020B0604020202020204" pitchFamily="34" charset="0"/>
-                <a:cs typeface="Arial" panose="020B0604020202020204" pitchFamily="34" charset="0"/>
-              </a:rPr>
-              <a:t>dolutatur</a:t>
-            </a:r>
-            <a:r>
-              <a:rPr lang="en-US" sz="572" dirty="0">
-                <a:solidFill>
-                  <a:prstClr val="black"/>
-                </a:solidFill>
-                <a:latin typeface="Arial" panose="020B0604020202020204" pitchFamily="34" charset="0"/>
-                <a:cs typeface="Arial" panose="020B0604020202020204" pitchFamily="34" charset="0"/>
-              </a:rPr>
-              <a:t> </a:t>
-            </a:r>
-            <a:r>
-              <a:rPr lang="en-US" sz="572" dirty="0" err="1">
-                <a:solidFill>
-                  <a:prstClr val="black"/>
-                </a:solidFill>
-                <a:latin typeface="Arial" panose="020B0604020202020204" pitchFamily="34" charset="0"/>
-                <a:cs typeface="Arial" panose="020B0604020202020204" pitchFamily="34" charset="0"/>
-              </a:rPr>
-              <a:t>sedit</a:t>
-            </a:r>
-            <a:r>
-              <a:rPr lang="en-US" sz="572" dirty="0">
-                <a:solidFill>
-                  <a:prstClr val="black"/>
-                </a:solidFill>
-                <a:latin typeface="Arial" panose="020B0604020202020204" pitchFamily="34" charset="0"/>
-                <a:cs typeface="Arial" panose="020B0604020202020204" pitchFamily="34" charset="0"/>
-              </a:rPr>
-              <a:t> </a:t>
-            </a:r>
-            <a:r>
-              <a:rPr lang="en-US" sz="572" dirty="0" err="1">
-                <a:solidFill>
-                  <a:prstClr val="black"/>
-                </a:solidFill>
-                <a:latin typeface="Arial" panose="020B0604020202020204" pitchFamily="34" charset="0"/>
-                <a:cs typeface="Arial" panose="020B0604020202020204" pitchFamily="34" charset="0"/>
-              </a:rPr>
-              <a:t>aliam</a:t>
-            </a:r>
-            <a:r>
-              <a:rPr lang="en-US" sz="572" dirty="0">
-                <a:solidFill>
-                  <a:prstClr val="black"/>
-                </a:solidFill>
-                <a:latin typeface="Arial" panose="020B0604020202020204" pitchFamily="34" charset="0"/>
-                <a:cs typeface="Arial" panose="020B0604020202020204" pitchFamily="34" charset="0"/>
-              </a:rPr>
-              <a:t> </a:t>
-            </a:r>
-            <a:r>
-              <a:rPr lang="en-US" sz="572" dirty="0" err="1">
-                <a:solidFill>
-                  <a:prstClr val="black"/>
-                </a:solidFill>
-                <a:latin typeface="Arial" panose="020B0604020202020204" pitchFamily="34" charset="0"/>
-                <a:cs typeface="Arial" panose="020B0604020202020204" pitchFamily="34" charset="0"/>
-              </a:rPr>
-              <a:t>apienda</a:t>
-            </a:r>
-            <a:r>
-              <a:rPr lang="en-US" sz="572" dirty="0">
-                <a:solidFill>
-                  <a:prstClr val="black"/>
-                </a:solidFill>
-                <a:latin typeface="Arial" panose="020B0604020202020204" pitchFamily="34" charset="0"/>
-                <a:cs typeface="Arial" panose="020B0604020202020204" pitchFamily="34" charset="0"/>
-              </a:rPr>
-              <a:t> </a:t>
-            </a:r>
-            <a:r>
-              <a:rPr lang="en-US" sz="572" dirty="0" err="1">
-                <a:solidFill>
-                  <a:prstClr val="black"/>
-                </a:solidFill>
-                <a:latin typeface="Arial" panose="020B0604020202020204" pitchFamily="34" charset="0"/>
-                <a:cs typeface="Arial" panose="020B0604020202020204" pitchFamily="34" charset="0"/>
-              </a:rPr>
-              <a:t>versper</a:t>
-            </a:r>
-            <a:r>
-              <a:rPr lang="en-US" sz="572" dirty="0">
-                <a:solidFill>
-                  <a:prstClr val="black"/>
-                </a:solidFill>
-                <a:latin typeface="Arial" panose="020B0604020202020204" pitchFamily="34" charset="0"/>
-                <a:cs typeface="Arial" panose="020B0604020202020204" pitchFamily="34" charset="0"/>
-              </a:rPr>
-              <a:t> </a:t>
-            </a:r>
-            <a:r>
-              <a:rPr lang="en-US" sz="572" dirty="0" err="1">
-                <a:solidFill>
-                  <a:prstClr val="black"/>
-                </a:solidFill>
-                <a:latin typeface="Arial" panose="020B0604020202020204" pitchFamily="34" charset="0"/>
-                <a:cs typeface="Arial" panose="020B0604020202020204" pitchFamily="34" charset="0"/>
-              </a:rPr>
-              <a:t>feriti</a:t>
-            </a:r>
-            <a:r>
-              <a:rPr lang="en-US" sz="572" dirty="0">
-                <a:solidFill>
-                  <a:prstClr val="black"/>
-                </a:solidFill>
-                <a:latin typeface="Arial" panose="020B0604020202020204" pitchFamily="34" charset="0"/>
-                <a:cs typeface="Arial" panose="020B0604020202020204" pitchFamily="34" charset="0"/>
-              </a:rPr>
-              <a:t> </a:t>
-            </a:r>
-            <a:r>
-              <a:rPr lang="en-US" sz="572" dirty="0" err="1">
-                <a:solidFill>
-                  <a:prstClr val="black"/>
-                </a:solidFill>
-                <a:latin typeface="Arial" panose="020B0604020202020204" pitchFamily="34" charset="0"/>
-                <a:cs typeface="Arial" panose="020B0604020202020204" pitchFamily="34" charset="0"/>
-              </a:rPr>
-              <a:t>delia</a:t>
-            </a:r>
-            <a:r>
-              <a:rPr lang="en-US" sz="572" dirty="0">
-                <a:solidFill>
-                  <a:prstClr val="black"/>
-                </a:solidFill>
-                <a:latin typeface="Arial" panose="020B0604020202020204" pitchFamily="34" charset="0"/>
-                <a:cs typeface="Arial" panose="020B0604020202020204" pitchFamily="34" charset="0"/>
-              </a:rPr>
-              <a:t> pa </a:t>
-            </a:r>
-            <a:r>
-              <a:rPr lang="en-US" sz="572" dirty="0" err="1">
-                <a:solidFill>
-                  <a:prstClr val="black"/>
-                </a:solidFill>
-                <a:latin typeface="Arial" panose="020B0604020202020204" pitchFamily="34" charset="0"/>
-                <a:cs typeface="Arial" panose="020B0604020202020204" pitchFamily="34" charset="0"/>
-              </a:rPr>
-              <a:t>dolo</a:t>
-            </a:r>
-            <a:r>
-              <a:rPr lang="en-US" sz="572" dirty="0">
-                <a:solidFill>
-                  <a:prstClr val="black"/>
-                </a:solidFill>
-                <a:latin typeface="Arial" panose="020B0604020202020204" pitchFamily="34" charset="0"/>
-                <a:cs typeface="Arial" panose="020B0604020202020204" pitchFamily="34" charset="0"/>
-              </a:rPr>
-              <a:t> </a:t>
-            </a:r>
-            <a:r>
-              <a:rPr lang="en-US" sz="572" dirty="0" err="1">
-                <a:solidFill>
-                  <a:prstClr val="black"/>
-                </a:solidFill>
-                <a:latin typeface="Arial" panose="020B0604020202020204" pitchFamily="34" charset="0"/>
-                <a:cs typeface="Arial" panose="020B0604020202020204" pitchFamily="34" charset="0"/>
-              </a:rPr>
-              <a:t>quamus</a:t>
-            </a:r>
-            <a:r>
-              <a:rPr lang="en-US" sz="572" dirty="0">
-                <a:solidFill>
-                  <a:prstClr val="black"/>
-                </a:solidFill>
-                <a:latin typeface="Arial" panose="020B0604020202020204" pitchFamily="34" charset="0"/>
-                <a:cs typeface="Arial" panose="020B0604020202020204" pitchFamily="34" charset="0"/>
-              </a:rPr>
-              <a:t> arum es </a:t>
-            </a:r>
-            <a:r>
-              <a:rPr lang="en-US" sz="572" dirty="0" err="1">
-                <a:solidFill>
-                  <a:prstClr val="black"/>
-                </a:solidFill>
-                <a:latin typeface="Arial" panose="020B0604020202020204" pitchFamily="34" charset="0"/>
-                <a:cs typeface="Arial" panose="020B0604020202020204" pitchFamily="34" charset="0"/>
-              </a:rPr>
-              <a:t>endellu</a:t>
-            </a:r>
-            <a:r>
-              <a:rPr lang="en-US" sz="572" dirty="0">
-                <a:solidFill>
-                  <a:prstClr val="black"/>
-                </a:solidFill>
-                <a:latin typeface="Arial" panose="020B0604020202020204" pitchFamily="34" charset="0"/>
-                <a:cs typeface="Arial" panose="020B0604020202020204" pitchFamily="34" charset="0"/>
-              </a:rPr>
-              <a:t> </a:t>
-            </a:r>
-            <a:r>
-              <a:rPr lang="en-US" sz="572" dirty="0" err="1">
-                <a:solidFill>
-                  <a:prstClr val="black"/>
-                </a:solidFill>
-                <a:latin typeface="Arial" panose="020B0604020202020204" pitchFamily="34" charset="0"/>
-                <a:cs typeface="Arial" panose="020B0604020202020204" pitchFamily="34" charset="0"/>
-              </a:rPr>
-              <a:t>pisquia</a:t>
-            </a:r>
-            <a:r>
-              <a:rPr lang="en-US" sz="572" dirty="0">
-                <a:solidFill>
-                  <a:prstClr val="black"/>
-                </a:solidFill>
-                <a:latin typeface="Arial" panose="020B0604020202020204" pitchFamily="34" charset="0"/>
-                <a:cs typeface="Arial" panose="020B0604020202020204" pitchFamily="34" charset="0"/>
-              </a:rPr>
-              <a:t> </a:t>
-            </a:r>
-            <a:r>
-              <a:rPr lang="en-US" sz="572" dirty="0" err="1">
-                <a:solidFill>
-                  <a:prstClr val="black"/>
-                </a:solidFill>
-                <a:latin typeface="Arial" panose="020B0604020202020204" pitchFamily="34" charset="0"/>
-                <a:cs typeface="Arial" panose="020B0604020202020204" pitchFamily="34" charset="0"/>
-              </a:rPr>
-              <a:t>aditatur</a:t>
-            </a:r>
-            <a:r>
-              <a:rPr lang="en-US" sz="572" dirty="0">
-                <a:solidFill>
-                  <a:prstClr val="black"/>
-                </a:solidFill>
-                <a:latin typeface="Arial" panose="020B0604020202020204" pitchFamily="34" charset="0"/>
-                <a:cs typeface="Arial" panose="020B0604020202020204" pitchFamily="34" charset="0"/>
-              </a:rPr>
-              <a:t> </a:t>
-            </a:r>
-            <a:r>
-              <a:rPr lang="en-US" sz="572" dirty="0" err="1">
-                <a:solidFill>
-                  <a:prstClr val="black"/>
-                </a:solidFill>
-                <a:latin typeface="Arial" panose="020B0604020202020204" pitchFamily="34" charset="0"/>
-                <a:cs typeface="Arial" panose="020B0604020202020204" pitchFamily="34" charset="0"/>
-              </a:rPr>
-              <a:t>audam</a:t>
-            </a:r>
-            <a:r>
-              <a:rPr lang="en-US" sz="572" dirty="0">
-                <a:solidFill>
-                  <a:prstClr val="black"/>
-                </a:solidFill>
-                <a:latin typeface="Arial" panose="020B0604020202020204" pitchFamily="34" charset="0"/>
-                <a:cs typeface="Arial" panose="020B0604020202020204" pitchFamily="34" charset="0"/>
-              </a:rPr>
-              <a:t> </a:t>
-            </a:r>
-            <a:r>
-              <a:rPr lang="en-US" sz="572" dirty="0" err="1">
-                <a:solidFill>
-                  <a:prstClr val="black"/>
-                </a:solidFill>
-                <a:latin typeface="Arial" panose="020B0604020202020204" pitchFamily="34" charset="0"/>
-                <a:cs typeface="Arial" panose="020B0604020202020204" pitchFamily="34" charset="0"/>
-              </a:rPr>
-              <a:t>earupid</a:t>
-            </a:r>
-            <a:r>
-              <a:rPr lang="en-US" sz="572" dirty="0">
-                <a:solidFill>
-                  <a:prstClr val="black"/>
-                </a:solidFill>
-                <a:latin typeface="Arial" panose="020B0604020202020204" pitchFamily="34" charset="0"/>
-                <a:cs typeface="Arial" panose="020B0604020202020204" pitchFamily="34" charset="0"/>
-              </a:rPr>
-              <a:t> quo </a:t>
-            </a:r>
-            <a:r>
-              <a:rPr lang="en-US" sz="572" dirty="0" err="1">
-                <a:solidFill>
-                  <a:prstClr val="black"/>
-                </a:solidFill>
-                <a:latin typeface="Arial" panose="020B0604020202020204" pitchFamily="34" charset="0"/>
-                <a:cs typeface="Arial" panose="020B0604020202020204" pitchFamily="34" charset="0"/>
-              </a:rPr>
-              <a:t>quunt</a:t>
-            </a:r>
-            <a:r>
-              <a:rPr lang="en-US" sz="572" dirty="0">
-                <a:solidFill>
-                  <a:prstClr val="black"/>
-                </a:solidFill>
-                <a:latin typeface="Arial" panose="020B0604020202020204" pitchFamily="34" charset="0"/>
-                <a:cs typeface="Arial" panose="020B0604020202020204" pitchFamily="34" charset="0"/>
-              </a:rPr>
-              <a:t> </a:t>
-            </a:r>
-            <a:r>
-              <a:rPr lang="en-US" sz="572" dirty="0" err="1">
-                <a:solidFill>
-                  <a:prstClr val="black"/>
-                </a:solidFill>
-                <a:latin typeface="Arial" panose="020B0604020202020204" pitchFamily="34" charset="0"/>
-                <a:cs typeface="Arial" panose="020B0604020202020204" pitchFamily="34" charset="0"/>
-              </a:rPr>
-              <a:t>odigniscil</a:t>
-            </a:r>
-            <a:r>
-              <a:rPr lang="en-US" sz="572" dirty="0">
-                <a:solidFill>
-                  <a:prstClr val="black"/>
-                </a:solidFill>
-                <a:latin typeface="Arial" panose="020B0604020202020204" pitchFamily="34" charset="0"/>
-                <a:cs typeface="Arial" panose="020B0604020202020204" pitchFamily="34" charset="0"/>
-              </a:rPr>
-              <a:t> </a:t>
-            </a:r>
-            <a:r>
-              <a:rPr lang="en-US" sz="572" dirty="0" err="1">
-                <a:solidFill>
-                  <a:prstClr val="black"/>
-                </a:solidFill>
-                <a:latin typeface="Arial" panose="020B0604020202020204" pitchFamily="34" charset="0"/>
-                <a:cs typeface="Arial" panose="020B0604020202020204" pitchFamily="34" charset="0"/>
-              </a:rPr>
-              <a:t>earum</a:t>
-            </a:r>
-            <a:r>
-              <a:rPr lang="en-US" sz="572" dirty="0">
-                <a:solidFill>
-                  <a:prstClr val="black"/>
-                </a:solidFill>
-                <a:latin typeface="Arial" panose="020B0604020202020204" pitchFamily="34" charset="0"/>
-                <a:cs typeface="Arial" panose="020B0604020202020204" pitchFamily="34" charset="0"/>
-              </a:rPr>
-              <a:t> </a:t>
-            </a:r>
-            <a:r>
-              <a:rPr lang="en-US" sz="572" dirty="0" err="1">
-                <a:solidFill>
-                  <a:prstClr val="black"/>
-                </a:solidFill>
-                <a:latin typeface="Arial" panose="020B0604020202020204" pitchFamily="34" charset="0"/>
-                <a:cs typeface="Arial" panose="020B0604020202020204" pitchFamily="34" charset="0"/>
-              </a:rPr>
-              <a:t>verios</a:t>
-            </a:r>
-            <a:r>
-              <a:rPr lang="en-US" sz="572" dirty="0">
-                <a:solidFill>
-                  <a:prstClr val="black"/>
-                </a:solidFill>
-                <a:latin typeface="Arial" panose="020B0604020202020204" pitchFamily="34" charset="0"/>
-                <a:cs typeface="Arial" panose="020B0604020202020204" pitchFamily="34" charset="0"/>
-              </a:rPr>
-              <a:t> </a:t>
-            </a:r>
-            <a:r>
-              <a:rPr lang="en-US" sz="572" dirty="0" err="1">
-                <a:solidFill>
-                  <a:prstClr val="black"/>
-                </a:solidFill>
-                <a:latin typeface="Arial" panose="020B0604020202020204" pitchFamily="34" charset="0"/>
-                <a:cs typeface="Arial" panose="020B0604020202020204" pitchFamily="34" charset="0"/>
-              </a:rPr>
-              <a:t>nonsequam</a:t>
-            </a:r>
-            <a:r>
-              <a:rPr lang="en-US" sz="572" dirty="0">
-                <a:solidFill>
-                  <a:prstClr val="black"/>
-                </a:solidFill>
-                <a:latin typeface="Arial" panose="020B0604020202020204" pitchFamily="34" charset="0"/>
-                <a:cs typeface="Arial" panose="020B0604020202020204" pitchFamily="34" charset="0"/>
-              </a:rPr>
-              <a:t> </a:t>
-            </a:r>
-            <a:r>
-              <a:rPr lang="en-US" sz="572" dirty="0" err="1">
-                <a:solidFill>
-                  <a:prstClr val="black"/>
-                </a:solidFill>
-                <a:latin typeface="Arial" panose="020B0604020202020204" pitchFamily="34" charset="0"/>
-                <a:cs typeface="Arial" panose="020B0604020202020204" pitchFamily="34" charset="0"/>
-              </a:rPr>
-              <a:t>duciis</a:t>
-            </a:r>
-            <a:r>
-              <a:rPr lang="en-US" sz="572" dirty="0">
-                <a:solidFill>
-                  <a:prstClr val="black"/>
-                </a:solidFill>
-                <a:latin typeface="Arial" panose="020B0604020202020204" pitchFamily="34" charset="0"/>
-                <a:cs typeface="Arial" panose="020B0604020202020204" pitchFamily="34" charset="0"/>
-              </a:rPr>
-              <a:t> et</a:t>
-            </a:r>
-          </a:p>
-          <a:p>
-            <a:pPr defTabSz="780653"/>
-            <a:endParaRPr lang="en-US" sz="572" dirty="0">
-              <a:solidFill>
-                <a:prstClr val="black"/>
-              </a:solidFill>
-              <a:latin typeface="Arial" panose="020B0604020202020204" pitchFamily="34" charset="0"/>
-              <a:cs typeface="Arial" panose="020B0604020202020204" pitchFamily="34" charset="0"/>
-            </a:endParaRPr>
-          </a:p>
-        </p:txBody>
-      </p:sp>
-      <p:sp>
-        <p:nvSpPr>
-          <p:cNvPr id="54" name="TextBox 53">
-            <a:extLst>
-              <a:ext uri="{FF2B5EF4-FFF2-40B4-BE49-F238E27FC236}">
-                <a16:creationId xmlns:a16="http://schemas.microsoft.com/office/drawing/2014/main" id="{F8C7482B-E913-3C49-AF7C-0ACF650610EA}"/>
-              </a:ext>
-            </a:extLst>
-          </p:cNvPr>
-          <p:cNvSpPr txBox="1"/>
-          <p:nvPr/>
-        </p:nvSpPr>
-        <p:spPr>
-          <a:xfrm>
-            <a:off x="4805279" y="4974783"/>
-            <a:ext cx="2581433" cy="796628"/>
-          </a:xfrm>
-          <a:prstGeom prst="rect">
-            <a:avLst/>
-          </a:prstGeom>
-          <a:noFill/>
-        </p:spPr>
-        <p:txBody>
-          <a:bodyPr wrap="square" rtlCol="0">
-            <a:spAutoFit/>
-          </a:bodyPr>
-          <a:lstStyle/>
-          <a:p>
-            <a:pPr defTabSz="780653"/>
-            <a:r>
-              <a:rPr lang="en-US" sz="572" dirty="0">
-                <a:solidFill>
-                  <a:prstClr val="black"/>
-                </a:solidFill>
-                <a:latin typeface="Arial" panose="020B0604020202020204" pitchFamily="34" charset="0"/>
-                <a:cs typeface="Arial" panose="020B0604020202020204" pitchFamily="34" charset="0"/>
-              </a:rPr>
-              <a:t>As </a:t>
-            </a:r>
-            <a:r>
-              <a:rPr lang="en-US" sz="572" dirty="0" err="1">
-                <a:solidFill>
-                  <a:prstClr val="black"/>
-                </a:solidFill>
-                <a:latin typeface="Arial" panose="020B0604020202020204" pitchFamily="34" charset="0"/>
-                <a:cs typeface="Arial" panose="020B0604020202020204" pitchFamily="34" charset="0"/>
-              </a:rPr>
-              <a:t>verepe</a:t>
-            </a:r>
-            <a:r>
-              <a:rPr lang="en-US" sz="572" dirty="0">
-                <a:solidFill>
-                  <a:prstClr val="black"/>
-                </a:solidFill>
-                <a:latin typeface="Arial" panose="020B0604020202020204" pitchFamily="34" charset="0"/>
-                <a:cs typeface="Arial" panose="020B0604020202020204" pitchFamily="34" charset="0"/>
-              </a:rPr>
-              <a:t> </a:t>
-            </a:r>
-            <a:r>
-              <a:rPr lang="en-US" sz="572" dirty="0" err="1">
-                <a:solidFill>
-                  <a:prstClr val="black"/>
-                </a:solidFill>
-                <a:latin typeface="Arial" panose="020B0604020202020204" pitchFamily="34" charset="0"/>
-                <a:cs typeface="Arial" panose="020B0604020202020204" pitchFamily="34" charset="0"/>
-              </a:rPr>
-              <a:t>sectis</a:t>
-            </a:r>
-            <a:r>
-              <a:rPr lang="en-US" sz="572" dirty="0">
-                <a:solidFill>
-                  <a:prstClr val="black"/>
-                </a:solidFill>
-                <a:latin typeface="Arial" panose="020B0604020202020204" pitchFamily="34" charset="0"/>
-                <a:cs typeface="Arial" panose="020B0604020202020204" pitchFamily="34" charset="0"/>
-              </a:rPr>
-              <a:t> </a:t>
-            </a:r>
-            <a:r>
-              <a:rPr lang="en-US" sz="572" dirty="0" err="1">
-                <a:solidFill>
-                  <a:prstClr val="black"/>
-                </a:solidFill>
-                <a:latin typeface="Arial" panose="020B0604020202020204" pitchFamily="34" charset="0"/>
-                <a:cs typeface="Arial" panose="020B0604020202020204" pitchFamily="34" charset="0"/>
-              </a:rPr>
-              <a:t>enda</a:t>
-            </a:r>
-            <a:r>
-              <a:rPr lang="en-US" sz="572" dirty="0">
-                <a:solidFill>
-                  <a:prstClr val="black"/>
-                </a:solidFill>
-                <a:latin typeface="Arial" panose="020B0604020202020204" pitchFamily="34" charset="0"/>
-                <a:cs typeface="Arial" panose="020B0604020202020204" pitchFamily="34" charset="0"/>
-              </a:rPr>
-              <a:t> di </a:t>
-            </a:r>
-            <a:r>
-              <a:rPr lang="en-US" sz="572" dirty="0" err="1">
-                <a:solidFill>
-                  <a:prstClr val="black"/>
-                </a:solidFill>
-                <a:latin typeface="Arial" panose="020B0604020202020204" pitchFamily="34" charset="0"/>
-                <a:cs typeface="Arial" panose="020B0604020202020204" pitchFamily="34" charset="0"/>
-              </a:rPr>
-              <a:t>incto</a:t>
-            </a:r>
-            <a:r>
-              <a:rPr lang="en-US" sz="572" dirty="0">
-                <a:solidFill>
-                  <a:prstClr val="black"/>
-                </a:solidFill>
-                <a:latin typeface="Arial" panose="020B0604020202020204" pitchFamily="34" charset="0"/>
-                <a:cs typeface="Arial" panose="020B0604020202020204" pitchFamily="34" charset="0"/>
-              </a:rPr>
-              <a:t> </a:t>
-            </a:r>
-            <a:r>
-              <a:rPr lang="en-US" sz="572" dirty="0" err="1">
-                <a:solidFill>
-                  <a:prstClr val="black"/>
-                </a:solidFill>
-                <a:latin typeface="Arial" panose="020B0604020202020204" pitchFamily="34" charset="0"/>
-                <a:cs typeface="Arial" panose="020B0604020202020204" pitchFamily="34" charset="0"/>
-              </a:rPr>
-              <a:t>etusda</a:t>
-            </a:r>
-            <a:r>
-              <a:rPr lang="en-US" sz="572" dirty="0">
-                <a:solidFill>
-                  <a:prstClr val="black"/>
-                </a:solidFill>
-                <a:latin typeface="Arial" panose="020B0604020202020204" pitchFamily="34" charset="0"/>
-                <a:cs typeface="Arial" panose="020B0604020202020204" pitchFamily="34" charset="0"/>
-              </a:rPr>
-              <a:t> </a:t>
-            </a:r>
-            <a:r>
-              <a:rPr lang="en-US" sz="572" dirty="0" err="1">
-                <a:solidFill>
-                  <a:prstClr val="black"/>
-                </a:solidFill>
-                <a:latin typeface="Arial" panose="020B0604020202020204" pitchFamily="34" charset="0"/>
-                <a:cs typeface="Arial" panose="020B0604020202020204" pitchFamily="34" charset="0"/>
-              </a:rPr>
-              <a:t>delectet</a:t>
-            </a:r>
-            <a:r>
-              <a:rPr lang="en-US" sz="572" dirty="0">
-                <a:solidFill>
-                  <a:prstClr val="black"/>
-                </a:solidFill>
-                <a:latin typeface="Arial" panose="020B0604020202020204" pitchFamily="34" charset="0"/>
-                <a:cs typeface="Arial" panose="020B0604020202020204" pitchFamily="34" charset="0"/>
-              </a:rPr>
-              <a:t> </a:t>
-            </a:r>
-            <a:r>
-              <a:rPr lang="en-US" sz="572" dirty="0" err="1">
-                <a:solidFill>
-                  <a:prstClr val="black"/>
-                </a:solidFill>
-                <a:latin typeface="Arial" panose="020B0604020202020204" pitchFamily="34" charset="0"/>
-                <a:cs typeface="Arial" panose="020B0604020202020204" pitchFamily="34" charset="0"/>
-              </a:rPr>
-              <a:t>eaque</a:t>
-            </a:r>
-            <a:r>
-              <a:rPr lang="en-US" sz="572" dirty="0">
-                <a:solidFill>
-                  <a:prstClr val="black"/>
-                </a:solidFill>
-                <a:latin typeface="Arial" panose="020B0604020202020204" pitchFamily="34" charset="0"/>
-                <a:cs typeface="Arial" panose="020B0604020202020204" pitchFamily="34" charset="0"/>
-              </a:rPr>
-              <a:t> </a:t>
-            </a:r>
-            <a:r>
-              <a:rPr lang="en-US" sz="572" dirty="0" err="1">
-                <a:solidFill>
-                  <a:prstClr val="black"/>
-                </a:solidFill>
-                <a:latin typeface="Arial" panose="020B0604020202020204" pitchFamily="34" charset="0"/>
-                <a:cs typeface="Arial" panose="020B0604020202020204" pitchFamily="34" charset="0"/>
-              </a:rPr>
-              <a:t>simusda</a:t>
-            </a:r>
-            <a:r>
-              <a:rPr lang="en-US" sz="572" dirty="0">
-                <a:solidFill>
-                  <a:prstClr val="black"/>
-                </a:solidFill>
-                <a:latin typeface="Arial" panose="020B0604020202020204" pitchFamily="34" charset="0"/>
-                <a:cs typeface="Arial" panose="020B0604020202020204" pitchFamily="34" charset="0"/>
-              </a:rPr>
-              <a:t> </a:t>
-            </a:r>
-            <a:r>
-              <a:rPr lang="en-US" sz="572" dirty="0" err="1">
-                <a:solidFill>
-                  <a:prstClr val="black"/>
-                </a:solidFill>
-                <a:latin typeface="Arial" panose="020B0604020202020204" pitchFamily="34" charset="0"/>
-                <a:cs typeface="Arial" panose="020B0604020202020204" pitchFamily="34" charset="0"/>
-              </a:rPr>
-              <a:t>ndanimus</a:t>
-            </a:r>
-            <a:r>
-              <a:rPr lang="en-US" sz="572" dirty="0">
-                <a:solidFill>
-                  <a:prstClr val="black"/>
-                </a:solidFill>
-                <a:latin typeface="Arial" panose="020B0604020202020204" pitchFamily="34" charset="0"/>
-                <a:cs typeface="Arial" panose="020B0604020202020204" pitchFamily="34" charset="0"/>
-              </a:rPr>
-              <a:t>, sin </a:t>
-            </a:r>
-            <a:r>
-              <a:rPr lang="en-US" sz="572" dirty="0" err="1">
-                <a:solidFill>
-                  <a:prstClr val="black"/>
-                </a:solidFill>
-                <a:latin typeface="Arial" panose="020B0604020202020204" pitchFamily="34" charset="0"/>
-                <a:cs typeface="Arial" panose="020B0604020202020204" pitchFamily="34" charset="0"/>
-              </a:rPr>
-              <a:t>cori</a:t>
-            </a:r>
-            <a:r>
-              <a:rPr lang="en-US" sz="572" dirty="0">
-                <a:solidFill>
-                  <a:prstClr val="black"/>
-                </a:solidFill>
-                <a:latin typeface="Arial" panose="020B0604020202020204" pitchFamily="34" charset="0"/>
-                <a:cs typeface="Arial" panose="020B0604020202020204" pitchFamily="34" charset="0"/>
-              </a:rPr>
-              <a:t> rem id </a:t>
-            </a:r>
-            <a:r>
-              <a:rPr lang="en-US" sz="572" dirty="0" err="1">
-                <a:solidFill>
-                  <a:prstClr val="black"/>
-                </a:solidFill>
-                <a:latin typeface="Arial" panose="020B0604020202020204" pitchFamily="34" charset="0"/>
-                <a:cs typeface="Arial" panose="020B0604020202020204" pitchFamily="34" charset="0"/>
-              </a:rPr>
-              <a:t>maximillut</a:t>
-            </a:r>
-            <a:r>
-              <a:rPr lang="en-US" sz="572" dirty="0">
-                <a:solidFill>
-                  <a:prstClr val="black"/>
-                </a:solidFill>
-                <a:latin typeface="Arial" panose="020B0604020202020204" pitchFamily="34" charset="0"/>
-                <a:cs typeface="Arial" panose="020B0604020202020204" pitchFamily="34" charset="0"/>
-              </a:rPr>
-              <a:t> </a:t>
-            </a:r>
-            <a:r>
-              <a:rPr lang="en-US" sz="572" dirty="0" err="1">
-                <a:solidFill>
-                  <a:prstClr val="black"/>
-                </a:solidFill>
-                <a:latin typeface="Arial" panose="020B0604020202020204" pitchFamily="34" charset="0"/>
-                <a:cs typeface="Arial" panose="020B0604020202020204" pitchFamily="34" charset="0"/>
-              </a:rPr>
-              <a:t>hari</a:t>
-            </a:r>
-            <a:r>
-              <a:rPr lang="en-US" sz="572" dirty="0">
-                <a:solidFill>
-                  <a:prstClr val="black"/>
-                </a:solidFill>
-                <a:latin typeface="Arial" panose="020B0604020202020204" pitchFamily="34" charset="0"/>
-                <a:cs typeface="Arial" panose="020B0604020202020204" pitchFamily="34" charset="0"/>
-              </a:rPr>
-              <a:t> con </a:t>
-            </a:r>
-            <a:r>
-              <a:rPr lang="en-US" sz="572" dirty="0" err="1">
-                <a:solidFill>
-                  <a:prstClr val="black"/>
-                </a:solidFill>
-                <a:latin typeface="Arial" panose="020B0604020202020204" pitchFamily="34" charset="0"/>
-                <a:cs typeface="Arial" panose="020B0604020202020204" pitchFamily="34" charset="0"/>
-              </a:rPr>
-              <a:t>ea</a:t>
-            </a:r>
-            <a:r>
-              <a:rPr lang="en-US" sz="572" dirty="0">
-                <a:solidFill>
-                  <a:prstClr val="black"/>
-                </a:solidFill>
-                <a:latin typeface="Arial" panose="020B0604020202020204" pitchFamily="34" charset="0"/>
-                <a:cs typeface="Arial" panose="020B0604020202020204" pitchFamily="34" charset="0"/>
-              </a:rPr>
-              <a:t> </a:t>
-            </a:r>
-            <a:r>
-              <a:rPr lang="en-US" sz="572" dirty="0" err="1">
-                <a:solidFill>
-                  <a:prstClr val="black"/>
-                </a:solidFill>
-                <a:latin typeface="Arial" panose="020B0604020202020204" pitchFamily="34" charset="0"/>
-                <a:cs typeface="Arial" panose="020B0604020202020204" pitchFamily="34" charset="0"/>
-              </a:rPr>
-              <a:t>quiam</a:t>
-            </a:r>
-            <a:r>
-              <a:rPr lang="en-US" sz="572" dirty="0">
-                <a:solidFill>
-                  <a:prstClr val="black"/>
-                </a:solidFill>
-                <a:latin typeface="Arial" panose="020B0604020202020204" pitchFamily="34" charset="0"/>
-                <a:cs typeface="Arial" panose="020B0604020202020204" pitchFamily="34" charset="0"/>
-              </a:rPr>
-              <a:t> </a:t>
-            </a:r>
-            <a:r>
-              <a:rPr lang="en-US" sz="572" dirty="0" err="1">
-                <a:solidFill>
-                  <a:prstClr val="black"/>
-                </a:solidFill>
-                <a:latin typeface="Arial" panose="020B0604020202020204" pitchFamily="34" charset="0"/>
-                <a:cs typeface="Arial" panose="020B0604020202020204" pitchFamily="34" charset="0"/>
-              </a:rPr>
-              <a:t>quam</a:t>
-            </a:r>
-            <a:r>
-              <a:rPr lang="en-US" sz="572" dirty="0">
-                <a:solidFill>
-                  <a:prstClr val="black"/>
-                </a:solidFill>
-                <a:latin typeface="Arial" panose="020B0604020202020204" pitchFamily="34" charset="0"/>
-                <a:cs typeface="Arial" panose="020B0604020202020204" pitchFamily="34" charset="0"/>
-              </a:rPr>
-              <a:t> et </a:t>
-            </a:r>
-            <a:r>
-              <a:rPr lang="en-US" sz="572" dirty="0" err="1">
-                <a:solidFill>
-                  <a:prstClr val="black"/>
-                </a:solidFill>
-                <a:latin typeface="Arial" panose="020B0604020202020204" pitchFamily="34" charset="0"/>
-                <a:cs typeface="Arial" panose="020B0604020202020204" pitchFamily="34" charset="0"/>
-              </a:rPr>
-              <a:t>enduci</a:t>
-            </a:r>
-            <a:r>
-              <a:rPr lang="en-US" sz="572" dirty="0">
-                <a:solidFill>
-                  <a:prstClr val="black"/>
-                </a:solidFill>
-                <a:latin typeface="Arial" panose="020B0604020202020204" pitchFamily="34" charset="0"/>
-                <a:cs typeface="Arial" panose="020B0604020202020204" pitchFamily="34" charset="0"/>
-              </a:rPr>
-              <a:t> </a:t>
-            </a:r>
-            <a:r>
-              <a:rPr lang="en-US" sz="572" dirty="0" err="1">
-                <a:solidFill>
-                  <a:prstClr val="black"/>
-                </a:solidFill>
-                <a:latin typeface="Arial" panose="020B0604020202020204" pitchFamily="34" charset="0"/>
-                <a:cs typeface="Arial" panose="020B0604020202020204" pitchFamily="34" charset="0"/>
-              </a:rPr>
-              <a:t>idunt</a:t>
-            </a:r>
-            <a:r>
-              <a:rPr lang="en-US" sz="572" dirty="0">
-                <a:solidFill>
-                  <a:prstClr val="black"/>
-                </a:solidFill>
-                <a:latin typeface="Arial" panose="020B0604020202020204" pitchFamily="34" charset="0"/>
-                <a:cs typeface="Arial" panose="020B0604020202020204" pitchFamily="34" charset="0"/>
-              </a:rPr>
-              <a:t>, </a:t>
-            </a:r>
-            <a:r>
-              <a:rPr lang="en-US" sz="572" dirty="0" err="1">
-                <a:solidFill>
-                  <a:prstClr val="black"/>
-                </a:solidFill>
-                <a:latin typeface="Arial" panose="020B0604020202020204" pitchFamily="34" charset="0"/>
-                <a:cs typeface="Arial" panose="020B0604020202020204" pitchFamily="34" charset="0"/>
-              </a:rPr>
-              <a:t>corecta</a:t>
-            </a:r>
-            <a:r>
-              <a:rPr lang="en-US" sz="572" dirty="0">
-                <a:solidFill>
-                  <a:prstClr val="black"/>
-                </a:solidFill>
-                <a:latin typeface="Arial" panose="020B0604020202020204" pitchFamily="34" charset="0"/>
-                <a:cs typeface="Arial" panose="020B0604020202020204" pitchFamily="34" charset="0"/>
-              </a:rPr>
-              <a:t> </a:t>
-            </a:r>
-            <a:r>
-              <a:rPr lang="en-US" sz="572" dirty="0" err="1">
-                <a:solidFill>
-                  <a:prstClr val="black"/>
-                </a:solidFill>
-                <a:latin typeface="Arial" panose="020B0604020202020204" pitchFamily="34" charset="0"/>
-                <a:cs typeface="Arial" panose="020B0604020202020204" pitchFamily="34" charset="0"/>
-              </a:rPr>
-              <a:t>alicimp</a:t>
-            </a:r>
-            <a:r>
-              <a:rPr lang="en-US" sz="572" dirty="0">
-                <a:solidFill>
-                  <a:prstClr val="black"/>
-                </a:solidFill>
-                <a:latin typeface="Arial" panose="020B0604020202020204" pitchFamily="34" charset="0"/>
-                <a:cs typeface="Arial" panose="020B0604020202020204" pitchFamily="34" charset="0"/>
-              </a:rPr>
-              <a:t> </a:t>
-            </a:r>
-            <a:r>
-              <a:rPr lang="en-US" sz="572" dirty="0" err="1">
-                <a:solidFill>
-                  <a:prstClr val="black"/>
-                </a:solidFill>
-                <a:latin typeface="Arial" panose="020B0604020202020204" pitchFamily="34" charset="0"/>
-                <a:cs typeface="Arial" panose="020B0604020202020204" pitchFamily="34" charset="0"/>
-              </a:rPr>
-              <a:t>oriaeperum</a:t>
-            </a:r>
-            <a:r>
-              <a:rPr lang="en-US" sz="572" dirty="0">
-                <a:solidFill>
-                  <a:prstClr val="black"/>
-                </a:solidFill>
-                <a:latin typeface="Arial" panose="020B0604020202020204" pitchFamily="34" charset="0"/>
-                <a:cs typeface="Arial" panose="020B0604020202020204" pitchFamily="34" charset="0"/>
-              </a:rPr>
-              <a:t> </a:t>
-            </a:r>
-            <a:r>
-              <a:rPr lang="en-US" sz="572" dirty="0" err="1">
-                <a:solidFill>
-                  <a:prstClr val="black"/>
-                </a:solidFill>
-                <a:latin typeface="Arial" panose="020B0604020202020204" pitchFamily="34" charset="0"/>
-                <a:cs typeface="Arial" panose="020B0604020202020204" pitchFamily="34" charset="0"/>
-              </a:rPr>
-              <a:t>iusaeped</a:t>
-            </a:r>
-            <a:r>
-              <a:rPr lang="en-US" sz="572" dirty="0">
-                <a:solidFill>
-                  <a:prstClr val="black"/>
-                </a:solidFill>
-                <a:latin typeface="Arial" panose="020B0604020202020204" pitchFamily="34" charset="0"/>
-                <a:cs typeface="Arial" panose="020B0604020202020204" pitchFamily="34" charset="0"/>
-              </a:rPr>
-              <a:t> </a:t>
-            </a:r>
-            <a:r>
-              <a:rPr lang="en-US" sz="572" dirty="0" err="1">
-                <a:solidFill>
-                  <a:prstClr val="black"/>
-                </a:solidFill>
-                <a:latin typeface="Arial" panose="020B0604020202020204" pitchFamily="34" charset="0"/>
-                <a:cs typeface="Arial" panose="020B0604020202020204" pitchFamily="34" charset="0"/>
-              </a:rPr>
-              <a:t>unt</a:t>
-            </a:r>
-            <a:r>
-              <a:rPr lang="en-US" sz="572" dirty="0">
-                <a:solidFill>
-                  <a:prstClr val="black"/>
-                </a:solidFill>
-                <a:latin typeface="Arial" panose="020B0604020202020204" pitchFamily="34" charset="0"/>
-                <a:cs typeface="Arial" panose="020B0604020202020204" pitchFamily="34" charset="0"/>
-              </a:rPr>
-              <a:t> </a:t>
-            </a:r>
-            <a:r>
-              <a:rPr lang="en-US" sz="572" dirty="0" err="1">
-                <a:solidFill>
-                  <a:prstClr val="black"/>
-                </a:solidFill>
-                <a:latin typeface="Arial" panose="020B0604020202020204" pitchFamily="34" charset="0"/>
-                <a:cs typeface="Arial" panose="020B0604020202020204" pitchFamily="34" charset="0"/>
-              </a:rPr>
-              <a:t>quis</a:t>
-            </a:r>
-            <a:r>
-              <a:rPr lang="en-US" sz="572" dirty="0">
-                <a:solidFill>
-                  <a:prstClr val="black"/>
-                </a:solidFill>
-                <a:latin typeface="Arial" panose="020B0604020202020204" pitchFamily="34" charset="0"/>
-                <a:cs typeface="Arial" panose="020B0604020202020204" pitchFamily="34" charset="0"/>
-              </a:rPr>
-              <a:t> et </a:t>
-            </a:r>
-            <a:r>
-              <a:rPr lang="en-US" sz="572" dirty="0" err="1">
-                <a:solidFill>
-                  <a:prstClr val="black"/>
-                </a:solidFill>
-                <a:latin typeface="Arial" panose="020B0604020202020204" pitchFamily="34" charset="0"/>
-                <a:cs typeface="Arial" panose="020B0604020202020204" pitchFamily="34" charset="0"/>
-              </a:rPr>
-              <a:t>ut</a:t>
-            </a:r>
-            <a:r>
-              <a:rPr lang="en-US" sz="572" dirty="0">
-                <a:solidFill>
-                  <a:prstClr val="black"/>
-                </a:solidFill>
-                <a:latin typeface="Arial" panose="020B0604020202020204" pitchFamily="34" charset="0"/>
-                <a:cs typeface="Arial" panose="020B0604020202020204" pitchFamily="34" charset="0"/>
-              </a:rPr>
-              <a:t> </a:t>
-            </a:r>
-            <a:r>
-              <a:rPr lang="en-US" sz="572" dirty="0" err="1">
-                <a:solidFill>
-                  <a:prstClr val="black"/>
-                </a:solidFill>
-                <a:latin typeface="Arial" panose="020B0604020202020204" pitchFamily="34" charset="0"/>
-                <a:cs typeface="Arial" panose="020B0604020202020204" pitchFamily="34" charset="0"/>
-              </a:rPr>
-              <a:t>abor</a:t>
-            </a:r>
-            <a:r>
-              <a:rPr lang="en-US" sz="572" dirty="0">
-                <a:solidFill>
-                  <a:prstClr val="black"/>
-                </a:solidFill>
-                <a:latin typeface="Arial" panose="020B0604020202020204" pitchFamily="34" charset="0"/>
-                <a:cs typeface="Arial" panose="020B0604020202020204" pitchFamily="34" charset="0"/>
-              </a:rPr>
-              <a:t> </a:t>
-            </a:r>
-            <a:r>
-              <a:rPr lang="en-US" sz="572" dirty="0" err="1">
-                <a:solidFill>
-                  <a:prstClr val="black"/>
-                </a:solidFill>
-                <a:latin typeface="Arial" panose="020B0604020202020204" pitchFamily="34" charset="0"/>
-                <a:cs typeface="Arial" panose="020B0604020202020204" pitchFamily="34" charset="0"/>
-              </a:rPr>
-              <a:t>ame</a:t>
-            </a:r>
-            <a:r>
-              <a:rPr lang="en-US" sz="572" dirty="0">
-                <a:solidFill>
-                  <a:prstClr val="black"/>
-                </a:solidFill>
-                <a:latin typeface="Arial" panose="020B0604020202020204" pitchFamily="34" charset="0"/>
-                <a:cs typeface="Arial" panose="020B0604020202020204" pitchFamily="34" charset="0"/>
-              </a:rPr>
-              <a:t> </a:t>
-            </a:r>
-            <a:r>
-              <a:rPr lang="en-US" sz="572" dirty="0" err="1">
-                <a:solidFill>
-                  <a:prstClr val="black"/>
-                </a:solidFill>
-                <a:latin typeface="Arial" panose="020B0604020202020204" pitchFamily="34" charset="0"/>
-                <a:cs typeface="Arial" panose="020B0604020202020204" pitchFamily="34" charset="0"/>
-              </a:rPr>
-              <a:t>alis</a:t>
-            </a:r>
-            <a:r>
-              <a:rPr lang="en-US" sz="572" dirty="0">
-                <a:solidFill>
-                  <a:prstClr val="black"/>
-                </a:solidFill>
-                <a:latin typeface="Arial" panose="020B0604020202020204" pitchFamily="34" charset="0"/>
-                <a:cs typeface="Arial" panose="020B0604020202020204" pitchFamily="34" charset="0"/>
-              </a:rPr>
-              <a:t> </a:t>
-            </a:r>
-            <a:r>
-              <a:rPr lang="en-US" sz="572" dirty="0" err="1">
-                <a:solidFill>
-                  <a:prstClr val="black"/>
-                </a:solidFill>
-                <a:latin typeface="Arial" panose="020B0604020202020204" pitchFamily="34" charset="0"/>
-                <a:cs typeface="Arial" panose="020B0604020202020204" pitchFamily="34" charset="0"/>
-              </a:rPr>
-              <a:t>utatur</a:t>
-            </a:r>
-            <a:r>
-              <a:rPr lang="en-US" sz="572" dirty="0">
-                <a:solidFill>
-                  <a:prstClr val="black"/>
-                </a:solidFill>
-                <a:latin typeface="Arial" panose="020B0604020202020204" pitchFamily="34" charset="0"/>
-                <a:cs typeface="Arial" panose="020B0604020202020204" pitchFamily="34" charset="0"/>
-              </a:rPr>
-              <a:t> as </a:t>
-            </a:r>
-            <a:r>
-              <a:rPr lang="en-US" sz="572" dirty="0" err="1">
-                <a:solidFill>
-                  <a:prstClr val="black"/>
-                </a:solidFill>
-                <a:latin typeface="Arial" panose="020B0604020202020204" pitchFamily="34" charset="0"/>
-                <a:cs typeface="Arial" panose="020B0604020202020204" pitchFamily="34" charset="0"/>
-              </a:rPr>
-              <a:t>senet</a:t>
-            </a:r>
-            <a:r>
-              <a:rPr lang="en-US" sz="572" dirty="0">
-                <a:solidFill>
-                  <a:prstClr val="black"/>
-                </a:solidFill>
-                <a:latin typeface="Arial" panose="020B0604020202020204" pitchFamily="34" charset="0"/>
-                <a:cs typeface="Arial" panose="020B0604020202020204" pitchFamily="34" charset="0"/>
-              </a:rPr>
-              <a:t> a </a:t>
-            </a:r>
-            <a:r>
-              <a:rPr lang="en-US" sz="572" dirty="0" err="1">
-                <a:solidFill>
-                  <a:prstClr val="black"/>
-                </a:solidFill>
-                <a:latin typeface="Arial" panose="020B0604020202020204" pitchFamily="34" charset="0"/>
-                <a:cs typeface="Arial" panose="020B0604020202020204" pitchFamily="34" charset="0"/>
-              </a:rPr>
-              <a:t>quibus</a:t>
-            </a:r>
-            <a:r>
-              <a:rPr lang="en-US" sz="572" dirty="0">
-                <a:solidFill>
-                  <a:prstClr val="black"/>
-                </a:solidFill>
-                <a:latin typeface="Arial" panose="020B0604020202020204" pitchFamily="34" charset="0"/>
-                <a:cs typeface="Arial" panose="020B0604020202020204" pitchFamily="34" charset="0"/>
-              </a:rPr>
-              <a:t> </a:t>
-            </a:r>
-            <a:r>
-              <a:rPr lang="en-US" sz="572" dirty="0" err="1">
-                <a:solidFill>
-                  <a:prstClr val="black"/>
-                </a:solidFill>
-                <a:latin typeface="Arial" panose="020B0604020202020204" pitchFamily="34" charset="0"/>
-                <a:cs typeface="Arial" panose="020B0604020202020204" pitchFamily="34" charset="0"/>
-              </a:rPr>
-              <a:t>dolutatur</a:t>
-            </a:r>
-            <a:r>
-              <a:rPr lang="en-US" sz="572" dirty="0">
-                <a:solidFill>
-                  <a:prstClr val="black"/>
-                </a:solidFill>
-                <a:latin typeface="Arial" panose="020B0604020202020204" pitchFamily="34" charset="0"/>
-                <a:cs typeface="Arial" panose="020B0604020202020204" pitchFamily="34" charset="0"/>
-              </a:rPr>
-              <a:t> </a:t>
-            </a:r>
-            <a:r>
-              <a:rPr lang="en-US" sz="572" dirty="0" err="1">
-                <a:solidFill>
-                  <a:prstClr val="black"/>
-                </a:solidFill>
-                <a:latin typeface="Arial" panose="020B0604020202020204" pitchFamily="34" charset="0"/>
-                <a:cs typeface="Arial" panose="020B0604020202020204" pitchFamily="34" charset="0"/>
-              </a:rPr>
-              <a:t>sedit</a:t>
-            </a:r>
-            <a:r>
-              <a:rPr lang="en-US" sz="572" dirty="0">
-                <a:solidFill>
-                  <a:prstClr val="black"/>
-                </a:solidFill>
-                <a:latin typeface="Arial" panose="020B0604020202020204" pitchFamily="34" charset="0"/>
-                <a:cs typeface="Arial" panose="020B0604020202020204" pitchFamily="34" charset="0"/>
-              </a:rPr>
-              <a:t> </a:t>
-            </a:r>
-            <a:r>
-              <a:rPr lang="en-US" sz="572" dirty="0" err="1">
-                <a:solidFill>
-                  <a:prstClr val="black"/>
-                </a:solidFill>
-                <a:latin typeface="Arial" panose="020B0604020202020204" pitchFamily="34" charset="0"/>
-                <a:cs typeface="Arial" panose="020B0604020202020204" pitchFamily="34" charset="0"/>
-              </a:rPr>
-              <a:t>aliam</a:t>
-            </a:r>
-            <a:r>
-              <a:rPr lang="en-US" sz="572" dirty="0">
-                <a:solidFill>
-                  <a:prstClr val="black"/>
-                </a:solidFill>
-                <a:latin typeface="Arial" panose="020B0604020202020204" pitchFamily="34" charset="0"/>
-                <a:cs typeface="Arial" panose="020B0604020202020204" pitchFamily="34" charset="0"/>
-              </a:rPr>
-              <a:t> </a:t>
-            </a:r>
-            <a:r>
-              <a:rPr lang="en-US" sz="572" dirty="0" err="1">
-                <a:solidFill>
-                  <a:prstClr val="black"/>
-                </a:solidFill>
-                <a:latin typeface="Arial" panose="020B0604020202020204" pitchFamily="34" charset="0"/>
-                <a:cs typeface="Arial" panose="020B0604020202020204" pitchFamily="34" charset="0"/>
-              </a:rPr>
-              <a:t>apienda</a:t>
-            </a:r>
-            <a:r>
-              <a:rPr lang="en-US" sz="572" dirty="0">
-                <a:solidFill>
-                  <a:prstClr val="black"/>
-                </a:solidFill>
-                <a:latin typeface="Arial" panose="020B0604020202020204" pitchFamily="34" charset="0"/>
-                <a:cs typeface="Arial" panose="020B0604020202020204" pitchFamily="34" charset="0"/>
-              </a:rPr>
-              <a:t> </a:t>
-            </a:r>
-            <a:r>
-              <a:rPr lang="en-US" sz="572" dirty="0" err="1">
-                <a:solidFill>
-                  <a:prstClr val="black"/>
-                </a:solidFill>
-                <a:latin typeface="Arial" panose="020B0604020202020204" pitchFamily="34" charset="0"/>
-                <a:cs typeface="Arial" panose="020B0604020202020204" pitchFamily="34" charset="0"/>
-              </a:rPr>
-              <a:t>versper</a:t>
-            </a:r>
-            <a:r>
-              <a:rPr lang="en-US" sz="572" dirty="0">
-                <a:solidFill>
-                  <a:prstClr val="black"/>
-                </a:solidFill>
-                <a:latin typeface="Arial" panose="020B0604020202020204" pitchFamily="34" charset="0"/>
-                <a:cs typeface="Arial" panose="020B0604020202020204" pitchFamily="34" charset="0"/>
-              </a:rPr>
-              <a:t> </a:t>
-            </a:r>
-            <a:r>
-              <a:rPr lang="en-US" sz="572" dirty="0" err="1">
-                <a:solidFill>
-                  <a:prstClr val="black"/>
-                </a:solidFill>
-                <a:latin typeface="Arial" panose="020B0604020202020204" pitchFamily="34" charset="0"/>
-                <a:cs typeface="Arial" panose="020B0604020202020204" pitchFamily="34" charset="0"/>
-              </a:rPr>
-              <a:t>feriti</a:t>
-            </a:r>
-            <a:r>
-              <a:rPr lang="en-US" sz="572" dirty="0">
-                <a:solidFill>
-                  <a:prstClr val="black"/>
-                </a:solidFill>
-                <a:latin typeface="Arial" panose="020B0604020202020204" pitchFamily="34" charset="0"/>
-                <a:cs typeface="Arial" panose="020B0604020202020204" pitchFamily="34" charset="0"/>
-              </a:rPr>
-              <a:t> </a:t>
-            </a:r>
-            <a:r>
-              <a:rPr lang="en-US" sz="572" dirty="0" err="1">
-                <a:solidFill>
-                  <a:prstClr val="black"/>
-                </a:solidFill>
-                <a:latin typeface="Arial" panose="020B0604020202020204" pitchFamily="34" charset="0"/>
-                <a:cs typeface="Arial" panose="020B0604020202020204" pitchFamily="34" charset="0"/>
-              </a:rPr>
-              <a:t>delia</a:t>
-            </a:r>
-            <a:r>
-              <a:rPr lang="en-US" sz="572" dirty="0">
-                <a:solidFill>
-                  <a:prstClr val="black"/>
-                </a:solidFill>
-                <a:latin typeface="Arial" panose="020B0604020202020204" pitchFamily="34" charset="0"/>
-                <a:cs typeface="Arial" panose="020B0604020202020204" pitchFamily="34" charset="0"/>
-              </a:rPr>
-              <a:t> pa </a:t>
-            </a:r>
-            <a:r>
-              <a:rPr lang="en-US" sz="572" dirty="0" err="1">
-                <a:solidFill>
-                  <a:prstClr val="black"/>
-                </a:solidFill>
-                <a:latin typeface="Arial" panose="020B0604020202020204" pitchFamily="34" charset="0"/>
-                <a:cs typeface="Arial" panose="020B0604020202020204" pitchFamily="34" charset="0"/>
-              </a:rPr>
-              <a:t>dolo</a:t>
-            </a:r>
-            <a:r>
-              <a:rPr lang="en-US" sz="572" dirty="0">
-                <a:solidFill>
-                  <a:prstClr val="black"/>
-                </a:solidFill>
-                <a:latin typeface="Arial" panose="020B0604020202020204" pitchFamily="34" charset="0"/>
-                <a:cs typeface="Arial" panose="020B0604020202020204" pitchFamily="34" charset="0"/>
-              </a:rPr>
-              <a:t> </a:t>
-            </a:r>
-            <a:r>
-              <a:rPr lang="en-US" sz="572" dirty="0" err="1">
-                <a:solidFill>
-                  <a:prstClr val="black"/>
-                </a:solidFill>
-                <a:latin typeface="Arial" panose="020B0604020202020204" pitchFamily="34" charset="0"/>
-                <a:cs typeface="Arial" panose="020B0604020202020204" pitchFamily="34" charset="0"/>
-              </a:rPr>
-              <a:t>quamus</a:t>
-            </a:r>
-            <a:r>
-              <a:rPr lang="en-US" sz="572" dirty="0">
-                <a:solidFill>
-                  <a:prstClr val="black"/>
-                </a:solidFill>
-                <a:latin typeface="Arial" panose="020B0604020202020204" pitchFamily="34" charset="0"/>
-                <a:cs typeface="Arial" panose="020B0604020202020204" pitchFamily="34" charset="0"/>
-              </a:rPr>
-              <a:t> arum </a:t>
-            </a:r>
-            <a:r>
-              <a:rPr lang="en-US" sz="572" dirty="0" err="1">
-                <a:solidFill>
-                  <a:prstClr val="black"/>
-                </a:solidFill>
-                <a:latin typeface="Arial" panose="020B0604020202020204" pitchFamily="34" charset="0"/>
-                <a:cs typeface="Arial" panose="020B0604020202020204" pitchFamily="34" charset="0"/>
-              </a:rPr>
-              <a:t>es</a:t>
-            </a:r>
-            <a:r>
-              <a:rPr lang="en-US" sz="572" dirty="0">
-                <a:solidFill>
-                  <a:prstClr val="black"/>
-                </a:solidFill>
-                <a:latin typeface="Arial" panose="020B0604020202020204" pitchFamily="34" charset="0"/>
-                <a:cs typeface="Arial" panose="020B0604020202020204" pitchFamily="34" charset="0"/>
-              </a:rPr>
-              <a:t> </a:t>
-            </a:r>
-            <a:r>
-              <a:rPr lang="en-US" sz="572" dirty="0" err="1">
-                <a:solidFill>
-                  <a:prstClr val="black"/>
-                </a:solidFill>
-                <a:latin typeface="Arial" panose="020B0604020202020204" pitchFamily="34" charset="0"/>
-                <a:cs typeface="Arial" panose="020B0604020202020204" pitchFamily="34" charset="0"/>
-              </a:rPr>
-              <a:t>endellu</a:t>
-            </a:r>
-            <a:r>
-              <a:rPr lang="en-US" sz="572" dirty="0">
-                <a:solidFill>
-                  <a:prstClr val="black"/>
-                </a:solidFill>
-                <a:latin typeface="Arial" panose="020B0604020202020204" pitchFamily="34" charset="0"/>
-                <a:cs typeface="Arial" panose="020B0604020202020204" pitchFamily="34" charset="0"/>
-              </a:rPr>
-              <a:t> </a:t>
-            </a:r>
-            <a:r>
-              <a:rPr lang="en-US" sz="572" dirty="0" err="1">
-                <a:solidFill>
-                  <a:prstClr val="black"/>
-                </a:solidFill>
-                <a:latin typeface="Arial" panose="020B0604020202020204" pitchFamily="34" charset="0"/>
-                <a:cs typeface="Arial" panose="020B0604020202020204" pitchFamily="34" charset="0"/>
-              </a:rPr>
-              <a:t>pisquia</a:t>
-            </a:r>
-            <a:r>
-              <a:rPr lang="en-US" sz="572" dirty="0">
-                <a:solidFill>
-                  <a:prstClr val="black"/>
-                </a:solidFill>
-                <a:latin typeface="Arial" panose="020B0604020202020204" pitchFamily="34" charset="0"/>
-                <a:cs typeface="Arial" panose="020B0604020202020204" pitchFamily="34" charset="0"/>
-              </a:rPr>
-              <a:t> </a:t>
-            </a:r>
-            <a:r>
-              <a:rPr lang="en-US" sz="572" dirty="0" err="1">
-                <a:solidFill>
-                  <a:prstClr val="black"/>
-                </a:solidFill>
-                <a:latin typeface="Arial" panose="020B0604020202020204" pitchFamily="34" charset="0"/>
-                <a:cs typeface="Arial" panose="020B0604020202020204" pitchFamily="34" charset="0"/>
-              </a:rPr>
-              <a:t>aditatur</a:t>
-            </a:r>
-            <a:r>
-              <a:rPr lang="en-US" sz="572" dirty="0">
-                <a:solidFill>
-                  <a:prstClr val="black"/>
-                </a:solidFill>
-                <a:latin typeface="Arial" panose="020B0604020202020204" pitchFamily="34" charset="0"/>
-                <a:cs typeface="Arial" panose="020B0604020202020204" pitchFamily="34" charset="0"/>
-              </a:rPr>
-              <a:t> </a:t>
-            </a:r>
-            <a:r>
-              <a:rPr lang="en-US" sz="572" dirty="0" err="1">
-                <a:solidFill>
-                  <a:prstClr val="black"/>
-                </a:solidFill>
-                <a:latin typeface="Arial" panose="020B0604020202020204" pitchFamily="34" charset="0"/>
-                <a:cs typeface="Arial" panose="020B0604020202020204" pitchFamily="34" charset="0"/>
-              </a:rPr>
-              <a:t>audam</a:t>
-            </a:r>
-            <a:r>
-              <a:rPr lang="en-US" sz="572" dirty="0">
-                <a:solidFill>
-                  <a:prstClr val="black"/>
-                </a:solidFill>
-                <a:latin typeface="Arial" panose="020B0604020202020204" pitchFamily="34" charset="0"/>
-                <a:cs typeface="Arial" panose="020B0604020202020204" pitchFamily="34" charset="0"/>
-              </a:rPr>
-              <a:t> </a:t>
-            </a:r>
-            <a:r>
-              <a:rPr lang="en-US" sz="572" dirty="0" err="1">
-                <a:solidFill>
-                  <a:prstClr val="black"/>
-                </a:solidFill>
-                <a:latin typeface="Arial" panose="020B0604020202020204" pitchFamily="34" charset="0"/>
-                <a:cs typeface="Arial" panose="020B0604020202020204" pitchFamily="34" charset="0"/>
-              </a:rPr>
-              <a:t>earupid</a:t>
-            </a:r>
-            <a:r>
-              <a:rPr lang="en-US" sz="572" dirty="0">
-                <a:solidFill>
-                  <a:prstClr val="black"/>
-                </a:solidFill>
-                <a:latin typeface="Arial" panose="020B0604020202020204" pitchFamily="34" charset="0"/>
-                <a:cs typeface="Arial" panose="020B0604020202020204" pitchFamily="34" charset="0"/>
-              </a:rPr>
-              <a:t> quo </a:t>
-            </a:r>
-            <a:r>
-              <a:rPr lang="en-US" sz="572" dirty="0" err="1">
-                <a:solidFill>
-                  <a:prstClr val="black"/>
-                </a:solidFill>
-                <a:latin typeface="Arial" panose="020B0604020202020204" pitchFamily="34" charset="0"/>
-                <a:cs typeface="Arial" panose="020B0604020202020204" pitchFamily="34" charset="0"/>
-              </a:rPr>
-              <a:t>quunt</a:t>
-            </a:r>
-            <a:r>
-              <a:rPr lang="en-US" sz="572" dirty="0">
-                <a:solidFill>
-                  <a:prstClr val="black"/>
-                </a:solidFill>
-                <a:latin typeface="Arial" panose="020B0604020202020204" pitchFamily="34" charset="0"/>
-                <a:cs typeface="Arial" panose="020B0604020202020204" pitchFamily="34" charset="0"/>
-              </a:rPr>
-              <a:t> </a:t>
-            </a:r>
-            <a:r>
-              <a:rPr lang="en-US" sz="572" dirty="0" err="1">
-                <a:solidFill>
-                  <a:prstClr val="black"/>
-                </a:solidFill>
-                <a:latin typeface="Arial" panose="020B0604020202020204" pitchFamily="34" charset="0"/>
-                <a:cs typeface="Arial" panose="020B0604020202020204" pitchFamily="34" charset="0"/>
-              </a:rPr>
-              <a:t>odigniscil</a:t>
-            </a:r>
-            <a:r>
-              <a:rPr lang="en-US" sz="572" dirty="0">
-                <a:solidFill>
-                  <a:prstClr val="black"/>
-                </a:solidFill>
-                <a:latin typeface="Arial" panose="020B0604020202020204" pitchFamily="34" charset="0"/>
-                <a:cs typeface="Arial" panose="020B0604020202020204" pitchFamily="34" charset="0"/>
-              </a:rPr>
-              <a:t> </a:t>
-            </a:r>
-            <a:r>
-              <a:rPr lang="en-US" sz="572" dirty="0" err="1">
-                <a:solidFill>
-                  <a:prstClr val="black"/>
-                </a:solidFill>
-                <a:latin typeface="Arial" panose="020B0604020202020204" pitchFamily="34" charset="0"/>
-                <a:cs typeface="Arial" panose="020B0604020202020204" pitchFamily="34" charset="0"/>
-              </a:rPr>
-              <a:t>earum</a:t>
-            </a:r>
-            <a:r>
-              <a:rPr lang="en-US" sz="572" dirty="0">
-                <a:solidFill>
-                  <a:prstClr val="black"/>
-                </a:solidFill>
-                <a:latin typeface="Arial" panose="020B0604020202020204" pitchFamily="34" charset="0"/>
-                <a:cs typeface="Arial" panose="020B0604020202020204" pitchFamily="34" charset="0"/>
-              </a:rPr>
-              <a:t> </a:t>
-            </a:r>
-            <a:r>
-              <a:rPr lang="en-US" sz="572" dirty="0" err="1">
-                <a:solidFill>
-                  <a:prstClr val="black"/>
-                </a:solidFill>
-                <a:latin typeface="Arial" panose="020B0604020202020204" pitchFamily="34" charset="0"/>
-                <a:cs typeface="Arial" panose="020B0604020202020204" pitchFamily="34" charset="0"/>
-              </a:rPr>
-              <a:t>verios</a:t>
-            </a:r>
-            <a:r>
-              <a:rPr lang="en-US" sz="572" dirty="0">
-                <a:solidFill>
-                  <a:prstClr val="black"/>
-                </a:solidFill>
-                <a:latin typeface="Arial" panose="020B0604020202020204" pitchFamily="34" charset="0"/>
-                <a:cs typeface="Arial" panose="020B0604020202020204" pitchFamily="34" charset="0"/>
-              </a:rPr>
-              <a:t> </a:t>
-            </a:r>
-            <a:r>
-              <a:rPr lang="en-US" sz="572" dirty="0" err="1">
-                <a:solidFill>
-                  <a:prstClr val="black"/>
-                </a:solidFill>
-                <a:latin typeface="Arial" panose="020B0604020202020204" pitchFamily="34" charset="0"/>
-                <a:cs typeface="Arial" panose="020B0604020202020204" pitchFamily="34" charset="0"/>
-              </a:rPr>
-              <a:t>nonsequam</a:t>
-            </a:r>
-            <a:r>
-              <a:rPr lang="en-US" sz="572" dirty="0">
-                <a:solidFill>
-                  <a:prstClr val="black"/>
-                </a:solidFill>
-                <a:latin typeface="Arial" panose="020B0604020202020204" pitchFamily="34" charset="0"/>
-                <a:cs typeface="Arial" panose="020B0604020202020204" pitchFamily="34" charset="0"/>
-              </a:rPr>
-              <a:t> </a:t>
-            </a:r>
-            <a:r>
-              <a:rPr lang="en-US" sz="572" dirty="0" err="1">
-                <a:solidFill>
-                  <a:prstClr val="black"/>
-                </a:solidFill>
-                <a:latin typeface="Arial" panose="020B0604020202020204" pitchFamily="34" charset="0"/>
-                <a:cs typeface="Arial" panose="020B0604020202020204" pitchFamily="34" charset="0"/>
-              </a:rPr>
-              <a:t>duciis</a:t>
-            </a:r>
-            <a:r>
-              <a:rPr lang="en-US" sz="572" dirty="0">
-                <a:solidFill>
-                  <a:prstClr val="black"/>
-                </a:solidFill>
-                <a:latin typeface="Arial" panose="020B0604020202020204" pitchFamily="34" charset="0"/>
-                <a:cs typeface="Arial" panose="020B0604020202020204" pitchFamily="34" charset="0"/>
-              </a:rPr>
-              <a:t> et </a:t>
-            </a:r>
-            <a:r>
-              <a:rPr lang="en-US" sz="572" dirty="0" err="1">
-                <a:solidFill>
-                  <a:prstClr val="black"/>
-                </a:solidFill>
-                <a:latin typeface="Arial" panose="020B0604020202020204" pitchFamily="34" charset="0"/>
-                <a:cs typeface="Arial" panose="020B0604020202020204" pitchFamily="34" charset="0"/>
-              </a:rPr>
-              <a:t>apienda</a:t>
-            </a:r>
-            <a:r>
-              <a:rPr lang="en-US" sz="572" dirty="0">
-                <a:solidFill>
-                  <a:prstClr val="black"/>
-                </a:solidFill>
-                <a:latin typeface="Arial" panose="020B0604020202020204" pitchFamily="34" charset="0"/>
-                <a:cs typeface="Arial" panose="020B0604020202020204" pitchFamily="34" charset="0"/>
-              </a:rPr>
-              <a:t> </a:t>
-            </a:r>
-            <a:r>
-              <a:rPr lang="en-US" sz="572" dirty="0" err="1">
-                <a:solidFill>
-                  <a:prstClr val="black"/>
-                </a:solidFill>
-                <a:latin typeface="Arial" panose="020B0604020202020204" pitchFamily="34" charset="0"/>
-                <a:cs typeface="Arial" panose="020B0604020202020204" pitchFamily="34" charset="0"/>
-              </a:rPr>
-              <a:t>versper</a:t>
-            </a:r>
-            <a:r>
-              <a:rPr lang="en-US" sz="572" dirty="0">
-                <a:solidFill>
-                  <a:prstClr val="black"/>
-                </a:solidFill>
-                <a:latin typeface="Arial" panose="020B0604020202020204" pitchFamily="34" charset="0"/>
-                <a:cs typeface="Arial" panose="020B0604020202020204" pitchFamily="34" charset="0"/>
-              </a:rPr>
-              <a:t> </a:t>
-            </a:r>
-            <a:r>
-              <a:rPr lang="en-US" sz="572" dirty="0" err="1">
-                <a:solidFill>
-                  <a:prstClr val="black"/>
-                </a:solidFill>
-                <a:latin typeface="Arial" panose="020B0604020202020204" pitchFamily="34" charset="0"/>
-                <a:cs typeface="Arial" panose="020B0604020202020204" pitchFamily="34" charset="0"/>
-              </a:rPr>
-              <a:t>feriti</a:t>
-            </a:r>
-            <a:r>
-              <a:rPr lang="en-US" sz="572" dirty="0">
-                <a:solidFill>
-                  <a:prstClr val="black"/>
-                </a:solidFill>
-                <a:latin typeface="Arial" panose="020B0604020202020204" pitchFamily="34" charset="0"/>
-                <a:cs typeface="Arial" panose="020B0604020202020204" pitchFamily="34" charset="0"/>
-              </a:rPr>
-              <a:t> </a:t>
-            </a:r>
-            <a:r>
-              <a:rPr lang="en-US" sz="572" dirty="0" err="1">
-                <a:solidFill>
-                  <a:prstClr val="black"/>
-                </a:solidFill>
-                <a:latin typeface="Arial" panose="020B0604020202020204" pitchFamily="34" charset="0"/>
-                <a:cs typeface="Arial" panose="020B0604020202020204" pitchFamily="34" charset="0"/>
-              </a:rPr>
-              <a:t>delia</a:t>
-            </a:r>
-            <a:r>
-              <a:rPr lang="en-US" sz="572" dirty="0">
-                <a:solidFill>
-                  <a:prstClr val="black"/>
-                </a:solidFill>
-                <a:latin typeface="Arial" panose="020B0604020202020204" pitchFamily="34" charset="0"/>
-                <a:cs typeface="Arial" panose="020B0604020202020204" pitchFamily="34" charset="0"/>
-              </a:rPr>
-              <a:t> pa </a:t>
-            </a:r>
-            <a:r>
-              <a:rPr lang="en-US" sz="572" dirty="0" err="1">
-                <a:solidFill>
-                  <a:prstClr val="black"/>
-                </a:solidFill>
-                <a:latin typeface="Arial" panose="020B0604020202020204" pitchFamily="34" charset="0"/>
-                <a:cs typeface="Arial" panose="020B0604020202020204" pitchFamily="34" charset="0"/>
-              </a:rPr>
-              <a:t>dolo</a:t>
-            </a:r>
-            <a:r>
-              <a:rPr lang="en-US" sz="572" dirty="0">
-                <a:solidFill>
-                  <a:prstClr val="black"/>
-                </a:solidFill>
-                <a:latin typeface="Arial" panose="020B0604020202020204" pitchFamily="34" charset="0"/>
-                <a:cs typeface="Arial" panose="020B0604020202020204" pitchFamily="34" charset="0"/>
-              </a:rPr>
-              <a:t> </a:t>
-            </a:r>
-            <a:r>
-              <a:rPr lang="en-US" sz="572" dirty="0" err="1">
-                <a:solidFill>
-                  <a:prstClr val="black"/>
-                </a:solidFill>
-                <a:latin typeface="Arial" panose="020B0604020202020204" pitchFamily="34" charset="0"/>
-                <a:cs typeface="Arial" panose="020B0604020202020204" pitchFamily="34" charset="0"/>
-              </a:rPr>
-              <a:t>quamus</a:t>
-            </a:r>
-            <a:r>
-              <a:rPr lang="en-US" sz="572" dirty="0">
-                <a:solidFill>
-                  <a:prstClr val="black"/>
-                </a:solidFill>
-                <a:latin typeface="Arial" panose="020B0604020202020204" pitchFamily="34" charset="0"/>
-                <a:cs typeface="Arial" panose="020B0604020202020204" pitchFamily="34" charset="0"/>
-              </a:rPr>
-              <a:t> arum </a:t>
-            </a:r>
-            <a:r>
-              <a:rPr lang="en-US" sz="572" dirty="0" err="1">
-                <a:solidFill>
-                  <a:prstClr val="black"/>
-                </a:solidFill>
-                <a:latin typeface="Arial" panose="020B0604020202020204" pitchFamily="34" charset="0"/>
-                <a:cs typeface="Arial" panose="020B0604020202020204" pitchFamily="34" charset="0"/>
-              </a:rPr>
-              <a:t>es</a:t>
-            </a:r>
-            <a:r>
-              <a:rPr lang="en-US" sz="572" dirty="0">
-                <a:solidFill>
-                  <a:prstClr val="black"/>
-                </a:solidFill>
-                <a:latin typeface="Arial" panose="020B0604020202020204" pitchFamily="34" charset="0"/>
-                <a:cs typeface="Arial" panose="020B0604020202020204" pitchFamily="34" charset="0"/>
-              </a:rPr>
-              <a:t> </a:t>
-            </a:r>
-            <a:r>
-              <a:rPr lang="en-US" sz="572" dirty="0" err="1">
-                <a:solidFill>
-                  <a:prstClr val="black"/>
-                </a:solidFill>
-                <a:latin typeface="Arial" panose="020B0604020202020204" pitchFamily="34" charset="0"/>
-                <a:cs typeface="Arial" panose="020B0604020202020204" pitchFamily="34" charset="0"/>
-              </a:rPr>
-              <a:t>endellu</a:t>
-            </a:r>
-            <a:r>
-              <a:rPr lang="en-US" sz="572" dirty="0">
-                <a:solidFill>
-                  <a:prstClr val="black"/>
-                </a:solidFill>
-                <a:latin typeface="Arial" panose="020B0604020202020204" pitchFamily="34" charset="0"/>
-                <a:cs typeface="Arial" panose="020B0604020202020204" pitchFamily="34" charset="0"/>
-              </a:rPr>
-              <a:t> </a:t>
-            </a:r>
-            <a:r>
-              <a:rPr lang="en-US" sz="572" dirty="0" err="1">
-                <a:solidFill>
-                  <a:prstClr val="black"/>
-                </a:solidFill>
-                <a:latin typeface="Arial" panose="020B0604020202020204" pitchFamily="34" charset="0"/>
-                <a:cs typeface="Arial" panose="020B0604020202020204" pitchFamily="34" charset="0"/>
-              </a:rPr>
-              <a:t>pisquia</a:t>
-            </a:r>
-            <a:r>
-              <a:rPr lang="en-US" sz="572" dirty="0">
-                <a:solidFill>
-                  <a:prstClr val="black"/>
-                </a:solidFill>
-                <a:latin typeface="Arial" panose="020B0604020202020204" pitchFamily="34" charset="0"/>
-                <a:cs typeface="Arial" panose="020B0604020202020204" pitchFamily="34" charset="0"/>
-              </a:rPr>
-              <a:t> </a:t>
-            </a:r>
-            <a:r>
-              <a:rPr lang="en-US" sz="572" dirty="0" err="1">
-                <a:solidFill>
-                  <a:prstClr val="black"/>
-                </a:solidFill>
-                <a:latin typeface="Arial" panose="020B0604020202020204" pitchFamily="34" charset="0"/>
-                <a:cs typeface="Arial" panose="020B0604020202020204" pitchFamily="34" charset="0"/>
-              </a:rPr>
-              <a:t>aditatur</a:t>
-            </a:r>
-            <a:r>
-              <a:rPr lang="en-US" sz="572" dirty="0">
-                <a:solidFill>
-                  <a:prstClr val="black"/>
-                </a:solidFill>
-                <a:latin typeface="Arial" panose="020B0604020202020204" pitchFamily="34" charset="0"/>
-                <a:cs typeface="Arial" panose="020B0604020202020204" pitchFamily="34" charset="0"/>
-              </a:rPr>
-              <a:t> </a:t>
-            </a:r>
-            <a:r>
-              <a:rPr lang="en-US" sz="572" dirty="0" err="1">
-                <a:solidFill>
-                  <a:prstClr val="black"/>
-                </a:solidFill>
-                <a:latin typeface="Arial" panose="020B0604020202020204" pitchFamily="34" charset="0"/>
-                <a:cs typeface="Arial" panose="020B0604020202020204" pitchFamily="34" charset="0"/>
-              </a:rPr>
-              <a:t>audam</a:t>
-            </a:r>
-            <a:r>
-              <a:rPr lang="en-US" sz="572" dirty="0">
-                <a:solidFill>
-                  <a:prstClr val="black"/>
-                </a:solidFill>
-                <a:latin typeface="Arial" panose="020B0604020202020204" pitchFamily="34" charset="0"/>
-                <a:cs typeface="Arial" panose="020B0604020202020204" pitchFamily="34" charset="0"/>
-              </a:rPr>
-              <a:t> </a:t>
-            </a:r>
-            <a:r>
-              <a:rPr lang="en-US" sz="572" dirty="0" err="1">
-                <a:solidFill>
-                  <a:prstClr val="black"/>
-                </a:solidFill>
-                <a:latin typeface="Arial" panose="020B0604020202020204" pitchFamily="34" charset="0"/>
-                <a:cs typeface="Arial" panose="020B0604020202020204" pitchFamily="34" charset="0"/>
-              </a:rPr>
-              <a:t>earupid</a:t>
-            </a:r>
-            <a:r>
-              <a:rPr lang="en-US" sz="572" dirty="0">
-                <a:solidFill>
-                  <a:prstClr val="black"/>
-                </a:solidFill>
-                <a:latin typeface="Arial" panose="020B0604020202020204" pitchFamily="34" charset="0"/>
-                <a:cs typeface="Arial" panose="020B0604020202020204" pitchFamily="34" charset="0"/>
-              </a:rPr>
-              <a:t> quo </a:t>
-            </a:r>
-            <a:r>
-              <a:rPr lang="en-US" sz="572" dirty="0" err="1">
-                <a:solidFill>
-                  <a:prstClr val="black"/>
-                </a:solidFill>
-                <a:latin typeface="Arial" panose="020B0604020202020204" pitchFamily="34" charset="0"/>
-                <a:cs typeface="Arial" panose="020B0604020202020204" pitchFamily="34" charset="0"/>
-              </a:rPr>
-              <a:t>quunt</a:t>
-            </a:r>
-            <a:r>
-              <a:rPr lang="en-US" sz="572" dirty="0">
-                <a:solidFill>
-                  <a:prstClr val="black"/>
-                </a:solidFill>
-                <a:latin typeface="Arial" panose="020B0604020202020204" pitchFamily="34" charset="0"/>
-                <a:cs typeface="Arial" panose="020B0604020202020204" pitchFamily="34" charset="0"/>
-              </a:rPr>
-              <a:t> </a:t>
-            </a:r>
-            <a:r>
-              <a:rPr lang="en-US" sz="572" dirty="0" err="1">
-                <a:solidFill>
-                  <a:prstClr val="black"/>
-                </a:solidFill>
-                <a:latin typeface="Arial" panose="020B0604020202020204" pitchFamily="34" charset="0"/>
-                <a:cs typeface="Arial" panose="020B0604020202020204" pitchFamily="34" charset="0"/>
-              </a:rPr>
-              <a:t>odigniscil</a:t>
-            </a:r>
-            <a:r>
-              <a:rPr lang="en-US" sz="572" dirty="0">
-                <a:solidFill>
-                  <a:prstClr val="black"/>
-                </a:solidFill>
-                <a:latin typeface="Arial" panose="020B0604020202020204" pitchFamily="34" charset="0"/>
-                <a:cs typeface="Arial" panose="020B0604020202020204" pitchFamily="34" charset="0"/>
-              </a:rPr>
-              <a:t> </a:t>
-            </a:r>
-            <a:r>
-              <a:rPr lang="en-US" sz="572" dirty="0" err="1">
-                <a:solidFill>
-                  <a:prstClr val="black"/>
-                </a:solidFill>
-                <a:latin typeface="Arial" panose="020B0604020202020204" pitchFamily="34" charset="0"/>
-                <a:cs typeface="Arial" panose="020B0604020202020204" pitchFamily="34" charset="0"/>
-              </a:rPr>
-              <a:t>earum</a:t>
-            </a:r>
-            <a:r>
-              <a:rPr lang="en-US" sz="572" dirty="0">
-                <a:solidFill>
-                  <a:prstClr val="black"/>
-                </a:solidFill>
-                <a:latin typeface="Arial" panose="020B0604020202020204" pitchFamily="34" charset="0"/>
-                <a:cs typeface="Arial" panose="020B0604020202020204" pitchFamily="34" charset="0"/>
-              </a:rPr>
-              <a:t> </a:t>
-            </a:r>
-            <a:r>
-              <a:rPr lang="en-US" sz="572" dirty="0" err="1">
-                <a:solidFill>
-                  <a:prstClr val="black"/>
-                </a:solidFill>
-                <a:latin typeface="Arial" panose="020B0604020202020204" pitchFamily="34" charset="0"/>
-                <a:cs typeface="Arial" panose="020B0604020202020204" pitchFamily="34" charset="0"/>
-              </a:rPr>
-              <a:t>verios</a:t>
-            </a:r>
-            <a:r>
-              <a:rPr lang="en-US" sz="572" dirty="0">
-                <a:solidFill>
-                  <a:prstClr val="black"/>
-                </a:solidFill>
-                <a:latin typeface="Arial" panose="020B0604020202020204" pitchFamily="34" charset="0"/>
-                <a:cs typeface="Arial" panose="020B0604020202020204" pitchFamily="34" charset="0"/>
-              </a:rPr>
-              <a:t> </a:t>
-            </a:r>
-            <a:r>
-              <a:rPr lang="en-US" sz="572" dirty="0" err="1">
-                <a:solidFill>
-                  <a:prstClr val="black"/>
-                </a:solidFill>
-                <a:latin typeface="Arial" panose="020B0604020202020204" pitchFamily="34" charset="0"/>
-                <a:cs typeface="Arial" panose="020B0604020202020204" pitchFamily="34" charset="0"/>
-              </a:rPr>
-              <a:t>nonsequam</a:t>
-            </a:r>
-            <a:endParaRPr lang="en-US" sz="572" dirty="0">
-              <a:solidFill>
-                <a:prstClr val="black"/>
-              </a:solidFill>
-              <a:latin typeface="Arial" panose="020B0604020202020204" pitchFamily="34" charset="0"/>
-              <a:cs typeface="Arial" panose="020B0604020202020204" pitchFamily="34" charset="0"/>
-            </a:endParaRPr>
-          </a:p>
-        </p:txBody>
-      </p:sp>
+      <mc:AlternateContent xmlns:mc="http://schemas.openxmlformats.org/markup-compatibility/2006">
+        <mc:Choice xmlns:a14="http://schemas.microsoft.com/office/drawing/2010/main" Requires="a14">
+          <p:sp>
+            <p:nvSpPr>
+              <p:cNvPr id="51" name="TextBox 50">
+                <a:extLst>
+                  <a:ext uri="{FF2B5EF4-FFF2-40B4-BE49-F238E27FC236}">
+                    <a16:creationId xmlns:a16="http://schemas.microsoft.com/office/drawing/2014/main" id="{E1CD2C2A-F064-084C-B9FF-1CE5B53E4E32}"/>
+                  </a:ext>
+                </a:extLst>
+              </p:cNvPr>
+              <p:cNvSpPr txBox="1"/>
+              <p:nvPr/>
+            </p:nvSpPr>
+            <p:spPr>
+              <a:xfrm>
+                <a:off x="4805278" y="5514244"/>
+                <a:ext cx="2581433" cy="1060740"/>
+              </a:xfrm>
+              <a:prstGeom prst="rect">
+                <a:avLst/>
+              </a:prstGeom>
+              <a:noFill/>
+            </p:spPr>
+            <p:txBody>
+              <a:bodyPr wrap="square" rtlCol="0">
+                <a:spAutoFit/>
+              </a:bodyPr>
+              <a:lstStyle/>
+              <a:p>
+                <a:pPr defTabSz="780653"/>
+                <a:r>
+                  <a:rPr lang="en-US" sz="572" dirty="0">
+                    <a:solidFill>
+                      <a:prstClr val="black"/>
+                    </a:solidFill>
+                    <a:latin typeface="Arial" panose="020B0604020202020204" pitchFamily="34" charset="0"/>
+                    <a:cs typeface="Arial" panose="020B0604020202020204" pitchFamily="34" charset="0"/>
+                  </a:rPr>
+                  <a:t>The experimental results demonstrate the relationship between capacitance and two key variables: plate separation and plate area. Shown in Figure 1, capacitance decreases as plate separation increases; following an inverse trend consistent with the theoretical prediction. Specifically, capacitance drops from approximately 0.44 pF at a 2 mm separation to about 0.13 pF at 7mm; indicating that greater distance between plates significantly reduces the ability to store charge.</a:t>
+                </a:r>
+              </a:p>
+              <a:p>
+                <a:pPr defTabSz="780653"/>
+                <a:r>
+                  <a:rPr lang="en-US" sz="572" dirty="0">
+                    <a:solidFill>
+                      <a:prstClr val="black"/>
+                    </a:solidFill>
+                    <a:latin typeface="Arial" panose="020B0604020202020204" pitchFamily="34" charset="0"/>
+                    <a:cs typeface="Arial" panose="020B0604020202020204" pitchFamily="34" charset="0"/>
+                  </a:rPr>
+                  <a:t>Conversely, Figure 2 illustrates that capacitance increases with plate area, rising from roughly 0.15 pF at </a:t>
+                </a:r>
+                <a14:m>
+                  <m:oMath xmlns:m="http://schemas.openxmlformats.org/officeDocument/2006/math">
+                    <m:r>
+                      <a:rPr lang="en-US" sz="572" b="0" i="1" smtClean="0">
+                        <a:solidFill>
+                          <a:prstClr val="black"/>
+                        </a:solidFill>
+                        <a:latin typeface="Cambria Math" panose="02040503050406030204" pitchFamily="18" charset="0"/>
+                        <a:cs typeface="Arial" panose="020B0604020202020204" pitchFamily="34" charset="0"/>
+                      </a:rPr>
+                      <m:t>100 </m:t>
+                    </m:r>
+                    <m:r>
+                      <a:rPr lang="en-US" sz="572" b="0" i="1" smtClean="0">
+                        <a:solidFill>
+                          <a:prstClr val="black"/>
+                        </a:solidFill>
+                        <a:latin typeface="Cambria Math" panose="02040503050406030204" pitchFamily="18" charset="0"/>
+                        <a:cs typeface="Arial" panose="020B0604020202020204" pitchFamily="34" charset="0"/>
+                      </a:rPr>
+                      <m:t>𝑚</m:t>
+                    </m:r>
+                    <m:sSup>
+                      <m:sSupPr>
+                        <m:ctrlPr>
+                          <a:rPr lang="en-US" sz="572" b="0" i="1" smtClean="0">
+                            <a:solidFill>
+                              <a:prstClr val="black"/>
+                            </a:solidFill>
+                            <a:latin typeface="Cambria Math" panose="02040503050406030204" pitchFamily="18" charset="0"/>
+                            <a:cs typeface="Arial" panose="020B0604020202020204" pitchFamily="34" charset="0"/>
+                          </a:rPr>
+                        </m:ctrlPr>
+                      </m:sSupPr>
+                      <m:e>
+                        <m:r>
+                          <a:rPr lang="en-US" sz="572" b="0" i="1" smtClean="0">
+                            <a:solidFill>
+                              <a:prstClr val="black"/>
+                            </a:solidFill>
+                            <a:latin typeface="Cambria Math" panose="02040503050406030204" pitchFamily="18" charset="0"/>
+                            <a:cs typeface="Arial" panose="020B0604020202020204" pitchFamily="34" charset="0"/>
+                          </a:rPr>
+                          <m:t>𝑚</m:t>
+                        </m:r>
+                      </m:e>
+                      <m:sup>
+                        <m:r>
+                          <a:rPr lang="en-US" sz="572" b="0" i="1" smtClean="0">
+                            <a:solidFill>
+                              <a:prstClr val="black"/>
+                            </a:solidFill>
+                            <a:latin typeface="Cambria Math" panose="02040503050406030204" pitchFamily="18" charset="0"/>
+                            <a:cs typeface="Arial" panose="020B0604020202020204" pitchFamily="34" charset="0"/>
+                          </a:rPr>
+                          <m:t>2</m:t>
+                        </m:r>
+                      </m:sup>
+                    </m:sSup>
+                  </m:oMath>
+                </a14:m>
+                <a:r>
+                  <a:rPr lang="en-US" sz="572" dirty="0">
+                    <a:solidFill>
+                      <a:prstClr val="black"/>
+                    </a:solidFill>
+                    <a:latin typeface="Arial" panose="020B0604020202020204" pitchFamily="34" charset="0"/>
+                    <a:cs typeface="Arial" panose="020B0604020202020204" pitchFamily="34" charset="0"/>
+                  </a:rPr>
+                  <a:t> to 0.22 pF at </a:t>
+                </a:r>
+                <a14:m>
+                  <m:oMath xmlns:m="http://schemas.openxmlformats.org/officeDocument/2006/math">
+                    <m:r>
+                      <a:rPr lang="en-US" sz="572" b="0" i="1" smtClean="0">
+                        <a:solidFill>
+                          <a:prstClr val="black"/>
+                        </a:solidFill>
+                        <a:latin typeface="Cambria Math" panose="02040503050406030204" pitchFamily="18" charset="0"/>
+                        <a:cs typeface="Arial" panose="020B0604020202020204" pitchFamily="34" charset="0"/>
+                      </a:rPr>
+                      <m:t>150 </m:t>
+                    </m:r>
+                    <m:r>
+                      <a:rPr lang="en-US" sz="572" b="0" i="1" smtClean="0">
+                        <a:solidFill>
+                          <a:prstClr val="black"/>
+                        </a:solidFill>
+                        <a:latin typeface="Cambria Math" panose="02040503050406030204" pitchFamily="18" charset="0"/>
+                        <a:cs typeface="Arial" panose="020B0604020202020204" pitchFamily="34" charset="0"/>
+                      </a:rPr>
+                      <m:t>𝑚</m:t>
+                    </m:r>
+                    <m:sSup>
+                      <m:sSupPr>
+                        <m:ctrlPr>
+                          <a:rPr lang="en-US" sz="572" b="0" i="1" smtClean="0">
+                            <a:solidFill>
+                              <a:prstClr val="black"/>
+                            </a:solidFill>
+                            <a:latin typeface="Cambria Math" panose="02040503050406030204" pitchFamily="18" charset="0"/>
+                            <a:cs typeface="Arial" panose="020B0604020202020204" pitchFamily="34" charset="0"/>
+                          </a:rPr>
+                        </m:ctrlPr>
+                      </m:sSupPr>
+                      <m:e>
+                        <m:r>
+                          <a:rPr lang="en-US" sz="572" b="0" i="1" smtClean="0">
+                            <a:solidFill>
+                              <a:prstClr val="black"/>
+                            </a:solidFill>
+                            <a:latin typeface="Cambria Math" panose="02040503050406030204" pitchFamily="18" charset="0"/>
+                            <a:cs typeface="Arial" panose="020B0604020202020204" pitchFamily="34" charset="0"/>
+                          </a:rPr>
+                          <m:t>𝑚</m:t>
+                        </m:r>
+                      </m:e>
+                      <m:sup>
+                        <m:r>
+                          <a:rPr lang="en-US" sz="572" b="0" i="1" smtClean="0">
+                            <a:solidFill>
+                              <a:prstClr val="black"/>
+                            </a:solidFill>
+                            <a:latin typeface="Cambria Math" panose="02040503050406030204" pitchFamily="18" charset="0"/>
+                            <a:cs typeface="Arial" panose="020B0604020202020204" pitchFamily="34" charset="0"/>
+                          </a:rPr>
+                          <m:t>2</m:t>
+                        </m:r>
+                      </m:sup>
+                    </m:sSup>
+                  </m:oMath>
+                </a14:m>
+                <a:r>
+                  <a:rPr lang="en-US" sz="572" dirty="0">
+                    <a:solidFill>
+                      <a:prstClr val="black"/>
+                    </a:solidFill>
+                    <a:latin typeface="Arial" panose="020B0604020202020204" pitchFamily="34" charset="0"/>
+                    <a:cs typeface="Arial" panose="020B0604020202020204" pitchFamily="34" charset="0"/>
+                  </a:rPr>
+                  <a:t>. This positive correlation aligns with the expectation that larger plate surfaces enhance charge storage capacity.</a:t>
+                </a:r>
+              </a:p>
+            </p:txBody>
+          </p:sp>
+        </mc:Choice>
+        <mc:Fallback>
+          <p:sp>
+            <p:nvSpPr>
+              <p:cNvPr id="51" name="TextBox 50">
+                <a:extLst>
+                  <a:ext uri="{FF2B5EF4-FFF2-40B4-BE49-F238E27FC236}">
+                    <a16:creationId xmlns:a16="http://schemas.microsoft.com/office/drawing/2014/main" id="{E1CD2C2A-F064-084C-B9FF-1CE5B53E4E32}"/>
+                  </a:ext>
+                </a:extLst>
+              </p:cNvPr>
+              <p:cNvSpPr txBox="1">
+                <a:spLocks noRot="1" noChangeAspect="1" noMove="1" noResize="1" noEditPoints="1" noAdjustHandles="1" noChangeArrowheads="1" noChangeShapeType="1" noTextEdit="1"/>
+              </p:cNvSpPr>
+              <p:nvPr/>
+            </p:nvSpPr>
+            <p:spPr>
+              <a:xfrm>
+                <a:off x="4805278" y="5514244"/>
+                <a:ext cx="2581433" cy="1060740"/>
+              </a:xfrm>
+              <a:prstGeom prst="rect">
+                <a:avLst/>
+              </a:prstGeom>
+              <a:blipFill>
+                <a:blip r:embed="rId5"/>
+                <a:stretch>
+                  <a:fillRect/>
+                </a:stretch>
+              </a:blipFill>
+            </p:spPr>
+            <p:txBody>
+              <a:bodyPr/>
+              <a:lstStyle/>
+              <a:p>
+                <a:r>
+                  <a:rPr lang="es-ES">
+                    <a:noFill/>
+                  </a:rPr>
+                  <a:t> </a:t>
+                </a:r>
+              </a:p>
+            </p:txBody>
+          </p:sp>
+        </mc:Fallback>
+      </mc:AlternateContent>
       <p:sp>
         <p:nvSpPr>
           <p:cNvPr id="55" name="Rectangle 54">
@@ -13390,7 +11525,7 @@
           <p:nvPr/>
         </p:nvPicPr>
         <p:blipFill>
-          <a:blip r:embed="rId5"/>
+          <a:blip r:embed="rId6"/>
           <a:stretch>
             <a:fillRect/>
           </a:stretch>
@@ -13405,140 +11540,240 @@
           </a:prstGeom>
         </p:spPr>
       </p:pic>
-      <p:sp>
-        <p:nvSpPr>
-          <p:cNvPr id="46" name="Rectangle 45">
+      <p:grpSp>
+        <p:nvGrpSpPr>
+          <p:cNvPr id="10" name="Grupo 9">
             <a:extLst>
               <a:ext uri="{FF2B5EF4-FFF2-40B4-BE49-F238E27FC236}">
-                <a16:creationId xmlns:a16="http://schemas.microsoft.com/office/drawing/2014/main" id="{D903B466-646C-2D4A-BD19-7AA4D5AE665B}"/>
+                <a16:creationId xmlns:a16="http://schemas.microsoft.com/office/drawing/2014/main" id="{8B87BA69-F4CB-DBF5-4676-B393D1F8A96A}"/>
               </a:ext>
             </a:extLst>
           </p:cNvPr>
-          <p:cNvSpPr/>
+          <p:cNvGrpSpPr/>
           <p:nvPr/>
-        </p:nvSpPr>
-        <p:spPr>
+        </p:nvGrpSpPr>
+        <p:grpSpPr>
           <a:xfrm>
-            <a:off x="7747567" y="634289"/>
-            <a:ext cx="1887651" cy="596757"/>
+            <a:off x="4823707" y="3637807"/>
+            <a:ext cx="2547253" cy="1876437"/>
+            <a:chOff x="4823707" y="3637807"/>
+            <a:chExt cx="2547253" cy="1876437"/>
           </a:xfrm>
-          <a:prstGeom prst="rect">
-            <a:avLst/>
-          </a:prstGeom>
-          <a:solidFill>
-            <a:schemeClr val="accent3">
-              <a:lumMod val="40000"/>
-              <a:lumOff val="60000"/>
-            </a:schemeClr>
-          </a:solidFill>
-          <a:ln>
+        </p:grpSpPr>
+        <p:pic>
+          <p:nvPicPr>
+            <p:cNvPr id="5" name="Picture 4" descr="A graph with a line going up&#10;&#10;AI-generated content may be incorrect.">
+              <a:extLst>
+                <a:ext uri="{FF2B5EF4-FFF2-40B4-BE49-F238E27FC236}">
+                  <a16:creationId xmlns:a16="http://schemas.microsoft.com/office/drawing/2014/main" id="{C498A840-B2C8-4383-7568-2620CE9B6494}"/>
+                </a:ext>
+              </a:extLst>
+            </p:cNvPr>
+            <p:cNvPicPr>
+              <a:picLocks noChangeAspect="1"/>
+            </p:cNvPicPr>
+            <p:nvPr/>
+          </p:nvPicPr>
+          <p:blipFill>
+            <a:blip r:embed="rId7">
+              <a:extLst>
+                <a:ext uri="{28A0092B-C50C-407E-A947-70E740481C1C}">
+                  <a14:useLocalDpi xmlns:a14="http://schemas.microsoft.com/office/drawing/2010/main" val="0"/>
+                </a:ext>
+              </a:extLst>
+            </a:blip>
+            <a:stretch>
+              <a:fillRect/>
+            </a:stretch>
+          </p:blipFill>
+          <p:spPr>
+            <a:xfrm>
+              <a:off x="4823707" y="3637807"/>
+              <a:ext cx="2547253" cy="1678218"/>
+            </a:xfrm>
+            <a:prstGeom prst="rect">
+              <a:avLst/>
+            </a:prstGeom>
+          </p:spPr>
+        </p:pic>
+        <p:sp>
+          <p:nvSpPr>
+            <p:cNvPr id="2" name="CuadroTexto 1">
+              <a:extLst>
+                <a:ext uri="{FF2B5EF4-FFF2-40B4-BE49-F238E27FC236}">
+                  <a16:creationId xmlns:a16="http://schemas.microsoft.com/office/drawing/2014/main" id="{B78BFC16-B0AF-8B41-829D-20E46F0F3C5B}"/>
+                </a:ext>
+              </a:extLst>
+            </p:cNvPr>
+            <p:cNvSpPr txBox="1"/>
+            <p:nvPr/>
+          </p:nvSpPr>
+          <p:spPr>
+            <a:xfrm>
+              <a:off x="5408444" y="5321884"/>
+              <a:ext cx="1375102" cy="192360"/>
+            </a:xfrm>
+            <a:prstGeom prst="rect">
+              <a:avLst/>
+            </a:prstGeom>
             <a:noFill/>
-          </a:ln>
-        </p:spPr>
-        <p:style>
-          <a:lnRef idx="2">
-            <a:schemeClr val="accent1">
-              <a:shade val="50000"/>
-            </a:schemeClr>
-          </a:lnRef>
-          <a:fillRef idx="1">
-            <a:schemeClr val="accent1"/>
-          </a:fillRef>
-          <a:effectRef idx="0">
-            <a:schemeClr val="accent1"/>
-          </a:effectRef>
-          <a:fontRef idx="minor">
-            <a:schemeClr val="lt1"/>
-          </a:fontRef>
-        </p:style>
-        <p:txBody>
-          <a:bodyPr rtlCol="0" anchor="ctr"/>
-          <a:lstStyle/>
-          <a:p>
-            <a:pPr algn="ctr" defTabSz="780653"/>
-            <a:r>
-              <a:rPr lang="en-US" sz="1281" dirty="0">
-                <a:solidFill>
-                  <a:prstClr val="white"/>
-                </a:solidFill>
-                <a:latin typeface="Arial" panose="020B0604020202020204" pitchFamily="34" charset="0"/>
-                <a:cs typeface="Arial" panose="020B0604020202020204" pitchFamily="34" charset="0"/>
-              </a:rPr>
-              <a:t>logo</a:t>
-            </a:r>
-          </a:p>
-        </p:txBody>
-      </p:sp>
-      <p:sp>
-        <p:nvSpPr>
-          <p:cNvPr id="59" name="Oval 58">
+          </p:spPr>
+          <p:txBody>
+            <a:bodyPr wrap="square" rtlCol="0">
+              <a:spAutoFit/>
+            </a:bodyPr>
+            <a:lstStyle/>
+            <a:p>
+              <a:pPr algn="ctr"/>
+              <a:r>
+                <a:rPr lang="es-ES" sz="650" dirty="0"/>
+                <a:t>Figure 2: </a:t>
+              </a:r>
+              <a:r>
+                <a:rPr lang="es-ES" sz="650" dirty="0" err="1"/>
+                <a:t>Capacitance</a:t>
+              </a:r>
+              <a:r>
+                <a:rPr lang="es-ES" sz="650" dirty="0"/>
+                <a:t> vs. </a:t>
+              </a:r>
+              <a:r>
+                <a:rPr lang="es-ES" sz="650" dirty="0" err="1"/>
+                <a:t>Plate</a:t>
+              </a:r>
+              <a:r>
+                <a:rPr lang="es-ES" sz="650" dirty="0"/>
+                <a:t> </a:t>
+              </a:r>
+              <a:r>
+                <a:rPr lang="es-ES" sz="650" dirty="0" err="1"/>
+                <a:t>Area</a:t>
+              </a:r>
+              <a:endParaRPr lang="es-ES" sz="650" dirty="0"/>
+            </a:p>
+          </p:txBody>
+        </p:sp>
+      </p:grpSp>
+      <p:grpSp>
+        <p:nvGrpSpPr>
+          <p:cNvPr id="11" name="Grupo 10">
             <a:extLst>
               <a:ext uri="{FF2B5EF4-FFF2-40B4-BE49-F238E27FC236}">
-                <a16:creationId xmlns:a16="http://schemas.microsoft.com/office/drawing/2014/main" id="{887E75FA-C034-2447-9AFA-253A4A8F5217}"/>
+                <a16:creationId xmlns:a16="http://schemas.microsoft.com/office/drawing/2014/main" id="{E4C589B7-4B88-CC58-6898-2E7425307E9A}"/>
               </a:ext>
             </a:extLst>
           </p:cNvPr>
-          <p:cNvSpPr/>
+          <p:cNvGrpSpPr/>
           <p:nvPr/>
-        </p:nvSpPr>
-        <p:spPr>
+        </p:nvGrpSpPr>
+        <p:grpSpPr>
           <a:xfrm>
-            <a:off x="9751559" y="634289"/>
-            <a:ext cx="794997" cy="590354"/>
+            <a:off x="4823703" y="1748673"/>
+            <a:ext cx="2547257" cy="1881983"/>
+            <a:chOff x="4823703" y="1748673"/>
+            <a:chExt cx="2547257" cy="1881983"/>
           </a:xfrm>
-          <a:prstGeom prst="ellipse">
-            <a:avLst/>
-          </a:prstGeom>
-          <a:solidFill>
-            <a:schemeClr val="accent3">
-              <a:lumMod val="40000"/>
-              <a:lumOff val="60000"/>
-            </a:schemeClr>
-          </a:solidFill>
-          <a:ln>
+        </p:grpSpPr>
+        <p:pic>
+          <p:nvPicPr>
+            <p:cNvPr id="7" name="Picture 6" descr="A graph with a red line&#10;&#10;AI-generated content may be incorrect.">
+              <a:extLst>
+                <a:ext uri="{FF2B5EF4-FFF2-40B4-BE49-F238E27FC236}">
+                  <a16:creationId xmlns:a16="http://schemas.microsoft.com/office/drawing/2014/main" id="{56CDAAF2-1818-9EB6-09DE-0325CCB12502}"/>
+                </a:ext>
+              </a:extLst>
+            </p:cNvPr>
+            <p:cNvPicPr>
+              <a:picLocks noChangeAspect="1"/>
+            </p:cNvPicPr>
+            <p:nvPr/>
+          </p:nvPicPr>
+          <p:blipFill>
+            <a:blip r:embed="rId8">
+              <a:extLst>
+                <a:ext uri="{28A0092B-C50C-407E-A947-70E740481C1C}">
+                  <a14:useLocalDpi xmlns:a14="http://schemas.microsoft.com/office/drawing/2010/main" val="0"/>
+                </a:ext>
+              </a:extLst>
+            </a:blip>
+            <a:stretch>
+              <a:fillRect/>
+            </a:stretch>
+          </p:blipFill>
+          <p:spPr>
+            <a:xfrm>
+              <a:off x="4823703" y="1748673"/>
+              <a:ext cx="2547257" cy="1690915"/>
+            </a:xfrm>
+            <a:prstGeom prst="rect">
+              <a:avLst/>
+            </a:prstGeom>
+          </p:spPr>
+        </p:pic>
+        <p:sp>
+          <p:nvSpPr>
+            <p:cNvPr id="3" name="CuadroTexto 2">
+              <a:extLst>
+                <a:ext uri="{FF2B5EF4-FFF2-40B4-BE49-F238E27FC236}">
+                  <a16:creationId xmlns:a16="http://schemas.microsoft.com/office/drawing/2014/main" id="{1342CD79-1432-E499-29FA-C0F48653707F}"/>
+                </a:ext>
+              </a:extLst>
+            </p:cNvPr>
+            <p:cNvSpPr txBox="1"/>
+            <p:nvPr/>
+          </p:nvSpPr>
+          <p:spPr>
+            <a:xfrm>
+              <a:off x="5300057" y="3438296"/>
+              <a:ext cx="1584097" cy="192360"/>
+            </a:xfrm>
+            <a:prstGeom prst="rect">
+              <a:avLst/>
+            </a:prstGeom>
             <a:noFill/>
-          </a:ln>
-        </p:spPr>
-        <p:style>
-          <a:lnRef idx="2">
-            <a:schemeClr val="accent1">
-              <a:shade val="50000"/>
-            </a:schemeClr>
-          </a:lnRef>
-          <a:fillRef idx="1">
-            <a:schemeClr val="accent1"/>
-          </a:fillRef>
-          <a:effectRef idx="0">
-            <a:schemeClr val="accent1"/>
-          </a:effectRef>
-          <a:fontRef idx="minor">
-            <a:schemeClr val="lt1"/>
-          </a:fontRef>
-        </p:style>
-        <p:txBody>
-          <a:bodyPr rtlCol="0" anchor="ctr"/>
-          <a:lstStyle/>
-          <a:p>
-            <a:pPr algn="ctr" defTabSz="780653"/>
-            <a:r>
-              <a:rPr lang="en-US" sz="1281" dirty="0">
-                <a:solidFill>
-                  <a:prstClr val="white"/>
-                </a:solidFill>
-                <a:latin typeface="Arial" panose="020B0604020202020204" pitchFamily="34" charset="0"/>
-                <a:cs typeface="Arial" panose="020B0604020202020204" pitchFamily="34" charset="0"/>
-              </a:rPr>
-              <a:t>logo</a:t>
-            </a:r>
-          </a:p>
-        </p:txBody>
-      </p:sp>
+          </p:spPr>
+          <p:txBody>
+            <a:bodyPr wrap="square" rtlCol="0">
+              <a:spAutoFit/>
+            </a:bodyPr>
+            <a:lstStyle/>
+            <a:p>
+              <a:pPr algn="ctr"/>
+              <a:r>
+                <a:rPr lang="es-ES" sz="650" dirty="0"/>
+                <a:t>Figure 1: </a:t>
+              </a:r>
+              <a:r>
+                <a:rPr lang="es-ES" sz="650" dirty="0" err="1"/>
+                <a:t>Capacitance</a:t>
+              </a:r>
+              <a:r>
+                <a:rPr lang="es-ES" sz="650" dirty="0"/>
+                <a:t> vs. </a:t>
+              </a:r>
+              <a:r>
+                <a:rPr lang="es-ES" sz="650" dirty="0" err="1"/>
+                <a:t>Plate</a:t>
+              </a:r>
+              <a:r>
+                <a:rPr lang="es-ES" sz="650" dirty="0"/>
+                <a:t> </a:t>
+              </a:r>
+              <a:r>
+                <a:rPr lang="es-ES" sz="650" dirty="0" err="1"/>
+                <a:t>Separation</a:t>
+              </a:r>
+              <a:endParaRPr lang="es-ES" sz="650" dirty="0"/>
+            </a:p>
+          </p:txBody>
+        </p:sp>
+      </p:grpSp>
       <p:pic>
         <p:nvPicPr>
-          <p:cNvPr id="5" name="Picture 4" descr="A graph with a line going up&#10;&#10;AI-generated content may be incorrect.">
+          <p:cNvPr id="9" name="Picture 26">
             <a:extLst>
               <a:ext uri="{FF2B5EF4-FFF2-40B4-BE49-F238E27FC236}">
-                <a16:creationId xmlns:a16="http://schemas.microsoft.com/office/drawing/2014/main" id="{C498A840-B2C8-4383-7568-2620CE9B6494}"/>
+                <a16:creationId xmlns:a16="http://schemas.microsoft.com/office/drawing/2014/main" id="{1F6FF982-84D1-D5B7-2672-EEB42FF7BB88}"/>
               </a:ext>
             </a:extLst>
           </p:cNvPr>
@@ -13548,57 +11783,15 @@
           <p:nvPr/>
         </p:nvPicPr>
         <p:blipFill>
-          <a:blip r:embed="rId6">
-            <a:extLst>
-              <a:ext uri="{28A0092B-C50C-407E-A947-70E740481C1C}">
-                <a14:useLocalDpi xmlns:a14="http://schemas.microsoft.com/office/drawing/2010/main" val="0"/>
-              </a:ext>
-            </a:extLst>
-          </a:blip>
+          <a:blip r:embed="rId9"/>
           <a:stretch>
             <a:fillRect/>
           </a:stretch>
         </p:blipFill>
         <p:spPr>
           <a:xfrm>
-            <a:off x="4839459" y="3560934"/>
-            <a:ext cx="2547253" cy="1678218"/>
-          </a:xfrm>
-          <a:prstGeom prst="rect">
-            <a:avLst/>
-          </a:prstGeom>
-        </p:spPr>
-      </p:pic>
-      <p:pic>
-        <p:nvPicPr>
-          <p:cNvPr id="7" name="Picture 6" descr="A graph with a red line&#10;&#10;AI-generated content may be incorrect.">
-            <a:extLst>
-              <a:ext uri="{FF2B5EF4-FFF2-40B4-BE49-F238E27FC236}">
-                <a16:creationId xmlns:a16="http://schemas.microsoft.com/office/drawing/2014/main" id="{56CDAAF2-1818-9EB6-09DE-0325CCB12502}"/>
-              </a:ext>
-            </a:extLst>
-          </p:cNvPr>
-          <p:cNvPicPr>
-            <a:picLocks noChangeAspect="1"/>
-          </p:cNvPicPr>
-          <p:nvPr/>
-        </p:nvPicPr>
-        <p:blipFill>
-          <a:blip r:embed="rId7">
-            <a:extLst>
-              <a:ext uri="{28A0092B-C50C-407E-A947-70E740481C1C}">
-                <a14:useLocalDpi xmlns:a14="http://schemas.microsoft.com/office/drawing/2010/main" val="0"/>
-              </a:ext>
-            </a:extLst>
-          </a:blip>
-          <a:stretch>
-            <a:fillRect/>
-          </a:stretch>
-        </p:blipFill>
-        <p:spPr>
-          <a:xfrm>
-            <a:off x="4839459" y="1826242"/>
-            <a:ext cx="2547257" cy="1690915"/>
+            <a:off x="7747567" y="695165"/>
+            <a:ext cx="1887651" cy="409173"/>
           </a:xfrm>
           <a:prstGeom prst="rect">
             <a:avLst/>

--- a/Final Project/FinalProject.pptx
+++ b/Final Project/FinalProject.pptx
@@ -5,6 +5,9 @@
     <p:sldMasterId id="2147483648" r:id="rId1"/>
     <p:sldMasterId id="2147483660" r:id="rId2"/>
   </p:sldMasterIdLst>
+  <p:notesMasterIdLst>
+    <p:notesMasterId r:id="rId4"/>
+  </p:notesMasterIdLst>
   <p:sldIdLst>
     <p:sldId id="268" r:id="rId3"/>
   </p:sldIdLst>
@@ -116,8 +119,7 @@
 <file path=ppt/revisionInfo.xml><?xml version="1.0" encoding="utf-8"?>
 <p1510:revInfo xmlns:a="http://schemas.openxmlformats.org/drawingml/2006/main" xmlns:r="http://schemas.openxmlformats.org/officeDocument/2006/relationships" xmlns:p1510="http://schemas.microsoft.com/office/powerpoint/2015/10/main">
   <p1510:revLst>
-    <p1510:client id="{60DCBEB9-452B-42DA-B7D1-E4A5A7FC6C10}" v="1749" dt="2025-12-03T17:44:14.992"/>
-    <p1510:client id="{80BA49D0-6376-CB48-B3C3-F4708D789340}" v="223" dt="2025-12-04T04:11:19.332"/>
+    <p1510:client id="{80BA49D0-6376-CB48-B3C3-F4708D789340}" v="992" dt="2025-12-04T22:49:57.117"/>
   </p1510:revLst>
 </p1510:revInfo>
 </file>
@@ -127,12 +129,12 @@
   <pc:docChgLst>
     <pc:chgData name="Morales, Abdon" userId="b8e72fca-89fa-40b2-95f0-bdb26e6d8c1d" providerId="ADAL" clId="{F77E3D6D-613B-5030-A384-37FA661628F6}"/>
     <pc:docChg chg="undo custSel modSld">
-      <pc:chgData name="Morales, Abdon" userId="b8e72fca-89fa-40b2-95f0-bdb26e6d8c1d" providerId="ADAL" clId="{F77E3D6D-613B-5030-A384-37FA661628F6}" dt="2025-12-04T04:20:15.339" v="1088" actId="164"/>
+      <pc:chgData name="Morales, Abdon" userId="b8e72fca-89fa-40b2-95f0-bdb26e6d8c1d" providerId="ADAL" clId="{F77E3D6D-613B-5030-A384-37FA661628F6}" dt="2025-12-04T22:49:57.117" v="2265" actId="313"/>
       <pc:docMkLst>
         <pc:docMk/>
       </pc:docMkLst>
       <pc:sldChg chg="addSp delSp modSp mod">
-        <pc:chgData name="Morales, Abdon" userId="b8e72fca-89fa-40b2-95f0-bdb26e6d8c1d" providerId="ADAL" clId="{F77E3D6D-613B-5030-A384-37FA661628F6}" dt="2025-12-04T04:20:15.339" v="1088" actId="164"/>
+        <pc:chgData name="Morales, Abdon" userId="b8e72fca-89fa-40b2-95f0-bdb26e6d8c1d" providerId="ADAL" clId="{F77E3D6D-613B-5030-A384-37FA661628F6}" dt="2025-12-04T22:49:57.117" v="2265" actId="313"/>
         <pc:sldMkLst>
           <pc:docMk/>
           <pc:sldMk cId="4152292366" sldId="268"/>
@@ -161,6 +163,14 @@
             <ac:spMk id="4" creationId="{C2642BAB-3737-CE4C-874C-5EA986C6E360}"/>
           </ac:spMkLst>
         </pc:spChg>
+        <pc:spChg chg="add mod">
+          <ac:chgData name="Morales, Abdon" userId="b8e72fca-89fa-40b2-95f0-bdb26e6d8c1d" providerId="ADAL" clId="{F77E3D6D-613B-5030-A384-37FA661628F6}" dt="2025-12-04T22:48:23.119" v="2052" actId="255"/>
+          <ac:spMkLst>
+            <pc:docMk/>
+            <pc:sldMk cId="4152292366" sldId="268"/>
+            <ac:spMk id="12" creationId="{F99076AB-CD48-1D9C-24C3-8E5BC7671CED}"/>
+          </ac:spMkLst>
+        </pc:spChg>
         <pc:spChg chg="del">
           <ac:chgData name="Morales, Abdon" userId="b8e72fca-89fa-40b2-95f0-bdb26e6d8c1d" providerId="ADAL" clId="{F77E3D6D-613B-5030-A384-37FA661628F6}" dt="2025-12-04T04:12:05.673" v="1083" actId="478"/>
           <ac:spMkLst>
@@ -170,11 +180,27 @@
           </ac:spMkLst>
         </pc:spChg>
         <pc:spChg chg="mod">
+          <ac:chgData name="Morales, Abdon" userId="b8e72fca-89fa-40b2-95f0-bdb26e6d8c1d" providerId="ADAL" clId="{F77E3D6D-613B-5030-A384-37FA661628F6}" dt="2025-12-04T22:49:57.117" v="2265" actId="313"/>
+          <ac:spMkLst>
+            <pc:docMk/>
+            <pc:sldMk cId="4152292366" sldId="268"/>
+            <ac:spMk id="50" creationId="{79C029F1-D5E2-A842-A19B-DC4969111E24}"/>
+          </ac:spMkLst>
+        </pc:spChg>
+        <pc:spChg chg="mod">
           <ac:chgData name="Morales, Abdon" userId="b8e72fca-89fa-40b2-95f0-bdb26e6d8c1d" providerId="ADAL" clId="{F77E3D6D-613B-5030-A384-37FA661628F6}" dt="2025-12-04T04:04:32.036" v="1038" actId="1076"/>
           <ac:spMkLst>
             <pc:docMk/>
             <pc:sldMk cId="4152292366" sldId="268"/>
             <ac:spMk id="51" creationId="{E1CD2C2A-F064-084C-B9FF-1CE5B53E4E32}"/>
+          </ac:spMkLst>
+        </pc:spChg>
+        <pc:spChg chg="del">
+          <ac:chgData name="Morales, Abdon" userId="b8e72fca-89fa-40b2-95f0-bdb26e6d8c1d" providerId="ADAL" clId="{F77E3D6D-613B-5030-A384-37FA661628F6}" dt="2025-12-04T22:37:34.067" v="1108" actId="478"/>
+          <ac:spMkLst>
+            <pc:docMk/>
+            <pc:sldMk cId="4152292366" sldId="268"/>
+            <ac:spMk id="55" creationId="{932F4CD2-D53A-6945-A147-AA4161801A71}"/>
           </ac:spMkLst>
         </pc:spChg>
         <pc:spChg chg="del">
@@ -245,6 +271,439 @@
     </pc:docChg>
   </pc:docChgLst>
 </pc:chgInfo>
+</file>
+
+<file path=ppt/notesMasters/notesMaster1.xml><?xml version="1.0" encoding="utf-8"?>
+<p:notesMaster xmlns:a="http://schemas.openxmlformats.org/drawingml/2006/main" xmlns:r="http://schemas.openxmlformats.org/officeDocument/2006/relationships" xmlns:p="http://schemas.openxmlformats.org/presentationml/2006/main">
+  <p:cSld>
+    <p:bg>
+      <p:bgRef idx="1001">
+        <a:schemeClr val="bg1"/>
+      </p:bgRef>
+    </p:bg>
+    <p:spTree>
+      <p:nvGrpSpPr>
+        <p:cNvPr id="1" name=""/>
+        <p:cNvGrpSpPr/>
+        <p:nvPr/>
+      </p:nvGrpSpPr>
+      <p:grpSpPr>
+        <a:xfrm>
+          <a:off x="0" y="0"/>
+          <a:ext cx="0" cy="0"/>
+          <a:chOff x="0" y="0"/>
+          <a:chExt cx="0" cy="0"/>
+        </a:xfrm>
+      </p:grpSpPr>
+      <p:sp>
+        <p:nvSpPr>
+          <p:cNvPr id="2" name="Marcador de encabezado 1"/>
+          <p:cNvSpPr>
+            <a:spLocks noGrp="1"/>
+          </p:cNvSpPr>
+          <p:nvPr>
+            <p:ph type="hdr" sz="quarter"/>
+          </p:nvPr>
+        </p:nvSpPr>
+        <p:spPr>
+          <a:xfrm>
+            <a:off x="0" y="0"/>
+            <a:ext cx="2971800" cy="458788"/>
+          </a:xfrm>
+          <a:prstGeom prst="rect">
+            <a:avLst/>
+          </a:prstGeom>
+        </p:spPr>
+        <p:txBody>
+          <a:bodyPr vert="horz" lIns="91440" tIns="45720" rIns="91440" bIns="45720" rtlCol="0"/>
+          <a:lstStyle>
+            <a:lvl1pPr algn="l">
+              <a:defRPr sz="1200"/>
+            </a:lvl1pPr>
+          </a:lstStyle>
+          <a:p>
+            <a:endParaRPr lang="es-ES"/>
+          </a:p>
+        </p:txBody>
+      </p:sp>
+      <p:sp>
+        <p:nvSpPr>
+          <p:cNvPr id="3" name="Marcador de fecha 2"/>
+          <p:cNvSpPr>
+            <a:spLocks noGrp="1"/>
+          </p:cNvSpPr>
+          <p:nvPr>
+            <p:ph type="dt" idx="1"/>
+          </p:nvPr>
+        </p:nvSpPr>
+        <p:spPr>
+          <a:xfrm>
+            <a:off x="3884613" y="0"/>
+            <a:ext cx="2971800" cy="458788"/>
+          </a:xfrm>
+          <a:prstGeom prst="rect">
+            <a:avLst/>
+          </a:prstGeom>
+        </p:spPr>
+        <p:txBody>
+          <a:bodyPr vert="horz" lIns="91440" tIns="45720" rIns="91440" bIns="45720" rtlCol="0"/>
+          <a:lstStyle>
+            <a:lvl1pPr algn="r">
+              <a:defRPr sz="1200"/>
+            </a:lvl1pPr>
+          </a:lstStyle>
+          <a:p>
+            <a:fld id="{D353F5E4-024D-B04C-8649-02453A372B74}" type="datetimeFigureOut">
+              <a:rPr lang="es-ES" smtClean="0"/>
+              <a:t>4/12/25</a:t>
+            </a:fld>
+            <a:endParaRPr lang="es-ES"/>
+          </a:p>
+        </p:txBody>
+      </p:sp>
+      <p:sp>
+        <p:nvSpPr>
+          <p:cNvPr id="4" name="Marcador de imagen de diapositiva 3"/>
+          <p:cNvSpPr>
+            <a:spLocks noGrp="1" noRot="1" noChangeAspect="1"/>
+          </p:cNvSpPr>
+          <p:nvPr>
+            <p:ph type="sldImg" idx="2"/>
+          </p:nvPr>
+        </p:nvSpPr>
+        <p:spPr>
+          <a:xfrm>
+            <a:off x="685800" y="1143000"/>
+            <a:ext cx="5486400" cy="3086100"/>
+          </a:xfrm>
+          <a:prstGeom prst="rect">
+            <a:avLst/>
+          </a:prstGeom>
+          <a:noFill/>
+          <a:ln w="12700">
+            <a:solidFill>
+              <a:prstClr val="black"/>
+            </a:solidFill>
+          </a:ln>
+        </p:spPr>
+        <p:txBody>
+          <a:bodyPr vert="horz" lIns="91440" tIns="45720" rIns="91440" bIns="45720" rtlCol="0" anchor="ctr"/>
+          <a:lstStyle/>
+          <a:p>
+            <a:endParaRPr lang="es-ES"/>
+          </a:p>
+        </p:txBody>
+      </p:sp>
+      <p:sp>
+        <p:nvSpPr>
+          <p:cNvPr id="5" name="Marcador de notas 4"/>
+          <p:cNvSpPr>
+            <a:spLocks noGrp="1"/>
+          </p:cNvSpPr>
+          <p:nvPr>
+            <p:ph type="body" sz="quarter" idx="3"/>
+          </p:nvPr>
+        </p:nvSpPr>
+        <p:spPr>
+          <a:xfrm>
+            <a:off x="685800" y="4400550"/>
+            <a:ext cx="5486400" cy="3600450"/>
+          </a:xfrm>
+          <a:prstGeom prst="rect">
+            <a:avLst/>
+          </a:prstGeom>
+        </p:spPr>
+        <p:txBody>
+          <a:bodyPr vert="horz" lIns="91440" tIns="45720" rIns="91440" bIns="45720" rtlCol="0"/>
+          <a:lstStyle/>
+          <a:p>
+            <a:pPr lvl="0"/>
+            <a:r>
+              <a:rPr lang="es-ES"/>
+              <a:t>Haga clic para modificar los estilos de texto del patrón</a:t>
+            </a:r>
+          </a:p>
+          <a:p>
+            <a:pPr lvl="1"/>
+            <a:r>
+              <a:rPr lang="es-ES"/>
+              <a:t>Segundo nivel</a:t>
+            </a:r>
+          </a:p>
+          <a:p>
+            <a:pPr lvl="2"/>
+            <a:r>
+              <a:rPr lang="es-ES"/>
+              <a:t>Tercer nivel</a:t>
+            </a:r>
+          </a:p>
+          <a:p>
+            <a:pPr lvl="3"/>
+            <a:r>
+              <a:rPr lang="es-ES"/>
+              <a:t>Cuarto nivel</a:t>
+            </a:r>
+          </a:p>
+          <a:p>
+            <a:pPr lvl="4"/>
+            <a:r>
+              <a:rPr lang="es-ES"/>
+              <a:t>Quinto nivel</a:t>
+            </a:r>
+          </a:p>
+        </p:txBody>
+      </p:sp>
+      <p:sp>
+        <p:nvSpPr>
+          <p:cNvPr id="6" name="Marcador de pie de página 5"/>
+          <p:cNvSpPr>
+            <a:spLocks noGrp="1"/>
+          </p:cNvSpPr>
+          <p:nvPr>
+            <p:ph type="ftr" sz="quarter" idx="4"/>
+          </p:nvPr>
+        </p:nvSpPr>
+        <p:spPr>
+          <a:xfrm>
+            <a:off x="0" y="8685213"/>
+            <a:ext cx="2971800" cy="458787"/>
+          </a:xfrm>
+          <a:prstGeom prst="rect">
+            <a:avLst/>
+          </a:prstGeom>
+        </p:spPr>
+        <p:txBody>
+          <a:bodyPr vert="horz" lIns="91440" tIns="45720" rIns="91440" bIns="45720" rtlCol="0" anchor="b"/>
+          <a:lstStyle>
+            <a:lvl1pPr algn="l">
+              <a:defRPr sz="1200"/>
+            </a:lvl1pPr>
+          </a:lstStyle>
+          <a:p>
+            <a:endParaRPr lang="es-ES"/>
+          </a:p>
+        </p:txBody>
+      </p:sp>
+      <p:sp>
+        <p:nvSpPr>
+          <p:cNvPr id="7" name="Marcador de número de diapositiva 6"/>
+          <p:cNvSpPr>
+            <a:spLocks noGrp="1"/>
+          </p:cNvSpPr>
+          <p:nvPr>
+            <p:ph type="sldNum" sz="quarter" idx="5"/>
+          </p:nvPr>
+        </p:nvSpPr>
+        <p:spPr>
+          <a:xfrm>
+            <a:off x="3884613" y="8685213"/>
+            <a:ext cx="2971800" cy="458787"/>
+          </a:xfrm>
+          <a:prstGeom prst="rect">
+            <a:avLst/>
+          </a:prstGeom>
+        </p:spPr>
+        <p:txBody>
+          <a:bodyPr vert="horz" lIns="91440" tIns="45720" rIns="91440" bIns="45720" rtlCol="0" anchor="b"/>
+          <a:lstStyle>
+            <a:lvl1pPr algn="r">
+              <a:defRPr sz="1200"/>
+            </a:lvl1pPr>
+          </a:lstStyle>
+          <a:p>
+            <a:fld id="{8B8AD62F-FB3F-5643-A016-D6A8B7C9C1C4}" type="slidenum">
+              <a:rPr lang="es-ES" smtClean="0"/>
+              <a:t>‹Nº›</a:t>
+            </a:fld>
+            <a:endParaRPr lang="es-ES"/>
+          </a:p>
+        </p:txBody>
+      </p:sp>
+    </p:spTree>
+    <p:extLst>
+      <p:ext uri="{BB962C8B-B14F-4D97-AF65-F5344CB8AC3E}">
+        <p14:creationId xmlns:p14="http://schemas.microsoft.com/office/powerpoint/2010/main" val="3470198231"/>
+      </p:ext>
+    </p:extLst>
+  </p:cSld>
+  <p:clrMap bg1="lt1" tx1="dk1" bg2="lt2" tx2="dk2" accent1="accent1" accent2="accent2" accent3="accent3" accent4="accent4" accent5="accent5" accent6="accent6" hlink="hlink" folHlink="folHlink"/>
+  <p:notesStyle>
+    <a:lvl1pPr marL="0" algn="l" defTabSz="914400" rtl="0" eaLnBrk="1" latinLnBrk="0" hangingPunct="1">
+      <a:defRPr sz="1200" kern="1200">
+        <a:solidFill>
+          <a:schemeClr val="tx1"/>
+        </a:solidFill>
+        <a:latin typeface="+mn-lt"/>
+        <a:ea typeface="+mn-ea"/>
+        <a:cs typeface="+mn-cs"/>
+      </a:defRPr>
+    </a:lvl1pPr>
+    <a:lvl2pPr marL="457200" algn="l" defTabSz="914400" rtl="0" eaLnBrk="1" latinLnBrk="0" hangingPunct="1">
+      <a:defRPr sz="1200" kern="1200">
+        <a:solidFill>
+          <a:schemeClr val="tx1"/>
+        </a:solidFill>
+        <a:latin typeface="+mn-lt"/>
+        <a:ea typeface="+mn-ea"/>
+        <a:cs typeface="+mn-cs"/>
+      </a:defRPr>
+    </a:lvl2pPr>
+    <a:lvl3pPr marL="914400" algn="l" defTabSz="914400" rtl="0" eaLnBrk="1" latinLnBrk="0" hangingPunct="1">
+      <a:defRPr sz="1200" kern="1200">
+        <a:solidFill>
+          <a:schemeClr val="tx1"/>
+        </a:solidFill>
+        <a:latin typeface="+mn-lt"/>
+        <a:ea typeface="+mn-ea"/>
+        <a:cs typeface="+mn-cs"/>
+      </a:defRPr>
+    </a:lvl3pPr>
+    <a:lvl4pPr marL="1371600" algn="l" defTabSz="914400" rtl="0" eaLnBrk="1" latinLnBrk="0" hangingPunct="1">
+      <a:defRPr sz="1200" kern="1200">
+        <a:solidFill>
+          <a:schemeClr val="tx1"/>
+        </a:solidFill>
+        <a:latin typeface="+mn-lt"/>
+        <a:ea typeface="+mn-ea"/>
+        <a:cs typeface="+mn-cs"/>
+      </a:defRPr>
+    </a:lvl4pPr>
+    <a:lvl5pPr marL="1828800" algn="l" defTabSz="914400" rtl="0" eaLnBrk="1" latinLnBrk="0" hangingPunct="1">
+      <a:defRPr sz="1200" kern="1200">
+        <a:solidFill>
+          <a:schemeClr val="tx1"/>
+        </a:solidFill>
+        <a:latin typeface="+mn-lt"/>
+        <a:ea typeface="+mn-ea"/>
+        <a:cs typeface="+mn-cs"/>
+      </a:defRPr>
+    </a:lvl5pPr>
+    <a:lvl6pPr marL="2286000" algn="l" defTabSz="914400" rtl="0" eaLnBrk="1" latinLnBrk="0" hangingPunct="1">
+      <a:defRPr sz="1200" kern="1200">
+        <a:solidFill>
+          <a:schemeClr val="tx1"/>
+        </a:solidFill>
+        <a:latin typeface="+mn-lt"/>
+        <a:ea typeface="+mn-ea"/>
+        <a:cs typeface="+mn-cs"/>
+      </a:defRPr>
+    </a:lvl6pPr>
+    <a:lvl7pPr marL="2743200" algn="l" defTabSz="914400" rtl="0" eaLnBrk="1" latinLnBrk="0" hangingPunct="1">
+      <a:defRPr sz="1200" kern="1200">
+        <a:solidFill>
+          <a:schemeClr val="tx1"/>
+        </a:solidFill>
+        <a:latin typeface="+mn-lt"/>
+        <a:ea typeface="+mn-ea"/>
+        <a:cs typeface="+mn-cs"/>
+      </a:defRPr>
+    </a:lvl7pPr>
+    <a:lvl8pPr marL="3200400" algn="l" defTabSz="914400" rtl="0" eaLnBrk="1" latinLnBrk="0" hangingPunct="1">
+      <a:defRPr sz="1200" kern="1200">
+        <a:solidFill>
+          <a:schemeClr val="tx1"/>
+        </a:solidFill>
+        <a:latin typeface="+mn-lt"/>
+        <a:ea typeface="+mn-ea"/>
+        <a:cs typeface="+mn-cs"/>
+      </a:defRPr>
+    </a:lvl8pPr>
+    <a:lvl9pPr marL="3657600" algn="l" defTabSz="914400" rtl="0" eaLnBrk="1" latinLnBrk="0" hangingPunct="1">
+      <a:defRPr sz="1200" kern="1200">
+        <a:solidFill>
+          <a:schemeClr val="tx1"/>
+        </a:solidFill>
+        <a:latin typeface="+mn-lt"/>
+        <a:ea typeface="+mn-ea"/>
+        <a:cs typeface="+mn-cs"/>
+      </a:defRPr>
+    </a:lvl9pPr>
+  </p:notesStyle>
+</p:notesMaster>
+</file>
+
+<file path=ppt/notesSlides/notesSlide1.xml><?xml version="1.0" encoding="utf-8"?>
+<p:notes xmlns:a="http://schemas.openxmlformats.org/drawingml/2006/main" xmlns:r="http://schemas.openxmlformats.org/officeDocument/2006/relationships" xmlns:p="http://schemas.openxmlformats.org/presentationml/2006/main">
+  <p:cSld>
+    <p:spTree>
+      <p:nvGrpSpPr>
+        <p:cNvPr id="1" name=""/>
+        <p:cNvGrpSpPr/>
+        <p:nvPr/>
+      </p:nvGrpSpPr>
+      <p:grpSpPr>
+        <a:xfrm>
+          <a:off x="0" y="0"/>
+          <a:ext cx="0" cy="0"/>
+          <a:chOff x="0" y="0"/>
+          <a:chExt cx="0" cy="0"/>
+        </a:xfrm>
+      </p:grpSpPr>
+      <p:sp>
+        <p:nvSpPr>
+          <p:cNvPr id="2" name="Marcador de imagen de diapositiva 1"/>
+          <p:cNvSpPr>
+            <a:spLocks noGrp="1" noRot="1" noChangeAspect="1"/>
+          </p:cNvSpPr>
+          <p:nvPr>
+            <p:ph type="sldImg"/>
+          </p:nvPr>
+        </p:nvSpPr>
+        <p:spPr/>
+      </p:sp>
+      <p:sp>
+        <p:nvSpPr>
+          <p:cNvPr id="3" name="Marcador de notas 2"/>
+          <p:cNvSpPr>
+            <a:spLocks noGrp="1"/>
+          </p:cNvSpPr>
+          <p:nvPr>
+            <p:ph type="body" idx="1"/>
+          </p:nvPr>
+        </p:nvSpPr>
+        <p:spPr/>
+        <p:txBody>
+          <a:bodyPr/>
+          <a:lstStyle/>
+          <a:p>
+            <a:endParaRPr lang="es-ES" dirty="0"/>
+          </a:p>
+        </p:txBody>
+      </p:sp>
+      <p:sp>
+        <p:nvSpPr>
+          <p:cNvPr id="4" name="Marcador de número de diapositiva 3"/>
+          <p:cNvSpPr>
+            <a:spLocks noGrp="1"/>
+          </p:cNvSpPr>
+          <p:nvPr>
+            <p:ph type="sldNum" sz="quarter" idx="5"/>
+          </p:nvPr>
+        </p:nvSpPr>
+        <p:spPr/>
+        <p:txBody>
+          <a:bodyPr/>
+          <a:lstStyle/>
+          <a:p>
+            <a:fld id="{8B8AD62F-FB3F-5643-A016-D6A8B7C9C1C4}" type="slidenum">
+              <a:rPr lang="es-ES" smtClean="0"/>
+              <a:t>1</a:t>
+            </a:fld>
+            <a:endParaRPr lang="es-ES"/>
+          </a:p>
+        </p:txBody>
+      </p:sp>
+    </p:spTree>
+    <p:extLst>
+      <p:ext uri="{BB962C8B-B14F-4D97-AF65-F5344CB8AC3E}">
+        <p14:creationId xmlns:p14="http://schemas.microsoft.com/office/powerpoint/2010/main" val="1924924292"/>
+      </p:ext>
+    </p:extLst>
+  </p:cSld>
+  <p:clrMapOvr>
+    <a:masterClrMapping/>
+  </p:clrMapOvr>
+</p:notes>
 </file>
 
 <file path=ppt/slideLayouts/slideLayout1.xml><?xml version="1.0" encoding="utf-8"?>
@@ -9778,7 +10237,7 @@
                 <a:avLst/>
               </a:prstGeom>
               <a:blipFill>
-                <a:blip r:embed="rId2"/>
+                <a:blip r:embed="rId3"/>
                 <a:stretch>
                   <a:fillRect/>
                 </a:stretch>
@@ -9976,7 +10435,7 @@
                 <a:avLst/>
               </a:prstGeom>
               <a:blipFill>
-                <a:blip r:embed="rId3"/>
+                <a:blip r:embed="rId4"/>
                 <a:stretch>
                   <a:fillRect/>
                 </a:stretch>
@@ -10535,7 +10994,7 @@
                 <a:avLst/>
               </a:prstGeom>
               <a:blipFill>
-                <a:blip r:embed="rId4"/>
+                <a:blip r:embed="rId5"/>
                 <a:stretch>
                   <a:fillRect/>
                 </a:stretch>
@@ -10556,508 +11015,346 @@
           </p:sp>
         </mc:Fallback>
       </mc:AlternateContent>
-      <p:sp>
-        <p:nvSpPr>
-          <p:cNvPr id="50" name="TextBox 49">
-            <a:extLst>
-              <a:ext uri="{FF2B5EF4-FFF2-40B4-BE49-F238E27FC236}">
-                <a16:creationId xmlns:a16="http://schemas.microsoft.com/office/drawing/2014/main" id="{79C029F1-D5E2-A842-A19B-DC4969111E24}"/>
-              </a:ext>
-            </a:extLst>
-          </p:cNvPr>
-          <p:cNvSpPr txBox="1"/>
-          <p:nvPr/>
-        </p:nvSpPr>
-        <p:spPr>
-          <a:xfrm>
-            <a:off x="7873433" y="3596455"/>
-            <a:ext cx="2597105" cy="356444"/>
-          </a:xfrm>
-          <a:prstGeom prst="rect">
-            <a:avLst/>
-          </a:prstGeom>
-          <a:noFill/>
-        </p:spPr>
-        <p:txBody>
-          <a:bodyPr wrap="square" rtlCol="0">
-            <a:spAutoFit/>
-          </a:bodyPr>
-          <a:lstStyle/>
-          <a:p>
-            <a:pPr defTabSz="780653"/>
-            <a:r>
-              <a:rPr lang="en-US" sz="572" dirty="0">
-                <a:solidFill>
-                  <a:prstClr val="black"/>
-                </a:solidFill>
-                <a:latin typeface="Arial" panose="020B0604020202020204" pitchFamily="34" charset="0"/>
-                <a:cs typeface="Arial" panose="020B0604020202020204" pitchFamily="34" charset="0"/>
-              </a:rPr>
-              <a:t>Ga. Ro </a:t>
-            </a:r>
-            <a:r>
-              <a:rPr lang="en-US" sz="572" dirty="0" err="1">
-                <a:solidFill>
-                  <a:prstClr val="black"/>
-                </a:solidFill>
-                <a:latin typeface="Arial" panose="020B0604020202020204" pitchFamily="34" charset="0"/>
-                <a:cs typeface="Arial" panose="020B0604020202020204" pitchFamily="34" charset="0"/>
-              </a:rPr>
-              <a:t>ium</a:t>
-            </a:r>
-            <a:r>
-              <a:rPr lang="en-US" sz="572" dirty="0">
-                <a:solidFill>
-                  <a:prstClr val="black"/>
-                </a:solidFill>
-                <a:latin typeface="Arial" panose="020B0604020202020204" pitchFamily="34" charset="0"/>
-                <a:cs typeface="Arial" panose="020B0604020202020204" pitchFamily="34" charset="0"/>
-              </a:rPr>
-              <a:t> </a:t>
-            </a:r>
-            <a:r>
-              <a:rPr lang="en-US" sz="572" dirty="0" err="1">
-                <a:solidFill>
-                  <a:prstClr val="black"/>
-                </a:solidFill>
-                <a:latin typeface="Arial" panose="020B0604020202020204" pitchFamily="34" charset="0"/>
-                <a:cs typeface="Arial" panose="020B0604020202020204" pitchFamily="34" charset="0"/>
-              </a:rPr>
-              <a:t>versperum</a:t>
-            </a:r>
-            <a:r>
-              <a:rPr lang="en-US" sz="572" dirty="0">
-                <a:solidFill>
-                  <a:prstClr val="black"/>
-                </a:solidFill>
-                <a:latin typeface="Arial" panose="020B0604020202020204" pitchFamily="34" charset="0"/>
-                <a:cs typeface="Arial" panose="020B0604020202020204" pitchFamily="34" charset="0"/>
-              </a:rPr>
-              <a:t> re </a:t>
-            </a:r>
-            <a:r>
-              <a:rPr lang="en-US" sz="572" dirty="0" err="1">
-                <a:solidFill>
-                  <a:prstClr val="black"/>
-                </a:solidFill>
-                <a:latin typeface="Arial" panose="020B0604020202020204" pitchFamily="34" charset="0"/>
-                <a:cs typeface="Arial" panose="020B0604020202020204" pitchFamily="34" charset="0"/>
-              </a:rPr>
-              <a:t>aut</a:t>
-            </a:r>
-            <a:r>
-              <a:rPr lang="en-US" sz="572" dirty="0">
-                <a:solidFill>
-                  <a:prstClr val="black"/>
-                </a:solidFill>
-                <a:latin typeface="Arial" panose="020B0604020202020204" pitchFamily="34" charset="0"/>
-                <a:cs typeface="Arial" panose="020B0604020202020204" pitchFamily="34" charset="0"/>
-              </a:rPr>
-              <a:t> </a:t>
-            </a:r>
-            <a:r>
-              <a:rPr lang="en-US" sz="572" dirty="0" err="1">
-                <a:solidFill>
-                  <a:prstClr val="black"/>
-                </a:solidFill>
-                <a:latin typeface="Arial" panose="020B0604020202020204" pitchFamily="34" charset="0"/>
-                <a:cs typeface="Arial" panose="020B0604020202020204" pitchFamily="34" charset="0"/>
-              </a:rPr>
-              <a:t>omnienderi</a:t>
-            </a:r>
-            <a:r>
-              <a:rPr lang="en-US" sz="572" dirty="0">
-                <a:solidFill>
-                  <a:prstClr val="black"/>
-                </a:solidFill>
-                <a:latin typeface="Arial" panose="020B0604020202020204" pitchFamily="34" charset="0"/>
-                <a:cs typeface="Arial" panose="020B0604020202020204" pitchFamily="34" charset="0"/>
-              </a:rPr>
-              <a:t> </a:t>
-            </a:r>
-            <a:r>
-              <a:rPr lang="en-US" sz="572" dirty="0" err="1">
-                <a:solidFill>
-                  <a:prstClr val="black"/>
-                </a:solidFill>
-                <a:latin typeface="Arial" panose="020B0604020202020204" pitchFamily="34" charset="0"/>
-                <a:cs typeface="Arial" panose="020B0604020202020204" pitchFamily="34" charset="0"/>
-              </a:rPr>
-              <a:t>sinvele</a:t>
-            </a:r>
-            <a:r>
-              <a:rPr lang="en-US" sz="572" dirty="0">
-                <a:solidFill>
-                  <a:prstClr val="black"/>
-                </a:solidFill>
-                <a:latin typeface="Arial" panose="020B0604020202020204" pitchFamily="34" charset="0"/>
-                <a:cs typeface="Arial" panose="020B0604020202020204" pitchFamily="34" charset="0"/>
-              </a:rPr>
-              <a:t> </a:t>
-            </a:r>
-            <a:r>
-              <a:rPr lang="en-US" sz="572" dirty="0" err="1">
-                <a:solidFill>
-                  <a:prstClr val="black"/>
-                </a:solidFill>
-                <a:latin typeface="Arial" panose="020B0604020202020204" pitchFamily="34" charset="0"/>
-                <a:cs typeface="Arial" panose="020B0604020202020204" pitchFamily="34" charset="0"/>
-              </a:rPr>
-              <a:t>stiam</a:t>
-            </a:r>
-            <a:r>
-              <a:rPr lang="en-US" sz="572" dirty="0">
-                <a:solidFill>
-                  <a:prstClr val="black"/>
-                </a:solidFill>
-                <a:latin typeface="Arial" panose="020B0604020202020204" pitchFamily="34" charset="0"/>
-                <a:cs typeface="Arial" panose="020B0604020202020204" pitchFamily="34" charset="0"/>
-              </a:rPr>
-              <a:t>, </a:t>
-            </a:r>
-            <a:r>
-              <a:rPr lang="en-US" sz="572" dirty="0" err="1">
-                <a:solidFill>
-                  <a:prstClr val="black"/>
-                </a:solidFill>
-                <a:latin typeface="Arial" panose="020B0604020202020204" pitchFamily="34" charset="0"/>
-                <a:cs typeface="Arial" panose="020B0604020202020204" pitchFamily="34" charset="0"/>
-              </a:rPr>
-              <a:t>cus</a:t>
-            </a:r>
-            <a:r>
-              <a:rPr lang="en-US" sz="572" dirty="0">
-                <a:solidFill>
-                  <a:prstClr val="black"/>
-                </a:solidFill>
-                <a:latin typeface="Arial" panose="020B0604020202020204" pitchFamily="34" charset="0"/>
-                <a:cs typeface="Arial" panose="020B0604020202020204" pitchFamily="34" charset="0"/>
-              </a:rPr>
-              <a:t> </a:t>
-            </a:r>
-            <a:r>
-              <a:rPr lang="en-US" sz="572" dirty="0" err="1">
-                <a:solidFill>
-                  <a:prstClr val="black"/>
-                </a:solidFill>
-                <a:latin typeface="Arial" panose="020B0604020202020204" pitchFamily="34" charset="0"/>
-                <a:cs typeface="Arial" panose="020B0604020202020204" pitchFamily="34" charset="0"/>
-              </a:rPr>
-              <a:t>eos</a:t>
-            </a:r>
-            <a:r>
-              <a:rPr lang="en-US" sz="572" dirty="0">
-                <a:solidFill>
-                  <a:prstClr val="black"/>
-                </a:solidFill>
-                <a:latin typeface="Arial" panose="020B0604020202020204" pitchFamily="34" charset="0"/>
-                <a:cs typeface="Arial" panose="020B0604020202020204" pitchFamily="34" charset="0"/>
-              </a:rPr>
-              <a:t> </a:t>
-            </a:r>
-            <a:r>
-              <a:rPr lang="en-US" sz="572" dirty="0" err="1">
-                <a:solidFill>
-                  <a:prstClr val="black"/>
-                </a:solidFill>
-                <a:latin typeface="Arial" panose="020B0604020202020204" pitchFamily="34" charset="0"/>
-                <a:cs typeface="Arial" panose="020B0604020202020204" pitchFamily="34" charset="0"/>
-              </a:rPr>
-              <a:t>sime</a:t>
-            </a:r>
-            <a:r>
-              <a:rPr lang="en-US" sz="572" dirty="0">
-                <a:solidFill>
-                  <a:prstClr val="black"/>
-                </a:solidFill>
-                <a:latin typeface="Arial" panose="020B0604020202020204" pitchFamily="34" charset="0"/>
-                <a:cs typeface="Arial" panose="020B0604020202020204" pitchFamily="34" charset="0"/>
-              </a:rPr>
-              <a:t> </a:t>
-            </a:r>
-            <a:r>
-              <a:rPr lang="en-US" sz="572" dirty="0" err="1">
-                <a:solidFill>
-                  <a:prstClr val="black"/>
-                </a:solidFill>
-                <a:latin typeface="Arial" panose="020B0604020202020204" pitchFamily="34" charset="0"/>
-                <a:cs typeface="Arial" panose="020B0604020202020204" pitchFamily="34" charset="0"/>
-              </a:rPr>
-              <a:t>sed</a:t>
-            </a:r>
-            <a:r>
-              <a:rPr lang="en-US" sz="572" dirty="0">
-                <a:solidFill>
-                  <a:prstClr val="black"/>
-                </a:solidFill>
-                <a:latin typeface="Arial" panose="020B0604020202020204" pitchFamily="34" charset="0"/>
-                <a:cs typeface="Arial" panose="020B0604020202020204" pitchFamily="34" charset="0"/>
-              </a:rPr>
-              <a:t> que </a:t>
-            </a:r>
-            <a:r>
-              <a:rPr lang="en-US" sz="572" dirty="0" err="1">
-                <a:solidFill>
-                  <a:prstClr val="black"/>
-                </a:solidFill>
-                <a:latin typeface="Arial" panose="020B0604020202020204" pitchFamily="34" charset="0"/>
-                <a:cs typeface="Arial" panose="020B0604020202020204" pitchFamily="34" charset="0"/>
-              </a:rPr>
-              <a:t>occupta</a:t>
-            </a:r>
-            <a:r>
-              <a:rPr lang="en-US" sz="572" dirty="0">
-                <a:solidFill>
-                  <a:prstClr val="black"/>
-                </a:solidFill>
-                <a:latin typeface="Arial" panose="020B0604020202020204" pitchFamily="34" charset="0"/>
-                <a:cs typeface="Arial" panose="020B0604020202020204" pitchFamily="34" charset="0"/>
-              </a:rPr>
-              <a:t> </a:t>
-            </a:r>
-            <a:r>
-              <a:rPr lang="en-US" sz="572" dirty="0" err="1">
-                <a:solidFill>
-                  <a:prstClr val="black"/>
-                </a:solidFill>
-                <a:latin typeface="Arial" panose="020B0604020202020204" pitchFamily="34" charset="0"/>
-                <a:cs typeface="Arial" panose="020B0604020202020204" pitchFamily="34" charset="0"/>
-              </a:rPr>
-              <a:t>temquia</a:t>
-            </a:r>
-            <a:r>
-              <a:rPr lang="en-US" sz="572" dirty="0">
-                <a:solidFill>
-                  <a:prstClr val="black"/>
-                </a:solidFill>
-                <a:latin typeface="Arial" panose="020B0604020202020204" pitchFamily="34" charset="0"/>
-                <a:cs typeface="Arial" panose="020B0604020202020204" pitchFamily="34" charset="0"/>
-              </a:rPr>
-              <a:t> </a:t>
-            </a:r>
-            <a:r>
-              <a:rPr lang="en-US" sz="572" dirty="0" err="1">
-                <a:solidFill>
-                  <a:prstClr val="black"/>
-                </a:solidFill>
-                <a:latin typeface="Arial" panose="020B0604020202020204" pitchFamily="34" charset="0"/>
-                <a:cs typeface="Arial" panose="020B0604020202020204" pitchFamily="34" charset="0"/>
-              </a:rPr>
-              <a:t>nobisciur</a:t>
-            </a:r>
-            <a:r>
-              <a:rPr lang="en-US" sz="572" dirty="0">
-                <a:solidFill>
-                  <a:prstClr val="black"/>
-                </a:solidFill>
-                <a:latin typeface="Arial" panose="020B0604020202020204" pitchFamily="34" charset="0"/>
-                <a:cs typeface="Arial" panose="020B0604020202020204" pitchFamily="34" charset="0"/>
-              </a:rPr>
-              <a:t>? </a:t>
-            </a:r>
-            <a:r>
-              <a:rPr lang="en-US" sz="572" dirty="0" err="1">
-                <a:solidFill>
-                  <a:prstClr val="black"/>
-                </a:solidFill>
-                <a:latin typeface="Arial" panose="020B0604020202020204" pitchFamily="34" charset="0"/>
-                <a:cs typeface="Arial" panose="020B0604020202020204" pitchFamily="34" charset="0"/>
-              </a:rPr>
-              <a:t>Quis</a:t>
-            </a:r>
-            <a:r>
-              <a:rPr lang="en-US" sz="572" dirty="0">
-                <a:solidFill>
-                  <a:prstClr val="black"/>
-                </a:solidFill>
-                <a:latin typeface="Arial" panose="020B0604020202020204" pitchFamily="34" charset="0"/>
-                <a:cs typeface="Arial" panose="020B0604020202020204" pitchFamily="34" charset="0"/>
-              </a:rPr>
-              <a:t> </a:t>
-            </a:r>
-            <a:r>
-              <a:rPr lang="en-US" sz="572" dirty="0" err="1">
-                <a:solidFill>
-                  <a:prstClr val="black"/>
-                </a:solidFill>
-                <a:latin typeface="Arial" panose="020B0604020202020204" pitchFamily="34" charset="0"/>
-                <a:cs typeface="Arial" panose="020B0604020202020204" pitchFamily="34" charset="0"/>
-              </a:rPr>
-              <a:t>dolenem</a:t>
-            </a:r>
-            <a:r>
-              <a:rPr lang="en-US" sz="572" dirty="0">
-                <a:solidFill>
-                  <a:prstClr val="black"/>
-                </a:solidFill>
-                <a:latin typeface="Arial" panose="020B0604020202020204" pitchFamily="34" charset="0"/>
-                <a:cs typeface="Arial" panose="020B0604020202020204" pitchFamily="34" charset="0"/>
-              </a:rPr>
-              <a:t> </a:t>
-            </a:r>
-            <a:r>
-              <a:rPr lang="en-US" sz="572" dirty="0" err="1">
-                <a:solidFill>
-                  <a:prstClr val="black"/>
-                </a:solidFill>
-                <a:latin typeface="Arial" panose="020B0604020202020204" pitchFamily="34" charset="0"/>
-                <a:cs typeface="Arial" panose="020B0604020202020204" pitchFamily="34" charset="0"/>
-              </a:rPr>
-              <a:t>oluptam</a:t>
-            </a:r>
-            <a:r>
-              <a:rPr lang="en-US" sz="572" dirty="0">
-                <a:solidFill>
-                  <a:prstClr val="black"/>
-                </a:solidFill>
-                <a:latin typeface="Arial" panose="020B0604020202020204" pitchFamily="34" charset="0"/>
-                <a:cs typeface="Arial" panose="020B0604020202020204" pitchFamily="34" charset="0"/>
-              </a:rPr>
-              <a:t> ne </a:t>
-            </a:r>
-            <a:r>
-              <a:rPr lang="en-US" sz="572" dirty="0" err="1">
-                <a:solidFill>
-                  <a:prstClr val="black"/>
-                </a:solidFill>
-                <a:latin typeface="Arial" panose="020B0604020202020204" pitchFamily="34" charset="0"/>
-                <a:cs typeface="Arial" panose="020B0604020202020204" pitchFamily="34" charset="0"/>
-              </a:rPr>
-              <a:t>nonessumqui</a:t>
-            </a:r>
-            <a:r>
-              <a:rPr lang="en-US" sz="572" dirty="0">
-                <a:solidFill>
-                  <a:prstClr val="black"/>
-                </a:solidFill>
-                <a:latin typeface="Arial" panose="020B0604020202020204" pitchFamily="34" charset="0"/>
-                <a:cs typeface="Arial" panose="020B0604020202020204" pitchFamily="34" charset="0"/>
-              </a:rPr>
-              <a:t> </a:t>
-            </a:r>
-            <a:r>
-              <a:rPr lang="en-US" sz="572" dirty="0" err="1">
-                <a:solidFill>
-                  <a:prstClr val="black"/>
-                </a:solidFill>
-                <a:latin typeface="Arial" panose="020B0604020202020204" pitchFamily="34" charset="0"/>
-                <a:cs typeface="Arial" panose="020B0604020202020204" pitchFamily="34" charset="0"/>
-              </a:rPr>
-              <a:t>doluptatem</a:t>
-            </a:r>
-            <a:r>
-              <a:rPr lang="en-US" sz="572" dirty="0">
-                <a:solidFill>
-                  <a:prstClr val="black"/>
-                </a:solidFill>
-                <a:latin typeface="Arial" panose="020B0604020202020204" pitchFamily="34" charset="0"/>
-                <a:cs typeface="Arial" panose="020B0604020202020204" pitchFamily="34" charset="0"/>
-              </a:rPr>
-              <a:t> </a:t>
-            </a:r>
-            <a:r>
-              <a:rPr lang="en-US" sz="572" dirty="0" err="1">
-                <a:solidFill>
-                  <a:prstClr val="black"/>
-                </a:solidFill>
-                <a:latin typeface="Arial" panose="020B0604020202020204" pitchFamily="34" charset="0"/>
-                <a:cs typeface="Arial" panose="020B0604020202020204" pitchFamily="34" charset="0"/>
-              </a:rPr>
-              <a:t>exeribus</a:t>
-            </a:r>
-            <a:r>
-              <a:rPr lang="en-US" sz="572" dirty="0">
-                <a:solidFill>
-                  <a:prstClr val="black"/>
-                </a:solidFill>
-                <a:latin typeface="Arial" panose="020B0604020202020204" pitchFamily="34" charset="0"/>
-                <a:cs typeface="Arial" panose="020B0604020202020204" pitchFamily="34" charset="0"/>
-              </a:rPr>
-              <a:t> id </a:t>
-            </a:r>
-            <a:r>
-              <a:rPr lang="en-US" sz="572" dirty="0" err="1">
-                <a:solidFill>
-                  <a:prstClr val="black"/>
-                </a:solidFill>
-                <a:latin typeface="Arial" panose="020B0604020202020204" pitchFamily="34" charset="0"/>
-                <a:cs typeface="Arial" panose="020B0604020202020204" pitchFamily="34" charset="0"/>
-              </a:rPr>
-              <a:t>eveliquam</a:t>
-            </a:r>
-            <a:r>
-              <a:rPr lang="en-US" sz="572" dirty="0">
-                <a:solidFill>
-                  <a:prstClr val="black"/>
-                </a:solidFill>
-                <a:latin typeface="Arial" panose="020B0604020202020204" pitchFamily="34" charset="0"/>
-                <a:cs typeface="Arial" panose="020B0604020202020204" pitchFamily="34" charset="0"/>
-              </a:rPr>
-              <a:t> qui </a:t>
-            </a:r>
-            <a:r>
-              <a:rPr lang="en-US" sz="572" dirty="0" err="1">
-                <a:solidFill>
-                  <a:prstClr val="black"/>
-                </a:solidFill>
-                <a:latin typeface="Arial" panose="020B0604020202020204" pitchFamily="34" charset="0"/>
-                <a:cs typeface="Arial" panose="020B0604020202020204" pitchFamily="34" charset="0"/>
-              </a:rPr>
-              <a:t>nisqui</a:t>
-            </a:r>
-            <a:r>
-              <a:rPr lang="en-US" sz="572" dirty="0">
-                <a:solidFill>
-                  <a:prstClr val="black"/>
-                </a:solidFill>
-                <a:latin typeface="Arial" panose="020B0604020202020204" pitchFamily="34" charset="0"/>
-                <a:cs typeface="Arial" panose="020B0604020202020204" pitchFamily="34" charset="0"/>
-              </a:rPr>
-              <a:t> </a:t>
-            </a:r>
-            <a:r>
-              <a:rPr lang="en-US" sz="572" dirty="0" err="1">
-                <a:solidFill>
-                  <a:prstClr val="black"/>
-                </a:solidFill>
-                <a:latin typeface="Arial" panose="020B0604020202020204" pitchFamily="34" charset="0"/>
-                <a:cs typeface="Arial" panose="020B0604020202020204" pitchFamily="34" charset="0"/>
-              </a:rPr>
-              <a:t>atet</a:t>
-            </a:r>
-            <a:r>
-              <a:rPr lang="en-US" sz="572" dirty="0">
-                <a:solidFill>
-                  <a:prstClr val="black"/>
-                </a:solidFill>
-                <a:latin typeface="Arial" panose="020B0604020202020204" pitchFamily="34" charset="0"/>
-                <a:cs typeface="Arial" panose="020B0604020202020204" pitchFamily="34" charset="0"/>
-              </a:rPr>
-              <a:t> </a:t>
-            </a:r>
-            <a:r>
-              <a:rPr lang="en-US" sz="572" dirty="0" err="1">
-                <a:solidFill>
-                  <a:prstClr val="black"/>
-                </a:solidFill>
-                <a:latin typeface="Arial" panose="020B0604020202020204" pitchFamily="34" charset="0"/>
-                <a:cs typeface="Arial" panose="020B0604020202020204" pitchFamily="34" charset="0"/>
-              </a:rPr>
-              <a:t>eiciunt</a:t>
-            </a:r>
-            <a:r>
-              <a:rPr lang="en-US" sz="572" dirty="0">
-                <a:solidFill>
-                  <a:prstClr val="black"/>
-                </a:solidFill>
-                <a:latin typeface="Arial" panose="020B0604020202020204" pitchFamily="34" charset="0"/>
-                <a:cs typeface="Arial" panose="020B0604020202020204" pitchFamily="34" charset="0"/>
-              </a:rPr>
-              <a:t>.</a:t>
-            </a:r>
-          </a:p>
-        </p:txBody>
-      </p:sp>
+      <mc:AlternateContent xmlns:mc="http://schemas.openxmlformats.org/markup-compatibility/2006">
+        <mc:Choice xmlns:a14="http://schemas.microsoft.com/office/drawing/2010/main" Requires="a14">
+          <p:sp>
+            <p:nvSpPr>
+              <p:cNvPr id="50" name="TextBox 49">
+                <a:extLst>
+                  <a:ext uri="{FF2B5EF4-FFF2-40B4-BE49-F238E27FC236}">
+                    <a16:creationId xmlns:a16="http://schemas.microsoft.com/office/drawing/2014/main" id="{79C029F1-D5E2-A842-A19B-DC4969111E24}"/>
+                  </a:ext>
+                </a:extLst>
+              </p:cNvPr>
+              <p:cNvSpPr txBox="1"/>
+              <p:nvPr/>
+            </p:nvSpPr>
+            <p:spPr>
+              <a:xfrm>
+                <a:off x="7845698" y="2600046"/>
+                <a:ext cx="2597105" cy="1361911"/>
+              </a:xfrm>
+              <a:prstGeom prst="rect">
+                <a:avLst/>
+              </a:prstGeom>
+              <a:noFill/>
+            </p:spPr>
+            <p:txBody>
+              <a:bodyPr wrap="square" rtlCol="0">
+                <a:spAutoFit/>
+              </a:bodyPr>
+              <a:lstStyle/>
+              <a:p>
+                <a:pPr defTabSz="780653"/>
+                <a:r>
+                  <a:rPr lang="en-US" sz="572" dirty="0">
+                    <a:solidFill>
+                      <a:prstClr val="black"/>
+                    </a:solidFill>
+                    <a:latin typeface="Arial" panose="020B0604020202020204" pitchFamily="34" charset="0"/>
+                    <a:cs typeface="Arial" panose="020B0604020202020204" pitchFamily="34" charset="0"/>
+                  </a:rPr>
+                  <a:t>I concluded that the experimental results confirm the theoretical relationships governing capacitance in parallel plate capacitors. As plate separation increased from 2 mm to 7 mm, capacitance decreased significantly; demonstrating that the expected inverse dependence on distance. Conversely, increasing plate area from </a:t>
+                </a:r>
+                <a14:m>
+                  <m:oMath xmlns:m="http://schemas.openxmlformats.org/officeDocument/2006/math">
+                    <m:r>
+                      <a:rPr lang="en-US" sz="572" b="0" i="1" smtClean="0">
+                        <a:solidFill>
+                          <a:prstClr val="black"/>
+                        </a:solidFill>
+                        <a:latin typeface="Cambria Math" panose="02040503050406030204" pitchFamily="18" charset="0"/>
+                        <a:cs typeface="Arial" panose="020B0604020202020204" pitchFamily="34" charset="0"/>
+                      </a:rPr>
+                      <m:t>100 </m:t>
+                    </m:r>
+                    <m:r>
+                      <a:rPr lang="en-US" sz="572" b="0" i="1" smtClean="0">
+                        <a:solidFill>
+                          <a:prstClr val="black"/>
+                        </a:solidFill>
+                        <a:latin typeface="Cambria Math" panose="02040503050406030204" pitchFamily="18" charset="0"/>
+                        <a:cs typeface="Arial" panose="020B0604020202020204" pitchFamily="34" charset="0"/>
+                      </a:rPr>
+                      <m:t>𝑚</m:t>
+                    </m:r>
+                    <m:sSup>
+                      <m:sSupPr>
+                        <m:ctrlPr>
+                          <a:rPr lang="en-US" sz="572" b="0" i="1" smtClean="0">
+                            <a:solidFill>
+                              <a:prstClr val="black"/>
+                            </a:solidFill>
+                            <a:latin typeface="Cambria Math" panose="02040503050406030204" pitchFamily="18" charset="0"/>
+                            <a:cs typeface="Arial" panose="020B0604020202020204" pitchFamily="34" charset="0"/>
+                          </a:rPr>
+                        </m:ctrlPr>
+                      </m:sSupPr>
+                      <m:e>
+                        <m:r>
+                          <a:rPr lang="en-US" sz="572" b="0" i="1" smtClean="0">
+                            <a:solidFill>
+                              <a:prstClr val="black"/>
+                            </a:solidFill>
+                            <a:latin typeface="Cambria Math" panose="02040503050406030204" pitchFamily="18" charset="0"/>
+                            <a:cs typeface="Arial" panose="020B0604020202020204" pitchFamily="34" charset="0"/>
+                          </a:rPr>
+                          <m:t>𝑚</m:t>
+                        </m:r>
+                      </m:e>
+                      <m:sup>
+                        <m:r>
+                          <a:rPr lang="en-US" sz="572" b="0" i="1" smtClean="0">
+                            <a:solidFill>
+                              <a:prstClr val="black"/>
+                            </a:solidFill>
+                            <a:latin typeface="Cambria Math" panose="02040503050406030204" pitchFamily="18" charset="0"/>
+                            <a:cs typeface="Arial" panose="020B0604020202020204" pitchFamily="34" charset="0"/>
+                          </a:rPr>
+                          <m:t>2</m:t>
+                        </m:r>
+                      </m:sup>
+                    </m:sSup>
+                  </m:oMath>
+                </a14:m>
+                <a:r>
+                  <a:rPr lang="en-US" sz="572" dirty="0">
+                    <a:solidFill>
+                      <a:prstClr val="black"/>
+                    </a:solidFill>
+                    <a:latin typeface="Arial" panose="020B0604020202020204" pitchFamily="34" charset="0"/>
+                    <a:cs typeface="Arial" panose="020B0604020202020204" pitchFamily="34" charset="0"/>
+                  </a:rPr>
+                  <a:t> to </a:t>
+                </a:r>
+                <a14:m>
+                  <m:oMath xmlns:m="http://schemas.openxmlformats.org/officeDocument/2006/math">
+                    <m:r>
+                      <a:rPr lang="en-US" sz="572" b="0" i="1" smtClean="0">
+                        <a:solidFill>
+                          <a:prstClr val="black"/>
+                        </a:solidFill>
+                        <a:latin typeface="Cambria Math" panose="02040503050406030204" pitchFamily="18" charset="0"/>
+                        <a:cs typeface="Arial" panose="020B0604020202020204" pitchFamily="34" charset="0"/>
+                      </a:rPr>
+                      <m:t>150 </m:t>
+                    </m:r>
+                    <m:r>
+                      <a:rPr lang="en-US" sz="572" b="0" i="1" smtClean="0">
+                        <a:solidFill>
+                          <a:prstClr val="black"/>
+                        </a:solidFill>
+                        <a:latin typeface="Cambria Math" panose="02040503050406030204" pitchFamily="18" charset="0"/>
+                        <a:cs typeface="Arial" panose="020B0604020202020204" pitchFamily="34" charset="0"/>
+                      </a:rPr>
+                      <m:t>𝑚</m:t>
+                    </m:r>
+                    <m:sSup>
+                      <m:sSupPr>
+                        <m:ctrlPr>
+                          <a:rPr lang="en-US" sz="572" b="0" i="1" smtClean="0">
+                            <a:solidFill>
+                              <a:prstClr val="black"/>
+                            </a:solidFill>
+                            <a:latin typeface="Cambria Math" panose="02040503050406030204" pitchFamily="18" charset="0"/>
+                            <a:cs typeface="Arial" panose="020B0604020202020204" pitchFamily="34" charset="0"/>
+                          </a:rPr>
+                        </m:ctrlPr>
+                      </m:sSupPr>
+                      <m:e>
+                        <m:r>
+                          <a:rPr lang="en-US" sz="572" b="0" i="1" smtClean="0">
+                            <a:solidFill>
+                              <a:prstClr val="black"/>
+                            </a:solidFill>
+                            <a:latin typeface="Cambria Math" panose="02040503050406030204" pitchFamily="18" charset="0"/>
+                            <a:cs typeface="Arial" panose="020B0604020202020204" pitchFamily="34" charset="0"/>
+                          </a:rPr>
+                          <m:t>𝑚</m:t>
+                        </m:r>
+                      </m:e>
+                      <m:sup>
+                        <m:r>
+                          <a:rPr lang="en-US" sz="572" b="0" i="1" smtClean="0">
+                            <a:solidFill>
+                              <a:prstClr val="black"/>
+                            </a:solidFill>
+                            <a:latin typeface="Cambria Math" panose="02040503050406030204" pitchFamily="18" charset="0"/>
+                            <a:cs typeface="Arial" panose="020B0604020202020204" pitchFamily="34" charset="0"/>
+                          </a:rPr>
+                          <m:t>2</m:t>
+                        </m:r>
+                      </m:sup>
+                    </m:sSup>
+                  </m:oMath>
+                </a14:m>
+                <a:r>
+                  <a:rPr lang="en-US" sz="572" dirty="0">
+                    <a:solidFill>
+                      <a:prstClr val="black"/>
+                    </a:solidFill>
+                    <a:latin typeface="Arial" panose="020B0604020202020204" pitchFamily="34" charset="0"/>
+                    <a:cs typeface="Arial" panose="020B0604020202020204" pitchFamily="34" charset="0"/>
+                  </a:rPr>
+                  <a:t> produced a clear rise in capacitance, consistent with the direct proportionality predicted by the capacitance formula </a:t>
+                </a:r>
+                <a14:m>
+                  <m:oMath xmlns:m="http://schemas.openxmlformats.org/officeDocument/2006/math">
+                    <m:r>
+                      <a:rPr lang="en-US" sz="572" b="0" i="1" smtClean="0">
+                        <a:solidFill>
+                          <a:prstClr val="black"/>
+                        </a:solidFill>
+                        <a:latin typeface="Cambria Math" panose="02040503050406030204" pitchFamily="18" charset="0"/>
+                        <a:cs typeface="Arial" panose="020B0604020202020204" pitchFamily="34" charset="0"/>
+                      </a:rPr>
+                      <m:t>𝐶</m:t>
+                    </m:r>
+                    <m:r>
+                      <a:rPr lang="en-US" sz="572" b="0" i="1" smtClean="0">
+                        <a:solidFill>
+                          <a:prstClr val="black"/>
+                        </a:solidFill>
+                        <a:latin typeface="Cambria Math" panose="02040503050406030204" pitchFamily="18" charset="0"/>
+                        <a:cs typeface="Arial" panose="020B0604020202020204" pitchFamily="34" charset="0"/>
+                      </a:rPr>
+                      <m:t>=</m:t>
+                    </m:r>
+                    <m:sSub>
+                      <m:sSubPr>
+                        <m:ctrlPr>
+                          <a:rPr lang="en-US" sz="572" b="0" i="1" smtClean="0">
+                            <a:solidFill>
+                              <a:prstClr val="black"/>
+                            </a:solidFill>
+                            <a:latin typeface="Cambria Math" panose="02040503050406030204" pitchFamily="18" charset="0"/>
+                            <a:cs typeface="Arial" panose="020B0604020202020204" pitchFamily="34" charset="0"/>
+                          </a:rPr>
+                        </m:ctrlPr>
+                      </m:sSubPr>
+                      <m:e>
+                        <m:r>
+                          <a:rPr lang="en-US" sz="572" b="0" i="1" smtClean="0">
+                            <a:solidFill>
+                              <a:prstClr val="black"/>
+                            </a:solidFill>
+                            <a:latin typeface="Cambria Math" panose="02040503050406030204" pitchFamily="18" charset="0"/>
+                            <a:cs typeface="Arial" panose="020B0604020202020204" pitchFamily="34" charset="0"/>
+                          </a:rPr>
+                          <m:t>𝜖</m:t>
+                        </m:r>
+                      </m:e>
+                      <m:sub>
+                        <m:r>
+                          <a:rPr lang="en-US" sz="572" b="0" i="1" smtClean="0">
+                            <a:solidFill>
+                              <a:prstClr val="black"/>
+                            </a:solidFill>
+                            <a:latin typeface="Cambria Math" panose="02040503050406030204" pitchFamily="18" charset="0"/>
+                            <a:cs typeface="Arial" panose="020B0604020202020204" pitchFamily="34" charset="0"/>
+                          </a:rPr>
+                          <m:t>0</m:t>
+                        </m:r>
+                      </m:sub>
+                    </m:sSub>
+                    <m:f>
+                      <m:fPr>
+                        <m:ctrlPr>
+                          <a:rPr lang="en-US" sz="572" b="0" i="1" smtClean="0">
+                            <a:solidFill>
+                              <a:prstClr val="black"/>
+                            </a:solidFill>
+                            <a:latin typeface="Cambria Math" panose="02040503050406030204" pitchFamily="18" charset="0"/>
+                            <a:cs typeface="Arial" panose="020B0604020202020204" pitchFamily="34" charset="0"/>
+                          </a:rPr>
+                        </m:ctrlPr>
+                      </m:fPr>
+                      <m:num>
+                        <m:r>
+                          <a:rPr lang="en-US" sz="572" b="0" i="1" smtClean="0">
+                            <a:solidFill>
+                              <a:prstClr val="black"/>
+                            </a:solidFill>
+                            <a:latin typeface="Cambria Math" panose="02040503050406030204" pitchFamily="18" charset="0"/>
+                            <a:cs typeface="Arial" panose="020B0604020202020204" pitchFamily="34" charset="0"/>
+                          </a:rPr>
+                          <m:t>𝐴</m:t>
+                        </m:r>
+                      </m:num>
+                      <m:den>
+                        <m:r>
+                          <a:rPr lang="en-US" sz="572" b="0" i="1" smtClean="0">
+                            <a:solidFill>
+                              <a:prstClr val="black"/>
+                            </a:solidFill>
+                            <a:latin typeface="Cambria Math" panose="02040503050406030204" pitchFamily="18" charset="0"/>
+                            <a:cs typeface="Arial" panose="020B0604020202020204" pitchFamily="34" charset="0"/>
+                          </a:rPr>
+                          <m:t>𝑑</m:t>
+                        </m:r>
+                      </m:den>
+                    </m:f>
+                  </m:oMath>
+                </a14:m>
+                <a:r>
+                  <a:rPr lang="en-US" sz="572" dirty="0">
+                    <a:solidFill>
+                      <a:prstClr val="black"/>
+                    </a:solidFill>
+                    <a:latin typeface="Arial" panose="020B0604020202020204" pitchFamily="34" charset="0"/>
+                    <a:cs typeface="Arial" panose="020B0604020202020204" pitchFamily="34" charset="0"/>
+                  </a:rPr>
+                  <a:t>. Statistical analysis showed that both trends were highly significant, reinforcing the validity of the theoretical model. These findings highlight how geometric factors strongly influence energy storage in capacitors, with plate separation exerting a greater effect than plate area within the tested ranges. Overall, the experiment successfully verified the fundamental principles of electrostatics and demonstrated the practical importance of capacitor design parameters.</a:t>
+                </a:r>
+              </a:p>
+            </p:txBody>
+          </p:sp>
+        </mc:Choice>
+        <mc:Fallback>
+          <p:sp>
+            <p:nvSpPr>
+              <p:cNvPr id="50" name="TextBox 49">
+                <a:extLst>
+                  <a:ext uri="{FF2B5EF4-FFF2-40B4-BE49-F238E27FC236}">
+                    <a16:creationId xmlns:a16="http://schemas.microsoft.com/office/drawing/2014/main" id="{79C029F1-D5E2-A842-A19B-DC4969111E24}"/>
+                  </a:ext>
+                </a:extLst>
+              </p:cNvPr>
+              <p:cNvSpPr txBox="1">
+                <a:spLocks noRot="1" noChangeAspect="1" noMove="1" noResize="1" noEditPoints="1" noAdjustHandles="1" noChangeArrowheads="1" noChangeShapeType="1" noTextEdit="1"/>
+              </p:cNvSpPr>
+              <p:nvPr/>
+            </p:nvSpPr>
+            <p:spPr>
+              <a:xfrm>
+                <a:off x="7845698" y="2600046"/>
+                <a:ext cx="2597105" cy="1361911"/>
+              </a:xfrm>
+              <a:prstGeom prst="rect">
+                <a:avLst/>
+              </a:prstGeom>
+              <a:blipFill>
+                <a:blip r:embed="rId6"/>
+                <a:stretch>
+                  <a:fillRect/>
+                </a:stretch>
+              </a:blipFill>
+            </p:spPr>
+            <p:txBody>
+              <a:bodyPr/>
+              <a:lstStyle/>
+              <a:p>
+                <a:r>
+                  <a:rPr lang="es-ES">
+                    <a:noFill/>
+                  </a:rPr>
+                  <a:t> </a:t>
+                </a:r>
+              </a:p>
+            </p:txBody>
+          </p:sp>
+        </mc:Fallback>
+      </mc:AlternateContent>
       <mc:AlternateContent xmlns:mc="http://schemas.openxmlformats.org/markup-compatibility/2006">
         <mc:Choice xmlns:a14="http://schemas.microsoft.com/office/drawing/2010/main" Requires="a14">
           <p:sp>
@@ -11282,7 +11579,7 @@
                 <a:avLst/>
               </a:prstGeom>
               <a:blipFill>
-                <a:blip r:embed="rId5"/>
+                <a:blip r:embed="rId7"/>
                 <a:stretch>
                   <a:fillRect/>
                 </a:stretch>
@@ -11305,70 +11602,6 @@
       </mc:AlternateContent>
       <p:sp>
         <p:nvSpPr>
-          <p:cNvPr id="55" name="Rectangle 54">
-            <a:extLst>
-              <a:ext uri="{FF2B5EF4-FFF2-40B4-BE49-F238E27FC236}">
-                <a16:creationId xmlns:a16="http://schemas.microsoft.com/office/drawing/2014/main" id="{932F4CD2-D53A-6945-A147-AA4161801A71}"/>
-              </a:ext>
-            </a:extLst>
-          </p:cNvPr>
-          <p:cNvSpPr/>
-          <p:nvPr/>
-        </p:nvSpPr>
-        <p:spPr>
-          <a:xfrm>
-            <a:off x="7873433" y="1845712"/>
-            <a:ext cx="2547257" cy="1641003"/>
-          </a:xfrm>
-          <a:prstGeom prst="rect">
-            <a:avLst/>
-          </a:prstGeom>
-          <a:solidFill>
-            <a:schemeClr val="accent3">
-              <a:lumMod val="40000"/>
-              <a:lumOff val="60000"/>
-            </a:schemeClr>
-          </a:solidFill>
-          <a:ln>
-            <a:noFill/>
-          </a:ln>
-        </p:spPr>
-        <p:style>
-          <a:lnRef idx="2">
-            <a:schemeClr val="accent1">
-              <a:shade val="50000"/>
-            </a:schemeClr>
-          </a:lnRef>
-          <a:fillRef idx="1">
-            <a:schemeClr val="accent1"/>
-          </a:fillRef>
-          <a:effectRef idx="0">
-            <a:schemeClr val="accent1"/>
-          </a:effectRef>
-          <a:fontRef idx="minor">
-            <a:schemeClr val="lt1"/>
-          </a:fontRef>
-        </p:style>
-        <p:txBody>
-          <a:bodyPr rtlCol="0" anchor="ctr"/>
-          <a:lstStyle/>
-          <a:p>
-            <a:pPr algn="ctr" defTabSz="780653"/>
-            <a:r>
-              <a:rPr lang="en-US" sz="1281" dirty="0">
-                <a:solidFill>
-                  <a:prstClr val="white"/>
-                </a:solidFill>
-                <a:latin typeface="Arial" panose="020B0604020202020204" pitchFamily="34" charset="0"/>
-                <a:cs typeface="Arial" panose="020B0604020202020204" pitchFamily="34" charset="0"/>
-              </a:rPr>
-              <a:t>figures</a:t>
-            </a:r>
-          </a:p>
-        </p:txBody>
-      </p:sp>
-      <p:sp>
-        <p:nvSpPr>
           <p:cNvPr id="37" name="TextBox 36">
             <a:extLst>
               <a:ext uri="{FF2B5EF4-FFF2-40B4-BE49-F238E27FC236}">
@@ -11525,7 +11758,7 @@
           <p:nvPr/>
         </p:nvPicPr>
         <p:blipFill>
-          <a:blip r:embed="rId6"/>
+          <a:blip r:embed="rId8"/>
           <a:stretch>
             <a:fillRect/>
           </a:stretch>
@@ -11575,7 +11808,7 @@
             <p:nvPr/>
           </p:nvPicPr>
           <p:blipFill>
-            <a:blip r:embed="rId7">
+            <a:blip r:embed="rId9">
               <a:extLst>
                 <a:ext uri="{28A0092B-C50C-407E-A947-70E740481C1C}">
                   <a14:useLocalDpi xmlns:a14="http://schemas.microsoft.com/office/drawing/2010/main" val="0"/>
@@ -11689,7 +11922,7 @@
             <p:nvPr/>
           </p:nvPicPr>
           <p:blipFill>
-            <a:blip r:embed="rId8">
+            <a:blip r:embed="rId10">
               <a:extLst>
                 <a:ext uri="{28A0092B-C50C-407E-A947-70E740481C1C}">
                   <a14:useLocalDpi xmlns:a14="http://schemas.microsoft.com/office/drawing/2010/main" val="0"/>
@@ -11783,7 +12016,7 @@
           <p:nvPr/>
         </p:nvPicPr>
         <p:blipFill>
-          <a:blip r:embed="rId9"/>
+          <a:blip r:embed="rId11"/>
           <a:stretch>
             <a:fillRect/>
           </a:stretch>
@@ -11798,6 +12031,157 @@
           </a:prstGeom>
         </p:spPr>
       </p:pic>
+      <p:sp>
+        <p:nvSpPr>
+          <p:cNvPr id="12" name="CuadroTexto 11">
+            <a:extLst>
+              <a:ext uri="{FF2B5EF4-FFF2-40B4-BE49-F238E27FC236}">
+                <a16:creationId xmlns:a16="http://schemas.microsoft.com/office/drawing/2014/main" id="{F99076AB-CD48-1D9C-24C3-8E5BC7671CED}"/>
+              </a:ext>
+            </a:extLst>
+          </p:cNvPr>
+          <p:cNvSpPr txBox="1"/>
+          <p:nvPr/>
+        </p:nvSpPr>
+        <p:spPr>
+          <a:xfrm>
+            <a:off x="7983415" y="1777442"/>
+            <a:ext cx="2350477" cy="830997"/>
+          </a:xfrm>
+          <a:prstGeom prst="rect">
+            <a:avLst/>
+          </a:prstGeom>
+          <a:noFill/>
+        </p:spPr>
+        <p:txBody>
+          <a:bodyPr wrap="square" rtlCol="0">
+            <a:spAutoFit/>
+          </a:bodyPr>
+          <a:lstStyle/>
+          <a:p>
+            <a:r>
+              <a:rPr lang="es-ES" sz="600" dirty="0">
+                <a:latin typeface="Source Code Pro Light" panose="020B0409030403020204" pitchFamily="49" charset="0"/>
+                <a:ea typeface="Source Code Pro Light" panose="020B0409030403020204" pitchFamily="49" charset="0"/>
+              </a:rPr>
+              <a:t>&gt;&gt; </a:t>
+            </a:r>
+            <a:r>
+              <a:rPr lang="es-ES" sz="600" dirty="0" err="1">
+                <a:latin typeface="Source Code Pro Light" panose="020B0409030403020204" pitchFamily="49" charset="0"/>
+                <a:ea typeface="Source Code Pro Light" panose="020B0409030403020204" pitchFamily="49" charset="0"/>
+              </a:rPr>
+              <a:t>tscoreTesting</a:t>
+            </a:r>
+            <a:endParaRPr lang="es-ES" sz="600" dirty="0">
+              <a:latin typeface="Source Code Pro Light" panose="020B0409030403020204" pitchFamily="49" charset="0"/>
+              <a:ea typeface="Source Code Pro Light" panose="020B0409030403020204" pitchFamily="49" charset="0"/>
+            </a:endParaRPr>
+          </a:p>
+          <a:p>
+            <a:r>
+              <a:rPr lang="es-ES" sz="600" dirty="0" err="1">
+                <a:latin typeface="Source Code Pro Light" panose="020B0409030403020204" pitchFamily="49" charset="0"/>
+                <a:ea typeface="Source Code Pro Light" panose="020B0409030403020204" pitchFamily="49" charset="0"/>
+              </a:rPr>
+              <a:t>Seperation</a:t>
+            </a:r>
+            <a:r>
+              <a:rPr lang="es-ES" sz="600" dirty="0">
+                <a:latin typeface="Source Code Pro Light" panose="020B0409030403020204" pitchFamily="49" charset="0"/>
+                <a:ea typeface="Source Code Pro Light" panose="020B0409030403020204" pitchFamily="49" charset="0"/>
+              </a:rPr>
+              <a:t>: mean=0.2367, </a:t>
+            </a:r>
+            <a:r>
+              <a:rPr lang="es-ES" sz="600" dirty="0" err="1">
+                <a:latin typeface="Source Code Pro Light" panose="020B0409030403020204" pitchFamily="49" charset="0"/>
+                <a:ea typeface="Source Code Pro Light" panose="020B0409030403020204" pitchFamily="49" charset="0"/>
+              </a:rPr>
+              <a:t>sd</a:t>
+            </a:r>
+            <a:r>
+              <a:rPr lang="es-ES" sz="600" dirty="0">
+                <a:latin typeface="Source Code Pro Light" panose="020B0409030403020204" pitchFamily="49" charset="0"/>
+                <a:ea typeface="Source Code Pro Light" panose="020B0409030403020204" pitchFamily="49" charset="0"/>
+              </a:rPr>
+              <a:t>=0.1062, n=6, t=5.4562, p=0.0028</a:t>
+            </a:r>
+          </a:p>
+          <a:p>
+            <a:endParaRPr lang="es-ES" sz="600" dirty="0">
+              <a:latin typeface="Source Code Pro Light" panose="020B0409030403020204" pitchFamily="49" charset="0"/>
+              <a:ea typeface="Source Code Pro Light" panose="020B0409030403020204" pitchFamily="49" charset="0"/>
+            </a:endParaRPr>
+          </a:p>
+          <a:p>
+            <a:r>
+              <a:rPr lang="es-ES" sz="600" dirty="0" err="1">
+                <a:latin typeface="Source Code Pro Light" panose="020B0409030403020204" pitchFamily="49" charset="0"/>
+                <a:ea typeface="Source Code Pro Light" panose="020B0409030403020204" pitchFamily="49" charset="0"/>
+              </a:rPr>
+              <a:t>Area</a:t>
+            </a:r>
+            <a:r>
+              <a:rPr lang="es-ES" sz="600" dirty="0">
+                <a:latin typeface="Source Code Pro Light" panose="020B0409030403020204" pitchFamily="49" charset="0"/>
+                <a:ea typeface="Source Code Pro Light" panose="020B0409030403020204" pitchFamily="49" charset="0"/>
+              </a:rPr>
+              <a:t>: mean=0.1850, </a:t>
+            </a:r>
+            <a:r>
+              <a:rPr lang="es-ES" sz="600" dirty="0" err="1">
+                <a:latin typeface="Source Code Pro Light" panose="020B0409030403020204" pitchFamily="49" charset="0"/>
+                <a:ea typeface="Source Code Pro Light" panose="020B0409030403020204" pitchFamily="49" charset="0"/>
+              </a:rPr>
+              <a:t>sd</a:t>
+            </a:r>
+            <a:r>
+              <a:rPr lang="es-ES" sz="600" dirty="0">
+                <a:latin typeface="Source Code Pro Light" panose="020B0409030403020204" pitchFamily="49" charset="0"/>
+                <a:ea typeface="Source Code Pro Light" panose="020B0409030403020204" pitchFamily="49" charset="0"/>
+              </a:rPr>
+              <a:t>=0.0250, n=6, t=18.1262, p=0.0000</a:t>
+            </a:r>
+          </a:p>
+          <a:p>
+            <a:endParaRPr lang="es-ES" sz="600" dirty="0">
+              <a:latin typeface="Source Code Pro Light" panose="020B0409030403020204" pitchFamily="49" charset="0"/>
+              <a:ea typeface="Source Code Pro Light" panose="020B0409030403020204" pitchFamily="49" charset="0"/>
+            </a:endParaRPr>
+          </a:p>
+          <a:p>
+            <a:r>
+              <a:rPr lang="es-ES" sz="600" dirty="0" err="1">
+                <a:latin typeface="Source Code Pro Light" panose="020B0409030403020204" pitchFamily="49" charset="0"/>
+                <a:ea typeface="Source Code Pro Light" panose="020B0409030403020204" pitchFamily="49" charset="0"/>
+              </a:rPr>
+              <a:t>Two-sample</a:t>
+            </a:r>
+            <a:r>
+              <a:rPr lang="es-ES" sz="600" dirty="0">
+                <a:latin typeface="Source Code Pro Light" panose="020B0409030403020204" pitchFamily="49" charset="0"/>
+                <a:ea typeface="Source Code Pro Light" panose="020B0409030403020204" pitchFamily="49" charset="0"/>
+              </a:rPr>
+              <a:t> t-test: t=1.0584, </a:t>
+            </a:r>
+            <a:r>
+              <a:rPr lang="es-ES" sz="600" dirty="0" err="1">
+                <a:latin typeface="Source Code Pro Light" panose="020B0409030403020204" pitchFamily="49" charset="0"/>
+                <a:ea typeface="Source Code Pro Light" panose="020B0409030403020204" pitchFamily="49" charset="0"/>
+              </a:rPr>
+              <a:t>df</a:t>
+            </a:r>
+            <a:r>
+              <a:rPr lang="es-ES" sz="600" dirty="0">
+                <a:latin typeface="Source Code Pro Light" panose="020B0409030403020204" pitchFamily="49" charset="0"/>
+                <a:ea typeface="Source Code Pro Light" panose="020B0409030403020204" pitchFamily="49" charset="0"/>
+              </a:rPr>
+              <a:t>=10, p=0.3147</a:t>
+            </a:r>
+          </a:p>
+        </p:txBody>
+      </p:sp>
     </p:spTree>
     <p:extLst>
       <p:ext uri="{BB962C8B-B14F-4D97-AF65-F5344CB8AC3E}">
@@ -12385,4 +12769,319 @@
     </a:ext>
   </a:extLst>
 </a:theme>
+</file>
+
+<file path=ppt/theme/theme3.xml><?xml version="1.0" encoding="utf-8"?>
+<a:theme xmlns:a="http://schemas.openxmlformats.org/drawingml/2006/main" name="Tema de Office">
+  <a:themeElements>
+    <a:clrScheme name="Office">
+      <a:dk1>
+        <a:sysClr val="windowText" lastClr="000000"/>
+      </a:dk1>
+      <a:lt1>
+        <a:sysClr val="window" lastClr="FFFFFF"/>
+      </a:lt1>
+      <a:dk2>
+        <a:srgbClr val="0E2841"/>
+      </a:dk2>
+      <a:lt2>
+        <a:srgbClr val="E8E8E8"/>
+      </a:lt2>
+      <a:accent1>
+        <a:srgbClr val="156082"/>
+      </a:accent1>
+      <a:accent2>
+        <a:srgbClr val="E97132"/>
+      </a:accent2>
+      <a:accent3>
+        <a:srgbClr val="196B24"/>
+      </a:accent3>
+      <a:accent4>
+        <a:srgbClr val="0F9ED5"/>
+      </a:accent4>
+      <a:accent5>
+        <a:srgbClr val="A02B93"/>
+      </a:accent5>
+      <a:accent6>
+        <a:srgbClr val="4EA72E"/>
+      </a:accent6>
+      <a:hlink>
+        <a:srgbClr val="467886"/>
+      </a:hlink>
+      <a:folHlink>
+        <a:srgbClr val="96607D"/>
+      </a:folHlink>
+    </a:clrScheme>
+    <a:fontScheme name="Office">
+      <a:majorFont>
+        <a:latin typeface="Aptos Display" panose="02110004020202020204"/>
+        <a:ea typeface=""/>
+        <a:cs typeface=""/>
+        <a:font script="Jpan" typeface="游ゴシック Light"/>
+        <a:font script="Hang" typeface="맑은 고딕"/>
+        <a:font script="Hans" typeface="等线 Light"/>
+        <a:font script="Hant" typeface="新細明體"/>
+        <a:font script="Arab" typeface="Times New Roman"/>
+        <a:font script="Hebr" typeface="Times New Roman"/>
+        <a:font script="Thai" typeface="Angsana New"/>
+        <a:font script="Ethi" typeface="Nyala"/>
+        <a:font script="Beng" typeface="Vrinda"/>
+        <a:font script="Gujr" typeface="Shruti"/>
+        <a:font script="Khmr" typeface="MoolBoran"/>
+        <a:font script="Knda" typeface="Tunga"/>
+        <a:font script="Guru" typeface="Raavi"/>
+        <a:font script="Cans" typeface="Euphemia"/>
+        <a:font script="Cher" typeface="Plantagenet Cherokee"/>
+        <a:font script="Yiii" typeface="Microsoft Yi Baiti"/>
+        <a:font script="Tibt" typeface="Microsoft Himalaya"/>
+        <a:font script="Thaa" typeface="MV Boli"/>
+        <a:font script="Deva" typeface="Mangal"/>
+        <a:font script="Telu" typeface="Gautami"/>
+        <a:font script="Taml" typeface="Latha"/>
+        <a:font script="Syrc" typeface="Estrangelo Edessa"/>
+        <a:font script="Orya" typeface="Kalinga"/>
+        <a:font script="Mlym" typeface="Kartika"/>
+        <a:font script="Laoo" typeface="DokChampa"/>
+        <a:font script="Sinh" typeface="Iskoola Pota"/>
+        <a:font script="Mong" typeface="Mongolian Baiti"/>
+        <a:font script="Viet" typeface="Times New Roman"/>
+        <a:font script="Uigh" typeface="Microsoft Uighur"/>
+        <a:font script="Geor" typeface="Sylfaen"/>
+        <a:font script="Armn" typeface="Arial"/>
+        <a:font script="Bugi" typeface="Leelawadee UI"/>
+        <a:font script="Bopo" typeface="Microsoft JhengHei"/>
+        <a:font script="Java" typeface="Javanese Text"/>
+        <a:font script="Lisu" typeface="Segoe UI"/>
+        <a:font script="Mymr" typeface="Myanmar Text"/>
+        <a:font script="Nkoo" typeface="Ebrima"/>
+        <a:font script="Olck" typeface="Nirmala UI"/>
+        <a:font script="Osma" typeface="Ebrima"/>
+        <a:font script="Phag" typeface="Phagspa"/>
+        <a:font script="Syrn" typeface="Estrangelo Edessa"/>
+        <a:font script="Syrj" typeface="Estrangelo Edessa"/>
+        <a:font script="Syre" typeface="Estrangelo Edessa"/>
+        <a:font script="Sora" typeface="Nirmala UI"/>
+        <a:font script="Tale" typeface="Microsoft Tai Le"/>
+        <a:font script="Talu" typeface="Microsoft New Tai Lue"/>
+        <a:font script="Tfng" typeface="Ebrima"/>
+      </a:majorFont>
+      <a:minorFont>
+        <a:latin typeface="Aptos" panose="02110004020202020204"/>
+        <a:ea typeface=""/>
+        <a:cs typeface=""/>
+        <a:font script="Jpan" typeface="游ゴシック"/>
+        <a:font script="Hang" typeface="맑은 고딕"/>
+        <a:font script="Hans" typeface="等线"/>
+        <a:font script="Hant" typeface="新細明體"/>
+        <a:font script="Arab" typeface="Arial"/>
+        <a:font script="Hebr" typeface="Arial"/>
+        <a:font script="Thai" typeface="Cordia New"/>
+        <a:font script="Ethi" typeface="Nyala"/>
+        <a:font script="Beng" typeface="Vrinda"/>
+        <a:font script="Gujr" typeface="Shruti"/>
+        <a:font script="Khmr" typeface="DaunPenh"/>
+        <a:font script="Knda" typeface="Tunga"/>
+        <a:font script="Guru" typeface="Raavi"/>
+        <a:font script="Cans" typeface="Euphemia"/>
+        <a:font script="Cher" typeface="Plantagenet Cherokee"/>
+        <a:font script="Yiii" typeface="Microsoft Yi Baiti"/>
+        <a:font script="Tibt" typeface="Microsoft Himalaya"/>
+        <a:font script="Thaa" typeface="MV Boli"/>
+        <a:font script="Deva" typeface="Mangal"/>
+        <a:font script="Telu" typeface="Gautami"/>
+        <a:font script="Taml" typeface="Latha"/>
+        <a:font script="Syrc" typeface="Estrangelo Edessa"/>
+        <a:font script="Orya" typeface="Kalinga"/>
+        <a:font script="Mlym" typeface="Kartika"/>
+        <a:font script="Laoo" typeface="DokChampa"/>
+        <a:font script="Sinh" typeface="Iskoola Pota"/>
+        <a:font script="Mong" typeface="Mongolian Baiti"/>
+        <a:font script="Viet" typeface="Arial"/>
+        <a:font script="Uigh" typeface="Microsoft Uighur"/>
+        <a:font script="Geor" typeface="Sylfaen"/>
+        <a:font script="Armn" typeface="Arial"/>
+        <a:font script="Bugi" typeface="Leelawadee UI"/>
+        <a:font script="Bopo" typeface="Microsoft JhengHei"/>
+        <a:font script="Java" typeface="Javanese Text"/>
+        <a:font script="Lisu" typeface="Segoe UI"/>
+        <a:font script="Mymr" typeface="Myanmar Text"/>
+        <a:font script="Nkoo" typeface="Ebrima"/>
+        <a:font script="Olck" typeface="Nirmala UI"/>
+        <a:font script="Osma" typeface="Ebrima"/>
+        <a:font script="Phag" typeface="Phagspa"/>
+        <a:font script="Syrn" typeface="Estrangelo Edessa"/>
+        <a:font script="Syrj" typeface="Estrangelo Edessa"/>
+        <a:font script="Syre" typeface="Estrangelo Edessa"/>
+        <a:font script="Sora" typeface="Nirmala UI"/>
+        <a:font script="Tale" typeface="Microsoft Tai Le"/>
+        <a:font script="Talu" typeface="Microsoft New Tai Lue"/>
+        <a:font script="Tfng" typeface="Ebrima"/>
+      </a:minorFont>
+    </a:fontScheme>
+    <a:fmtScheme name="Office">
+      <a:fillStyleLst>
+        <a:solidFill>
+          <a:schemeClr val="phClr"/>
+        </a:solidFill>
+        <a:gradFill rotWithShape="1">
+          <a:gsLst>
+            <a:gs pos="0">
+              <a:schemeClr val="phClr">
+                <a:lumMod val="110000"/>
+                <a:satMod val="105000"/>
+                <a:tint val="67000"/>
+              </a:schemeClr>
+            </a:gs>
+            <a:gs pos="50000">
+              <a:schemeClr val="phClr">
+                <a:lumMod val="105000"/>
+                <a:satMod val="103000"/>
+                <a:tint val="73000"/>
+              </a:schemeClr>
+            </a:gs>
+            <a:gs pos="100000">
+              <a:schemeClr val="phClr">
+                <a:lumMod val="105000"/>
+                <a:satMod val="109000"/>
+                <a:tint val="81000"/>
+              </a:schemeClr>
+            </a:gs>
+          </a:gsLst>
+          <a:lin ang="5400000" scaled="0"/>
+        </a:gradFill>
+        <a:gradFill rotWithShape="1">
+          <a:gsLst>
+            <a:gs pos="0">
+              <a:schemeClr val="phClr">
+                <a:satMod val="103000"/>
+                <a:lumMod val="102000"/>
+                <a:tint val="94000"/>
+              </a:schemeClr>
+            </a:gs>
+            <a:gs pos="50000">
+              <a:schemeClr val="phClr">
+                <a:satMod val="110000"/>
+                <a:lumMod val="100000"/>
+                <a:shade val="100000"/>
+              </a:schemeClr>
+            </a:gs>
+            <a:gs pos="100000">
+              <a:schemeClr val="phClr">
+                <a:lumMod val="99000"/>
+                <a:satMod val="120000"/>
+                <a:shade val="78000"/>
+              </a:schemeClr>
+            </a:gs>
+          </a:gsLst>
+          <a:lin ang="5400000" scaled="0"/>
+        </a:gradFill>
+      </a:fillStyleLst>
+      <a:lnStyleLst>
+        <a:ln w="12700" cap="flat" cmpd="sng" algn="ctr">
+          <a:solidFill>
+            <a:schemeClr val="phClr"/>
+          </a:solidFill>
+          <a:prstDash val="solid"/>
+          <a:miter lim="800000"/>
+        </a:ln>
+        <a:ln w="19050" cap="flat" cmpd="sng" algn="ctr">
+          <a:solidFill>
+            <a:schemeClr val="phClr"/>
+          </a:solidFill>
+          <a:prstDash val="solid"/>
+          <a:miter lim="800000"/>
+        </a:ln>
+        <a:ln w="25400" cap="flat" cmpd="sng" algn="ctr">
+          <a:solidFill>
+            <a:schemeClr val="phClr"/>
+          </a:solidFill>
+          <a:prstDash val="solid"/>
+          <a:miter lim="800000"/>
+        </a:ln>
+      </a:lnStyleLst>
+      <a:effectStyleLst>
+        <a:effectStyle>
+          <a:effectLst/>
+        </a:effectStyle>
+        <a:effectStyle>
+          <a:effectLst/>
+        </a:effectStyle>
+        <a:effectStyle>
+          <a:effectLst>
+            <a:outerShdw blurRad="57150" dist="19050" dir="5400000" algn="ctr" rotWithShape="0">
+              <a:srgbClr val="000000">
+                <a:alpha val="63000"/>
+              </a:srgbClr>
+            </a:outerShdw>
+          </a:effectLst>
+        </a:effectStyle>
+      </a:effectStyleLst>
+      <a:bgFillStyleLst>
+        <a:solidFill>
+          <a:schemeClr val="phClr"/>
+        </a:solidFill>
+        <a:solidFill>
+          <a:schemeClr val="phClr">
+            <a:tint val="95000"/>
+            <a:satMod val="170000"/>
+          </a:schemeClr>
+        </a:solidFill>
+        <a:gradFill rotWithShape="1">
+          <a:gsLst>
+            <a:gs pos="0">
+              <a:schemeClr val="phClr">
+                <a:tint val="93000"/>
+                <a:satMod val="150000"/>
+                <a:shade val="98000"/>
+                <a:lumMod val="102000"/>
+              </a:schemeClr>
+            </a:gs>
+            <a:gs pos="50000">
+              <a:schemeClr val="phClr">
+                <a:tint val="98000"/>
+                <a:satMod val="130000"/>
+                <a:shade val="90000"/>
+                <a:lumMod val="103000"/>
+              </a:schemeClr>
+            </a:gs>
+            <a:gs pos="100000">
+              <a:schemeClr val="phClr">
+                <a:shade val="63000"/>
+                <a:satMod val="120000"/>
+              </a:schemeClr>
+            </a:gs>
+          </a:gsLst>
+          <a:lin ang="5400000" scaled="0"/>
+        </a:gradFill>
+      </a:bgFillStyleLst>
+    </a:fmtScheme>
+  </a:themeElements>
+  <a:objectDefaults>
+    <a:lnDef>
+      <a:spPr/>
+      <a:bodyPr/>
+      <a:lstStyle/>
+      <a:style>
+        <a:lnRef idx="2">
+          <a:schemeClr val="accent1"/>
+        </a:lnRef>
+        <a:fillRef idx="0">
+          <a:schemeClr val="accent1"/>
+        </a:fillRef>
+        <a:effectRef idx="1">
+          <a:schemeClr val="accent1"/>
+        </a:effectRef>
+        <a:fontRef idx="minor">
+          <a:schemeClr val="tx1"/>
+        </a:fontRef>
+      </a:style>
+    </a:lnDef>
+  </a:objectDefaults>
+  <a:extraClrSchemeLst/>
+  <a:extLst>
+    <a:ext uri="{05A4C25C-085E-4340-85A3-A5531E510DB2}">
+      <thm15:themeFamily xmlns:thm15="http://schemas.microsoft.com/office/thememl/2012/main" name="Office Theme" id="{2E142A2C-CD16-42D6-873A-C26D2A0506FA}" vid="{1BDDFF52-6CD6-40A5-AB3C-68EB2F1E4D0A}"/>
+    </a:ext>
+  </a:extLst>
+</a:theme>
 </file>
--- a/Final Project/FinalProject.pptx
+++ b/Final Project/FinalProject.pptx
@@ -119,7 +119,7 @@
 <file path=ppt/revisionInfo.xml><?xml version="1.0" encoding="utf-8"?>
 <p1510:revInfo xmlns:a="http://schemas.openxmlformats.org/drawingml/2006/main" xmlns:r="http://schemas.openxmlformats.org/officeDocument/2006/relationships" xmlns:p1510="http://schemas.microsoft.com/office/powerpoint/2015/10/main">
   <p1510:revLst>
-    <p1510:client id="{80BA49D0-6376-CB48-B3C3-F4708D789340}" v="992" dt="2025-12-04T22:49:57.117"/>
+    <p1510:client id="{80BA49D0-6376-CB48-B3C3-F4708D789340}" v="996" dt="2025-12-09T01:48:09.323"/>
   </p1510:revLst>
 </p1510:revInfo>
 </file>
@@ -129,12 +129,12 @@
   <pc:docChgLst>
     <pc:chgData name="Morales, Abdon" userId="b8e72fca-89fa-40b2-95f0-bdb26e6d8c1d" providerId="ADAL" clId="{F77E3D6D-613B-5030-A384-37FA661628F6}"/>
     <pc:docChg chg="undo custSel modSld">
-      <pc:chgData name="Morales, Abdon" userId="b8e72fca-89fa-40b2-95f0-bdb26e6d8c1d" providerId="ADAL" clId="{F77E3D6D-613B-5030-A384-37FA661628F6}" dt="2025-12-04T22:49:57.117" v="2265" actId="313"/>
+      <pc:chgData name="Morales, Abdon" userId="b8e72fca-89fa-40b2-95f0-bdb26e6d8c1d" providerId="ADAL" clId="{F77E3D6D-613B-5030-A384-37FA661628F6}" dt="2025-12-09T02:04:01.911" v="3158" actId="1076"/>
       <pc:docMkLst>
         <pc:docMk/>
       </pc:docMkLst>
       <pc:sldChg chg="addSp delSp modSp mod">
-        <pc:chgData name="Morales, Abdon" userId="b8e72fca-89fa-40b2-95f0-bdb26e6d8c1d" providerId="ADAL" clId="{F77E3D6D-613B-5030-A384-37FA661628F6}" dt="2025-12-04T22:49:57.117" v="2265" actId="313"/>
+        <pc:chgData name="Morales, Abdon" userId="b8e72fca-89fa-40b2-95f0-bdb26e6d8c1d" providerId="ADAL" clId="{F77E3D6D-613B-5030-A384-37FA661628F6}" dt="2025-12-09T02:04:01.911" v="3158" actId="1076"/>
         <pc:sldMkLst>
           <pc:docMk/>
           <pc:sldMk cId="4152292366" sldId="268"/>
@@ -163,6 +163,22 @@
             <ac:spMk id="4" creationId="{C2642BAB-3737-CE4C-874C-5EA986C6E360}"/>
           </ac:spMkLst>
         </pc:spChg>
+        <pc:spChg chg="add">
+          <ac:chgData name="Morales, Abdon" userId="b8e72fca-89fa-40b2-95f0-bdb26e6d8c1d" providerId="ADAL" clId="{F77E3D6D-613B-5030-A384-37FA661628F6}" dt="2025-12-09T01:47:51.006" v="2267"/>
+          <ac:spMkLst>
+            <pc:docMk/>
+            <pc:sldMk cId="4152292366" sldId="268"/>
+            <ac:spMk id="6" creationId="{E9F5AE11-6BC9-3A93-8A3B-372009404BB0}"/>
+          </ac:spMkLst>
+        </pc:spChg>
+        <pc:spChg chg="add">
+          <ac:chgData name="Morales, Abdon" userId="b8e72fca-89fa-40b2-95f0-bdb26e6d8c1d" providerId="ADAL" clId="{F77E3D6D-613B-5030-A384-37FA661628F6}" dt="2025-12-09T01:48:04.923" v="2268"/>
+          <ac:spMkLst>
+            <pc:docMk/>
+            <pc:sldMk cId="4152292366" sldId="268"/>
+            <ac:spMk id="8" creationId="{B9E1747F-727B-1E0D-8B34-FE9018FFF933}"/>
+          </ac:spMkLst>
+        </pc:spChg>
         <pc:spChg chg="add mod">
           <ac:chgData name="Morales, Abdon" userId="b8e72fca-89fa-40b2-95f0-bdb26e6d8c1d" providerId="ADAL" clId="{F77E3D6D-613B-5030-A384-37FA661628F6}" dt="2025-12-04T22:48:23.119" v="2052" actId="255"/>
           <ac:spMkLst>
@@ -171,12 +187,20 @@
             <ac:spMk id="12" creationId="{F99076AB-CD48-1D9C-24C3-8E5BC7671CED}"/>
           </ac:spMkLst>
         </pc:spChg>
-        <pc:spChg chg="del">
-          <ac:chgData name="Morales, Abdon" userId="b8e72fca-89fa-40b2-95f0-bdb26e6d8c1d" providerId="ADAL" clId="{F77E3D6D-613B-5030-A384-37FA661628F6}" dt="2025-12-04T04:12:05.673" v="1083" actId="478"/>
+        <pc:spChg chg="mod">
+          <ac:chgData name="Morales, Abdon" userId="b8e72fca-89fa-40b2-95f0-bdb26e6d8c1d" providerId="ADAL" clId="{F77E3D6D-613B-5030-A384-37FA661628F6}" dt="2025-12-09T02:04:01.911" v="3158" actId="1076"/>
           <ac:spMkLst>
             <pc:docMk/>
             <pc:sldMk cId="4152292366" sldId="268"/>
-            <ac:spMk id="46" creationId="{D903B466-646C-2D4A-BD19-7AA4D5AE665B}"/>
+            <ac:spMk id="21" creationId="{74A298CE-07C7-084B-B72C-D7D120AA24D1}"/>
+          </ac:spMkLst>
+        </pc:spChg>
+        <pc:spChg chg="mod">
+          <ac:chgData name="Morales, Abdon" userId="b8e72fca-89fa-40b2-95f0-bdb26e6d8c1d" providerId="ADAL" clId="{F77E3D6D-613B-5030-A384-37FA661628F6}" dt="2025-12-09T01:50:48.278" v="2596" actId="1076"/>
+          <ac:spMkLst>
+            <pc:docMk/>
+            <pc:sldMk cId="4152292366" sldId="268"/>
+            <ac:spMk id="24" creationId="{EF233BEC-D918-0A48-8894-42A92980A8AA}"/>
           </ac:spMkLst>
         </pc:spChg>
         <pc:spChg chg="mod">
@@ -193,22 +217,6 @@
             <pc:docMk/>
             <pc:sldMk cId="4152292366" sldId="268"/>
             <ac:spMk id="51" creationId="{E1CD2C2A-F064-084C-B9FF-1CE5B53E4E32}"/>
-          </ac:spMkLst>
-        </pc:spChg>
-        <pc:spChg chg="del">
-          <ac:chgData name="Morales, Abdon" userId="b8e72fca-89fa-40b2-95f0-bdb26e6d8c1d" providerId="ADAL" clId="{F77E3D6D-613B-5030-A384-37FA661628F6}" dt="2025-12-04T22:37:34.067" v="1108" actId="478"/>
-          <ac:spMkLst>
-            <pc:docMk/>
-            <pc:sldMk cId="4152292366" sldId="268"/>
-            <ac:spMk id="55" creationId="{932F4CD2-D53A-6945-A147-AA4161801A71}"/>
-          </ac:spMkLst>
-        </pc:spChg>
-        <pc:spChg chg="del">
-          <ac:chgData name="Morales, Abdon" userId="b8e72fca-89fa-40b2-95f0-bdb26e6d8c1d" providerId="ADAL" clId="{F77E3D6D-613B-5030-A384-37FA661628F6}" dt="2025-12-04T04:12:09.898" v="1084" actId="478"/>
-          <ac:spMkLst>
-            <pc:docMk/>
-            <pc:sldMk cId="4152292366" sldId="268"/>
-            <ac:spMk id="59" creationId="{887E75FA-C034-2447-9AFA-253A4A8F5217}"/>
           </ac:spMkLst>
         </pc:spChg>
         <pc:grpChg chg="add">
@@ -235,28 +243,12 @@
             <ac:picMk id="5" creationId="{C498A840-B2C8-4383-7568-2620CE9B6494}"/>
           </ac:picMkLst>
         </pc:picChg>
-        <pc:picChg chg="add mod">
-          <ac:chgData name="Morales, Abdon" userId="b8e72fca-89fa-40b2-95f0-bdb26e6d8c1d" providerId="ADAL" clId="{F77E3D6D-613B-5030-A384-37FA661628F6}" dt="2025-12-04T04:08:01.170" v="1064"/>
-          <ac:picMkLst>
-            <pc:docMk/>
-            <pc:sldMk cId="4152292366" sldId="268"/>
-            <ac:picMk id="6" creationId="{6408B6EF-FEDB-CD66-BA45-B016490FC750}"/>
-          </ac:picMkLst>
-        </pc:picChg>
         <pc:picChg chg="mod">
           <ac:chgData name="Morales, Abdon" userId="b8e72fca-89fa-40b2-95f0-bdb26e6d8c1d" providerId="ADAL" clId="{F77E3D6D-613B-5030-A384-37FA661628F6}" dt="2025-12-04T04:04:42.913" v="1039" actId="1076"/>
           <ac:picMkLst>
             <pc:docMk/>
             <pc:sldMk cId="4152292366" sldId="268"/>
             <ac:picMk id="7" creationId="{56CDAAF2-1818-9EB6-09DE-0325CCB12502}"/>
-          </ac:picMkLst>
-        </pc:picChg>
-        <pc:picChg chg="add del mod">
-          <ac:chgData name="Morales, Abdon" userId="b8e72fca-89fa-40b2-95f0-bdb26e6d8c1d" providerId="ADAL" clId="{F77E3D6D-613B-5030-A384-37FA661628F6}" dt="2025-12-04T04:08:55.938" v="1074" actId="478"/>
-          <ac:picMkLst>
-            <pc:docMk/>
-            <pc:sldMk cId="4152292366" sldId="268"/>
-            <ac:picMk id="8" creationId="{6740F724-754B-FD30-2AC9-4F6671BEBCC8}"/>
           </ac:picMkLst>
         </pc:picChg>
         <pc:picChg chg="add mod">
@@ -355,7 +347,7 @@
           <a:p>
             <a:fld id="{D353F5E4-024D-B04C-8649-02453A372B74}" type="datetimeFigureOut">
               <a:rPr lang="es-ES" smtClean="0"/>
-              <a:t>4/12/25</a:t>
+              <a:t>5/12/25</a:t>
             </a:fld>
             <a:endParaRPr lang="es-ES"/>
           </a:p>
@@ -853,7 +845,7 @@
           <a:p>
             <a:fld id="{722949B6-FD26-4F0A-B27E-95AA34CFB7B6}" type="datetimeFigureOut">
               <a:rPr lang="en-US" smtClean="0"/>
-              <a:t>12/3/25</a:t>
+              <a:t>12/5/25</a:t>
             </a:fld>
             <a:endParaRPr lang="en-US"/>
           </a:p>
@@ -1051,7 +1043,7 @@
           <a:p>
             <a:fld id="{722949B6-FD26-4F0A-B27E-95AA34CFB7B6}" type="datetimeFigureOut">
               <a:rPr lang="en-US" smtClean="0"/>
-              <a:t>12/3/25</a:t>
+              <a:t>12/5/25</a:t>
             </a:fld>
             <a:endParaRPr lang="en-US"/>
           </a:p>
@@ -1259,7 +1251,7 @@
           <a:p>
             <a:fld id="{722949B6-FD26-4F0A-B27E-95AA34CFB7B6}" type="datetimeFigureOut">
               <a:rPr lang="en-US" smtClean="0"/>
-              <a:t>12/3/25</a:t>
+              <a:t>12/5/25</a:t>
             </a:fld>
             <a:endParaRPr lang="en-US"/>
           </a:p>
@@ -1463,7 +1455,7 @@
           <a:p>
             <a:fld id="{C764DE79-268F-4C1A-8933-263129D2AF90}" type="datetimeFigureOut">
               <a:rPr lang="en-US" dirty="0"/>
-              <a:t>12/3/25</a:t>
+              <a:t>12/5/25</a:t>
             </a:fld>
             <a:endParaRPr lang="en-US" dirty="0"/>
           </a:p>
@@ -1633,7 +1625,7 @@
           <a:p>
             <a:fld id="{C764DE79-268F-4C1A-8933-263129D2AF90}" type="datetimeFigureOut">
               <a:rPr lang="en-US" dirty="0"/>
-              <a:t>12/3/25</a:t>
+              <a:t>12/5/25</a:t>
             </a:fld>
             <a:endParaRPr lang="en-US" dirty="0"/>
           </a:p>
@@ -1877,7 +1869,7 @@
           <a:p>
             <a:fld id="{C764DE79-268F-4C1A-8933-263129D2AF90}" type="datetimeFigureOut">
               <a:rPr lang="en-US" dirty="0"/>
-              <a:t>12/3/25</a:t>
+              <a:t>12/5/25</a:t>
             </a:fld>
             <a:endParaRPr lang="en-US" dirty="0"/>
           </a:p>
@@ -2109,7 +2101,7 @@
           <a:p>
             <a:fld id="{C764DE79-268F-4C1A-8933-263129D2AF90}" type="datetimeFigureOut">
               <a:rPr lang="en-US" dirty="0"/>
-              <a:t>12/3/25</a:t>
+              <a:t>12/5/25</a:t>
             </a:fld>
             <a:endParaRPr lang="en-US" dirty="0"/>
           </a:p>
@@ -2476,7 +2468,7 @@
           <a:p>
             <a:fld id="{C764DE79-268F-4C1A-8933-263129D2AF90}" type="datetimeFigureOut">
               <a:rPr lang="en-US" dirty="0"/>
-              <a:t>12/3/25</a:t>
+              <a:t>12/5/25</a:t>
             </a:fld>
             <a:endParaRPr lang="en-US" dirty="0"/>
           </a:p>
@@ -2594,7 +2586,7 @@
           <a:p>
             <a:fld id="{C764DE79-268F-4C1A-8933-263129D2AF90}" type="datetimeFigureOut">
               <a:rPr lang="en-US" dirty="0"/>
-              <a:t>12/3/25</a:t>
+              <a:t>12/5/25</a:t>
             </a:fld>
             <a:endParaRPr lang="en-US" dirty="0"/>
           </a:p>
@@ -2689,7 +2681,7 @@
           <a:p>
             <a:fld id="{C764DE79-268F-4C1A-8933-263129D2AF90}" type="datetimeFigureOut">
               <a:rPr lang="en-US" dirty="0"/>
-              <a:t>12/3/25</a:t>
+              <a:t>12/5/25</a:t>
             </a:fld>
             <a:endParaRPr lang="en-US" dirty="0"/>
           </a:p>
@@ -2966,7 +2958,7 @@
           <a:p>
             <a:fld id="{C764DE79-268F-4C1A-8933-263129D2AF90}" type="datetimeFigureOut">
               <a:rPr lang="en-US" dirty="0"/>
-              <a:t>12/3/25</a:t>
+              <a:t>12/5/25</a:t>
             </a:fld>
             <a:endParaRPr lang="en-US" dirty="0"/>
           </a:p>
@@ -3152,7 +3144,7 @@
           <a:p>
             <a:fld id="{722949B6-FD26-4F0A-B27E-95AA34CFB7B6}" type="datetimeFigureOut">
               <a:rPr lang="en-US" smtClean="0"/>
-              <a:t>12/3/25</a:t>
+              <a:t>12/5/25</a:t>
             </a:fld>
             <a:endParaRPr lang="en-US"/>
           </a:p>
@@ -3421,7 +3413,7 @@
           <a:p>
             <a:fld id="{C764DE79-268F-4C1A-8933-263129D2AF90}" type="datetimeFigureOut">
               <a:rPr lang="en-US" dirty="0"/>
-              <a:t>12/3/25</a:t>
+              <a:t>12/5/25</a:t>
             </a:fld>
             <a:endParaRPr lang="en-US" dirty="0"/>
           </a:p>
@@ -3591,7 +3583,7 @@
           <a:p>
             <a:fld id="{C764DE79-268F-4C1A-8933-263129D2AF90}" type="datetimeFigureOut">
               <a:rPr lang="en-US" dirty="0"/>
-              <a:t>12/3/25</a:t>
+              <a:t>12/5/25</a:t>
             </a:fld>
             <a:endParaRPr lang="en-US" dirty="0"/>
           </a:p>
@@ -3771,7 +3763,7 @@
           <a:p>
             <a:fld id="{C764DE79-268F-4C1A-8933-263129D2AF90}" type="datetimeFigureOut">
               <a:rPr lang="en-US" dirty="0"/>
-              <a:t>12/3/25</a:t>
+              <a:t>12/5/25</a:t>
             </a:fld>
             <a:endParaRPr lang="en-US" dirty="0"/>
           </a:p>
@@ -4064,7 +4056,7 @@
           <a:p>
             <a:fld id="{722949B6-FD26-4F0A-B27E-95AA34CFB7B6}" type="datetimeFigureOut">
               <a:rPr lang="en-US" smtClean="0"/>
-              <a:t>12/3/25</a:t>
+              <a:t>12/5/25</a:t>
             </a:fld>
             <a:endParaRPr lang="en-US"/>
           </a:p>
@@ -4329,7 +4321,7 @@
           <a:p>
             <a:fld id="{722949B6-FD26-4F0A-B27E-95AA34CFB7B6}" type="datetimeFigureOut">
               <a:rPr lang="en-US" smtClean="0"/>
-              <a:t>12/3/25</a:t>
+              <a:t>12/5/25</a:t>
             </a:fld>
             <a:endParaRPr lang="en-US"/>
           </a:p>
@@ -4741,7 +4733,7 @@
           <a:p>
             <a:fld id="{722949B6-FD26-4F0A-B27E-95AA34CFB7B6}" type="datetimeFigureOut">
               <a:rPr lang="en-US" smtClean="0"/>
-              <a:t>12/3/25</a:t>
+              <a:t>12/5/25</a:t>
             </a:fld>
             <a:endParaRPr lang="en-US"/>
           </a:p>
@@ -4882,7 +4874,7 @@
           <a:p>
             <a:fld id="{722949B6-FD26-4F0A-B27E-95AA34CFB7B6}" type="datetimeFigureOut">
               <a:rPr lang="en-US" smtClean="0"/>
-              <a:t>12/3/25</a:t>
+              <a:t>12/5/25</a:t>
             </a:fld>
             <a:endParaRPr lang="en-US"/>
           </a:p>
@@ -4995,7 +4987,7 @@
           <a:p>
             <a:fld id="{722949B6-FD26-4F0A-B27E-95AA34CFB7B6}" type="datetimeFigureOut">
               <a:rPr lang="en-US" smtClean="0"/>
-              <a:t>12/3/25</a:t>
+              <a:t>12/5/25</a:t>
             </a:fld>
             <a:endParaRPr lang="en-US"/>
           </a:p>
@@ -5306,7 +5298,7 @@
           <a:p>
             <a:fld id="{722949B6-FD26-4F0A-B27E-95AA34CFB7B6}" type="datetimeFigureOut">
               <a:rPr lang="en-US" smtClean="0"/>
-              <a:t>12/3/25</a:t>
+              <a:t>12/5/25</a:t>
             </a:fld>
             <a:endParaRPr lang="en-US"/>
           </a:p>
@@ -5594,7 +5586,7 @@
           <a:p>
             <a:fld id="{722949B6-FD26-4F0A-B27E-95AA34CFB7B6}" type="datetimeFigureOut">
               <a:rPr lang="en-US" smtClean="0"/>
-              <a:t>12/3/25</a:t>
+              <a:t>12/5/25</a:t>
             </a:fld>
             <a:endParaRPr lang="en-US"/>
           </a:p>
@@ -5835,7 +5827,7 @@
           <a:p>
             <a:fld id="{722949B6-FD26-4F0A-B27E-95AA34CFB7B6}" type="datetimeFigureOut">
               <a:rPr lang="en-US" smtClean="0"/>
-              <a:t>12/3/25</a:t>
+              <a:t>12/5/25</a:t>
             </a:fld>
             <a:endParaRPr lang="en-US"/>
           </a:p>
@@ -6387,7 +6379,7 @@
           <a:p>
             <a:fld id="{C764DE79-268F-4C1A-8933-263129D2AF90}" type="datetimeFigureOut">
               <a:rPr lang="en-US" dirty="0"/>
-              <a:t>12/3/25</a:t>
+              <a:t>12/5/25</a:t>
             </a:fld>
             <a:endParaRPr lang="en-US" dirty="0"/>
           </a:p>
@@ -6973,8 +6965,8 @@
         </p:nvSpPr>
         <p:spPr>
           <a:xfrm>
-            <a:off x="7873433" y="4521783"/>
-            <a:ext cx="2592548" cy="620554"/>
+            <a:off x="7845698" y="4476916"/>
+            <a:ext cx="2592548" cy="708592"/>
           </a:xfrm>
           <a:prstGeom prst="rect">
             <a:avLst/>
@@ -6988,16 +6980,6 @@
           <a:lstStyle/>
           <a:p>
             <a:pPr defTabSz="780653"/>
-            <a:r>
-              <a:rPr lang="en-US" sz="572" dirty="0" err="1">
-                <a:solidFill>
-                  <a:prstClr val="black"/>
-                </a:solidFill>
-                <a:latin typeface="Arial" panose="020B0604020202020204" pitchFamily="34" charset="0"/>
-                <a:cs typeface="Arial" panose="020B0604020202020204" pitchFamily="34" charset="0"/>
-              </a:rPr>
-              <a:t>Vitam</a:t>
-            </a:r>
             <a:r>
               <a:rPr lang="en-US" sz="572" dirty="0">
                 <a:solidFill>
@@ -7006,967 +6988,7 @@
                 <a:latin typeface="Arial" panose="020B0604020202020204" pitchFamily="34" charset="0"/>
                 <a:cs typeface="Arial" panose="020B0604020202020204" pitchFamily="34" charset="0"/>
               </a:rPr>
-              <a:t> </a:t>
-            </a:r>
-            <a:r>
-              <a:rPr lang="en-US" sz="572" dirty="0" err="1">
-                <a:solidFill>
-                  <a:prstClr val="black"/>
-                </a:solidFill>
-                <a:latin typeface="Arial" panose="020B0604020202020204" pitchFamily="34" charset="0"/>
-                <a:cs typeface="Arial" panose="020B0604020202020204" pitchFamily="34" charset="0"/>
-              </a:rPr>
-              <a:t>voloria</a:t>
-            </a:r>
-            <a:r>
-              <a:rPr lang="en-US" sz="572" dirty="0">
-                <a:solidFill>
-                  <a:prstClr val="black"/>
-                </a:solidFill>
-                <a:latin typeface="Arial" panose="020B0604020202020204" pitchFamily="34" charset="0"/>
-                <a:cs typeface="Arial" panose="020B0604020202020204" pitchFamily="34" charset="0"/>
-              </a:rPr>
-              <a:t> con et, cum </a:t>
-            </a:r>
-            <a:r>
-              <a:rPr lang="en-US" sz="572" dirty="0" err="1">
-                <a:solidFill>
-                  <a:prstClr val="black"/>
-                </a:solidFill>
-                <a:latin typeface="Arial" panose="020B0604020202020204" pitchFamily="34" charset="0"/>
-                <a:cs typeface="Arial" panose="020B0604020202020204" pitchFamily="34" charset="0"/>
-              </a:rPr>
-              <a:t>laboreium</a:t>
-            </a:r>
-            <a:r>
-              <a:rPr lang="en-US" sz="572" dirty="0">
-                <a:solidFill>
-                  <a:prstClr val="black"/>
-                </a:solidFill>
-                <a:latin typeface="Arial" panose="020B0604020202020204" pitchFamily="34" charset="0"/>
-                <a:cs typeface="Arial" panose="020B0604020202020204" pitchFamily="34" charset="0"/>
-              </a:rPr>
-              <a:t>, </a:t>
-            </a:r>
-            <a:r>
-              <a:rPr lang="en-US" sz="572" dirty="0" err="1">
-                <a:solidFill>
-                  <a:prstClr val="black"/>
-                </a:solidFill>
-                <a:latin typeface="Arial" panose="020B0604020202020204" pitchFamily="34" charset="0"/>
-                <a:cs typeface="Arial" panose="020B0604020202020204" pitchFamily="34" charset="0"/>
-              </a:rPr>
-              <a:t>nam</a:t>
-            </a:r>
-            <a:r>
-              <a:rPr lang="en-US" sz="572" dirty="0">
-                <a:solidFill>
-                  <a:prstClr val="black"/>
-                </a:solidFill>
-                <a:latin typeface="Arial" panose="020B0604020202020204" pitchFamily="34" charset="0"/>
-                <a:cs typeface="Arial" panose="020B0604020202020204" pitchFamily="34" charset="0"/>
-              </a:rPr>
-              <a:t> cum, </a:t>
-            </a:r>
-            <a:r>
-              <a:rPr lang="en-US" sz="572" dirty="0" err="1">
-                <a:solidFill>
-                  <a:prstClr val="black"/>
-                </a:solidFill>
-                <a:latin typeface="Arial" panose="020B0604020202020204" pitchFamily="34" charset="0"/>
-                <a:cs typeface="Arial" panose="020B0604020202020204" pitchFamily="34" charset="0"/>
-              </a:rPr>
-              <a:t>quat</a:t>
-            </a:r>
-            <a:r>
-              <a:rPr lang="en-US" sz="572" dirty="0">
-                <a:solidFill>
-                  <a:prstClr val="black"/>
-                </a:solidFill>
-                <a:latin typeface="Arial" panose="020B0604020202020204" pitchFamily="34" charset="0"/>
-                <a:cs typeface="Arial" panose="020B0604020202020204" pitchFamily="34" charset="0"/>
-              </a:rPr>
-              <a:t> </a:t>
-            </a:r>
-            <a:r>
-              <a:rPr lang="en-US" sz="572" dirty="0" err="1">
-                <a:solidFill>
-                  <a:prstClr val="black"/>
-                </a:solidFill>
-                <a:latin typeface="Arial" panose="020B0604020202020204" pitchFamily="34" charset="0"/>
-                <a:cs typeface="Arial" panose="020B0604020202020204" pitchFamily="34" charset="0"/>
-              </a:rPr>
-              <a:t>paris</a:t>
-            </a:r>
-            <a:r>
-              <a:rPr lang="en-US" sz="572" dirty="0">
-                <a:solidFill>
-                  <a:prstClr val="black"/>
-                </a:solidFill>
-                <a:latin typeface="Arial" panose="020B0604020202020204" pitchFamily="34" charset="0"/>
-                <a:cs typeface="Arial" panose="020B0604020202020204" pitchFamily="34" charset="0"/>
-              </a:rPr>
-              <a:t> as core </a:t>
-            </a:r>
-            <a:r>
-              <a:rPr lang="en-US" sz="572" dirty="0" err="1">
-                <a:solidFill>
-                  <a:prstClr val="black"/>
-                </a:solidFill>
-                <a:latin typeface="Arial" panose="020B0604020202020204" pitchFamily="34" charset="0"/>
-                <a:cs typeface="Arial" panose="020B0604020202020204" pitchFamily="34" charset="0"/>
-              </a:rPr>
-              <a:t>volorest</a:t>
-            </a:r>
-            <a:r>
-              <a:rPr lang="en-US" sz="572" dirty="0">
-                <a:solidFill>
-                  <a:prstClr val="black"/>
-                </a:solidFill>
-                <a:latin typeface="Arial" panose="020B0604020202020204" pitchFamily="34" charset="0"/>
-                <a:cs typeface="Arial" panose="020B0604020202020204" pitchFamily="34" charset="0"/>
-              </a:rPr>
-              <a:t>, </a:t>
-            </a:r>
-            <a:r>
-              <a:rPr lang="en-US" sz="572" dirty="0" err="1">
-                <a:solidFill>
-                  <a:prstClr val="black"/>
-                </a:solidFill>
-                <a:latin typeface="Arial" panose="020B0604020202020204" pitchFamily="34" charset="0"/>
-                <a:cs typeface="Arial" panose="020B0604020202020204" pitchFamily="34" charset="0"/>
-              </a:rPr>
-              <a:t>sust</a:t>
-            </a:r>
-            <a:r>
-              <a:rPr lang="en-US" sz="572" dirty="0">
-                <a:solidFill>
-                  <a:prstClr val="black"/>
-                </a:solidFill>
-                <a:latin typeface="Arial" panose="020B0604020202020204" pitchFamily="34" charset="0"/>
-                <a:cs typeface="Arial" panose="020B0604020202020204" pitchFamily="34" charset="0"/>
-              </a:rPr>
-              <a:t> </a:t>
-            </a:r>
-            <a:r>
-              <a:rPr lang="en-US" sz="572" dirty="0" err="1">
-                <a:solidFill>
-                  <a:prstClr val="black"/>
-                </a:solidFill>
-                <a:latin typeface="Arial" panose="020B0604020202020204" pitchFamily="34" charset="0"/>
-                <a:cs typeface="Arial" panose="020B0604020202020204" pitchFamily="34" charset="0"/>
-              </a:rPr>
-              <a:t>exceatur</a:t>
-            </a:r>
-            <a:r>
-              <a:rPr lang="en-US" sz="572" dirty="0">
-                <a:solidFill>
-                  <a:prstClr val="black"/>
-                </a:solidFill>
-                <a:latin typeface="Arial" panose="020B0604020202020204" pitchFamily="34" charset="0"/>
-                <a:cs typeface="Arial" panose="020B0604020202020204" pitchFamily="34" charset="0"/>
-              </a:rPr>
-              <a:t> </a:t>
-            </a:r>
-            <a:r>
-              <a:rPr lang="en-US" sz="572" dirty="0" err="1">
-                <a:solidFill>
-                  <a:prstClr val="black"/>
-                </a:solidFill>
-                <a:latin typeface="Arial" panose="020B0604020202020204" pitchFamily="34" charset="0"/>
-                <a:cs typeface="Arial" panose="020B0604020202020204" pitchFamily="34" charset="0"/>
-              </a:rPr>
-              <a:t>antio</a:t>
-            </a:r>
-            <a:r>
-              <a:rPr lang="en-US" sz="572" dirty="0">
-                <a:solidFill>
-                  <a:prstClr val="black"/>
-                </a:solidFill>
-                <a:latin typeface="Arial" panose="020B0604020202020204" pitchFamily="34" charset="0"/>
-                <a:cs typeface="Arial" panose="020B0604020202020204" pitchFamily="34" charset="0"/>
-              </a:rPr>
-              <a:t> </a:t>
-            </a:r>
-            <a:r>
-              <a:rPr lang="en-US" sz="572" dirty="0" err="1">
-                <a:solidFill>
-                  <a:prstClr val="black"/>
-                </a:solidFill>
-                <a:latin typeface="Arial" panose="020B0604020202020204" pitchFamily="34" charset="0"/>
-                <a:cs typeface="Arial" panose="020B0604020202020204" pitchFamily="34" charset="0"/>
-              </a:rPr>
-              <a:t>ea</a:t>
-            </a:r>
-            <a:r>
-              <a:rPr lang="en-US" sz="572" dirty="0">
-                <a:solidFill>
-                  <a:prstClr val="black"/>
-                </a:solidFill>
-                <a:latin typeface="Arial" panose="020B0604020202020204" pitchFamily="34" charset="0"/>
-                <a:cs typeface="Arial" panose="020B0604020202020204" pitchFamily="34" charset="0"/>
-              </a:rPr>
-              <a:t> </a:t>
-            </a:r>
-            <a:r>
-              <a:rPr lang="en-US" sz="572" dirty="0" err="1">
-                <a:solidFill>
-                  <a:prstClr val="black"/>
-                </a:solidFill>
-                <a:latin typeface="Arial" panose="020B0604020202020204" pitchFamily="34" charset="0"/>
-                <a:cs typeface="Arial" panose="020B0604020202020204" pitchFamily="34" charset="0"/>
-              </a:rPr>
-              <a:t>voluptas</a:t>
-            </a:r>
-            <a:r>
-              <a:rPr lang="en-US" sz="572" dirty="0">
-                <a:solidFill>
-                  <a:prstClr val="black"/>
-                </a:solidFill>
-                <a:latin typeface="Arial" panose="020B0604020202020204" pitchFamily="34" charset="0"/>
-                <a:cs typeface="Arial" panose="020B0604020202020204" pitchFamily="34" charset="0"/>
-              </a:rPr>
-              <a:t> </a:t>
-            </a:r>
-            <a:r>
-              <a:rPr lang="en-US" sz="572" dirty="0" err="1">
-                <a:solidFill>
-                  <a:prstClr val="black"/>
-                </a:solidFill>
-                <a:latin typeface="Arial" panose="020B0604020202020204" pitchFamily="34" charset="0"/>
-                <a:cs typeface="Arial" panose="020B0604020202020204" pitchFamily="34" charset="0"/>
-              </a:rPr>
-              <a:t>eumquatendit</a:t>
-            </a:r>
-            <a:r>
-              <a:rPr lang="en-US" sz="572" dirty="0">
-                <a:solidFill>
-                  <a:prstClr val="black"/>
-                </a:solidFill>
-                <a:latin typeface="Arial" panose="020B0604020202020204" pitchFamily="34" charset="0"/>
-                <a:cs typeface="Arial" panose="020B0604020202020204" pitchFamily="34" charset="0"/>
-              </a:rPr>
-              <a:t> </a:t>
-            </a:r>
-            <a:r>
-              <a:rPr lang="en-US" sz="572" dirty="0" err="1">
-                <a:solidFill>
-                  <a:prstClr val="black"/>
-                </a:solidFill>
-                <a:latin typeface="Arial" panose="020B0604020202020204" pitchFamily="34" charset="0"/>
-                <a:cs typeface="Arial" panose="020B0604020202020204" pitchFamily="34" charset="0"/>
-              </a:rPr>
-              <a:t>quas</a:t>
-            </a:r>
-            <a:r>
-              <a:rPr lang="en-US" sz="572" dirty="0">
-                <a:solidFill>
-                  <a:prstClr val="black"/>
-                </a:solidFill>
-                <a:latin typeface="Arial" panose="020B0604020202020204" pitchFamily="34" charset="0"/>
-                <a:cs typeface="Arial" panose="020B0604020202020204" pitchFamily="34" charset="0"/>
-              </a:rPr>
-              <a:t> </a:t>
-            </a:r>
-            <a:r>
-              <a:rPr lang="en-US" sz="572" dirty="0" err="1">
-                <a:solidFill>
-                  <a:prstClr val="black"/>
-                </a:solidFill>
-                <a:latin typeface="Arial" panose="020B0604020202020204" pitchFamily="34" charset="0"/>
-                <a:cs typeface="Arial" panose="020B0604020202020204" pitchFamily="34" charset="0"/>
-              </a:rPr>
-              <a:t>doluptatet</a:t>
-            </a:r>
-            <a:r>
-              <a:rPr lang="en-US" sz="572" dirty="0">
-                <a:solidFill>
-                  <a:prstClr val="black"/>
-                </a:solidFill>
-                <a:latin typeface="Arial" panose="020B0604020202020204" pitchFamily="34" charset="0"/>
-                <a:cs typeface="Arial" panose="020B0604020202020204" pitchFamily="34" charset="0"/>
-              </a:rPr>
-              <a:t> </a:t>
-            </a:r>
-            <a:r>
-              <a:rPr lang="en-US" sz="572" dirty="0" err="1">
-                <a:solidFill>
-                  <a:prstClr val="black"/>
-                </a:solidFill>
-                <a:latin typeface="Arial" panose="020B0604020202020204" pitchFamily="34" charset="0"/>
-                <a:cs typeface="Arial" panose="020B0604020202020204" pitchFamily="34" charset="0"/>
-              </a:rPr>
-              <a:t>aut</a:t>
-            </a:r>
-            <a:r>
-              <a:rPr lang="en-US" sz="572" dirty="0">
-                <a:solidFill>
-                  <a:prstClr val="black"/>
-                </a:solidFill>
-                <a:latin typeface="Arial" panose="020B0604020202020204" pitchFamily="34" charset="0"/>
-                <a:cs typeface="Arial" panose="020B0604020202020204" pitchFamily="34" charset="0"/>
-              </a:rPr>
-              <a:t> </a:t>
-            </a:r>
-            <a:r>
-              <a:rPr lang="en-US" sz="572" dirty="0" err="1">
-                <a:solidFill>
-                  <a:prstClr val="black"/>
-                </a:solidFill>
-                <a:latin typeface="Arial" panose="020B0604020202020204" pitchFamily="34" charset="0"/>
-                <a:cs typeface="Arial" panose="020B0604020202020204" pitchFamily="34" charset="0"/>
-              </a:rPr>
-              <a:t>landignam</a:t>
-            </a:r>
-            <a:r>
-              <a:rPr lang="en-US" sz="572" dirty="0">
-                <a:solidFill>
-                  <a:prstClr val="black"/>
-                </a:solidFill>
-                <a:latin typeface="Arial" panose="020B0604020202020204" pitchFamily="34" charset="0"/>
-                <a:cs typeface="Arial" panose="020B0604020202020204" pitchFamily="34" charset="0"/>
-              </a:rPr>
-              <a:t> que </a:t>
-            </a:r>
-            <a:r>
-              <a:rPr lang="en-US" sz="572" dirty="0" err="1">
-                <a:solidFill>
-                  <a:prstClr val="black"/>
-                </a:solidFill>
-                <a:latin typeface="Arial" panose="020B0604020202020204" pitchFamily="34" charset="0"/>
-                <a:cs typeface="Arial" panose="020B0604020202020204" pitchFamily="34" charset="0"/>
-              </a:rPr>
-              <a:t>lantur</a:t>
-            </a:r>
-            <a:r>
-              <a:rPr lang="en-US" sz="572" dirty="0">
-                <a:solidFill>
-                  <a:prstClr val="black"/>
-                </a:solidFill>
-                <a:latin typeface="Arial" panose="020B0604020202020204" pitchFamily="34" charset="0"/>
-                <a:cs typeface="Arial" panose="020B0604020202020204" pitchFamily="34" charset="0"/>
-              </a:rPr>
-              <a:t> </a:t>
-            </a:r>
-            <a:r>
-              <a:rPr lang="en-US" sz="572" dirty="0" err="1">
-                <a:solidFill>
-                  <a:prstClr val="black"/>
-                </a:solidFill>
-                <a:latin typeface="Arial" panose="020B0604020202020204" pitchFamily="34" charset="0"/>
-                <a:cs typeface="Arial" panose="020B0604020202020204" pitchFamily="34" charset="0"/>
-              </a:rPr>
-              <a:t>sania</a:t>
-            </a:r>
-            <a:r>
-              <a:rPr lang="en-US" sz="572" dirty="0">
-                <a:solidFill>
-                  <a:prstClr val="black"/>
-                </a:solidFill>
-                <a:latin typeface="Arial" panose="020B0604020202020204" pitchFamily="34" charset="0"/>
-                <a:cs typeface="Arial" panose="020B0604020202020204" pitchFamily="34" charset="0"/>
-              </a:rPr>
-              <a:t> </a:t>
-            </a:r>
-            <a:r>
-              <a:rPr lang="en-US" sz="572" dirty="0" err="1">
-                <a:solidFill>
-                  <a:prstClr val="black"/>
-                </a:solidFill>
-                <a:latin typeface="Arial" panose="020B0604020202020204" pitchFamily="34" charset="0"/>
-                <a:cs typeface="Arial" panose="020B0604020202020204" pitchFamily="34" charset="0"/>
-              </a:rPr>
-              <a:t>dem</a:t>
-            </a:r>
-            <a:r>
-              <a:rPr lang="en-US" sz="572" dirty="0">
-                <a:solidFill>
-                  <a:prstClr val="black"/>
-                </a:solidFill>
-                <a:latin typeface="Arial" panose="020B0604020202020204" pitchFamily="34" charset="0"/>
-                <a:cs typeface="Arial" panose="020B0604020202020204" pitchFamily="34" charset="0"/>
-              </a:rPr>
-              <a:t> </a:t>
-            </a:r>
-            <a:r>
-              <a:rPr lang="en-US" sz="572" dirty="0" err="1">
-                <a:solidFill>
-                  <a:prstClr val="black"/>
-                </a:solidFill>
-                <a:latin typeface="Arial" panose="020B0604020202020204" pitchFamily="34" charset="0"/>
-                <a:cs typeface="Arial" panose="020B0604020202020204" pitchFamily="34" charset="0"/>
-              </a:rPr>
-              <a:t>escidit</a:t>
-            </a:r>
-            <a:r>
-              <a:rPr lang="en-US" sz="572" dirty="0">
-                <a:solidFill>
-                  <a:prstClr val="black"/>
-                </a:solidFill>
-                <a:latin typeface="Arial" panose="020B0604020202020204" pitchFamily="34" charset="0"/>
-                <a:cs typeface="Arial" panose="020B0604020202020204" pitchFamily="34" charset="0"/>
-              </a:rPr>
-              <a:t> min </a:t>
-            </a:r>
-            <a:r>
-              <a:rPr lang="en-US" sz="572" dirty="0" err="1">
-                <a:solidFill>
-                  <a:prstClr val="black"/>
-                </a:solidFill>
-                <a:latin typeface="Arial" panose="020B0604020202020204" pitchFamily="34" charset="0"/>
-                <a:cs typeface="Arial" panose="020B0604020202020204" pitchFamily="34" charset="0"/>
-              </a:rPr>
-              <a:t>reruptiaero</a:t>
-            </a:r>
-            <a:r>
-              <a:rPr lang="en-US" sz="572" dirty="0">
-                <a:solidFill>
-                  <a:prstClr val="black"/>
-                </a:solidFill>
-                <a:latin typeface="Arial" panose="020B0604020202020204" pitchFamily="34" charset="0"/>
-                <a:cs typeface="Arial" panose="020B0604020202020204" pitchFamily="34" charset="0"/>
-              </a:rPr>
-              <a:t> </a:t>
-            </a:r>
-            <a:r>
-              <a:rPr lang="en-US" sz="572" dirty="0" err="1">
-                <a:solidFill>
-                  <a:prstClr val="black"/>
-                </a:solidFill>
-                <a:latin typeface="Arial" panose="020B0604020202020204" pitchFamily="34" charset="0"/>
-                <a:cs typeface="Arial" panose="020B0604020202020204" pitchFamily="34" charset="0"/>
-              </a:rPr>
-              <a:t>velis</a:t>
-            </a:r>
-            <a:r>
-              <a:rPr lang="en-US" sz="572" dirty="0">
-                <a:solidFill>
-                  <a:prstClr val="black"/>
-                </a:solidFill>
-                <a:latin typeface="Arial" panose="020B0604020202020204" pitchFamily="34" charset="0"/>
-                <a:cs typeface="Arial" panose="020B0604020202020204" pitchFamily="34" charset="0"/>
-              </a:rPr>
-              <a:t> maximus </a:t>
-            </a:r>
-            <a:r>
-              <a:rPr lang="en-US" sz="572" dirty="0" err="1">
-                <a:solidFill>
-                  <a:prstClr val="black"/>
-                </a:solidFill>
-                <a:latin typeface="Arial" panose="020B0604020202020204" pitchFamily="34" charset="0"/>
-                <a:cs typeface="Arial" panose="020B0604020202020204" pitchFamily="34" charset="0"/>
-              </a:rPr>
-              <a:t>aut</a:t>
-            </a:r>
-            <a:r>
-              <a:rPr lang="en-US" sz="572" dirty="0">
-                <a:solidFill>
-                  <a:prstClr val="black"/>
-                </a:solidFill>
-                <a:latin typeface="Arial" panose="020B0604020202020204" pitchFamily="34" charset="0"/>
-                <a:cs typeface="Arial" panose="020B0604020202020204" pitchFamily="34" charset="0"/>
-              </a:rPr>
-              <a:t> que </a:t>
-            </a:r>
-            <a:r>
-              <a:rPr lang="en-US" sz="572" dirty="0" err="1">
-                <a:solidFill>
-                  <a:prstClr val="black"/>
-                </a:solidFill>
-                <a:latin typeface="Arial" panose="020B0604020202020204" pitchFamily="34" charset="0"/>
-                <a:cs typeface="Arial" panose="020B0604020202020204" pitchFamily="34" charset="0"/>
-              </a:rPr>
-              <a:t>pe</a:t>
-            </a:r>
-            <a:r>
-              <a:rPr lang="en-US" sz="572" dirty="0">
-                <a:solidFill>
-                  <a:prstClr val="black"/>
-                </a:solidFill>
-                <a:latin typeface="Arial" panose="020B0604020202020204" pitchFamily="34" charset="0"/>
-                <a:cs typeface="Arial" panose="020B0604020202020204" pitchFamily="34" charset="0"/>
-              </a:rPr>
-              <a:t> </a:t>
-            </a:r>
-            <a:r>
-              <a:rPr lang="en-US" sz="572" dirty="0" err="1">
-                <a:solidFill>
-                  <a:prstClr val="black"/>
-                </a:solidFill>
-                <a:latin typeface="Arial" panose="020B0604020202020204" pitchFamily="34" charset="0"/>
-                <a:cs typeface="Arial" panose="020B0604020202020204" pitchFamily="34" charset="0"/>
-              </a:rPr>
-              <a:t>aliquas</a:t>
-            </a:r>
-            <a:r>
-              <a:rPr lang="en-US" sz="572" dirty="0">
-                <a:solidFill>
-                  <a:prstClr val="black"/>
-                </a:solidFill>
-                <a:latin typeface="Arial" panose="020B0604020202020204" pitchFamily="34" charset="0"/>
-                <a:cs typeface="Arial" panose="020B0604020202020204" pitchFamily="34" charset="0"/>
-              </a:rPr>
-              <a:t> </a:t>
-            </a:r>
-            <a:r>
-              <a:rPr lang="en-US" sz="572" dirty="0" err="1">
-                <a:solidFill>
-                  <a:prstClr val="black"/>
-                </a:solidFill>
-                <a:latin typeface="Arial" panose="020B0604020202020204" pitchFamily="34" charset="0"/>
-                <a:cs typeface="Arial" panose="020B0604020202020204" pitchFamily="34" charset="0"/>
-              </a:rPr>
-              <a:t>sequidisit</a:t>
-            </a:r>
-            <a:r>
-              <a:rPr lang="en-US" sz="572" dirty="0">
-                <a:solidFill>
-                  <a:prstClr val="black"/>
-                </a:solidFill>
-                <a:latin typeface="Arial" panose="020B0604020202020204" pitchFamily="34" charset="0"/>
-                <a:cs typeface="Arial" panose="020B0604020202020204" pitchFamily="34" charset="0"/>
-              </a:rPr>
-              <a:t>, </a:t>
-            </a:r>
-            <a:r>
-              <a:rPr lang="en-US" sz="572" dirty="0" err="1">
-                <a:solidFill>
-                  <a:prstClr val="black"/>
-                </a:solidFill>
-                <a:latin typeface="Arial" panose="020B0604020202020204" pitchFamily="34" charset="0"/>
-                <a:cs typeface="Arial" panose="020B0604020202020204" pitchFamily="34" charset="0"/>
-              </a:rPr>
-              <a:t>omnient</a:t>
-            </a:r>
-            <a:r>
-              <a:rPr lang="en-US" sz="572" dirty="0">
-                <a:solidFill>
-                  <a:prstClr val="black"/>
-                </a:solidFill>
-                <a:latin typeface="Arial" panose="020B0604020202020204" pitchFamily="34" charset="0"/>
-                <a:cs typeface="Arial" panose="020B0604020202020204" pitchFamily="34" charset="0"/>
-              </a:rPr>
-              <a:t> hit lam </a:t>
-            </a:r>
-            <a:r>
-              <a:rPr lang="en-US" sz="572" dirty="0" err="1">
-                <a:solidFill>
-                  <a:prstClr val="black"/>
-                </a:solidFill>
-                <a:latin typeface="Arial" panose="020B0604020202020204" pitchFamily="34" charset="0"/>
-                <a:cs typeface="Arial" panose="020B0604020202020204" pitchFamily="34" charset="0"/>
-              </a:rPr>
-              <a:t>eicias</a:t>
-            </a:r>
-            <a:r>
-              <a:rPr lang="en-US" sz="572" dirty="0">
-                <a:solidFill>
-                  <a:prstClr val="black"/>
-                </a:solidFill>
-                <a:latin typeface="Arial" panose="020B0604020202020204" pitchFamily="34" charset="0"/>
-                <a:cs typeface="Arial" panose="020B0604020202020204" pitchFamily="34" charset="0"/>
-              </a:rPr>
-              <a:t> </a:t>
-            </a:r>
-            <a:r>
-              <a:rPr lang="en-US" sz="572" dirty="0" err="1">
-                <a:solidFill>
-                  <a:prstClr val="black"/>
-                </a:solidFill>
-                <a:latin typeface="Arial" panose="020B0604020202020204" pitchFamily="34" charset="0"/>
-                <a:cs typeface="Arial" panose="020B0604020202020204" pitchFamily="34" charset="0"/>
-              </a:rPr>
-              <a:t>modio</a:t>
-            </a:r>
-            <a:r>
-              <a:rPr lang="en-US" sz="572" dirty="0">
-                <a:solidFill>
-                  <a:prstClr val="black"/>
-                </a:solidFill>
-                <a:latin typeface="Arial" panose="020B0604020202020204" pitchFamily="34" charset="0"/>
-                <a:cs typeface="Arial" panose="020B0604020202020204" pitchFamily="34" charset="0"/>
-              </a:rPr>
-              <a:t> con </a:t>
-            </a:r>
-            <a:r>
-              <a:rPr lang="en-US" sz="572" dirty="0" err="1">
-                <a:solidFill>
-                  <a:prstClr val="black"/>
-                </a:solidFill>
-                <a:latin typeface="Arial" panose="020B0604020202020204" pitchFamily="34" charset="0"/>
-                <a:cs typeface="Arial" panose="020B0604020202020204" pitchFamily="34" charset="0"/>
-              </a:rPr>
-              <a:t>nisin</a:t>
-            </a:r>
-            <a:r>
-              <a:rPr lang="en-US" sz="572" dirty="0">
-                <a:solidFill>
-                  <a:prstClr val="black"/>
-                </a:solidFill>
-                <a:latin typeface="Arial" panose="020B0604020202020204" pitchFamily="34" charset="0"/>
-                <a:cs typeface="Arial" panose="020B0604020202020204" pitchFamily="34" charset="0"/>
-              </a:rPr>
-              <a:t> </a:t>
-            </a:r>
-            <a:r>
-              <a:rPr lang="en-US" sz="572" dirty="0" err="1">
-                <a:solidFill>
-                  <a:prstClr val="black"/>
-                </a:solidFill>
-                <a:latin typeface="Arial" panose="020B0604020202020204" pitchFamily="34" charset="0"/>
-                <a:cs typeface="Arial" panose="020B0604020202020204" pitchFamily="34" charset="0"/>
-              </a:rPr>
-              <a:t>pediam</a:t>
-            </a:r>
-            <a:r>
-              <a:rPr lang="en-US" sz="572" dirty="0">
-                <a:solidFill>
-                  <a:prstClr val="black"/>
-                </a:solidFill>
-                <a:latin typeface="Arial" panose="020B0604020202020204" pitchFamily="34" charset="0"/>
-                <a:cs typeface="Arial" panose="020B0604020202020204" pitchFamily="34" charset="0"/>
-              </a:rPr>
-              <a:t>, </a:t>
-            </a:r>
-            <a:r>
-              <a:rPr lang="en-US" sz="572" dirty="0" err="1">
-                <a:solidFill>
-                  <a:prstClr val="black"/>
-                </a:solidFill>
-                <a:latin typeface="Arial" panose="020B0604020202020204" pitchFamily="34" charset="0"/>
-                <a:cs typeface="Arial" panose="020B0604020202020204" pitchFamily="34" charset="0"/>
-              </a:rPr>
-              <a:t>ent</a:t>
-            </a:r>
-            <a:r>
-              <a:rPr lang="en-US" sz="572" dirty="0">
-                <a:solidFill>
-                  <a:prstClr val="black"/>
-                </a:solidFill>
-                <a:latin typeface="Arial" panose="020B0604020202020204" pitchFamily="34" charset="0"/>
-                <a:cs typeface="Arial" panose="020B0604020202020204" pitchFamily="34" charset="0"/>
-              </a:rPr>
-              <a:t>, </a:t>
-            </a:r>
-            <a:r>
-              <a:rPr lang="en-US" sz="572" dirty="0" err="1">
-                <a:solidFill>
-                  <a:prstClr val="black"/>
-                </a:solidFill>
-                <a:latin typeface="Arial" panose="020B0604020202020204" pitchFamily="34" charset="0"/>
-                <a:cs typeface="Arial" panose="020B0604020202020204" pitchFamily="34" charset="0"/>
-              </a:rPr>
-              <a:t>cust</a:t>
-            </a:r>
-            <a:r>
-              <a:rPr lang="en-US" sz="572" dirty="0">
-                <a:solidFill>
-                  <a:prstClr val="black"/>
-                </a:solidFill>
-                <a:latin typeface="Arial" panose="020B0604020202020204" pitchFamily="34" charset="0"/>
-                <a:cs typeface="Arial" panose="020B0604020202020204" pitchFamily="34" charset="0"/>
-              </a:rPr>
-              <a:t> </a:t>
-            </a:r>
-            <a:r>
-              <a:rPr lang="en-US" sz="572" dirty="0" err="1">
-                <a:solidFill>
-                  <a:prstClr val="black"/>
-                </a:solidFill>
-                <a:latin typeface="Arial" panose="020B0604020202020204" pitchFamily="34" charset="0"/>
-                <a:cs typeface="Arial" panose="020B0604020202020204" pitchFamily="34" charset="0"/>
-              </a:rPr>
-              <a:t>accaborit</a:t>
-            </a:r>
-            <a:r>
-              <a:rPr lang="en-US" sz="572" dirty="0">
-                <a:solidFill>
-                  <a:prstClr val="black"/>
-                </a:solidFill>
-                <a:latin typeface="Arial" panose="020B0604020202020204" pitchFamily="34" charset="0"/>
-                <a:cs typeface="Arial" panose="020B0604020202020204" pitchFamily="34" charset="0"/>
-              </a:rPr>
-              <a:t> </a:t>
-            </a:r>
-            <a:r>
-              <a:rPr lang="en-US" sz="572" dirty="0" err="1">
-                <a:solidFill>
-                  <a:prstClr val="black"/>
-                </a:solidFill>
-                <a:latin typeface="Arial" panose="020B0604020202020204" pitchFamily="34" charset="0"/>
-                <a:cs typeface="Arial" panose="020B0604020202020204" pitchFamily="34" charset="0"/>
-              </a:rPr>
-              <a:t>odio</a:t>
-            </a:r>
-            <a:r>
-              <a:rPr lang="en-US" sz="572" dirty="0">
-                <a:solidFill>
-                  <a:prstClr val="black"/>
-                </a:solidFill>
-                <a:latin typeface="Arial" panose="020B0604020202020204" pitchFamily="34" charset="0"/>
-                <a:cs typeface="Arial" panose="020B0604020202020204" pitchFamily="34" charset="0"/>
-              </a:rPr>
-              <a:t> </a:t>
-            </a:r>
-            <a:r>
-              <a:rPr lang="en-US" sz="572" dirty="0" err="1">
-                <a:solidFill>
-                  <a:prstClr val="black"/>
-                </a:solidFill>
-                <a:latin typeface="Arial" panose="020B0604020202020204" pitchFamily="34" charset="0"/>
-                <a:cs typeface="Arial" panose="020B0604020202020204" pitchFamily="34" charset="0"/>
-              </a:rPr>
-              <a:t>corehen</a:t>
-            </a:r>
-            <a:r>
-              <a:rPr lang="en-US" sz="572" dirty="0">
-                <a:solidFill>
-                  <a:prstClr val="black"/>
-                </a:solidFill>
-                <a:latin typeface="Arial" panose="020B0604020202020204" pitchFamily="34" charset="0"/>
-                <a:cs typeface="Arial" panose="020B0604020202020204" pitchFamily="34" charset="0"/>
-              </a:rPr>
-              <a:t> </a:t>
-            </a:r>
-            <a:r>
-              <a:rPr lang="en-US" sz="572" dirty="0" err="1">
-                <a:solidFill>
-                  <a:prstClr val="black"/>
-                </a:solidFill>
-                <a:latin typeface="Arial" panose="020B0604020202020204" pitchFamily="34" charset="0"/>
-                <a:cs typeface="Arial" panose="020B0604020202020204" pitchFamily="34" charset="0"/>
-              </a:rPr>
-              <a:t>dendae</a:t>
-            </a:r>
-            <a:r>
-              <a:rPr lang="en-US" sz="572" dirty="0">
-                <a:solidFill>
-                  <a:prstClr val="black"/>
-                </a:solidFill>
-                <a:latin typeface="Arial" panose="020B0604020202020204" pitchFamily="34" charset="0"/>
-                <a:cs typeface="Arial" panose="020B0604020202020204" pitchFamily="34" charset="0"/>
-              </a:rPr>
-              <a:t> nonet </a:t>
-            </a:r>
-            <a:r>
-              <a:rPr lang="en-US" sz="572" dirty="0" err="1">
-                <a:solidFill>
-                  <a:prstClr val="black"/>
-                </a:solidFill>
-                <a:latin typeface="Arial" panose="020B0604020202020204" pitchFamily="34" charset="0"/>
-                <a:cs typeface="Arial" panose="020B0604020202020204" pitchFamily="34" charset="0"/>
-              </a:rPr>
-              <a:t>eliquam</a:t>
-            </a:r>
-            <a:r>
-              <a:rPr lang="en-US" sz="572" dirty="0">
-                <a:solidFill>
-                  <a:prstClr val="black"/>
-                </a:solidFill>
-                <a:latin typeface="Arial" panose="020B0604020202020204" pitchFamily="34" charset="0"/>
-                <a:cs typeface="Arial" panose="020B0604020202020204" pitchFamily="34" charset="0"/>
-              </a:rPr>
-              <a:t>, </a:t>
-            </a:r>
-            <a:r>
-              <a:rPr lang="en-US" sz="572" dirty="0" err="1">
-                <a:solidFill>
-                  <a:prstClr val="black"/>
-                </a:solidFill>
-                <a:latin typeface="Arial" panose="020B0604020202020204" pitchFamily="34" charset="0"/>
-                <a:cs typeface="Arial" panose="020B0604020202020204" pitchFamily="34" charset="0"/>
-              </a:rPr>
-              <a:t>aperorepe</a:t>
-            </a:r>
-            <a:r>
-              <a:rPr lang="en-US" sz="572" dirty="0">
-                <a:solidFill>
-                  <a:prstClr val="black"/>
-                </a:solidFill>
-                <a:latin typeface="Arial" panose="020B0604020202020204" pitchFamily="34" charset="0"/>
-                <a:cs typeface="Arial" panose="020B0604020202020204" pitchFamily="34" charset="0"/>
-              </a:rPr>
-              <a:t> </a:t>
-            </a:r>
-            <a:r>
-              <a:rPr lang="en-US" sz="572" dirty="0" err="1">
-                <a:solidFill>
-                  <a:prstClr val="black"/>
-                </a:solidFill>
-                <a:latin typeface="Arial" panose="020B0604020202020204" pitchFamily="34" charset="0"/>
-                <a:cs typeface="Arial" panose="020B0604020202020204" pitchFamily="34" charset="0"/>
-              </a:rPr>
-              <a:t>autatem</a:t>
-            </a:r>
-            <a:r>
-              <a:rPr lang="en-US" sz="572" dirty="0">
-                <a:solidFill>
-                  <a:prstClr val="black"/>
-                </a:solidFill>
-                <a:latin typeface="Arial" panose="020B0604020202020204" pitchFamily="34" charset="0"/>
-                <a:cs typeface="Arial" panose="020B0604020202020204" pitchFamily="34" charset="0"/>
-              </a:rPr>
-              <a:t> voles </a:t>
-            </a:r>
-            <a:r>
-              <a:rPr lang="en-US" sz="572" dirty="0" err="1">
-                <a:solidFill>
-                  <a:prstClr val="black"/>
-                </a:solidFill>
-                <a:latin typeface="Arial" panose="020B0604020202020204" pitchFamily="34" charset="0"/>
-                <a:cs typeface="Arial" panose="020B0604020202020204" pitchFamily="34" charset="0"/>
-              </a:rPr>
-              <a:t>int</a:t>
-            </a:r>
-            <a:r>
-              <a:rPr lang="en-US" sz="572" dirty="0">
-                <a:solidFill>
-                  <a:prstClr val="black"/>
-                </a:solidFill>
-                <a:latin typeface="Arial" panose="020B0604020202020204" pitchFamily="34" charset="0"/>
-                <a:cs typeface="Arial" panose="020B0604020202020204" pitchFamily="34" charset="0"/>
-              </a:rPr>
-              <a:t> </a:t>
-            </a:r>
-            <a:r>
-              <a:rPr lang="en-US" sz="572" dirty="0" err="1">
-                <a:solidFill>
-                  <a:prstClr val="black"/>
-                </a:solidFill>
-                <a:latin typeface="Arial" panose="020B0604020202020204" pitchFamily="34" charset="0"/>
-                <a:cs typeface="Arial" panose="020B0604020202020204" pitchFamily="34" charset="0"/>
-              </a:rPr>
-              <a:t>odic</a:t>
-            </a:r>
-            <a:r>
-              <a:rPr lang="en-US" sz="572" dirty="0">
-                <a:solidFill>
-                  <a:prstClr val="black"/>
-                </a:solidFill>
-                <a:latin typeface="Arial" panose="020B0604020202020204" pitchFamily="34" charset="0"/>
-                <a:cs typeface="Arial" panose="020B0604020202020204" pitchFamily="34" charset="0"/>
-              </a:rPr>
-              <a:t> </a:t>
-            </a:r>
-            <a:r>
-              <a:rPr lang="en-US" sz="572" dirty="0" err="1">
-                <a:solidFill>
-                  <a:prstClr val="black"/>
-                </a:solidFill>
-                <a:latin typeface="Arial" panose="020B0604020202020204" pitchFamily="34" charset="0"/>
-                <a:cs typeface="Arial" panose="020B0604020202020204" pitchFamily="34" charset="0"/>
-              </a:rPr>
-              <a:t>tem</a:t>
-            </a:r>
-            <a:r>
-              <a:rPr lang="en-US" sz="572" dirty="0">
-                <a:solidFill>
-                  <a:prstClr val="black"/>
-                </a:solidFill>
-                <a:latin typeface="Arial" panose="020B0604020202020204" pitchFamily="34" charset="0"/>
-                <a:cs typeface="Arial" panose="020B0604020202020204" pitchFamily="34" charset="0"/>
-              </a:rPr>
-              <a:t> </a:t>
-            </a:r>
-            <a:r>
-              <a:rPr lang="en-US" sz="572" dirty="0" err="1">
-                <a:solidFill>
-                  <a:prstClr val="black"/>
-                </a:solidFill>
-                <a:latin typeface="Arial" panose="020B0604020202020204" pitchFamily="34" charset="0"/>
-                <a:cs typeface="Arial" panose="020B0604020202020204" pitchFamily="34" charset="0"/>
-              </a:rPr>
-              <a:t>nis</a:t>
-            </a:r>
-            <a:r>
-              <a:rPr lang="en-US" sz="572" dirty="0">
-                <a:solidFill>
-                  <a:prstClr val="black"/>
-                </a:solidFill>
-                <a:latin typeface="Arial" panose="020B0604020202020204" pitchFamily="34" charset="0"/>
-                <a:cs typeface="Arial" panose="020B0604020202020204" pitchFamily="34" charset="0"/>
-              </a:rPr>
-              <a:t> </a:t>
-            </a:r>
-            <a:r>
-              <a:rPr lang="en-US" sz="572" dirty="0" err="1">
-                <a:solidFill>
-                  <a:prstClr val="black"/>
-                </a:solidFill>
-                <a:latin typeface="Arial" panose="020B0604020202020204" pitchFamily="34" charset="0"/>
-                <a:cs typeface="Arial" panose="020B0604020202020204" pitchFamily="34" charset="0"/>
-              </a:rPr>
-              <a:t>dolorrum</a:t>
-            </a:r>
-            <a:r>
-              <a:rPr lang="en-US" sz="572" dirty="0">
-                <a:solidFill>
-                  <a:prstClr val="black"/>
-                </a:solidFill>
-                <a:latin typeface="Arial" panose="020B0604020202020204" pitchFamily="34" charset="0"/>
-                <a:cs typeface="Arial" panose="020B0604020202020204" pitchFamily="34" charset="0"/>
-              </a:rPr>
-              <a:t> que cores </a:t>
-            </a:r>
-            <a:r>
-              <a:rPr lang="en-US" sz="572" dirty="0" err="1">
-                <a:solidFill>
-                  <a:prstClr val="black"/>
-                </a:solidFill>
-                <a:latin typeface="Arial" panose="020B0604020202020204" pitchFamily="34" charset="0"/>
-                <a:cs typeface="Arial" panose="020B0604020202020204" pitchFamily="34" charset="0"/>
-              </a:rPr>
-              <a:t>doluptaturi</a:t>
-            </a:r>
-            <a:r>
-              <a:rPr lang="en-US" sz="572" dirty="0">
-                <a:solidFill>
-                  <a:prstClr val="black"/>
-                </a:solidFill>
-                <a:latin typeface="Arial" panose="020B0604020202020204" pitchFamily="34" charset="0"/>
-                <a:cs typeface="Arial" panose="020B0604020202020204" pitchFamily="34" charset="0"/>
-              </a:rPr>
-              <a:t> </a:t>
-            </a:r>
-            <a:r>
-              <a:rPr lang="en-US" sz="572" dirty="0" err="1">
-                <a:solidFill>
-                  <a:prstClr val="black"/>
-                </a:solidFill>
-                <a:latin typeface="Arial" panose="020B0604020202020204" pitchFamily="34" charset="0"/>
-                <a:cs typeface="Arial" panose="020B0604020202020204" pitchFamily="34" charset="0"/>
-              </a:rPr>
-              <a:t>utemolorum</a:t>
-            </a:r>
-            <a:r>
-              <a:rPr lang="en-US" sz="572" dirty="0">
-                <a:solidFill>
-                  <a:prstClr val="black"/>
-                </a:solidFill>
-                <a:latin typeface="Arial" panose="020B0604020202020204" pitchFamily="34" charset="0"/>
-                <a:cs typeface="Arial" panose="020B0604020202020204" pitchFamily="34" charset="0"/>
-              </a:rPr>
-              <a:t> </a:t>
-            </a:r>
-            <a:r>
-              <a:rPr lang="en-US" sz="572" dirty="0" err="1">
-                <a:solidFill>
-                  <a:prstClr val="black"/>
-                </a:solidFill>
-                <a:latin typeface="Arial" panose="020B0604020202020204" pitchFamily="34" charset="0"/>
-                <a:cs typeface="Arial" panose="020B0604020202020204" pitchFamily="34" charset="0"/>
-              </a:rPr>
-              <a:t>imusam</a:t>
-            </a:r>
-            <a:r>
-              <a:rPr lang="en-US" sz="572" dirty="0">
-                <a:solidFill>
-                  <a:prstClr val="black"/>
-                </a:solidFill>
-                <a:latin typeface="Arial" panose="020B0604020202020204" pitchFamily="34" charset="0"/>
-                <a:cs typeface="Arial" panose="020B0604020202020204" pitchFamily="34" charset="0"/>
-              </a:rPr>
-              <a:t>,</a:t>
+              <a:t>I would like to express my gratitude to Professor Aaron Zimmerman for his instruction in Engineering Physics II, which provided the theoretical foundations for this research. I also thank Professor Seth Bank for his guidance on the underlying electrical engineering concepts. Finally, I would like to acknowledge my Lab TA, Tannishtha Nandi, for facilitating access to the laboratory equipment and providing the necessary statistical tools for our data analysis throughout the semester.</a:t>
             </a:r>
           </a:p>
         </p:txBody>
@@ -7985,8 +7007,8 @@
         </p:nvSpPr>
         <p:spPr>
           <a:xfrm>
-            <a:off x="7873433" y="5691997"/>
-            <a:ext cx="2592548" cy="884666"/>
+            <a:off x="7845698" y="5706033"/>
+            <a:ext cx="2592548" cy="532518"/>
           </a:xfrm>
           <a:prstGeom prst="rect">
             <a:avLst/>
@@ -8000,6 +7022,16 @@
           <a:lstStyle/>
           <a:p>
             <a:pPr defTabSz="780653"/>
+            <a:r>
+              <a:rPr lang="en-US" sz="572" dirty="0">
+                <a:solidFill>
+                  <a:prstClr val="black"/>
+                </a:solidFill>
+                <a:latin typeface="Arial" panose="020B0604020202020204" pitchFamily="34" charset="0"/>
+                <a:cs typeface="Arial" panose="020B0604020202020204" pitchFamily="34" charset="0"/>
+              </a:rPr>
+              <a:t>[1] F.T Ulaby, M.M. </a:t>
+            </a:r>
             <a:r>
               <a:rPr lang="en-US" sz="572" dirty="0" err="1">
                 <a:solidFill>
@@ -8008,7 +7040,7 @@
                 <a:latin typeface="Arial" panose="020B0604020202020204" pitchFamily="34" charset="0"/>
                 <a:cs typeface="Arial" panose="020B0604020202020204" pitchFamily="34" charset="0"/>
               </a:rPr>
-              <a:t>Vitam</a:t>
+              <a:t>Maharbiz</a:t>
             </a:r>
             <a:r>
               <a:rPr lang="en-US" sz="572" dirty="0">
@@ -8018,17 +7050,17 @@
                 <a:latin typeface="Arial" panose="020B0604020202020204" pitchFamily="34" charset="0"/>
                 <a:cs typeface="Arial" panose="020B0604020202020204" pitchFamily="34" charset="0"/>
               </a:rPr>
-              <a:t> </a:t>
-            </a:r>
-            <a:r>
-              <a:rPr lang="en-US" sz="572" dirty="0" err="1">
+              <a:t>, C.M. Furse, </a:t>
+            </a:r>
+            <a:r>
+              <a:rPr lang="en-US" sz="572" i="1" dirty="0">
                 <a:solidFill>
                   <a:prstClr val="black"/>
                 </a:solidFill>
                 <a:latin typeface="Arial" panose="020B0604020202020204" pitchFamily="34" charset="0"/>
                 <a:cs typeface="Arial" panose="020B0604020202020204" pitchFamily="34" charset="0"/>
               </a:rPr>
-              <a:t>voloria</a:t>
+              <a:t>Circuit Analysis and Design</a:t>
             </a:r>
             <a:r>
               <a:rPr lang="en-US" sz="572" dirty="0">
@@ -8038,17 +7070,17 @@
                 <a:latin typeface="Arial" panose="020B0604020202020204" pitchFamily="34" charset="0"/>
                 <a:cs typeface="Arial" panose="020B0604020202020204" pitchFamily="34" charset="0"/>
               </a:rPr>
-              <a:t> con et, cum </a:t>
-            </a:r>
-            <a:r>
-              <a:rPr lang="en-US" sz="572" dirty="0" err="1">
+              <a:t>, 2</a:t>
+            </a:r>
+            <a:r>
+              <a:rPr lang="en-US" sz="572" baseline="30000" dirty="0">
                 <a:solidFill>
                   <a:prstClr val="black"/>
                 </a:solidFill>
                 <a:latin typeface="Arial" panose="020B0604020202020204" pitchFamily="34" charset="0"/>
                 <a:cs typeface="Arial" panose="020B0604020202020204" pitchFamily="34" charset="0"/>
               </a:rPr>
-              <a:t>laboreium</a:t>
+              <a:t>nd</a:t>
             </a:r>
             <a:r>
               <a:rPr lang="en-US" sz="572" dirty="0">
@@ -8058,18 +7090,21 @@
                 <a:latin typeface="Arial" panose="020B0604020202020204" pitchFamily="34" charset="0"/>
                 <a:cs typeface="Arial" panose="020B0604020202020204" pitchFamily="34" charset="0"/>
               </a:rPr>
-              <a:t>, </a:t>
-            </a:r>
-            <a:r>
-              <a:rPr lang="en-US" sz="572" dirty="0" err="1">
-                <a:solidFill>
-                  <a:prstClr val="black"/>
-                </a:solidFill>
-                <a:latin typeface="Arial" panose="020B0604020202020204" pitchFamily="34" charset="0"/>
-                <a:cs typeface="Arial" panose="020B0604020202020204" pitchFamily="34" charset="0"/>
-              </a:rPr>
-              <a:t>nam</a:t>
-            </a:r>
+              <a:t> ed. Ann Arbor, MI, USA: Michigan Publishing, 2024</a:t>
+            </a:r>
+          </a:p>
+          <a:p>
+            <a:pPr defTabSz="780653"/>
+            <a:endParaRPr lang="en-US" sz="572" dirty="0">
+              <a:solidFill>
+                <a:prstClr val="black"/>
+              </a:solidFill>
+              <a:latin typeface="Arial" panose="020B0604020202020204" pitchFamily="34" charset="0"/>
+              <a:cs typeface="Arial" panose="020B0604020202020204" pitchFamily="34" charset="0"/>
+            </a:endParaRPr>
+          </a:p>
+          <a:p>
+            <a:pPr defTabSz="780653"/>
             <a:r>
               <a:rPr lang="en-US" sz="572" dirty="0">
                 <a:solidFill>
@@ -8078,17 +7113,17 @@
                 <a:latin typeface="Arial" panose="020B0604020202020204" pitchFamily="34" charset="0"/>
                 <a:cs typeface="Arial" panose="020B0604020202020204" pitchFamily="34" charset="0"/>
               </a:rPr>
-              <a:t> cum, </a:t>
-            </a:r>
-            <a:r>
-              <a:rPr lang="en-US" sz="572" dirty="0" err="1">
+              <a:t>[2] H.C Ohanian and J.T Markert, </a:t>
+            </a:r>
+            <a:r>
+              <a:rPr lang="en-US" sz="572" i="1" dirty="0">
                 <a:solidFill>
                   <a:prstClr val="black"/>
                 </a:solidFill>
                 <a:latin typeface="Arial" panose="020B0604020202020204" pitchFamily="34" charset="0"/>
                 <a:cs typeface="Arial" panose="020B0604020202020204" pitchFamily="34" charset="0"/>
               </a:rPr>
-              <a:t>quat</a:t>
+              <a:t>Physics for Engineers and Scientists</a:t>
             </a:r>
             <a:r>
               <a:rPr lang="en-US" sz="572" dirty="0">
@@ -8098,17 +7133,17 @@
                 <a:latin typeface="Arial" panose="020B0604020202020204" pitchFamily="34" charset="0"/>
                 <a:cs typeface="Arial" panose="020B0604020202020204" pitchFamily="34" charset="0"/>
               </a:rPr>
-              <a:t> </a:t>
-            </a:r>
-            <a:r>
-              <a:rPr lang="en-US" sz="572" dirty="0" err="1">
+              <a:t>, 3</a:t>
+            </a:r>
+            <a:r>
+              <a:rPr lang="en-US" sz="572" baseline="30000" dirty="0">
                 <a:solidFill>
                   <a:prstClr val="black"/>
                 </a:solidFill>
                 <a:latin typeface="Arial" panose="020B0604020202020204" pitchFamily="34" charset="0"/>
                 <a:cs typeface="Arial" panose="020B0604020202020204" pitchFamily="34" charset="0"/>
               </a:rPr>
-              <a:t>paris</a:t>
+              <a:t>rd</a:t>
             </a:r>
             <a:r>
               <a:rPr lang="en-US" sz="572" dirty="0">
@@ -8118,1271 +7153,15 @@
                 <a:latin typeface="Arial" panose="020B0604020202020204" pitchFamily="34" charset="0"/>
                 <a:cs typeface="Arial" panose="020B0604020202020204" pitchFamily="34" charset="0"/>
               </a:rPr>
-              <a:t> as core </a:t>
-            </a:r>
-            <a:r>
-              <a:rPr lang="en-US" sz="572" dirty="0" err="1">
-                <a:solidFill>
-                  <a:prstClr val="black"/>
-                </a:solidFill>
-                <a:latin typeface="Arial" panose="020B0604020202020204" pitchFamily="34" charset="0"/>
-                <a:cs typeface="Arial" panose="020B0604020202020204" pitchFamily="34" charset="0"/>
-              </a:rPr>
-              <a:t>volorest</a:t>
-            </a:r>
-            <a:r>
-              <a:rPr lang="en-US" sz="572" dirty="0">
-                <a:solidFill>
-                  <a:prstClr val="black"/>
-                </a:solidFill>
-                <a:latin typeface="Arial" panose="020B0604020202020204" pitchFamily="34" charset="0"/>
-                <a:cs typeface="Arial" panose="020B0604020202020204" pitchFamily="34" charset="0"/>
-              </a:rPr>
-              <a:t>, </a:t>
-            </a:r>
-            <a:r>
-              <a:rPr lang="en-US" sz="572" dirty="0" err="1">
-                <a:solidFill>
-                  <a:prstClr val="black"/>
-                </a:solidFill>
-                <a:latin typeface="Arial" panose="020B0604020202020204" pitchFamily="34" charset="0"/>
-                <a:cs typeface="Arial" panose="020B0604020202020204" pitchFamily="34" charset="0"/>
-              </a:rPr>
-              <a:t>sust</a:t>
-            </a:r>
-            <a:r>
-              <a:rPr lang="en-US" sz="572" dirty="0">
-                <a:solidFill>
-                  <a:prstClr val="black"/>
-                </a:solidFill>
-                <a:latin typeface="Arial" panose="020B0604020202020204" pitchFamily="34" charset="0"/>
-                <a:cs typeface="Arial" panose="020B0604020202020204" pitchFamily="34" charset="0"/>
-              </a:rPr>
-              <a:t> </a:t>
-            </a:r>
-            <a:r>
-              <a:rPr lang="en-US" sz="572" dirty="0" err="1">
-                <a:solidFill>
-                  <a:prstClr val="black"/>
-                </a:solidFill>
-                <a:latin typeface="Arial" panose="020B0604020202020204" pitchFamily="34" charset="0"/>
-                <a:cs typeface="Arial" panose="020B0604020202020204" pitchFamily="34" charset="0"/>
-              </a:rPr>
-              <a:t>exceatur</a:t>
-            </a:r>
-            <a:r>
-              <a:rPr lang="en-US" sz="572" dirty="0">
-                <a:solidFill>
-                  <a:prstClr val="black"/>
-                </a:solidFill>
-                <a:latin typeface="Arial" panose="020B0604020202020204" pitchFamily="34" charset="0"/>
-                <a:cs typeface="Arial" panose="020B0604020202020204" pitchFamily="34" charset="0"/>
-              </a:rPr>
-              <a:t> </a:t>
-            </a:r>
-            <a:r>
-              <a:rPr lang="en-US" sz="572" dirty="0" err="1">
-                <a:solidFill>
-                  <a:prstClr val="black"/>
-                </a:solidFill>
-                <a:latin typeface="Arial" panose="020B0604020202020204" pitchFamily="34" charset="0"/>
-                <a:cs typeface="Arial" panose="020B0604020202020204" pitchFamily="34" charset="0"/>
-              </a:rPr>
-              <a:t>antio</a:t>
-            </a:r>
-            <a:r>
-              <a:rPr lang="en-US" sz="572" dirty="0">
-                <a:solidFill>
-                  <a:prstClr val="black"/>
-                </a:solidFill>
-                <a:latin typeface="Arial" panose="020B0604020202020204" pitchFamily="34" charset="0"/>
-                <a:cs typeface="Arial" panose="020B0604020202020204" pitchFamily="34" charset="0"/>
-              </a:rPr>
-              <a:t> </a:t>
-            </a:r>
-            <a:r>
-              <a:rPr lang="en-US" sz="572" dirty="0" err="1">
-                <a:solidFill>
-                  <a:prstClr val="black"/>
-                </a:solidFill>
-                <a:latin typeface="Arial" panose="020B0604020202020204" pitchFamily="34" charset="0"/>
-                <a:cs typeface="Arial" panose="020B0604020202020204" pitchFamily="34" charset="0"/>
-              </a:rPr>
-              <a:t>ea</a:t>
-            </a:r>
-            <a:r>
-              <a:rPr lang="en-US" sz="572" dirty="0">
-                <a:solidFill>
-                  <a:prstClr val="black"/>
-                </a:solidFill>
-                <a:latin typeface="Arial" panose="020B0604020202020204" pitchFamily="34" charset="0"/>
-                <a:cs typeface="Arial" panose="020B0604020202020204" pitchFamily="34" charset="0"/>
-              </a:rPr>
-              <a:t> </a:t>
-            </a:r>
-            <a:r>
-              <a:rPr lang="en-US" sz="572" dirty="0" err="1">
-                <a:solidFill>
-                  <a:prstClr val="black"/>
-                </a:solidFill>
-                <a:latin typeface="Arial" panose="020B0604020202020204" pitchFamily="34" charset="0"/>
-                <a:cs typeface="Arial" panose="020B0604020202020204" pitchFamily="34" charset="0"/>
-              </a:rPr>
-              <a:t>voluptas</a:t>
-            </a:r>
-            <a:r>
-              <a:rPr lang="en-US" sz="572" dirty="0">
-                <a:solidFill>
-                  <a:prstClr val="black"/>
-                </a:solidFill>
-                <a:latin typeface="Arial" panose="020B0604020202020204" pitchFamily="34" charset="0"/>
-                <a:cs typeface="Arial" panose="020B0604020202020204" pitchFamily="34" charset="0"/>
-              </a:rPr>
-              <a:t> </a:t>
-            </a:r>
-            <a:r>
-              <a:rPr lang="en-US" sz="572" dirty="0" err="1">
-                <a:solidFill>
-                  <a:prstClr val="black"/>
-                </a:solidFill>
-                <a:latin typeface="Arial" panose="020B0604020202020204" pitchFamily="34" charset="0"/>
-                <a:cs typeface="Arial" panose="020B0604020202020204" pitchFamily="34" charset="0"/>
-              </a:rPr>
-              <a:t>eumquatendit</a:t>
-            </a:r>
-            <a:r>
-              <a:rPr lang="en-US" sz="572" dirty="0">
-                <a:solidFill>
-                  <a:prstClr val="black"/>
-                </a:solidFill>
-                <a:latin typeface="Arial" panose="020B0604020202020204" pitchFamily="34" charset="0"/>
-                <a:cs typeface="Arial" panose="020B0604020202020204" pitchFamily="34" charset="0"/>
-              </a:rPr>
-              <a:t> </a:t>
-            </a:r>
-            <a:r>
-              <a:rPr lang="en-US" sz="572" dirty="0" err="1">
-                <a:solidFill>
-                  <a:prstClr val="black"/>
-                </a:solidFill>
-                <a:latin typeface="Arial" panose="020B0604020202020204" pitchFamily="34" charset="0"/>
-                <a:cs typeface="Arial" panose="020B0604020202020204" pitchFamily="34" charset="0"/>
-              </a:rPr>
-              <a:t>quas</a:t>
-            </a:r>
-            <a:r>
-              <a:rPr lang="en-US" sz="572" dirty="0">
-                <a:solidFill>
-                  <a:prstClr val="black"/>
-                </a:solidFill>
-                <a:latin typeface="Arial" panose="020B0604020202020204" pitchFamily="34" charset="0"/>
-                <a:cs typeface="Arial" panose="020B0604020202020204" pitchFamily="34" charset="0"/>
-              </a:rPr>
-              <a:t> </a:t>
-            </a:r>
-            <a:r>
-              <a:rPr lang="en-US" sz="572" dirty="0" err="1">
-                <a:solidFill>
-                  <a:prstClr val="black"/>
-                </a:solidFill>
-                <a:latin typeface="Arial" panose="020B0604020202020204" pitchFamily="34" charset="0"/>
-                <a:cs typeface="Arial" panose="020B0604020202020204" pitchFamily="34" charset="0"/>
-              </a:rPr>
-              <a:t>doluptatet</a:t>
-            </a:r>
-            <a:r>
-              <a:rPr lang="en-US" sz="572" dirty="0">
-                <a:solidFill>
-                  <a:prstClr val="black"/>
-                </a:solidFill>
-                <a:latin typeface="Arial" panose="020B0604020202020204" pitchFamily="34" charset="0"/>
-                <a:cs typeface="Arial" panose="020B0604020202020204" pitchFamily="34" charset="0"/>
-              </a:rPr>
-              <a:t> </a:t>
-            </a:r>
-            <a:r>
-              <a:rPr lang="en-US" sz="572" dirty="0" err="1">
-                <a:solidFill>
-                  <a:prstClr val="black"/>
-                </a:solidFill>
-                <a:latin typeface="Arial" panose="020B0604020202020204" pitchFamily="34" charset="0"/>
-                <a:cs typeface="Arial" panose="020B0604020202020204" pitchFamily="34" charset="0"/>
-              </a:rPr>
-              <a:t>aut</a:t>
-            </a:r>
-            <a:r>
-              <a:rPr lang="en-US" sz="572" dirty="0">
-                <a:solidFill>
-                  <a:prstClr val="black"/>
-                </a:solidFill>
-                <a:latin typeface="Arial" panose="020B0604020202020204" pitchFamily="34" charset="0"/>
-                <a:cs typeface="Arial" panose="020B0604020202020204" pitchFamily="34" charset="0"/>
-              </a:rPr>
-              <a:t> </a:t>
-            </a:r>
-            <a:r>
-              <a:rPr lang="en-US" sz="572" dirty="0" err="1">
-                <a:solidFill>
-                  <a:prstClr val="black"/>
-                </a:solidFill>
-                <a:latin typeface="Arial" panose="020B0604020202020204" pitchFamily="34" charset="0"/>
-                <a:cs typeface="Arial" panose="020B0604020202020204" pitchFamily="34" charset="0"/>
-              </a:rPr>
-              <a:t>landignam</a:t>
-            </a:r>
-            <a:r>
-              <a:rPr lang="en-US" sz="572" dirty="0">
-                <a:solidFill>
-                  <a:prstClr val="black"/>
-                </a:solidFill>
-                <a:latin typeface="Arial" panose="020B0604020202020204" pitchFamily="34" charset="0"/>
-                <a:cs typeface="Arial" panose="020B0604020202020204" pitchFamily="34" charset="0"/>
-              </a:rPr>
-              <a:t> que </a:t>
-            </a:r>
-            <a:r>
-              <a:rPr lang="en-US" sz="572" dirty="0" err="1">
-                <a:solidFill>
-                  <a:prstClr val="black"/>
-                </a:solidFill>
-                <a:latin typeface="Arial" panose="020B0604020202020204" pitchFamily="34" charset="0"/>
-                <a:cs typeface="Arial" panose="020B0604020202020204" pitchFamily="34" charset="0"/>
-              </a:rPr>
-              <a:t>lantur</a:t>
-            </a:r>
-            <a:r>
-              <a:rPr lang="en-US" sz="572" dirty="0">
-                <a:solidFill>
-                  <a:prstClr val="black"/>
-                </a:solidFill>
-                <a:latin typeface="Arial" panose="020B0604020202020204" pitchFamily="34" charset="0"/>
-                <a:cs typeface="Arial" panose="020B0604020202020204" pitchFamily="34" charset="0"/>
-              </a:rPr>
-              <a:t> </a:t>
-            </a:r>
-            <a:r>
-              <a:rPr lang="en-US" sz="572" dirty="0" err="1">
-                <a:solidFill>
-                  <a:prstClr val="black"/>
-                </a:solidFill>
-                <a:latin typeface="Arial" panose="020B0604020202020204" pitchFamily="34" charset="0"/>
-                <a:cs typeface="Arial" panose="020B0604020202020204" pitchFamily="34" charset="0"/>
-              </a:rPr>
-              <a:t>sania</a:t>
-            </a:r>
-            <a:r>
-              <a:rPr lang="en-US" sz="572" dirty="0">
-                <a:solidFill>
-                  <a:prstClr val="black"/>
-                </a:solidFill>
-                <a:latin typeface="Arial" panose="020B0604020202020204" pitchFamily="34" charset="0"/>
-                <a:cs typeface="Arial" panose="020B0604020202020204" pitchFamily="34" charset="0"/>
-              </a:rPr>
-              <a:t> </a:t>
-            </a:r>
-            <a:r>
-              <a:rPr lang="en-US" sz="572" dirty="0" err="1">
-                <a:solidFill>
-                  <a:prstClr val="black"/>
-                </a:solidFill>
-                <a:latin typeface="Arial" panose="020B0604020202020204" pitchFamily="34" charset="0"/>
-                <a:cs typeface="Arial" panose="020B0604020202020204" pitchFamily="34" charset="0"/>
-              </a:rPr>
-              <a:t>dem</a:t>
-            </a:r>
-            <a:r>
-              <a:rPr lang="en-US" sz="572" dirty="0">
-                <a:solidFill>
-                  <a:prstClr val="black"/>
-                </a:solidFill>
-                <a:latin typeface="Arial" panose="020B0604020202020204" pitchFamily="34" charset="0"/>
-                <a:cs typeface="Arial" panose="020B0604020202020204" pitchFamily="34" charset="0"/>
-              </a:rPr>
-              <a:t> </a:t>
-            </a:r>
-            <a:r>
-              <a:rPr lang="en-US" sz="572" dirty="0" err="1">
-                <a:solidFill>
-                  <a:prstClr val="black"/>
-                </a:solidFill>
-                <a:latin typeface="Arial" panose="020B0604020202020204" pitchFamily="34" charset="0"/>
-                <a:cs typeface="Arial" panose="020B0604020202020204" pitchFamily="34" charset="0"/>
-              </a:rPr>
-              <a:t>escidit</a:t>
-            </a:r>
-            <a:r>
-              <a:rPr lang="en-US" sz="572" dirty="0">
-                <a:solidFill>
-                  <a:prstClr val="black"/>
-                </a:solidFill>
-                <a:latin typeface="Arial" panose="020B0604020202020204" pitchFamily="34" charset="0"/>
-                <a:cs typeface="Arial" panose="020B0604020202020204" pitchFamily="34" charset="0"/>
-              </a:rPr>
-              <a:t> min </a:t>
-            </a:r>
-            <a:r>
-              <a:rPr lang="en-US" sz="572" dirty="0" err="1">
-                <a:solidFill>
-                  <a:prstClr val="black"/>
-                </a:solidFill>
-                <a:latin typeface="Arial" panose="020B0604020202020204" pitchFamily="34" charset="0"/>
-                <a:cs typeface="Arial" panose="020B0604020202020204" pitchFamily="34" charset="0"/>
-              </a:rPr>
-              <a:t>reruptiaero</a:t>
-            </a:r>
-            <a:r>
-              <a:rPr lang="en-US" sz="572" dirty="0">
-                <a:solidFill>
-                  <a:prstClr val="black"/>
-                </a:solidFill>
-                <a:latin typeface="Arial" panose="020B0604020202020204" pitchFamily="34" charset="0"/>
-                <a:cs typeface="Arial" panose="020B0604020202020204" pitchFamily="34" charset="0"/>
-              </a:rPr>
-              <a:t> </a:t>
-            </a:r>
-            <a:r>
-              <a:rPr lang="en-US" sz="572" dirty="0" err="1">
-                <a:solidFill>
-                  <a:prstClr val="black"/>
-                </a:solidFill>
-                <a:latin typeface="Arial" panose="020B0604020202020204" pitchFamily="34" charset="0"/>
-                <a:cs typeface="Arial" panose="020B0604020202020204" pitchFamily="34" charset="0"/>
-              </a:rPr>
-              <a:t>velis</a:t>
-            </a:r>
-            <a:r>
-              <a:rPr lang="en-US" sz="572" dirty="0">
-                <a:solidFill>
-                  <a:prstClr val="black"/>
-                </a:solidFill>
-                <a:latin typeface="Arial" panose="020B0604020202020204" pitchFamily="34" charset="0"/>
-                <a:cs typeface="Arial" panose="020B0604020202020204" pitchFamily="34" charset="0"/>
-              </a:rPr>
-              <a:t> maximus </a:t>
-            </a:r>
-            <a:r>
-              <a:rPr lang="en-US" sz="572" dirty="0" err="1">
-                <a:solidFill>
-                  <a:prstClr val="black"/>
-                </a:solidFill>
-                <a:latin typeface="Arial" panose="020B0604020202020204" pitchFamily="34" charset="0"/>
-                <a:cs typeface="Arial" panose="020B0604020202020204" pitchFamily="34" charset="0"/>
-              </a:rPr>
-              <a:t>aut</a:t>
-            </a:r>
-            <a:r>
-              <a:rPr lang="en-US" sz="572" dirty="0">
-                <a:solidFill>
-                  <a:prstClr val="black"/>
-                </a:solidFill>
-                <a:latin typeface="Arial" panose="020B0604020202020204" pitchFamily="34" charset="0"/>
-                <a:cs typeface="Arial" panose="020B0604020202020204" pitchFamily="34" charset="0"/>
-              </a:rPr>
-              <a:t> que </a:t>
-            </a:r>
-            <a:r>
-              <a:rPr lang="en-US" sz="572" dirty="0" err="1">
-                <a:solidFill>
-                  <a:prstClr val="black"/>
-                </a:solidFill>
-                <a:latin typeface="Arial" panose="020B0604020202020204" pitchFamily="34" charset="0"/>
-                <a:cs typeface="Arial" panose="020B0604020202020204" pitchFamily="34" charset="0"/>
-              </a:rPr>
-              <a:t>pe</a:t>
-            </a:r>
-            <a:r>
-              <a:rPr lang="en-US" sz="572" dirty="0">
-                <a:solidFill>
-                  <a:prstClr val="black"/>
-                </a:solidFill>
-                <a:latin typeface="Arial" panose="020B0604020202020204" pitchFamily="34" charset="0"/>
-                <a:cs typeface="Arial" panose="020B0604020202020204" pitchFamily="34" charset="0"/>
-              </a:rPr>
-              <a:t> </a:t>
-            </a:r>
-            <a:r>
-              <a:rPr lang="en-US" sz="572" dirty="0" err="1">
-                <a:solidFill>
-                  <a:prstClr val="black"/>
-                </a:solidFill>
-                <a:latin typeface="Arial" panose="020B0604020202020204" pitchFamily="34" charset="0"/>
-                <a:cs typeface="Arial" panose="020B0604020202020204" pitchFamily="34" charset="0"/>
-              </a:rPr>
-              <a:t>aliquas</a:t>
-            </a:r>
-            <a:r>
-              <a:rPr lang="en-US" sz="572" dirty="0">
-                <a:solidFill>
-                  <a:prstClr val="black"/>
-                </a:solidFill>
-                <a:latin typeface="Arial" panose="020B0604020202020204" pitchFamily="34" charset="0"/>
-                <a:cs typeface="Arial" panose="020B0604020202020204" pitchFamily="34" charset="0"/>
-              </a:rPr>
-              <a:t> </a:t>
-            </a:r>
-            <a:r>
-              <a:rPr lang="en-US" sz="572" dirty="0" err="1">
-                <a:solidFill>
-                  <a:prstClr val="black"/>
-                </a:solidFill>
-                <a:latin typeface="Arial" panose="020B0604020202020204" pitchFamily="34" charset="0"/>
-                <a:cs typeface="Arial" panose="020B0604020202020204" pitchFamily="34" charset="0"/>
-              </a:rPr>
-              <a:t>sequidisit</a:t>
-            </a:r>
-            <a:r>
-              <a:rPr lang="en-US" sz="572" dirty="0">
-                <a:solidFill>
-                  <a:prstClr val="black"/>
-                </a:solidFill>
-                <a:latin typeface="Arial" panose="020B0604020202020204" pitchFamily="34" charset="0"/>
-                <a:cs typeface="Arial" panose="020B0604020202020204" pitchFamily="34" charset="0"/>
-              </a:rPr>
-              <a:t>, </a:t>
-            </a:r>
-            <a:r>
-              <a:rPr lang="en-US" sz="572" dirty="0" err="1">
-                <a:solidFill>
-                  <a:prstClr val="black"/>
-                </a:solidFill>
-                <a:latin typeface="Arial" panose="020B0604020202020204" pitchFamily="34" charset="0"/>
-                <a:cs typeface="Arial" panose="020B0604020202020204" pitchFamily="34" charset="0"/>
-              </a:rPr>
-              <a:t>omnient</a:t>
-            </a:r>
-            <a:r>
-              <a:rPr lang="en-US" sz="572" dirty="0">
-                <a:solidFill>
-                  <a:prstClr val="black"/>
-                </a:solidFill>
-                <a:latin typeface="Arial" panose="020B0604020202020204" pitchFamily="34" charset="0"/>
-                <a:cs typeface="Arial" panose="020B0604020202020204" pitchFamily="34" charset="0"/>
-              </a:rPr>
-              <a:t> hit lam </a:t>
-            </a:r>
-            <a:r>
-              <a:rPr lang="en-US" sz="572" dirty="0" err="1">
-                <a:solidFill>
-                  <a:prstClr val="black"/>
-                </a:solidFill>
-                <a:latin typeface="Arial" panose="020B0604020202020204" pitchFamily="34" charset="0"/>
-                <a:cs typeface="Arial" panose="020B0604020202020204" pitchFamily="34" charset="0"/>
-              </a:rPr>
-              <a:t>eicias</a:t>
-            </a:r>
-            <a:r>
-              <a:rPr lang="en-US" sz="572" dirty="0">
-                <a:solidFill>
-                  <a:prstClr val="black"/>
-                </a:solidFill>
-                <a:latin typeface="Arial" panose="020B0604020202020204" pitchFamily="34" charset="0"/>
-                <a:cs typeface="Arial" panose="020B0604020202020204" pitchFamily="34" charset="0"/>
-              </a:rPr>
-              <a:t> </a:t>
-            </a:r>
-            <a:r>
-              <a:rPr lang="en-US" sz="572" dirty="0" err="1">
-                <a:solidFill>
-                  <a:prstClr val="black"/>
-                </a:solidFill>
-                <a:latin typeface="Arial" panose="020B0604020202020204" pitchFamily="34" charset="0"/>
-                <a:cs typeface="Arial" panose="020B0604020202020204" pitchFamily="34" charset="0"/>
-              </a:rPr>
-              <a:t>modio</a:t>
-            </a:r>
-            <a:r>
-              <a:rPr lang="en-US" sz="572" dirty="0">
-                <a:solidFill>
-                  <a:prstClr val="black"/>
-                </a:solidFill>
-                <a:latin typeface="Arial" panose="020B0604020202020204" pitchFamily="34" charset="0"/>
-                <a:cs typeface="Arial" panose="020B0604020202020204" pitchFamily="34" charset="0"/>
-              </a:rPr>
-              <a:t> con </a:t>
-            </a:r>
-            <a:r>
-              <a:rPr lang="en-US" sz="572" dirty="0" err="1">
-                <a:solidFill>
-                  <a:prstClr val="black"/>
-                </a:solidFill>
-                <a:latin typeface="Arial" panose="020B0604020202020204" pitchFamily="34" charset="0"/>
-                <a:cs typeface="Arial" panose="020B0604020202020204" pitchFamily="34" charset="0"/>
-              </a:rPr>
-              <a:t>nisin</a:t>
-            </a:r>
-            <a:r>
-              <a:rPr lang="en-US" sz="572" dirty="0">
-                <a:solidFill>
-                  <a:prstClr val="black"/>
-                </a:solidFill>
-                <a:latin typeface="Arial" panose="020B0604020202020204" pitchFamily="34" charset="0"/>
-                <a:cs typeface="Arial" panose="020B0604020202020204" pitchFamily="34" charset="0"/>
-              </a:rPr>
-              <a:t> </a:t>
-            </a:r>
-            <a:r>
-              <a:rPr lang="en-US" sz="572" dirty="0" err="1">
-                <a:solidFill>
-                  <a:prstClr val="black"/>
-                </a:solidFill>
-                <a:latin typeface="Arial" panose="020B0604020202020204" pitchFamily="34" charset="0"/>
-                <a:cs typeface="Arial" panose="020B0604020202020204" pitchFamily="34" charset="0"/>
-              </a:rPr>
-              <a:t>pediam</a:t>
-            </a:r>
-            <a:r>
-              <a:rPr lang="en-US" sz="572" dirty="0">
-                <a:solidFill>
-                  <a:prstClr val="black"/>
-                </a:solidFill>
-                <a:latin typeface="Arial" panose="020B0604020202020204" pitchFamily="34" charset="0"/>
-                <a:cs typeface="Arial" panose="020B0604020202020204" pitchFamily="34" charset="0"/>
-              </a:rPr>
-              <a:t>, </a:t>
-            </a:r>
-            <a:r>
-              <a:rPr lang="en-US" sz="572" dirty="0" err="1">
-                <a:solidFill>
-                  <a:prstClr val="black"/>
-                </a:solidFill>
-                <a:latin typeface="Arial" panose="020B0604020202020204" pitchFamily="34" charset="0"/>
-                <a:cs typeface="Arial" panose="020B0604020202020204" pitchFamily="34" charset="0"/>
-              </a:rPr>
-              <a:t>ent</a:t>
-            </a:r>
-            <a:r>
-              <a:rPr lang="en-US" sz="572" dirty="0">
-                <a:solidFill>
-                  <a:prstClr val="black"/>
-                </a:solidFill>
-                <a:latin typeface="Arial" panose="020B0604020202020204" pitchFamily="34" charset="0"/>
-                <a:cs typeface="Arial" panose="020B0604020202020204" pitchFamily="34" charset="0"/>
-              </a:rPr>
-              <a:t>, </a:t>
-            </a:r>
-            <a:r>
-              <a:rPr lang="en-US" sz="572" dirty="0" err="1">
-                <a:solidFill>
-                  <a:prstClr val="black"/>
-                </a:solidFill>
-                <a:latin typeface="Arial" panose="020B0604020202020204" pitchFamily="34" charset="0"/>
-                <a:cs typeface="Arial" panose="020B0604020202020204" pitchFamily="34" charset="0"/>
-              </a:rPr>
-              <a:t>cust</a:t>
-            </a:r>
-            <a:r>
-              <a:rPr lang="en-US" sz="572" dirty="0">
-                <a:solidFill>
-                  <a:prstClr val="black"/>
-                </a:solidFill>
-                <a:latin typeface="Arial" panose="020B0604020202020204" pitchFamily="34" charset="0"/>
-                <a:cs typeface="Arial" panose="020B0604020202020204" pitchFamily="34" charset="0"/>
-              </a:rPr>
-              <a:t> </a:t>
-            </a:r>
-            <a:r>
-              <a:rPr lang="en-US" sz="572" dirty="0" err="1">
-                <a:solidFill>
-                  <a:prstClr val="black"/>
-                </a:solidFill>
-                <a:latin typeface="Arial" panose="020B0604020202020204" pitchFamily="34" charset="0"/>
-                <a:cs typeface="Arial" panose="020B0604020202020204" pitchFamily="34" charset="0"/>
-              </a:rPr>
-              <a:t>accaborit</a:t>
-            </a:r>
-            <a:r>
-              <a:rPr lang="en-US" sz="572" dirty="0">
-                <a:solidFill>
-                  <a:prstClr val="black"/>
-                </a:solidFill>
-                <a:latin typeface="Arial" panose="020B0604020202020204" pitchFamily="34" charset="0"/>
-                <a:cs typeface="Arial" panose="020B0604020202020204" pitchFamily="34" charset="0"/>
-              </a:rPr>
-              <a:t> </a:t>
-            </a:r>
-            <a:r>
-              <a:rPr lang="en-US" sz="572" dirty="0" err="1">
-                <a:solidFill>
-                  <a:prstClr val="black"/>
-                </a:solidFill>
-                <a:latin typeface="Arial" panose="020B0604020202020204" pitchFamily="34" charset="0"/>
-                <a:cs typeface="Arial" panose="020B0604020202020204" pitchFamily="34" charset="0"/>
-              </a:rPr>
-              <a:t>odio</a:t>
-            </a:r>
-            <a:r>
-              <a:rPr lang="en-US" sz="572" dirty="0">
-                <a:solidFill>
-                  <a:prstClr val="black"/>
-                </a:solidFill>
-                <a:latin typeface="Arial" panose="020B0604020202020204" pitchFamily="34" charset="0"/>
-                <a:cs typeface="Arial" panose="020B0604020202020204" pitchFamily="34" charset="0"/>
-              </a:rPr>
-              <a:t> </a:t>
-            </a:r>
-            <a:r>
-              <a:rPr lang="en-US" sz="572" dirty="0" err="1">
-                <a:solidFill>
-                  <a:prstClr val="black"/>
-                </a:solidFill>
-                <a:latin typeface="Arial" panose="020B0604020202020204" pitchFamily="34" charset="0"/>
-                <a:cs typeface="Arial" panose="020B0604020202020204" pitchFamily="34" charset="0"/>
-              </a:rPr>
-              <a:t>corehen</a:t>
-            </a:r>
-            <a:r>
-              <a:rPr lang="en-US" sz="572" dirty="0">
-                <a:solidFill>
-                  <a:prstClr val="black"/>
-                </a:solidFill>
-                <a:latin typeface="Arial" panose="020B0604020202020204" pitchFamily="34" charset="0"/>
-                <a:cs typeface="Arial" panose="020B0604020202020204" pitchFamily="34" charset="0"/>
-              </a:rPr>
-              <a:t> </a:t>
-            </a:r>
-            <a:r>
-              <a:rPr lang="en-US" sz="572" dirty="0" err="1">
-                <a:solidFill>
-                  <a:prstClr val="black"/>
-                </a:solidFill>
-                <a:latin typeface="Arial" panose="020B0604020202020204" pitchFamily="34" charset="0"/>
-                <a:cs typeface="Arial" panose="020B0604020202020204" pitchFamily="34" charset="0"/>
-              </a:rPr>
-              <a:t>dendae</a:t>
-            </a:r>
-            <a:r>
-              <a:rPr lang="en-US" sz="572" dirty="0">
-                <a:solidFill>
-                  <a:prstClr val="black"/>
-                </a:solidFill>
-                <a:latin typeface="Arial" panose="020B0604020202020204" pitchFamily="34" charset="0"/>
-                <a:cs typeface="Arial" panose="020B0604020202020204" pitchFamily="34" charset="0"/>
-              </a:rPr>
-              <a:t> nonet </a:t>
-            </a:r>
-            <a:r>
-              <a:rPr lang="en-US" sz="572" dirty="0" err="1">
-                <a:solidFill>
-                  <a:prstClr val="black"/>
-                </a:solidFill>
-                <a:latin typeface="Arial" panose="020B0604020202020204" pitchFamily="34" charset="0"/>
-                <a:cs typeface="Arial" panose="020B0604020202020204" pitchFamily="34" charset="0"/>
-              </a:rPr>
-              <a:t>eliquam</a:t>
-            </a:r>
-            <a:r>
-              <a:rPr lang="en-US" sz="572" dirty="0">
-                <a:solidFill>
-                  <a:prstClr val="black"/>
-                </a:solidFill>
-                <a:latin typeface="Arial" panose="020B0604020202020204" pitchFamily="34" charset="0"/>
-                <a:cs typeface="Arial" panose="020B0604020202020204" pitchFamily="34" charset="0"/>
-              </a:rPr>
-              <a:t>, </a:t>
-            </a:r>
-            <a:r>
-              <a:rPr lang="en-US" sz="572" dirty="0" err="1">
-                <a:solidFill>
-                  <a:prstClr val="black"/>
-                </a:solidFill>
-                <a:latin typeface="Arial" panose="020B0604020202020204" pitchFamily="34" charset="0"/>
-                <a:cs typeface="Arial" panose="020B0604020202020204" pitchFamily="34" charset="0"/>
-              </a:rPr>
-              <a:t>aperorepe</a:t>
-            </a:r>
-            <a:r>
-              <a:rPr lang="en-US" sz="572" dirty="0">
-                <a:solidFill>
-                  <a:prstClr val="black"/>
-                </a:solidFill>
-                <a:latin typeface="Arial" panose="020B0604020202020204" pitchFamily="34" charset="0"/>
-                <a:cs typeface="Arial" panose="020B0604020202020204" pitchFamily="34" charset="0"/>
-              </a:rPr>
-              <a:t> </a:t>
-            </a:r>
-            <a:r>
-              <a:rPr lang="en-US" sz="572" dirty="0" err="1">
-                <a:solidFill>
-                  <a:prstClr val="black"/>
-                </a:solidFill>
-                <a:latin typeface="Arial" panose="020B0604020202020204" pitchFamily="34" charset="0"/>
-                <a:cs typeface="Arial" panose="020B0604020202020204" pitchFamily="34" charset="0"/>
-              </a:rPr>
-              <a:t>autatem</a:t>
-            </a:r>
-            <a:r>
-              <a:rPr lang="en-US" sz="572" dirty="0">
-                <a:solidFill>
-                  <a:prstClr val="black"/>
-                </a:solidFill>
-                <a:latin typeface="Arial" panose="020B0604020202020204" pitchFamily="34" charset="0"/>
-                <a:cs typeface="Arial" panose="020B0604020202020204" pitchFamily="34" charset="0"/>
-              </a:rPr>
-              <a:t> voles </a:t>
-            </a:r>
-            <a:r>
-              <a:rPr lang="en-US" sz="572" dirty="0" err="1">
-                <a:solidFill>
-                  <a:prstClr val="black"/>
-                </a:solidFill>
-                <a:latin typeface="Arial" panose="020B0604020202020204" pitchFamily="34" charset="0"/>
-                <a:cs typeface="Arial" panose="020B0604020202020204" pitchFamily="34" charset="0"/>
-              </a:rPr>
-              <a:t>int</a:t>
-            </a:r>
-            <a:r>
-              <a:rPr lang="en-US" sz="572" dirty="0">
-                <a:solidFill>
-                  <a:prstClr val="black"/>
-                </a:solidFill>
-                <a:latin typeface="Arial" panose="020B0604020202020204" pitchFamily="34" charset="0"/>
-                <a:cs typeface="Arial" panose="020B0604020202020204" pitchFamily="34" charset="0"/>
-              </a:rPr>
-              <a:t> </a:t>
-            </a:r>
-            <a:r>
-              <a:rPr lang="en-US" sz="572" dirty="0" err="1">
-                <a:solidFill>
-                  <a:prstClr val="black"/>
-                </a:solidFill>
-                <a:latin typeface="Arial" panose="020B0604020202020204" pitchFamily="34" charset="0"/>
-                <a:cs typeface="Arial" panose="020B0604020202020204" pitchFamily="34" charset="0"/>
-              </a:rPr>
-              <a:t>odic</a:t>
-            </a:r>
-            <a:r>
-              <a:rPr lang="en-US" sz="572" dirty="0">
-                <a:solidFill>
-                  <a:prstClr val="black"/>
-                </a:solidFill>
-                <a:latin typeface="Arial" panose="020B0604020202020204" pitchFamily="34" charset="0"/>
-                <a:cs typeface="Arial" panose="020B0604020202020204" pitchFamily="34" charset="0"/>
-              </a:rPr>
-              <a:t> </a:t>
-            </a:r>
-            <a:r>
-              <a:rPr lang="en-US" sz="572" dirty="0" err="1">
-                <a:solidFill>
-                  <a:prstClr val="black"/>
-                </a:solidFill>
-                <a:latin typeface="Arial" panose="020B0604020202020204" pitchFamily="34" charset="0"/>
-                <a:cs typeface="Arial" panose="020B0604020202020204" pitchFamily="34" charset="0"/>
-              </a:rPr>
-              <a:t>tem</a:t>
-            </a:r>
-            <a:r>
-              <a:rPr lang="en-US" sz="572" dirty="0">
-                <a:solidFill>
-                  <a:prstClr val="black"/>
-                </a:solidFill>
-                <a:latin typeface="Arial" panose="020B0604020202020204" pitchFamily="34" charset="0"/>
-                <a:cs typeface="Arial" panose="020B0604020202020204" pitchFamily="34" charset="0"/>
-              </a:rPr>
-              <a:t> </a:t>
-            </a:r>
-            <a:r>
-              <a:rPr lang="en-US" sz="572" dirty="0" err="1">
-                <a:solidFill>
-                  <a:prstClr val="black"/>
-                </a:solidFill>
-                <a:latin typeface="Arial" panose="020B0604020202020204" pitchFamily="34" charset="0"/>
-                <a:cs typeface="Arial" panose="020B0604020202020204" pitchFamily="34" charset="0"/>
-              </a:rPr>
-              <a:t>nis</a:t>
-            </a:r>
-            <a:r>
-              <a:rPr lang="en-US" sz="572" dirty="0">
-                <a:solidFill>
-                  <a:prstClr val="black"/>
-                </a:solidFill>
-                <a:latin typeface="Arial" panose="020B0604020202020204" pitchFamily="34" charset="0"/>
-                <a:cs typeface="Arial" panose="020B0604020202020204" pitchFamily="34" charset="0"/>
-              </a:rPr>
-              <a:t> </a:t>
-            </a:r>
-            <a:r>
-              <a:rPr lang="en-US" sz="572" dirty="0" err="1">
-                <a:solidFill>
-                  <a:prstClr val="black"/>
-                </a:solidFill>
-                <a:latin typeface="Arial" panose="020B0604020202020204" pitchFamily="34" charset="0"/>
-                <a:cs typeface="Arial" panose="020B0604020202020204" pitchFamily="34" charset="0"/>
-              </a:rPr>
-              <a:t>dolorrum</a:t>
-            </a:r>
-            <a:r>
-              <a:rPr lang="en-US" sz="572" dirty="0">
-                <a:solidFill>
-                  <a:prstClr val="black"/>
-                </a:solidFill>
-                <a:latin typeface="Arial" panose="020B0604020202020204" pitchFamily="34" charset="0"/>
-                <a:cs typeface="Arial" panose="020B0604020202020204" pitchFamily="34" charset="0"/>
-              </a:rPr>
-              <a:t> que cores </a:t>
-            </a:r>
-            <a:r>
-              <a:rPr lang="en-US" sz="572" dirty="0" err="1">
-                <a:solidFill>
-                  <a:prstClr val="black"/>
-                </a:solidFill>
-                <a:latin typeface="Arial" panose="020B0604020202020204" pitchFamily="34" charset="0"/>
-                <a:cs typeface="Arial" panose="020B0604020202020204" pitchFamily="34" charset="0"/>
-              </a:rPr>
-              <a:t>doluptaturi</a:t>
-            </a:r>
-            <a:r>
-              <a:rPr lang="en-US" sz="572" dirty="0">
-                <a:solidFill>
-                  <a:prstClr val="black"/>
-                </a:solidFill>
-                <a:latin typeface="Arial" panose="020B0604020202020204" pitchFamily="34" charset="0"/>
-                <a:cs typeface="Arial" panose="020B0604020202020204" pitchFamily="34" charset="0"/>
-              </a:rPr>
-              <a:t> </a:t>
-            </a:r>
-            <a:r>
-              <a:rPr lang="en-US" sz="572" dirty="0" err="1">
-                <a:solidFill>
-                  <a:prstClr val="black"/>
-                </a:solidFill>
-                <a:latin typeface="Arial" panose="020B0604020202020204" pitchFamily="34" charset="0"/>
-                <a:cs typeface="Arial" panose="020B0604020202020204" pitchFamily="34" charset="0"/>
-              </a:rPr>
-              <a:t>utemolorum</a:t>
-            </a:r>
-            <a:r>
-              <a:rPr lang="en-US" sz="572" dirty="0">
-                <a:solidFill>
-                  <a:prstClr val="black"/>
-                </a:solidFill>
-                <a:latin typeface="Arial" panose="020B0604020202020204" pitchFamily="34" charset="0"/>
-                <a:cs typeface="Arial" panose="020B0604020202020204" pitchFamily="34" charset="0"/>
-              </a:rPr>
-              <a:t> </a:t>
-            </a:r>
-            <a:r>
-              <a:rPr lang="en-US" sz="572" dirty="0" err="1">
-                <a:solidFill>
-                  <a:prstClr val="black"/>
-                </a:solidFill>
-                <a:latin typeface="Arial" panose="020B0604020202020204" pitchFamily="34" charset="0"/>
-                <a:cs typeface="Arial" panose="020B0604020202020204" pitchFamily="34" charset="0"/>
-              </a:rPr>
-              <a:t>imusam</a:t>
-            </a:r>
-            <a:r>
-              <a:rPr lang="en-US" sz="572" dirty="0">
-                <a:solidFill>
-                  <a:prstClr val="black"/>
-                </a:solidFill>
-                <a:latin typeface="Arial" panose="020B0604020202020204" pitchFamily="34" charset="0"/>
-                <a:cs typeface="Arial" panose="020B0604020202020204" pitchFamily="34" charset="0"/>
-              </a:rPr>
-              <a:t>, </a:t>
-            </a:r>
-            <a:r>
-              <a:rPr lang="en-US" sz="572" dirty="0" err="1">
-                <a:solidFill>
-                  <a:prstClr val="black"/>
-                </a:solidFill>
-                <a:latin typeface="Arial" panose="020B0604020202020204" pitchFamily="34" charset="0"/>
-                <a:cs typeface="Arial" panose="020B0604020202020204" pitchFamily="34" charset="0"/>
-              </a:rPr>
-              <a:t>idendaecabo</a:t>
-            </a:r>
-            <a:r>
-              <a:rPr lang="en-US" sz="572" dirty="0">
-                <a:solidFill>
-                  <a:prstClr val="black"/>
-                </a:solidFill>
-                <a:latin typeface="Arial" panose="020B0604020202020204" pitchFamily="34" charset="0"/>
-                <a:cs typeface="Arial" panose="020B0604020202020204" pitchFamily="34" charset="0"/>
-              </a:rPr>
-              <a:t>. Nam quo </a:t>
-            </a:r>
-            <a:r>
-              <a:rPr lang="en-US" sz="572" dirty="0" err="1">
-                <a:solidFill>
-                  <a:prstClr val="black"/>
-                </a:solidFill>
-                <a:latin typeface="Arial" panose="020B0604020202020204" pitchFamily="34" charset="0"/>
-                <a:cs typeface="Arial" panose="020B0604020202020204" pitchFamily="34" charset="0"/>
-              </a:rPr>
-              <a:t>moluptatur</a:t>
-            </a:r>
-            <a:r>
-              <a:rPr lang="en-US" sz="572" dirty="0">
-                <a:solidFill>
-                  <a:prstClr val="black"/>
-                </a:solidFill>
-                <a:latin typeface="Arial" panose="020B0604020202020204" pitchFamily="34" charset="0"/>
-                <a:cs typeface="Arial" panose="020B0604020202020204" pitchFamily="34" charset="0"/>
-              </a:rPr>
-              <a:t>?</a:t>
-            </a:r>
-          </a:p>
-          <a:p>
-            <a:pPr defTabSz="780653"/>
-            <a:r>
-              <a:rPr lang="en-US" sz="572" dirty="0" err="1">
-                <a:solidFill>
-                  <a:prstClr val="black"/>
-                </a:solidFill>
-                <a:latin typeface="Arial" panose="020B0604020202020204" pitchFamily="34" charset="0"/>
-                <a:cs typeface="Arial" panose="020B0604020202020204" pitchFamily="34" charset="0"/>
-              </a:rPr>
-              <a:t>eicias</a:t>
-            </a:r>
-            <a:r>
-              <a:rPr lang="en-US" sz="572" dirty="0">
-                <a:solidFill>
-                  <a:prstClr val="black"/>
-                </a:solidFill>
-                <a:latin typeface="Arial" panose="020B0604020202020204" pitchFamily="34" charset="0"/>
-                <a:cs typeface="Arial" panose="020B0604020202020204" pitchFamily="34" charset="0"/>
-              </a:rPr>
-              <a:t> </a:t>
-            </a:r>
-            <a:r>
-              <a:rPr lang="en-US" sz="572" dirty="0" err="1">
-                <a:solidFill>
-                  <a:prstClr val="black"/>
-                </a:solidFill>
-                <a:latin typeface="Arial" panose="020B0604020202020204" pitchFamily="34" charset="0"/>
-                <a:cs typeface="Arial" panose="020B0604020202020204" pitchFamily="34" charset="0"/>
-              </a:rPr>
-              <a:t>modio</a:t>
-            </a:r>
-            <a:r>
-              <a:rPr lang="en-US" sz="572" dirty="0">
-                <a:solidFill>
-                  <a:prstClr val="black"/>
-                </a:solidFill>
-                <a:latin typeface="Arial" panose="020B0604020202020204" pitchFamily="34" charset="0"/>
-                <a:cs typeface="Arial" panose="020B0604020202020204" pitchFamily="34" charset="0"/>
-              </a:rPr>
-              <a:t> con </a:t>
-            </a:r>
-            <a:r>
-              <a:rPr lang="en-US" sz="572" dirty="0" err="1">
-                <a:solidFill>
-                  <a:prstClr val="black"/>
-                </a:solidFill>
-                <a:latin typeface="Arial" panose="020B0604020202020204" pitchFamily="34" charset="0"/>
-                <a:cs typeface="Arial" panose="020B0604020202020204" pitchFamily="34" charset="0"/>
-              </a:rPr>
-              <a:t>nisin</a:t>
-            </a:r>
-            <a:r>
-              <a:rPr lang="en-US" sz="572" dirty="0">
-                <a:solidFill>
-                  <a:prstClr val="black"/>
-                </a:solidFill>
-                <a:latin typeface="Arial" panose="020B0604020202020204" pitchFamily="34" charset="0"/>
-                <a:cs typeface="Arial" panose="020B0604020202020204" pitchFamily="34" charset="0"/>
-              </a:rPr>
-              <a:t> </a:t>
-            </a:r>
-            <a:r>
-              <a:rPr lang="en-US" sz="572" dirty="0" err="1">
-                <a:solidFill>
-                  <a:prstClr val="black"/>
-                </a:solidFill>
-                <a:latin typeface="Arial" panose="020B0604020202020204" pitchFamily="34" charset="0"/>
-                <a:cs typeface="Arial" panose="020B0604020202020204" pitchFamily="34" charset="0"/>
-              </a:rPr>
-              <a:t>pediam</a:t>
-            </a:r>
-            <a:r>
-              <a:rPr lang="en-US" sz="572" dirty="0">
-                <a:solidFill>
-                  <a:prstClr val="black"/>
-                </a:solidFill>
-                <a:latin typeface="Arial" panose="020B0604020202020204" pitchFamily="34" charset="0"/>
-                <a:cs typeface="Arial" panose="020B0604020202020204" pitchFamily="34" charset="0"/>
-              </a:rPr>
-              <a:t>, </a:t>
-            </a:r>
-            <a:r>
-              <a:rPr lang="en-US" sz="572" dirty="0" err="1">
-                <a:solidFill>
-                  <a:prstClr val="black"/>
-                </a:solidFill>
-                <a:latin typeface="Arial" panose="020B0604020202020204" pitchFamily="34" charset="0"/>
-                <a:cs typeface="Arial" panose="020B0604020202020204" pitchFamily="34" charset="0"/>
-              </a:rPr>
-              <a:t>ent</a:t>
-            </a:r>
-            <a:r>
-              <a:rPr lang="en-US" sz="572" dirty="0">
-                <a:solidFill>
-                  <a:prstClr val="black"/>
-                </a:solidFill>
-                <a:latin typeface="Arial" panose="020B0604020202020204" pitchFamily="34" charset="0"/>
-                <a:cs typeface="Arial" panose="020B0604020202020204" pitchFamily="34" charset="0"/>
-              </a:rPr>
-              <a:t>, </a:t>
-            </a:r>
-            <a:r>
-              <a:rPr lang="en-US" sz="572" dirty="0" err="1">
-                <a:solidFill>
-                  <a:prstClr val="black"/>
-                </a:solidFill>
-                <a:latin typeface="Arial" panose="020B0604020202020204" pitchFamily="34" charset="0"/>
-                <a:cs typeface="Arial" panose="020B0604020202020204" pitchFamily="34" charset="0"/>
-              </a:rPr>
-              <a:t>cust</a:t>
-            </a:r>
-            <a:r>
-              <a:rPr lang="en-US" sz="572" dirty="0">
-                <a:solidFill>
-                  <a:prstClr val="black"/>
-                </a:solidFill>
-                <a:latin typeface="Arial" panose="020B0604020202020204" pitchFamily="34" charset="0"/>
-                <a:cs typeface="Arial" panose="020B0604020202020204" pitchFamily="34" charset="0"/>
-              </a:rPr>
-              <a:t> </a:t>
-            </a:r>
-            <a:r>
-              <a:rPr lang="en-US" sz="572" dirty="0" err="1">
-                <a:solidFill>
-                  <a:prstClr val="black"/>
-                </a:solidFill>
-                <a:latin typeface="Arial" panose="020B0604020202020204" pitchFamily="34" charset="0"/>
-                <a:cs typeface="Arial" panose="020B0604020202020204" pitchFamily="34" charset="0"/>
-              </a:rPr>
-              <a:t>accaborit</a:t>
-            </a:r>
-            <a:r>
-              <a:rPr lang="en-US" sz="572" dirty="0">
-                <a:solidFill>
-                  <a:prstClr val="black"/>
-                </a:solidFill>
-                <a:latin typeface="Arial" panose="020B0604020202020204" pitchFamily="34" charset="0"/>
-                <a:cs typeface="Arial" panose="020B0604020202020204" pitchFamily="34" charset="0"/>
-              </a:rPr>
-              <a:t> </a:t>
-            </a:r>
-            <a:r>
-              <a:rPr lang="en-US" sz="572" dirty="0" err="1">
-                <a:solidFill>
-                  <a:prstClr val="black"/>
-                </a:solidFill>
-                <a:latin typeface="Arial" panose="020B0604020202020204" pitchFamily="34" charset="0"/>
-                <a:cs typeface="Arial" panose="020B0604020202020204" pitchFamily="34" charset="0"/>
-              </a:rPr>
-              <a:t>odio</a:t>
-            </a:r>
-            <a:r>
-              <a:rPr lang="en-US" sz="572" dirty="0">
-                <a:solidFill>
-                  <a:prstClr val="black"/>
-                </a:solidFill>
-                <a:latin typeface="Arial" panose="020B0604020202020204" pitchFamily="34" charset="0"/>
-                <a:cs typeface="Arial" panose="020B0604020202020204" pitchFamily="34" charset="0"/>
-              </a:rPr>
-              <a:t> </a:t>
-            </a:r>
-            <a:r>
-              <a:rPr lang="en-US" sz="572" dirty="0" err="1">
-                <a:solidFill>
-                  <a:prstClr val="black"/>
-                </a:solidFill>
-                <a:latin typeface="Arial" panose="020B0604020202020204" pitchFamily="34" charset="0"/>
-                <a:cs typeface="Arial" panose="020B0604020202020204" pitchFamily="34" charset="0"/>
-              </a:rPr>
-              <a:t>corehen</a:t>
-            </a:r>
-            <a:r>
-              <a:rPr lang="en-US" sz="572" dirty="0">
-                <a:solidFill>
-                  <a:prstClr val="black"/>
-                </a:solidFill>
-                <a:latin typeface="Arial" panose="020B0604020202020204" pitchFamily="34" charset="0"/>
-                <a:cs typeface="Arial" panose="020B0604020202020204" pitchFamily="34" charset="0"/>
-              </a:rPr>
-              <a:t> </a:t>
-            </a:r>
-            <a:r>
-              <a:rPr lang="en-US" sz="572" dirty="0" err="1">
-                <a:solidFill>
-                  <a:prstClr val="black"/>
-                </a:solidFill>
-                <a:latin typeface="Arial" panose="020B0604020202020204" pitchFamily="34" charset="0"/>
-                <a:cs typeface="Arial" panose="020B0604020202020204" pitchFamily="34" charset="0"/>
-              </a:rPr>
-              <a:t>dendae</a:t>
-            </a:r>
-            <a:r>
-              <a:rPr lang="en-US" sz="572" dirty="0">
-                <a:solidFill>
-                  <a:prstClr val="black"/>
-                </a:solidFill>
-                <a:latin typeface="Arial" panose="020B0604020202020204" pitchFamily="34" charset="0"/>
-                <a:cs typeface="Arial" panose="020B0604020202020204" pitchFamily="34" charset="0"/>
-              </a:rPr>
-              <a:t> nonet </a:t>
-            </a:r>
-            <a:r>
-              <a:rPr lang="en-US" sz="572" dirty="0" err="1">
-                <a:solidFill>
-                  <a:prstClr val="black"/>
-                </a:solidFill>
-                <a:latin typeface="Arial" panose="020B0604020202020204" pitchFamily="34" charset="0"/>
-                <a:cs typeface="Arial" panose="020B0604020202020204" pitchFamily="34" charset="0"/>
-              </a:rPr>
-              <a:t>eliquam</a:t>
-            </a:r>
-            <a:r>
-              <a:rPr lang="en-US" sz="572" dirty="0">
-                <a:solidFill>
-                  <a:prstClr val="black"/>
-                </a:solidFill>
-                <a:latin typeface="Arial" panose="020B0604020202020204" pitchFamily="34" charset="0"/>
-                <a:cs typeface="Arial" panose="020B0604020202020204" pitchFamily="34" charset="0"/>
-              </a:rPr>
-              <a:t>, </a:t>
-            </a:r>
-            <a:r>
-              <a:rPr lang="en-US" sz="572" dirty="0" err="1">
-                <a:solidFill>
-                  <a:prstClr val="black"/>
-                </a:solidFill>
-                <a:latin typeface="Arial" panose="020B0604020202020204" pitchFamily="34" charset="0"/>
-                <a:cs typeface="Arial" panose="020B0604020202020204" pitchFamily="34" charset="0"/>
-              </a:rPr>
-              <a:t>aperorepe</a:t>
-            </a:r>
-            <a:r>
-              <a:rPr lang="en-US" sz="572" dirty="0">
-                <a:solidFill>
-                  <a:prstClr val="black"/>
-                </a:solidFill>
-                <a:latin typeface="Arial" panose="020B0604020202020204" pitchFamily="34" charset="0"/>
-                <a:cs typeface="Arial" panose="020B0604020202020204" pitchFamily="34" charset="0"/>
-              </a:rPr>
-              <a:t> </a:t>
-            </a:r>
-            <a:r>
-              <a:rPr lang="en-US" sz="572" dirty="0" err="1">
-                <a:solidFill>
-                  <a:prstClr val="black"/>
-                </a:solidFill>
-                <a:latin typeface="Arial" panose="020B0604020202020204" pitchFamily="34" charset="0"/>
-                <a:cs typeface="Arial" panose="020B0604020202020204" pitchFamily="34" charset="0"/>
-              </a:rPr>
-              <a:t>autatem</a:t>
-            </a:r>
-            <a:r>
-              <a:rPr lang="en-US" sz="572" dirty="0">
-                <a:solidFill>
-                  <a:prstClr val="black"/>
-                </a:solidFill>
-                <a:latin typeface="Arial" panose="020B0604020202020204" pitchFamily="34" charset="0"/>
-                <a:cs typeface="Arial" panose="020B0604020202020204" pitchFamily="34" charset="0"/>
-              </a:rPr>
-              <a:t> voles </a:t>
-            </a:r>
-            <a:r>
-              <a:rPr lang="en-US" sz="572" dirty="0" err="1">
-                <a:solidFill>
-                  <a:prstClr val="black"/>
-                </a:solidFill>
-                <a:latin typeface="Arial" panose="020B0604020202020204" pitchFamily="34" charset="0"/>
-                <a:cs typeface="Arial" panose="020B0604020202020204" pitchFamily="34" charset="0"/>
-              </a:rPr>
-              <a:t>int</a:t>
-            </a:r>
-            <a:r>
-              <a:rPr lang="en-US" sz="572" dirty="0">
-                <a:solidFill>
-                  <a:prstClr val="black"/>
-                </a:solidFill>
-                <a:latin typeface="Arial" panose="020B0604020202020204" pitchFamily="34" charset="0"/>
-                <a:cs typeface="Arial" panose="020B0604020202020204" pitchFamily="34" charset="0"/>
-              </a:rPr>
-              <a:t> </a:t>
-            </a:r>
-            <a:r>
-              <a:rPr lang="en-US" sz="572" dirty="0" err="1">
-                <a:solidFill>
-                  <a:prstClr val="black"/>
-                </a:solidFill>
-                <a:latin typeface="Arial" panose="020B0604020202020204" pitchFamily="34" charset="0"/>
-                <a:cs typeface="Arial" panose="020B0604020202020204" pitchFamily="34" charset="0"/>
-              </a:rPr>
-              <a:t>odic</a:t>
-            </a:r>
-            <a:r>
-              <a:rPr lang="en-US" sz="572" dirty="0">
-                <a:solidFill>
-                  <a:prstClr val="black"/>
-                </a:solidFill>
-                <a:latin typeface="Arial" panose="020B0604020202020204" pitchFamily="34" charset="0"/>
-                <a:cs typeface="Arial" panose="020B0604020202020204" pitchFamily="34" charset="0"/>
-              </a:rPr>
-              <a:t> </a:t>
-            </a:r>
-            <a:r>
-              <a:rPr lang="en-US" sz="572" dirty="0" err="1">
-                <a:solidFill>
-                  <a:prstClr val="black"/>
-                </a:solidFill>
-                <a:latin typeface="Arial" panose="020B0604020202020204" pitchFamily="34" charset="0"/>
-                <a:cs typeface="Arial" panose="020B0604020202020204" pitchFamily="34" charset="0"/>
-              </a:rPr>
-              <a:t>tem</a:t>
-            </a:r>
-            <a:r>
-              <a:rPr lang="en-US" sz="572" dirty="0">
-                <a:solidFill>
-                  <a:prstClr val="black"/>
-                </a:solidFill>
-                <a:latin typeface="Arial" panose="020B0604020202020204" pitchFamily="34" charset="0"/>
-                <a:cs typeface="Arial" panose="020B0604020202020204" pitchFamily="34" charset="0"/>
-              </a:rPr>
-              <a:t> </a:t>
-            </a:r>
-            <a:r>
-              <a:rPr lang="en-US" sz="572" dirty="0" err="1">
-                <a:solidFill>
-                  <a:prstClr val="black"/>
-                </a:solidFill>
-                <a:latin typeface="Arial" panose="020B0604020202020204" pitchFamily="34" charset="0"/>
-                <a:cs typeface="Arial" panose="020B0604020202020204" pitchFamily="34" charset="0"/>
-              </a:rPr>
-              <a:t>nis</a:t>
-            </a:r>
-            <a:r>
-              <a:rPr lang="en-US" sz="572" dirty="0">
-                <a:solidFill>
-                  <a:prstClr val="black"/>
-                </a:solidFill>
-                <a:latin typeface="Arial" panose="020B0604020202020204" pitchFamily="34" charset="0"/>
-                <a:cs typeface="Arial" panose="020B0604020202020204" pitchFamily="34" charset="0"/>
-              </a:rPr>
-              <a:t> </a:t>
-            </a:r>
-            <a:r>
-              <a:rPr lang="en-US" sz="572" dirty="0" err="1">
-                <a:solidFill>
-                  <a:prstClr val="black"/>
-                </a:solidFill>
-                <a:latin typeface="Arial" panose="020B0604020202020204" pitchFamily="34" charset="0"/>
-                <a:cs typeface="Arial" panose="020B0604020202020204" pitchFamily="34" charset="0"/>
-              </a:rPr>
-              <a:t>dolorrum</a:t>
-            </a:r>
-            <a:r>
-              <a:rPr lang="en-US" sz="572" dirty="0">
-                <a:solidFill>
-                  <a:prstClr val="black"/>
-                </a:solidFill>
-                <a:latin typeface="Arial" panose="020B0604020202020204" pitchFamily="34" charset="0"/>
-                <a:cs typeface="Arial" panose="020B0604020202020204" pitchFamily="34" charset="0"/>
-              </a:rPr>
-              <a:t> que</a:t>
-            </a:r>
+              <a:t> ed., vol. 2. New York, NY, USA: W.W. Norton &amp; Company, 2007.</a:t>
+            </a:r>
+            <a:endParaRPr lang="en-US" sz="572" i="1" dirty="0">
+              <a:solidFill>
+                <a:prstClr val="black"/>
+              </a:solidFill>
+              <a:latin typeface="Arial" panose="020B0604020202020204" pitchFamily="34" charset="0"/>
+              <a:cs typeface="Arial" panose="020B0604020202020204" pitchFamily="34" charset="0"/>
+            </a:endParaRPr>
           </a:p>
         </p:txBody>
       </p:sp>
@@ -11015,8 +8794,8 @@
           </p:sp>
         </mc:Fallback>
       </mc:AlternateContent>
-      <mc:AlternateContent xmlns:mc="http://schemas.openxmlformats.org/markup-compatibility/2006">
-        <mc:Choice xmlns:a14="http://schemas.microsoft.com/office/drawing/2010/main" Requires="a14">
+      <mc:AlternateContent xmlns:mc="http://schemas.openxmlformats.org/markup-compatibility/2006" xmlns:a14="http://schemas.microsoft.com/office/drawing/2010/main">
+        <mc:Choice Requires="a14">
           <p:sp>
             <p:nvSpPr>
               <p:cNvPr id="50" name="TextBox 49">
@@ -11310,7 +9089,7 @@
             </p:txBody>
           </p:sp>
         </mc:Choice>
-        <mc:Fallback>
+        <mc:Fallback xmlns="">
           <p:sp>
             <p:nvSpPr>
               <p:cNvPr id="50" name="TextBox 49">
@@ -11355,8 +9134,8 @@
           </p:sp>
         </mc:Fallback>
       </mc:AlternateContent>
-      <mc:AlternateContent xmlns:mc="http://schemas.openxmlformats.org/markup-compatibility/2006">
-        <mc:Choice xmlns:a14="http://schemas.microsoft.com/office/drawing/2010/main" Requires="a14">
+      <mc:AlternateContent xmlns:mc="http://schemas.openxmlformats.org/markup-compatibility/2006" xmlns:a14="http://schemas.microsoft.com/office/drawing/2010/main">
+        <mc:Choice Requires="a14">
           <p:sp>
             <p:nvSpPr>
               <p:cNvPr id="51" name="TextBox 50">
@@ -11555,7 +9334,7 @@
             </p:txBody>
           </p:sp>
         </mc:Choice>
-        <mc:Fallback>
+        <mc:Fallback xmlns="">
           <p:sp>
             <p:nvSpPr>
               <p:cNvPr id="51" name="TextBox 50">
